--- a/Tissue Supplier Research/Supplier_Strategy_Meeting.pptx
+++ b/Tissue Supplier Research/Supplier_Strategy_Meeting.pptx
@@ -110,6 +110,1404 @@
     </a:lvl9pPr>
   </p:defaultTextStyle>
 </p:presentation>
+</file>
+
+<file path=ppt/charts/chart1.xml><?xml version="1.0" encoding="utf-8"?>
+<c:chartSpace xmlns:c="http://schemas.openxmlformats.org/drawingml/2006/chart" xmlns:a="http://schemas.openxmlformats.org/drawingml/2006/main" xmlns:r="http://schemas.openxmlformats.org/officeDocument/2006/relationships">
+  <c:date1904 val="0"/>
+  <c:roundedCorners val="1"/>
+  <c:chart>
+    <c:title>
+      <c:tx>
+        <c:rich>
+          <a:bodyPr/>
+          <a:lstStyle/>
+          <a:p>
+            <a:pPr algn="l">
+              <a:defRPr sz="1400" b="0" i="0" u="none" strike="noStrike">
+                <a:solidFill>
+                  <a:srgbClr val="6D2E46"/>
+                </a:solidFill>
+                <a:latin typeface="Cambria"/>
+              </a:defRPr>
+            </a:pPr>
+            <a:r>
+              <a:rPr sz="1400" b="0" i="0" u="none" strike="noStrike">
+                <a:solidFill>
+                  <a:srgbClr val="6D2E46"/>
+                </a:solidFill>
+                <a:latin typeface="Cambria"/>
+              </a:rPr>
+              <a:t>By certification</a:t>
+            </a:r>
+          </a:p>
+        </c:rich>
+      </c:tx>
+      <c:layout/>
+      <c:overlay val="0"/>
+    </c:title>
+    <c:autoTitleDeleted val="0"/>
+    <c:plotArea>
+      <c:layout/>
+      <c:barChart>
+        <c:barDir val="col"/>
+        <c:grouping val="stacked"/>
+        <c:varyColors val="0"/>
+        <c:ser>
+          <c:idx val="0"/>
+          <c:order val="0"/>
+          <c:tx>
+            <c:strRef>
+              <c:f>Sheet1!$B$1</c:f>
+              <c:strCache>
+                <c:ptCount val="1"/>
+                <c:pt idx="0">
+                  <c:v>Federal / Talmadge-Aiken</c:v>
+                </c:pt>
+              </c:strCache>
+            </c:strRef>
+          </c:tx>
+          <c:spPr>
+            <a:solidFill>
+              <a:srgbClr val="6D2E46"/>
+            </a:solidFill>
+            <a:effectLst/>
+          </c:spPr>
+          <c:invertIfNegative val="0"/>
+          <c:dLbls>
+            <c:numFmt formatCode="#,##0" sourceLinked="0"/>
+            <c:txPr>
+              <a:bodyPr/>
+              <a:lstStyle/>
+              <a:p>
+                <a:pPr>
+                  <a:defRPr b="0" i="0" strike="noStrike" sz="900" u="none">
+                    <a:solidFill>
+                      <a:srgbClr val="FFFFFF"/>
+                    </a:solidFill>
+                    <a:latin typeface="Calibri"/>
+                  </a:defRPr>
+                </a:pPr>
+              </a:p>
+            </c:txPr>
+            <c:dLblPos val="ctr"/>
+            <c:showLegendKey val="0"/>
+            <c:showVal val="1"/>
+            <c:showCatName val="0"/>
+            <c:showSerName val="0"/>
+            <c:showPercent val="0"/>
+            <c:showBubbleSize val="0"/>
+            <c:showLeaderLines val="0"/>
+          </c:dLbls>
+          <c:cat>
+            <c:multiLvlStrRef>
+              <c:f>Sheet1!$A$2:$A$8</c:f>
+              <c:multiLvlStrCache>
+                <c:ptCount val="7"/>
+                <c:lvl>
+                  <c:pt idx="0">
+                    <c:v>Eastern NC</c:v>
+                  </c:pt>
+                  <c:pt idx="1">
+                    <c:v>Western NC</c:v>
+                  </c:pt>
+                  <c:pt idx="2">
+                    <c:v>SC</c:v>
+                  </c:pt>
+                  <c:pt idx="3">
+                    <c:v>TN</c:v>
+                  </c:pt>
+                  <c:pt idx="4">
+                    <c:v>VA</c:v>
+                  </c:pt>
+                  <c:pt idx="5">
+                    <c:v>Iowa</c:v>
+                  </c:pt>
+                  <c:pt idx="6">
+                    <c:v>Nebraska</c:v>
+                  </c:pt>
+                </c:lvl>
+              </c:multiLvlStrCache>
+            </c:multiLvlStrRef>
+          </c:cat>
+          <c:val>
+            <c:numRef>
+              <c:f>Sheet1!$B$2:$B$8</c:f>
+              <c:numCache>
+                <c:formatCode>General</c:formatCode>
+                <c:ptCount val="7"/>
+                <c:pt idx="0">
+                  <c:v>10</c:v>
+                </c:pt>
+                <c:pt idx="1">
+                  <c:v>5</c:v>
+                </c:pt>
+                <c:pt idx="2">
+                  <c:v>4</c:v>
+                </c:pt>
+                <c:pt idx="3">
+                  <c:v>7</c:v>
+                </c:pt>
+                <c:pt idx="4">
+                  <c:v>4</c:v>
+                </c:pt>
+                <c:pt idx="5">
+                  <c:v>8</c:v>
+                </c:pt>
+                <c:pt idx="6">
+                  <c:v>1</c:v>
+                </c:pt>
+              </c:numCache>
+            </c:numRef>
+          </c:val>
+        </c:ser>
+        <c:ser>
+          <c:idx val="1"/>
+          <c:order val="1"/>
+          <c:tx>
+            <c:strRef>
+              <c:f>Sheet1!$C$1</c:f>
+              <c:strCache>
+                <c:ptCount val="1"/>
+                <c:pt idx="0">
+                  <c:v>State-inspected only</c:v>
+                </c:pt>
+              </c:strCache>
+            </c:strRef>
+          </c:tx>
+          <c:spPr>
+            <a:solidFill>
+              <a:srgbClr val="A26769"/>
+            </a:solidFill>
+            <a:effectLst/>
+          </c:spPr>
+          <c:invertIfNegative val="0"/>
+          <c:dLbls>
+            <c:numFmt formatCode="#,##0" sourceLinked="0"/>
+            <c:txPr>
+              <a:bodyPr/>
+              <a:lstStyle/>
+              <a:p>
+                <a:pPr>
+                  <a:defRPr b="0" i="0" strike="noStrike" sz="900" u="none">
+                    <a:solidFill>
+                      <a:srgbClr val="FFFFFF"/>
+                    </a:solidFill>
+                    <a:latin typeface="Calibri"/>
+                  </a:defRPr>
+                </a:pPr>
+              </a:p>
+            </c:txPr>
+            <c:dLblPos val="ctr"/>
+            <c:showLegendKey val="0"/>
+            <c:showVal val="1"/>
+            <c:showCatName val="0"/>
+            <c:showSerName val="0"/>
+            <c:showPercent val="0"/>
+            <c:showBubbleSize val="0"/>
+            <c:showLeaderLines val="0"/>
+          </c:dLbls>
+          <c:cat>
+            <c:multiLvlStrRef>
+              <c:f>Sheet1!$A$2:$A$8</c:f>
+              <c:multiLvlStrCache>
+                <c:ptCount val="7"/>
+                <c:lvl>
+                  <c:pt idx="0">
+                    <c:v>Eastern NC</c:v>
+                  </c:pt>
+                  <c:pt idx="1">
+                    <c:v>Western NC</c:v>
+                  </c:pt>
+                  <c:pt idx="2">
+                    <c:v>SC</c:v>
+                  </c:pt>
+                  <c:pt idx="3">
+                    <c:v>TN</c:v>
+                  </c:pt>
+                  <c:pt idx="4">
+                    <c:v>VA</c:v>
+                  </c:pt>
+                  <c:pt idx="5">
+                    <c:v>Iowa</c:v>
+                  </c:pt>
+                  <c:pt idx="6">
+                    <c:v>Nebraska</c:v>
+                  </c:pt>
+                </c:lvl>
+              </c:multiLvlStrCache>
+            </c:multiLvlStrRef>
+          </c:cat>
+          <c:val>
+            <c:numRef>
+              <c:f>Sheet1!$C$2:$C$8</c:f>
+              <c:numCache>
+                <c:formatCode>General</c:formatCode>
+                <c:ptCount val="7"/>
+                <c:pt idx="0">
+                  <c:v>1</c:v>
+                </c:pt>
+                <c:pt idx="1">
+                  <c:v>4</c:v>
+                </c:pt>
+                <c:pt idx="2">
+                  <c:v>0</c:v>
+                </c:pt>
+                <c:pt idx="3">
+                  <c:v>0</c:v>
+                </c:pt>
+                <c:pt idx="4">
+                  <c:v>0</c:v>
+                </c:pt>
+                <c:pt idx="5">
+                  <c:v>0</c:v>
+                </c:pt>
+                <c:pt idx="6">
+                  <c:v>0</c:v>
+                </c:pt>
+              </c:numCache>
+            </c:numRef>
+          </c:val>
+        </c:ser>
+        <c:ser>
+          <c:idx val="2"/>
+          <c:order val="2"/>
+          <c:tx>
+            <c:strRef>
+              <c:f>Sheet1!$D$1</c:f>
+              <c:strCache>
+                <c:ptCount val="1"/>
+                <c:pt idx="0">
+                  <c:v>Custom-exempt</c:v>
+                </c:pt>
+              </c:strCache>
+            </c:strRef>
+          </c:tx>
+          <c:spPr>
+            <a:solidFill>
+              <a:srgbClr val="C89B7B"/>
+            </a:solidFill>
+            <a:effectLst/>
+          </c:spPr>
+          <c:invertIfNegative val="0"/>
+          <c:dLbls>
+            <c:numFmt formatCode="#,##0" sourceLinked="0"/>
+            <c:txPr>
+              <a:bodyPr/>
+              <a:lstStyle/>
+              <a:p>
+                <a:pPr>
+                  <a:defRPr b="0" i="0" strike="noStrike" sz="900" u="none">
+                    <a:solidFill>
+                      <a:srgbClr val="FFFFFF"/>
+                    </a:solidFill>
+                    <a:latin typeface="Calibri"/>
+                  </a:defRPr>
+                </a:pPr>
+              </a:p>
+            </c:txPr>
+            <c:dLblPos val="ctr"/>
+            <c:showLegendKey val="0"/>
+            <c:showVal val="1"/>
+            <c:showCatName val="0"/>
+            <c:showSerName val="0"/>
+            <c:showPercent val="0"/>
+            <c:showBubbleSize val="0"/>
+            <c:showLeaderLines val="0"/>
+          </c:dLbls>
+          <c:cat>
+            <c:multiLvlStrRef>
+              <c:f>Sheet1!$A$2:$A$8</c:f>
+              <c:multiLvlStrCache>
+                <c:ptCount val="7"/>
+                <c:lvl>
+                  <c:pt idx="0">
+                    <c:v>Eastern NC</c:v>
+                  </c:pt>
+                  <c:pt idx="1">
+                    <c:v>Western NC</c:v>
+                  </c:pt>
+                  <c:pt idx="2">
+                    <c:v>SC</c:v>
+                  </c:pt>
+                  <c:pt idx="3">
+                    <c:v>TN</c:v>
+                  </c:pt>
+                  <c:pt idx="4">
+                    <c:v>VA</c:v>
+                  </c:pt>
+                  <c:pt idx="5">
+                    <c:v>Iowa</c:v>
+                  </c:pt>
+                  <c:pt idx="6">
+                    <c:v>Nebraska</c:v>
+                  </c:pt>
+                </c:lvl>
+              </c:multiLvlStrCache>
+            </c:multiLvlStrRef>
+          </c:cat>
+          <c:val>
+            <c:numRef>
+              <c:f>Sheet1!$D$2:$D$8</c:f>
+              <c:numCache>
+                <c:formatCode>General</c:formatCode>
+                <c:ptCount val="7"/>
+                <c:pt idx="0">
+                  <c:v>1</c:v>
+                </c:pt>
+                <c:pt idx="1">
+                  <c:v>1</c:v>
+                </c:pt>
+                <c:pt idx="2">
+                  <c:v>0</c:v>
+                </c:pt>
+                <c:pt idx="3">
+                  <c:v>0</c:v>
+                </c:pt>
+                <c:pt idx="4">
+                  <c:v>0</c:v>
+                </c:pt>
+                <c:pt idx="5">
+                  <c:v>0</c:v>
+                </c:pt>
+                <c:pt idx="6">
+                  <c:v>0</c:v>
+                </c:pt>
+              </c:numCache>
+            </c:numRef>
+          </c:val>
+        </c:ser>
+        <c:ser>
+          <c:idx val="3"/>
+          <c:order val="3"/>
+          <c:tx>
+            <c:strRef>
+              <c:f>Sheet1!$E$1</c:f>
+              <c:strCache>
+                <c:ptCount val="1"/>
+                <c:pt idx="0">
+                  <c:v>Unconfirmed</c:v>
+                </c:pt>
+              </c:strCache>
+            </c:strRef>
+          </c:tx>
+          <c:spPr>
+            <a:solidFill>
+              <a:srgbClr val="D5CACD"/>
+            </a:solidFill>
+            <a:effectLst/>
+          </c:spPr>
+          <c:invertIfNegative val="0"/>
+          <c:dLbls>
+            <c:numFmt formatCode="#,##0" sourceLinked="0"/>
+            <c:txPr>
+              <a:bodyPr/>
+              <a:lstStyle/>
+              <a:p>
+                <a:pPr>
+                  <a:defRPr b="0" i="0" strike="noStrike" sz="900" u="none">
+                    <a:solidFill>
+                      <a:srgbClr val="FFFFFF"/>
+                    </a:solidFill>
+                    <a:latin typeface="Calibri"/>
+                  </a:defRPr>
+                </a:pPr>
+              </a:p>
+            </c:txPr>
+            <c:dLblPos val="ctr"/>
+            <c:showLegendKey val="0"/>
+            <c:showVal val="1"/>
+            <c:showCatName val="0"/>
+            <c:showSerName val="0"/>
+            <c:showPercent val="0"/>
+            <c:showBubbleSize val="0"/>
+            <c:showLeaderLines val="0"/>
+          </c:dLbls>
+          <c:cat>
+            <c:multiLvlStrRef>
+              <c:f>Sheet1!$A$2:$A$8</c:f>
+              <c:multiLvlStrCache>
+                <c:ptCount val="7"/>
+                <c:lvl>
+                  <c:pt idx="0">
+                    <c:v>Eastern NC</c:v>
+                  </c:pt>
+                  <c:pt idx="1">
+                    <c:v>Western NC</c:v>
+                  </c:pt>
+                  <c:pt idx="2">
+                    <c:v>SC</c:v>
+                  </c:pt>
+                  <c:pt idx="3">
+                    <c:v>TN</c:v>
+                  </c:pt>
+                  <c:pt idx="4">
+                    <c:v>VA</c:v>
+                  </c:pt>
+                  <c:pt idx="5">
+                    <c:v>Iowa</c:v>
+                  </c:pt>
+                  <c:pt idx="6">
+                    <c:v>Nebraska</c:v>
+                  </c:pt>
+                </c:lvl>
+              </c:multiLvlStrCache>
+            </c:multiLvlStrRef>
+          </c:cat>
+          <c:val>
+            <c:numRef>
+              <c:f>Sheet1!$E$2:$E$8</c:f>
+              <c:numCache>
+                <c:formatCode>General</c:formatCode>
+                <c:ptCount val="7"/>
+                <c:pt idx="0">
+                  <c:v>2</c:v>
+                </c:pt>
+                <c:pt idx="1">
+                  <c:v>4</c:v>
+                </c:pt>
+                <c:pt idx="2">
+                  <c:v>1</c:v>
+                </c:pt>
+                <c:pt idx="3">
+                  <c:v>0</c:v>
+                </c:pt>
+                <c:pt idx="4">
+                  <c:v>1</c:v>
+                </c:pt>
+                <c:pt idx="5">
+                  <c:v>0</c:v>
+                </c:pt>
+                <c:pt idx="6">
+                  <c:v>0</c:v>
+                </c:pt>
+              </c:numCache>
+            </c:numRef>
+          </c:val>
+        </c:ser>
+        <c:dLbls>
+          <c:numFmt formatCode="#,##0" sourceLinked="0"/>
+          <c:txPr>
+            <a:bodyPr/>
+            <a:lstStyle/>
+            <a:p>
+              <a:pPr>
+                <a:defRPr b="0" i="0" strike="noStrike" sz="900" u="none">
+                  <a:solidFill>
+                    <a:srgbClr val="FFFFFF"/>
+                  </a:solidFill>
+                  <a:latin typeface="Calibri"/>
+                </a:defRPr>
+              </a:pPr>
+            </a:p>
+          </c:txPr>
+          <c:dLblPos val="ctr"/>
+          <c:showLegendKey val="0"/>
+          <c:showVal val="1"/>
+          <c:showCatName val="0"/>
+          <c:showSerName val="0"/>
+          <c:showPercent val="0"/>
+          <c:showBubbleSize val="0"/>
+          <c:showLeaderLines val="0"/>
+        </c:dLbls>
+        <c:gapWidth val="50"/>
+        <c:overlap val="100"/>
+        <c:axId val="2094734554"/>
+        <c:axId val="2094734552"/>
+        <c:axId val="2094734556"/>
+      </c:barChart>
+      <c:catAx>
+        <c:axId val="2094734554"/>
+        <c:scaling>
+          <c:orientation val="minMax"/>
+        </c:scaling>
+        <c:delete val="0"/>
+        <c:axPos val="b"/>
+        <c:numFmt formatCode="General" sourceLinked="1"/>
+        <c:majorTickMark val="out"/>
+        <c:minorTickMark val="none"/>
+        <c:tickLblPos val="low"/>
+        <c:spPr>
+          <a:ln w="12700" cap="flat">
+            <a:solidFill>
+              <a:srgbClr val="888888"/>
+            </a:solidFill>
+            <a:prstDash val="solid"/>
+            <a:round/>
+          </a:ln>
+        </c:spPr>
+        <c:txPr>
+          <a:bodyPr/>
+          <a:lstStyle/>
+          <a:p>
+            <a:pPr>
+              <a:defRPr sz="1000" b="0" i="0" u="none" strike="noStrike">
+                <a:solidFill>
+                  <a:srgbClr val="2B2B2B"/>
+                </a:solidFill>
+                <a:latin typeface="Calibri"/>
+              </a:defRPr>
+            </a:pPr>
+            <a:endParaRPr lang="en-US"/>
+          </a:p>
+        </c:txPr>
+        <c:crossAx val="2094734552"/>
+        <c:crosses val="autoZero"/>
+        <c:auto val="1"/>
+        <c:lblAlgn val="ctr"/>
+        <c:noMultiLvlLbl val="1"/>
+      </c:catAx>
+      <c:valAx>
+        <c:axId val="2094734552"/>
+        <c:scaling>
+          <c:orientation val="minMax"/>
+          <c:max val="16"/>
+        </c:scaling>
+        <c:delete val="0"/>
+        <c:axPos val="l"/>
+        <c:majorGridlines>
+          <c:spPr>
+            <a:ln w="12700" cap="flat">
+              <a:solidFill>
+                <a:srgbClr val="EDE4E6"/>
+              </a:solidFill>
+              <a:prstDash val="solid"/>
+              <a:round/>
+            </a:ln>
+          </c:spPr>
+        </c:majorGridlines>
+        <c:numFmt formatCode="General" sourceLinked="0"/>
+        <c:majorTickMark val="out"/>
+        <c:minorTickMark val="none"/>
+        <c:tickLblPos val="nextTo"/>
+        <c:spPr>
+          <a:ln w="12700" cap="flat">
+            <a:solidFill>
+              <a:srgbClr val="888888"/>
+            </a:solidFill>
+            <a:prstDash val="solid"/>
+            <a:round/>
+          </a:ln>
+        </c:spPr>
+        <c:txPr>
+          <a:bodyPr/>
+          <a:lstStyle/>
+          <a:p>
+            <a:pPr>
+              <a:defRPr sz="900" b="0" i="0" u="none" strike="noStrike">
+                <a:solidFill>
+                  <a:srgbClr val="6E6E6E"/>
+                </a:solidFill>
+                <a:latin typeface="Arial"/>
+              </a:defRPr>
+            </a:pPr>
+            <a:endParaRPr lang="en-US"/>
+          </a:p>
+        </c:txPr>
+        <c:crossAx val="2094734554"/>
+        <c:crosses val="autoZero"/>
+        <c:crossBetween val="between"/>
+        <c:majorUnit val="4"/>
+      </c:valAx>
+      <c:spPr>
+        <a:solidFill>
+          <a:srgbClr val="FFFFFF"/>
+        </a:solidFill>
+        <a:ln w="12700" cap="flat">
+          <a:solidFill>
+            <a:srgbClr val="FFFFFF"/>
+          </a:solidFill>
+        </a:ln>
+        <a:effectLst/>
+      </c:spPr>
+    </c:plotArea>
+    <c:legend>
+      <c:legendPos val="b"/>
+      <c:overlay val="0"/>
+      <c:txPr>
+        <a:bodyPr/>
+        <a:lstStyle/>
+        <a:p>
+          <a:pPr>
+            <a:defRPr sz="900">
+              <a:solidFill>
+                <a:srgbClr val="2B2B2B"/>
+              </a:solidFill>
+              <a:latin typeface="Calibri"/>
+              <a:cs typeface="Calibri"/>
+            </a:defRPr>
+          </a:pPr>
+          <a:endParaRPr lang="en-US"/>
+        </a:p>
+      </c:txPr>
+    </c:legend>
+    <c:plotVisOnly val="1"/>
+    <c:dispBlanksAs val="span"/>
+  </c:chart>
+  <c:spPr>
+    <a:noFill/>
+    <a:ln>
+      <a:noFill/>
+    </a:ln>
+    <a:effectLst/>
+  </c:spPr>
+  <c:externalData r:id="rId1">
+    <c:autoUpdate val="0"/>
+  </c:externalData>
+</c:chartSpace>
+</file>
+
+<file path=ppt/charts/chart2.xml><?xml version="1.0" encoding="utf-8"?>
+<c:chartSpace xmlns:c="http://schemas.openxmlformats.org/drawingml/2006/chart" xmlns:a="http://schemas.openxmlformats.org/drawingml/2006/main" xmlns:r="http://schemas.openxmlformats.org/officeDocument/2006/relationships">
+  <c:date1904 val="0"/>
+  <c:roundedCorners val="1"/>
+  <c:chart>
+    <c:title>
+      <c:tx>
+        <c:rich>
+          <a:bodyPr/>
+          <a:lstStyle/>
+          <a:p>
+            <a:pPr algn="l">
+              <a:defRPr sz="1400" b="0" i="0" u="none" strike="noStrike">
+                <a:solidFill>
+                  <a:srgbClr val="6D2E46"/>
+                </a:solidFill>
+                <a:latin typeface="Cambria"/>
+              </a:defRPr>
+            </a:pPr>
+            <a:r>
+              <a:rPr sz="1400" b="0" i="0" u="none" strike="noStrike">
+                <a:solidFill>
+                  <a:srgbClr val="6D2E46"/>
+                </a:solidFill>
+                <a:latin typeface="Cambria"/>
+              </a:rPr>
+              <a:t>By size tier (hogs / week)</a:t>
+            </a:r>
+          </a:p>
+        </c:rich>
+      </c:tx>
+      <c:layout/>
+      <c:overlay val="0"/>
+    </c:title>
+    <c:autoTitleDeleted val="0"/>
+    <c:plotArea>
+      <c:layout/>
+      <c:barChart>
+        <c:barDir val="col"/>
+        <c:grouping val="stacked"/>
+        <c:varyColors val="0"/>
+        <c:ser>
+          <c:idx val="0"/>
+          <c:order val="0"/>
+          <c:tx>
+            <c:strRef>
+              <c:f>Sheet1!$B$1</c:f>
+              <c:strCache>
+                <c:ptCount val="1"/>
+                <c:pt idx="0">
+                  <c:v>Small (0–300)</c:v>
+                </c:pt>
+              </c:strCache>
+            </c:strRef>
+          </c:tx>
+          <c:spPr>
+            <a:solidFill>
+              <a:srgbClr val="D9BFC6"/>
+            </a:solidFill>
+            <a:effectLst/>
+          </c:spPr>
+          <c:invertIfNegative val="0"/>
+          <c:dLbls>
+            <c:numFmt formatCode="#,##0" sourceLinked="0"/>
+            <c:txPr>
+              <a:bodyPr/>
+              <a:lstStyle/>
+              <a:p>
+                <a:pPr>
+                  <a:defRPr b="0" i="0" strike="noStrike" sz="900" u="none">
+                    <a:solidFill>
+                      <a:srgbClr val="3A3A3A"/>
+                    </a:solidFill>
+                    <a:latin typeface="Calibri"/>
+                  </a:defRPr>
+                </a:pPr>
+              </a:p>
+            </c:txPr>
+            <c:dLblPos val="ctr"/>
+            <c:showLegendKey val="0"/>
+            <c:showVal val="1"/>
+            <c:showCatName val="0"/>
+            <c:showSerName val="0"/>
+            <c:showPercent val="0"/>
+            <c:showBubbleSize val="0"/>
+            <c:showLeaderLines val="0"/>
+          </c:dLbls>
+          <c:cat>
+            <c:multiLvlStrRef>
+              <c:f>Sheet1!$A$2:$A$8</c:f>
+              <c:multiLvlStrCache>
+                <c:ptCount val="7"/>
+                <c:lvl>
+                  <c:pt idx="0">
+                    <c:v>Eastern NC</c:v>
+                  </c:pt>
+                  <c:pt idx="1">
+                    <c:v>Western NC</c:v>
+                  </c:pt>
+                  <c:pt idx="2">
+                    <c:v>SC</c:v>
+                  </c:pt>
+                  <c:pt idx="3">
+                    <c:v>TN</c:v>
+                  </c:pt>
+                  <c:pt idx="4">
+                    <c:v>VA</c:v>
+                  </c:pt>
+                  <c:pt idx="5">
+                    <c:v>Iowa</c:v>
+                  </c:pt>
+                  <c:pt idx="6">
+                    <c:v>Nebraska</c:v>
+                  </c:pt>
+                </c:lvl>
+              </c:multiLvlStrCache>
+            </c:multiLvlStrRef>
+          </c:cat>
+          <c:val>
+            <c:numRef>
+              <c:f>Sheet1!$B$2:$B$8</c:f>
+              <c:numCache>
+                <c:formatCode>General</c:formatCode>
+                <c:ptCount val="7"/>
+                <c:pt idx="0">
+                  <c:v>2</c:v>
+                </c:pt>
+                <c:pt idx="1">
+                  <c:v>6</c:v>
+                </c:pt>
+                <c:pt idx="2">
+                  <c:v>2</c:v>
+                </c:pt>
+                <c:pt idx="3">
+                  <c:v>1</c:v>
+                </c:pt>
+                <c:pt idx="4">
+                  <c:v>2</c:v>
+                </c:pt>
+                <c:pt idx="5">
+                  <c:v>1</c:v>
+                </c:pt>
+                <c:pt idx="6">
+                  <c:v>0</c:v>
+                </c:pt>
+              </c:numCache>
+            </c:numRef>
+          </c:val>
+        </c:ser>
+        <c:ser>
+          <c:idx val="1"/>
+          <c:order val="1"/>
+          <c:tx>
+            <c:strRef>
+              <c:f>Sheet1!$C$1</c:f>
+              <c:strCache>
+                <c:ptCount val="1"/>
+                <c:pt idx="0">
+                  <c:v>Medium (350–2.5k)</c:v>
+                </c:pt>
+              </c:strCache>
+            </c:strRef>
+          </c:tx>
+          <c:spPr>
+            <a:solidFill>
+              <a:srgbClr val="A26769"/>
+            </a:solidFill>
+            <a:effectLst/>
+          </c:spPr>
+          <c:invertIfNegative val="0"/>
+          <c:dLbls>
+            <c:numFmt formatCode="#,##0" sourceLinked="0"/>
+            <c:txPr>
+              <a:bodyPr/>
+              <a:lstStyle/>
+              <a:p>
+                <a:pPr>
+                  <a:defRPr b="0" i="0" strike="noStrike" sz="900" u="none">
+                    <a:solidFill>
+                      <a:srgbClr val="3A3A3A"/>
+                    </a:solidFill>
+                    <a:latin typeface="Calibri"/>
+                  </a:defRPr>
+                </a:pPr>
+              </a:p>
+            </c:txPr>
+            <c:dLblPos val="ctr"/>
+            <c:showLegendKey val="0"/>
+            <c:showVal val="1"/>
+            <c:showCatName val="0"/>
+            <c:showSerName val="0"/>
+            <c:showPercent val="0"/>
+            <c:showBubbleSize val="0"/>
+            <c:showLeaderLines val="0"/>
+          </c:dLbls>
+          <c:cat>
+            <c:multiLvlStrRef>
+              <c:f>Sheet1!$A$2:$A$8</c:f>
+              <c:multiLvlStrCache>
+                <c:ptCount val="7"/>
+                <c:lvl>
+                  <c:pt idx="0">
+                    <c:v>Eastern NC</c:v>
+                  </c:pt>
+                  <c:pt idx="1">
+                    <c:v>Western NC</c:v>
+                  </c:pt>
+                  <c:pt idx="2">
+                    <c:v>SC</c:v>
+                  </c:pt>
+                  <c:pt idx="3">
+                    <c:v>TN</c:v>
+                  </c:pt>
+                  <c:pt idx="4">
+                    <c:v>VA</c:v>
+                  </c:pt>
+                  <c:pt idx="5">
+                    <c:v>Iowa</c:v>
+                  </c:pt>
+                  <c:pt idx="6">
+                    <c:v>Nebraska</c:v>
+                  </c:pt>
+                </c:lvl>
+              </c:multiLvlStrCache>
+            </c:multiLvlStrRef>
+          </c:cat>
+          <c:val>
+            <c:numRef>
+              <c:f>Sheet1!$C$2:$C$8</c:f>
+              <c:numCache>
+                <c:formatCode>General</c:formatCode>
+                <c:ptCount val="7"/>
+                <c:pt idx="0">
+                  <c:v>3</c:v>
+                </c:pt>
+                <c:pt idx="1">
+                  <c:v>0</c:v>
+                </c:pt>
+                <c:pt idx="2">
+                  <c:v>0</c:v>
+                </c:pt>
+                <c:pt idx="3">
+                  <c:v>1</c:v>
+                </c:pt>
+                <c:pt idx="4">
+                  <c:v>1</c:v>
+                </c:pt>
+                <c:pt idx="5">
+                  <c:v>0</c:v>
+                </c:pt>
+                <c:pt idx="6">
+                  <c:v>0</c:v>
+                </c:pt>
+              </c:numCache>
+            </c:numRef>
+          </c:val>
+        </c:ser>
+        <c:ser>
+          <c:idx val="2"/>
+          <c:order val="2"/>
+          <c:tx>
+            <c:strRef>
+              <c:f>Sheet1!$D$1</c:f>
+              <c:strCache>
+                <c:ptCount val="1"/>
+                <c:pt idx="0">
+                  <c:v>Med-High (2.5–5k)</c:v>
+                </c:pt>
+              </c:strCache>
+            </c:strRef>
+          </c:tx>
+          <c:spPr>
+            <a:solidFill>
+              <a:srgbClr val="E0A458"/>
+            </a:solidFill>
+            <a:effectLst/>
+          </c:spPr>
+          <c:invertIfNegative val="0"/>
+          <c:dLbls>
+            <c:numFmt formatCode="#,##0" sourceLinked="0"/>
+            <c:txPr>
+              <a:bodyPr/>
+              <a:lstStyle/>
+              <a:p>
+                <a:pPr>
+                  <a:defRPr b="0" i="0" strike="noStrike" sz="900" u="none">
+                    <a:solidFill>
+                      <a:srgbClr val="3A3A3A"/>
+                    </a:solidFill>
+                    <a:latin typeface="Calibri"/>
+                  </a:defRPr>
+                </a:pPr>
+              </a:p>
+            </c:txPr>
+            <c:dLblPos val="ctr"/>
+            <c:showLegendKey val="0"/>
+            <c:showVal val="1"/>
+            <c:showCatName val="0"/>
+            <c:showSerName val="0"/>
+            <c:showPercent val="0"/>
+            <c:showBubbleSize val="0"/>
+            <c:showLeaderLines val="0"/>
+          </c:dLbls>
+          <c:cat>
+            <c:multiLvlStrRef>
+              <c:f>Sheet1!$A$2:$A$8</c:f>
+              <c:multiLvlStrCache>
+                <c:ptCount val="7"/>
+                <c:lvl>
+                  <c:pt idx="0">
+                    <c:v>Eastern NC</c:v>
+                  </c:pt>
+                  <c:pt idx="1">
+                    <c:v>Western NC</c:v>
+                  </c:pt>
+                  <c:pt idx="2">
+                    <c:v>SC</c:v>
+                  </c:pt>
+                  <c:pt idx="3">
+                    <c:v>TN</c:v>
+                  </c:pt>
+                  <c:pt idx="4">
+                    <c:v>VA</c:v>
+                  </c:pt>
+                  <c:pt idx="5">
+                    <c:v>Iowa</c:v>
+                  </c:pt>
+                  <c:pt idx="6">
+                    <c:v>Nebraska</c:v>
+                  </c:pt>
+                </c:lvl>
+              </c:multiLvlStrCache>
+            </c:multiLvlStrRef>
+          </c:cat>
+          <c:val>
+            <c:numRef>
+              <c:f>Sheet1!$D$2:$D$8</c:f>
+              <c:numCache>
+                <c:formatCode>General</c:formatCode>
+                <c:ptCount val="7"/>
+                <c:pt idx="0">
+                  <c:v>1</c:v>
+                </c:pt>
+                <c:pt idx="1">
+                  <c:v>0</c:v>
+                </c:pt>
+                <c:pt idx="2">
+                  <c:v>0</c:v>
+                </c:pt>
+                <c:pt idx="3">
+                  <c:v>2</c:v>
+                </c:pt>
+                <c:pt idx="4">
+                  <c:v>0</c:v>
+                </c:pt>
+                <c:pt idx="5">
+                  <c:v>0</c:v>
+                </c:pt>
+                <c:pt idx="6">
+                  <c:v>0</c:v>
+                </c:pt>
+              </c:numCache>
+            </c:numRef>
+          </c:val>
+        </c:ser>
+        <c:ser>
+          <c:idx val="3"/>
+          <c:order val="3"/>
+          <c:tx>
+            <c:strRef>
+              <c:f>Sheet1!$E$1</c:f>
+              <c:strCache>
+                <c:ptCount val="1"/>
+                <c:pt idx="0">
+                  <c:v>High (5k+)</c:v>
+                </c:pt>
+              </c:strCache>
+            </c:strRef>
+          </c:tx>
+          <c:spPr>
+            <a:solidFill>
+              <a:srgbClr val="6D2E46"/>
+            </a:solidFill>
+            <a:effectLst/>
+          </c:spPr>
+          <c:invertIfNegative val="0"/>
+          <c:dLbls>
+            <c:numFmt formatCode="#,##0" sourceLinked="0"/>
+            <c:txPr>
+              <a:bodyPr/>
+              <a:lstStyle/>
+              <a:p>
+                <a:pPr>
+                  <a:defRPr b="0" i="0" strike="noStrike" sz="900" u="none">
+                    <a:solidFill>
+                      <a:srgbClr val="3A3A3A"/>
+                    </a:solidFill>
+                    <a:latin typeface="Calibri"/>
+                  </a:defRPr>
+                </a:pPr>
+              </a:p>
+            </c:txPr>
+            <c:dLblPos val="ctr"/>
+            <c:showLegendKey val="0"/>
+            <c:showVal val="1"/>
+            <c:showCatName val="0"/>
+            <c:showSerName val="0"/>
+            <c:showPercent val="0"/>
+            <c:showBubbleSize val="0"/>
+            <c:showLeaderLines val="0"/>
+          </c:dLbls>
+          <c:cat>
+            <c:multiLvlStrRef>
+              <c:f>Sheet1!$A$2:$A$8</c:f>
+              <c:multiLvlStrCache>
+                <c:ptCount val="7"/>
+                <c:lvl>
+                  <c:pt idx="0">
+                    <c:v>Eastern NC</c:v>
+                  </c:pt>
+                  <c:pt idx="1">
+                    <c:v>Western NC</c:v>
+                  </c:pt>
+                  <c:pt idx="2">
+                    <c:v>SC</c:v>
+                  </c:pt>
+                  <c:pt idx="3">
+                    <c:v>TN</c:v>
+                  </c:pt>
+                  <c:pt idx="4">
+                    <c:v>VA</c:v>
+                  </c:pt>
+                  <c:pt idx="5">
+                    <c:v>Iowa</c:v>
+                  </c:pt>
+                  <c:pt idx="6">
+                    <c:v>Nebraska</c:v>
+                  </c:pt>
+                </c:lvl>
+              </c:multiLvlStrCache>
+            </c:multiLvlStrRef>
+          </c:cat>
+          <c:val>
+            <c:numRef>
+              <c:f>Sheet1!$E$2:$E$8</c:f>
+              <c:numCache>
+                <c:formatCode>General</c:formatCode>
+                <c:ptCount val="7"/>
+                <c:pt idx="0">
+                  <c:v>2</c:v>
+                </c:pt>
+                <c:pt idx="1">
+                  <c:v>0</c:v>
+                </c:pt>
+                <c:pt idx="2">
+                  <c:v>0</c:v>
+                </c:pt>
+                <c:pt idx="3">
+                  <c:v>1</c:v>
+                </c:pt>
+                <c:pt idx="4">
+                  <c:v>0</c:v>
+                </c:pt>
+                <c:pt idx="5">
+                  <c:v>6</c:v>
+                </c:pt>
+                <c:pt idx="6">
+                  <c:v>1</c:v>
+                </c:pt>
+              </c:numCache>
+            </c:numRef>
+          </c:val>
+        </c:ser>
+        <c:ser>
+          <c:idx val="4"/>
+          <c:order val="4"/>
+          <c:tx>
+            <c:strRef>
+              <c:f>Sheet1!$F$1</c:f>
+              <c:strCache>
+                <c:ptCount val="1"/>
+                <c:pt idx="0">
+                  <c:v>To confirm</c:v>
+                </c:pt>
+              </c:strCache>
+            </c:strRef>
+          </c:tx>
+          <c:spPr>
+            <a:solidFill>
+              <a:srgbClr val="D5CACD"/>
+            </a:solidFill>
+            <a:effectLst/>
+          </c:spPr>
+          <c:invertIfNegative val="0"/>
+          <c:dLbls>
+            <c:numFmt formatCode="#,##0" sourceLinked="0"/>
+            <c:txPr>
+              <a:bodyPr/>
+              <a:lstStyle/>
+              <a:p>
+                <a:pPr>
+                  <a:defRPr b="0" i="0" strike="noStrike" sz="900" u="none">
+                    <a:solidFill>
+                      <a:srgbClr val="3A3A3A"/>
+                    </a:solidFill>
+                    <a:latin typeface="Calibri"/>
+                  </a:defRPr>
+                </a:pPr>
+              </a:p>
+            </c:txPr>
+            <c:dLblPos val="ctr"/>
+            <c:showLegendKey val="0"/>
+            <c:showVal val="1"/>
+            <c:showCatName val="0"/>
+            <c:showSerName val="0"/>
+            <c:showPercent val="0"/>
+            <c:showBubbleSize val="0"/>
+            <c:showLeaderLines val="0"/>
+          </c:dLbls>
+          <c:cat>
+            <c:multiLvlStrRef>
+              <c:f>Sheet1!$A$2:$A$8</c:f>
+              <c:multiLvlStrCache>
+                <c:ptCount val="7"/>
+                <c:lvl>
+                  <c:pt idx="0">
+                    <c:v>Eastern NC</c:v>
+                  </c:pt>
+                  <c:pt idx="1">
+                    <c:v>Western NC</c:v>
+                  </c:pt>
+                  <c:pt idx="2">
+                    <c:v>SC</c:v>
+                  </c:pt>
+                  <c:pt idx="3">
+                    <c:v>TN</c:v>
+                  </c:pt>
+                  <c:pt idx="4">
+                    <c:v>VA</c:v>
+                  </c:pt>
+                  <c:pt idx="5">
+                    <c:v>Iowa</c:v>
+                  </c:pt>
+                  <c:pt idx="6">
+                    <c:v>Nebraska</c:v>
+                  </c:pt>
+                </c:lvl>
+              </c:multiLvlStrCache>
+            </c:multiLvlStrRef>
+          </c:cat>
+          <c:val>
+            <c:numRef>
+              <c:f>Sheet1!$F$2:$F$8</c:f>
+              <c:numCache>
+                <c:formatCode>General</c:formatCode>
+                <c:ptCount val="7"/>
+                <c:pt idx="0">
+                  <c:v>6</c:v>
+                </c:pt>
+                <c:pt idx="1">
+                  <c:v>8</c:v>
+                </c:pt>
+                <c:pt idx="2">
+                  <c:v>3</c:v>
+                </c:pt>
+                <c:pt idx="3">
+                  <c:v>2</c:v>
+                </c:pt>
+                <c:pt idx="4">
+                  <c:v>2</c:v>
+                </c:pt>
+                <c:pt idx="5">
+                  <c:v>1</c:v>
+                </c:pt>
+                <c:pt idx="6">
+                  <c:v>0</c:v>
+                </c:pt>
+              </c:numCache>
+            </c:numRef>
+          </c:val>
+        </c:ser>
+        <c:dLbls>
+          <c:numFmt formatCode="#,##0" sourceLinked="0"/>
+          <c:txPr>
+            <a:bodyPr/>
+            <a:lstStyle/>
+            <a:p>
+              <a:pPr>
+                <a:defRPr b="0" i="0" strike="noStrike" sz="900" u="none">
+                  <a:solidFill>
+                    <a:srgbClr val="3A3A3A"/>
+                  </a:solidFill>
+                  <a:latin typeface="Calibri"/>
+                </a:defRPr>
+              </a:pPr>
+            </a:p>
+          </c:txPr>
+          <c:dLblPos val="ctr"/>
+          <c:showLegendKey val="0"/>
+          <c:showVal val="1"/>
+          <c:showCatName val="0"/>
+          <c:showSerName val="0"/>
+          <c:showPercent val="0"/>
+          <c:showBubbleSize val="0"/>
+          <c:showLeaderLines val="0"/>
+        </c:dLbls>
+        <c:gapWidth val="50"/>
+        <c:overlap val="100"/>
+        <c:axId val="2094734554"/>
+        <c:axId val="2094734552"/>
+        <c:axId val="2094734556"/>
+      </c:barChart>
+      <c:catAx>
+        <c:axId val="2094734554"/>
+        <c:scaling>
+          <c:orientation val="minMax"/>
+        </c:scaling>
+        <c:delete val="0"/>
+        <c:axPos val="b"/>
+        <c:numFmt formatCode="General" sourceLinked="1"/>
+        <c:majorTickMark val="out"/>
+        <c:minorTickMark val="none"/>
+        <c:tickLblPos val="low"/>
+        <c:spPr>
+          <a:ln w="12700" cap="flat">
+            <a:solidFill>
+              <a:srgbClr val="888888"/>
+            </a:solidFill>
+            <a:prstDash val="solid"/>
+            <a:round/>
+          </a:ln>
+        </c:spPr>
+        <c:txPr>
+          <a:bodyPr/>
+          <a:lstStyle/>
+          <a:p>
+            <a:pPr>
+              <a:defRPr sz="1000" b="0" i="0" u="none" strike="noStrike">
+                <a:solidFill>
+                  <a:srgbClr val="2B2B2B"/>
+                </a:solidFill>
+                <a:latin typeface="Calibri"/>
+              </a:defRPr>
+            </a:pPr>
+            <a:endParaRPr lang="en-US"/>
+          </a:p>
+        </c:txPr>
+        <c:crossAx val="2094734552"/>
+        <c:crosses val="autoZero"/>
+        <c:auto val="1"/>
+        <c:lblAlgn val="ctr"/>
+        <c:noMultiLvlLbl val="1"/>
+      </c:catAx>
+      <c:valAx>
+        <c:axId val="2094734552"/>
+        <c:scaling>
+          <c:orientation val="minMax"/>
+          <c:max val="16"/>
+        </c:scaling>
+        <c:delete val="0"/>
+        <c:axPos val="l"/>
+        <c:majorGridlines>
+          <c:spPr>
+            <a:ln w="12700" cap="flat">
+              <a:solidFill>
+                <a:srgbClr val="EDE4E6"/>
+              </a:solidFill>
+              <a:prstDash val="solid"/>
+              <a:round/>
+            </a:ln>
+          </c:spPr>
+        </c:majorGridlines>
+        <c:numFmt formatCode="General" sourceLinked="0"/>
+        <c:majorTickMark val="out"/>
+        <c:minorTickMark val="none"/>
+        <c:tickLblPos val="nextTo"/>
+        <c:spPr>
+          <a:ln w="12700" cap="flat">
+            <a:solidFill>
+              <a:srgbClr val="888888"/>
+            </a:solidFill>
+            <a:prstDash val="solid"/>
+            <a:round/>
+          </a:ln>
+        </c:spPr>
+        <c:txPr>
+          <a:bodyPr/>
+          <a:lstStyle/>
+          <a:p>
+            <a:pPr>
+              <a:defRPr sz="900" b="0" i="0" u="none" strike="noStrike">
+                <a:solidFill>
+                  <a:srgbClr val="6E6E6E"/>
+                </a:solidFill>
+                <a:latin typeface="Arial"/>
+              </a:defRPr>
+            </a:pPr>
+            <a:endParaRPr lang="en-US"/>
+          </a:p>
+        </c:txPr>
+        <c:crossAx val="2094734554"/>
+        <c:crosses val="autoZero"/>
+        <c:crossBetween val="between"/>
+        <c:majorUnit val="4"/>
+      </c:valAx>
+      <c:spPr>
+        <a:solidFill>
+          <a:srgbClr val="FFFFFF"/>
+        </a:solidFill>
+        <a:ln w="12700" cap="flat">
+          <a:solidFill>
+            <a:srgbClr val="FFFFFF"/>
+          </a:solidFill>
+        </a:ln>
+        <a:effectLst/>
+      </c:spPr>
+    </c:plotArea>
+    <c:legend>
+      <c:legendPos val="b"/>
+      <c:overlay val="0"/>
+      <c:txPr>
+        <a:bodyPr/>
+        <a:lstStyle/>
+        <a:p>
+          <a:pPr>
+            <a:defRPr sz="900">
+              <a:solidFill>
+                <a:srgbClr val="2B2B2B"/>
+              </a:solidFill>
+              <a:latin typeface="Calibri"/>
+              <a:cs typeface="Calibri"/>
+            </a:defRPr>
+          </a:pPr>
+          <a:endParaRPr lang="en-US"/>
+        </a:p>
+      </c:txPr>
+    </c:legend>
+    <c:plotVisOnly val="1"/>
+    <c:dispBlanksAs val="span"/>
+  </c:chart>
+  <c:spPr>
+    <a:noFill/>
+    <a:ln>
+      <a:noFill/>
+    </a:ln>
+    <a:effectLst/>
+  </c:spPr>
+  <c:externalData r:id="rId1">
+    <c:autoUpdate val="0"/>
+  </c:externalData>
+</c:chartSpace>
 </file>
 
 <file path=ppt/notesMasters/notesMaster1.xml><?xml version="1.0" encoding="utf-8"?>
@@ -771,7 +2169,7 @@
           <a:p>
             <a:r>
               <a:rPr lang="en-US" dirty="0"/>
-              <a:t>Proximity matters because aggregation only works if plants share one crew.</a:t>
+              <a:t>Eastern NC: 14 plants, 10 federal/TA — the export-capable base and the aggregation cluster. Western NC: 14 plants but small and largely state-inspected, so domestic only. Iowa: 8 plants, 6 High tier. Nebraska: 1. Proximity matters because aggregation only works if plants share one crew.</a:t>
             </a:r>
             <a:endParaRPr lang="en-US" dirty="0"/>
           </a:p>
@@ -3810,24 +5208,24 @@
         </p:nvSpPr>
         <p:spPr>
           <a:xfrm>
-            <a:off x="548640" y="1554480"/>
-            <a:ext cx="11064240" cy="310896"/>
-          </a:xfrm>
-          <a:prstGeom prst="rect">
-            <a:avLst/>
-          </a:prstGeom>
-          <a:noFill/>
-          <a:ln/>
-        </p:spPr>
-        <p:txBody>
-          <a:bodyPr wrap="square" lIns="0" tIns="0" rIns="0" bIns="0" rtlCol="0" anchor="ctr"/>
-          <a:lstStyle/>
-          <a:p>
-            <a:pPr indent="0" marL="0">
-              <a:buNone/>
-            </a:pPr>
-            <a:r>
-              <a:rPr lang="en-US" sz="1500" dirty="0">
+            <a:off x="548640" y="1517904"/>
+            <a:ext cx="11064240" cy="292608"/>
+          </a:xfrm>
+          <a:prstGeom prst="rect">
+            <a:avLst/>
+          </a:prstGeom>
+          <a:noFill/>
+          <a:ln/>
+        </p:spPr>
+        <p:txBody>
+          <a:bodyPr wrap="square" lIns="0" tIns="0" rIns="0" bIns="0" rtlCol="0" anchor="ctr"/>
+          <a:lstStyle/>
+          <a:p>
+            <a:pPr indent="0" marL="0">
+              <a:buNone/>
+            </a:pPr>
+            <a:r>
+              <a:rPr lang="en-US" sz="1400" dirty="0">
                 <a:solidFill>
                   <a:srgbClr val="2B2B2B"/>
                 </a:solidFill>
@@ -3835,876 +5233,158 @@
                 <a:ea typeface="Calibri" pitchFamily="34" charset="-122"/>
                 <a:cs typeface="Calibri" pitchFamily="34" charset="-120"/>
               </a:rPr>
-              <a:t>91 facilities on the roster. Geography decides whether one crew can serve more than one plant.</a:t>
-            </a:r>
-            <a:endParaRPr lang="en-US" sz="1500" dirty="0"/>
-          </a:p>
-        </p:txBody>
-      </p:sp>
-      <p:sp>
-        <p:nvSpPr>
-          <p:cNvPr id="7" name="Shape 5"/>
-          <p:cNvSpPr/>
-          <p:nvPr/>
-        </p:nvSpPr>
-        <p:spPr>
-          <a:xfrm>
-            <a:off x="548640" y="2103120"/>
-            <a:ext cx="5349240" cy="1609344"/>
-          </a:xfrm>
-          <a:prstGeom prst="roundRect">
-            <a:avLst>
-              <a:gd name="adj" fmla="val 4545"/>
-            </a:avLst>
-          </a:prstGeom>
-          <a:solidFill>
-            <a:srgbClr val="F7F0F1"/>
-          </a:solidFill>
-          <a:ln w="12700">
-            <a:solidFill>
-              <a:srgbClr val="F7F0F1"/>
-            </a:solidFill>
-            <a:prstDash val="solid"/>
-          </a:ln>
-        </p:spPr>
-      </p:sp>
-      <p:sp>
-        <p:nvSpPr>
-          <p:cNvPr id="8" name="Shape 6"/>
-          <p:cNvSpPr/>
-          <p:nvPr/>
-        </p:nvSpPr>
-        <p:spPr>
-          <a:xfrm>
-            <a:off x="859536" y="2377440"/>
-            <a:ext cx="365760" cy="365760"/>
-          </a:xfrm>
-          <a:prstGeom prst="ellipse">
-            <a:avLst/>
-          </a:prstGeom>
-          <a:solidFill>
-            <a:srgbClr val="6D2E46"/>
-          </a:solidFill>
-          <a:ln w="12700">
-            <a:solidFill>
-              <a:srgbClr val="6D2E46"/>
-            </a:solidFill>
-            <a:prstDash val="solid"/>
-          </a:ln>
-        </p:spPr>
-      </p:sp>
-      <p:sp>
-        <p:nvSpPr>
-          <p:cNvPr id="9" name="Text 7"/>
-          <p:cNvSpPr/>
-          <p:nvPr/>
-        </p:nvSpPr>
-        <p:spPr>
-          <a:xfrm>
-            <a:off x="859536" y="2377440"/>
-            <a:ext cx="365760" cy="365760"/>
-          </a:xfrm>
-          <a:prstGeom prst="rect">
-            <a:avLst/>
-          </a:prstGeom>
-          <a:noFill/>
-          <a:ln/>
-        </p:spPr>
-        <p:txBody>
-          <a:bodyPr wrap="square" lIns="0" tIns="0" rIns="0" bIns="0" rtlCol="0" anchor="ctr"/>
-          <a:lstStyle/>
-          <a:p>
-            <a:pPr algn="ctr" indent="0" marL="0">
-              <a:buNone/>
-            </a:pPr>
-            <a:r>
-              <a:rPr lang="en-US" sz="1400" b="1" dirty="0">
-                <a:solidFill>
-                  <a:srgbClr val="FFFFFF"/>
-                </a:solidFill>
-                <a:latin typeface="Calibri" pitchFamily="34" charset="0"/>
-                <a:ea typeface="Calibri" pitchFamily="34" charset="-122"/>
-                <a:cs typeface="Calibri" pitchFamily="34" charset="-120"/>
-              </a:rPr>
-              <a:t>1</a:t>
+              <a:t>54 plants across our target areas. Certification decides whether a plant can ever serve EU work; size decides the operating model.</a:t>
             </a:r>
             <a:endParaRPr lang="en-US" sz="1400" dirty="0"/>
           </a:p>
         </p:txBody>
       </p:sp>
-      <p:sp>
-        <p:nvSpPr>
-          <p:cNvPr id="10" name="Text 8"/>
-          <p:cNvSpPr/>
-          <p:nvPr/>
-        </p:nvSpPr>
-        <p:spPr>
-          <a:xfrm>
-            <a:off x="1371600" y="2359152"/>
-            <a:ext cx="4297680" cy="365760"/>
-          </a:xfrm>
-          <a:prstGeom prst="rect">
-            <a:avLst/>
-          </a:prstGeom>
-          <a:noFill/>
-          <a:ln/>
-        </p:spPr>
-        <p:txBody>
-          <a:bodyPr wrap="square" lIns="0" tIns="0" rIns="0" bIns="0" rtlCol="0" anchor="ctr"/>
-          <a:lstStyle/>
-          <a:p>
-            <a:pPr indent="0" marL="0">
-              <a:buNone/>
-            </a:pPr>
-            <a:r>
-              <a:rPr lang="en-US" sz="1800" b="1" dirty="0">
+      <p:graphicFrame>
+        <p:nvGraphicFramePr>
+          <p:cNvPr id="7" name="Chart 0" descr=""/>
+          <p:cNvGraphicFramePr/>
+          <p:nvPr/>
+        </p:nvGraphicFramePr>
+        <p:xfrm>
+          <a:off x="548640" y="1938528"/>
+          <a:ext cx="5394960" cy="3401568"/>
+        </p:xfrm>
+        <a:graphic xmlns:a="http://schemas.openxmlformats.org/drawingml/2006/main">
+          <a:graphicData uri="http://schemas.openxmlformats.org/drawingml/2006/chart">
+            <c:chart xmlns:c="http://schemas.openxmlformats.org/drawingml/2006/chart" r:id="rId1"/>
+          </a:graphicData>
+        </a:graphic>
+      </p:graphicFrame>
+      <p:graphicFrame>
+        <p:nvGraphicFramePr>
+          <p:cNvPr id="8" name="Chart 1" descr=""/>
+          <p:cNvGraphicFramePr/>
+          <p:nvPr/>
+        </p:nvGraphicFramePr>
+        <p:xfrm>
+          <a:off x="6236208" y="1938528"/>
+          <a:ext cx="5376672" cy="3401568"/>
+        </p:xfrm>
+        <a:graphic xmlns:a="http://schemas.openxmlformats.org/drawingml/2006/main">
+          <a:graphicData uri="http://schemas.openxmlformats.org/drawingml/2006/chart">
+            <c:chart xmlns:c="http://schemas.openxmlformats.org/drawingml/2006/chart" r:id="rId2"/>
+          </a:graphicData>
+        </a:graphic>
+      </p:graphicFrame>
+      <p:sp>
+        <p:nvSpPr>
+          <p:cNvPr id="9" name="Text 5"/>
+          <p:cNvSpPr/>
+          <p:nvPr/>
+        </p:nvSpPr>
+        <p:spPr>
+          <a:xfrm>
+            <a:off x="548640" y="5431536"/>
+            <a:ext cx="11064240" cy="384048"/>
+          </a:xfrm>
+          <a:prstGeom prst="rect">
+            <a:avLst/>
+          </a:prstGeom>
+          <a:noFill/>
+          <a:ln/>
+        </p:spPr>
+        <p:txBody>
+          <a:bodyPr wrap="square" lIns="0" tIns="0" rIns="0" bIns="0" rtlCol="0" anchor="ctr"/>
+          <a:lstStyle/>
+          <a:p>
+            <a:pPr indent="0" marL="0">
+              <a:buNone/>
+            </a:pPr>
+            <a:r>
+              <a:rPr lang="en-US" sz="1300" b="1" dirty="0">
                 <a:solidFill>
                   <a:srgbClr val="6D2E46"/>
                 </a:solidFill>
-                <a:latin typeface="Cambria" pitchFamily="34" charset="0"/>
-                <a:ea typeface="Cambria" pitchFamily="34" charset="-122"/>
-                <a:cs typeface="Cambria" pitchFamily="34" charset="-120"/>
-              </a:rPr>
-              <a:t>North Carolina</a:t>
-            </a:r>
-            <a:endParaRPr lang="en-US" sz="1800" dirty="0"/>
-          </a:p>
-        </p:txBody>
-      </p:sp>
-      <p:sp>
-        <p:nvSpPr>
-          <p:cNvPr id="11" name="Text 9"/>
-          <p:cNvSpPr/>
-          <p:nvPr/>
-        </p:nvSpPr>
-        <p:spPr>
-          <a:xfrm>
-            <a:off x="859536" y="2816352"/>
-            <a:ext cx="4754880" cy="822960"/>
-          </a:xfrm>
-          <a:prstGeom prst="rect">
-            <a:avLst/>
-          </a:prstGeom>
-          <a:noFill/>
-          <a:ln/>
-        </p:spPr>
-        <p:txBody>
-          <a:bodyPr wrap="square" lIns="0" tIns="0" rIns="0" bIns="0" rtlCol="0" anchor="ctr"/>
-          <a:lstStyle/>
-          <a:p>
-            <a:pPr indent="0" marL="0">
-              <a:lnSpc>
-                <a:spcPts val="1700"/>
-              </a:lnSpc>
-              <a:buNone/>
-            </a:pPr>
-            <a:r>
-              <a:rPr lang="en-US" sz="1250" dirty="0">
-                <a:solidFill>
-                  <a:srgbClr val="2B2B2B"/>
-                </a:solidFill>
-                <a:latin typeface="Calibri" pitchFamily="34" charset="0"/>
-                <a:ea typeface="Calibri" pitchFamily="34" charset="-122"/>
-                <a:cs typeface="Calibri" pitchFamily="34" charset="-120"/>
-              </a:rPr>
-              <a:t>Primary. 9 swine-only plants, 18 Talmadge-Aiken</a:t>
-            </a:r>
-            <a:endParaRPr lang="en-US" sz="1250" dirty="0"/>
-          </a:p>
-          <a:p>
-            <a:pPr indent="0" marL="0">
-              <a:lnSpc>
-                <a:spcPts val="1700"/>
-              </a:lnSpc>
-              <a:buNone/>
-            </a:pPr>
-            <a:r>
-              <a:rPr lang="en-US" sz="1250" dirty="0">
-                <a:solidFill>
-                  <a:srgbClr val="2B2B2B"/>
-                </a:solidFill>
-                <a:latin typeface="Calibri" pitchFamily="34" charset="0"/>
-                <a:ea typeface="Calibri" pitchFamily="34" charset="-122"/>
-                <a:cs typeface="Calibri" pitchFamily="34" charset="-120"/>
-              </a:rPr>
-              <a:t>(federal, export-eligible). Eastern-NC cluster lets</a:t>
-            </a:r>
-            <a:endParaRPr lang="en-US" sz="1250" dirty="0"/>
-          </a:p>
-          <a:p>
-            <a:pPr indent="0" marL="0">
-              <a:lnSpc>
-                <a:spcPts val="1700"/>
-              </a:lnSpc>
-              <a:buNone/>
-            </a:pPr>
-            <a:r>
-              <a:rPr lang="en-US" sz="1250" dirty="0">
-                <a:solidFill>
-                  <a:srgbClr val="2B2B2B"/>
-                </a:solidFill>
-                <a:latin typeface="Calibri" pitchFamily="34" charset="0"/>
-                <a:ea typeface="Calibri" pitchFamily="34" charset="-122"/>
-                <a:cs typeface="Calibri" pitchFamily="34" charset="-120"/>
-              </a:rPr>
-              <a:t>one crew cover several floors in ~70 miles.</a:t>
-            </a:r>
-            <a:endParaRPr lang="en-US" sz="1250" dirty="0"/>
-          </a:p>
-        </p:txBody>
-      </p:sp>
-      <p:sp>
-        <p:nvSpPr>
-          <p:cNvPr id="12" name="Shape 10"/>
-          <p:cNvSpPr/>
-          <p:nvPr/>
-        </p:nvSpPr>
-        <p:spPr>
-          <a:xfrm>
-            <a:off x="6263640" y="2103120"/>
-            <a:ext cx="5349240" cy="1609344"/>
-          </a:xfrm>
-          <a:prstGeom prst="roundRect">
-            <a:avLst>
-              <a:gd name="adj" fmla="val 4545"/>
-            </a:avLst>
-          </a:prstGeom>
-          <a:solidFill>
-            <a:srgbClr val="F7F0F1"/>
-          </a:solidFill>
-          <a:ln w="12700">
-            <a:solidFill>
-              <a:srgbClr val="F7F0F1"/>
-            </a:solidFill>
-            <a:prstDash val="solid"/>
-          </a:ln>
-        </p:spPr>
-      </p:sp>
-      <p:sp>
-        <p:nvSpPr>
-          <p:cNvPr id="13" name="Shape 11"/>
-          <p:cNvSpPr/>
-          <p:nvPr/>
-        </p:nvSpPr>
-        <p:spPr>
-          <a:xfrm>
-            <a:off x="6574536" y="2377440"/>
-            <a:ext cx="365760" cy="365760"/>
-          </a:xfrm>
-          <a:prstGeom prst="ellipse">
-            <a:avLst/>
-          </a:prstGeom>
-          <a:solidFill>
-            <a:srgbClr val="6D2E46"/>
-          </a:solidFill>
-          <a:ln w="12700">
-            <a:solidFill>
-              <a:srgbClr val="6D2E46"/>
-            </a:solidFill>
-            <a:prstDash val="solid"/>
-          </a:ln>
-        </p:spPr>
-      </p:sp>
-      <p:sp>
-        <p:nvSpPr>
-          <p:cNvPr id="14" name="Text 12"/>
-          <p:cNvSpPr/>
-          <p:nvPr/>
-        </p:nvSpPr>
-        <p:spPr>
-          <a:xfrm>
-            <a:off x="6574536" y="2377440"/>
-            <a:ext cx="365760" cy="365760"/>
-          </a:xfrm>
-          <a:prstGeom prst="rect">
-            <a:avLst/>
-          </a:prstGeom>
-          <a:noFill/>
-          <a:ln/>
-        </p:spPr>
-        <p:txBody>
-          <a:bodyPr wrap="square" lIns="0" tIns="0" rIns="0" bIns="0" rtlCol="0" anchor="ctr"/>
-          <a:lstStyle/>
-          <a:p>
-            <a:pPr algn="ctr" indent="0" marL="0">
-              <a:buNone/>
-            </a:pPr>
-            <a:r>
-              <a:rPr lang="en-US" sz="1400" b="1" dirty="0">
-                <a:solidFill>
-                  <a:srgbClr val="FFFFFF"/>
-                </a:solidFill>
-                <a:latin typeface="Calibri" pitchFamily="34" charset="0"/>
-                <a:ea typeface="Calibri" pitchFamily="34" charset="-122"/>
-                <a:cs typeface="Calibri" pitchFamily="34" charset="-120"/>
-              </a:rPr>
-              <a:t>2</a:t>
-            </a:r>
-            <a:endParaRPr lang="en-US" sz="1400" dirty="0"/>
-          </a:p>
-        </p:txBody>
-      </p:sp>
-      <p:sp>
-        <p:nvSpPr>
-          <p:cNvPr id="15" name="Text 13"/>
-          <p:cNvSpPr/>
-          <p:nvPr/>
-        </p:nvSpPr>
-        <p:spPr>
-          <a:xfrm>
-            <a:off x="7086600" y="2359152"/>
-            <a:ext cx="4297680" cy="365760"/>
-          </a:xfrm>
-          <a:prstGeom prst="rect">
-            <a:avLst/>
-          </a:prstGeom>
-          <a:noFill/>
-          <a:ln/>
-        </p:spPr>
-        <p:txBody>
-          <a:bodyPr wrap="square" lIns="0" tIns="0" rIns="0" bIns="0" rtlCol="0" anchor="ctr"/>
-          <a:lstStyle/>
-          <a:p>
-            <a:pPr indent="0" marL="0">
-              <a:buNone/>
-            </a:pPr>
-            <a:r>
-              <a:rPr lang="en-US" sz="1800" b="1" dirty="0">
+                <a:latin typeface="Calibri" pitchFamily="34" charset="0"/>
+                <a:ea typeface="Calibri" pitchFamily="34" charset="-122"/>
+                <a:cs typeface="Calibri" pitchFamily="34" charset="-120"/>
+              </a:rPr>
+              <a:t>Eastern NC holds the export-eligible plants and the real volume. Western NC is small and state-inspected. Iowa is all High tier.</a:t>
+            </a:r>
+            <a:endParaRPr lang="en-US" sz="1300" dirty="0"/>
+          </a:p>
+        </p:txBody>
+      </p:sp>
+      <p:sp>
+        <p:nvSpPr>
+          <p:cNvPr id="10" name="Text 6"/>
+          <p:cNvSpPr/>
+          <p:nvPr/>
+        </p:nvSpPr>
+        <p:spPr>
+          <a:xfrm>
+            <a:off x="548640" y="5833872"/>
+            <a:ext cx="11064240" cy="329184"/>
+          </a:xfrm>
+          <a:prstGeom prst="rect">
+            <a:avLst/>
+          </a:prstGeom>
+          <a:noFill/>
+          <a:ln/>
+        </p:spPr>
+        <p:txBody>
+          <a:bodyPr wrap="square" lIns="0" tIns="0" rIns="0" bIns="0" rtlCol="0" anchor="ctr"/>
+          <a:lstStyle/>
+          <a:p>
+            <a:pPr indent="0" marL="0">
+              <a:buNone/>
+            </a:pPr>
+            <a:r>
+              <a:rPr lang="en-US" sz="1050" i="1" dirty="0">
+                <a:solidFill>
+                  <a:srgbClr val="6E6E6E"/>
+                </a:solidFill>
+                <a:latin typeface="Calibri" pitchFamily="34" charset="0"/>
+                <a:ea typeface="Calibri" pitchFamily="34" charset="-122"/>
+                <a:cs typeface="Calibri" pitchFamily="34" charset="-120"/>
+              </a:rPr>
+              <a:t>Distinct named plants only — roll-ups excluded to avoid double-counting. 20 further plants sit elsewhere in the Midwest / nationally. Pennsylvania out of scope.</a:t>
+            </a:r>
+            <a:endParaRPr lang="en-US" sz="1050" dirty="0"/>
+          </a:p>
+        </p:txBody>
+      </p:sp>
+      <p:sp>
+        <p:nvSpPr>
+          <p:cNvPr id="11" name="Text 7"/>
+          <p:cNvSpPr/>
+          <p:nvPr/>
+        </p:nvSpPr>
+        <p:spPr>
+          <a:xfrm>
+            <a:off x="548640" y="6199632"/>
+            <a:ext cx="11064240" cy="329184"/>
+          </a:xfrm>
+          <a:prstGeom prst="rect">
+            <a:avLst/>
+          </a:prstGeom>
+          <a:noFill/>
+          <a:ln/>
+        </p:spPr>
+        <p:txBody>
+          <a:bodyPr wrap="square" lIns="0" tIns="0" rIns="0" bIns="0" rtlCol="0" anchor="ctr"/>
+          <a:lstStyle/>
+          <a:p>
+            <a:pPr indent="0" marL="0">
+              <a:buNone/>
+            </a:pPr>
+            <a:r>
+              <a:rPr lang="en-US" sz="1350" i="1" dirty="0">
                 <a:solidFill>
                   <a:srgbClr val="6D2E46"/>
                 </a:solidFill>
-                <a:latin typeface="Cambria" pitchFamily="34" charset="0"/>
-                <a:ea typeface="Cambria" pitchFamily="34" charset="-122"/>
-                <a:cs typeface="Cambria" pitchFamily="34" charset="-120"/>
-              </a:rPr>
-              <a:t>SC · TN · VA</a:t>
-            </a:r>
-            <a:endParaRPr lang="en-US" sz="1800" dirty="0"/>
-          </a:p>
-        </p:txBody>
-      </p:sp>
-      <p:sp>
-        <p:nvSpPr>
-          <p:cNvPr id="16" name="Text 14"/>
-          <p:cNvSpPr/>
-          <p:nvPr/>
-        </p:nvSpPr>
-        <p:spPr>
-          <a:xfrm>
-            <a:off x="6574536" y="2816352"/>
-            <a:ext cx="4754880" cy="822960"/>
-          </a:xfrm>
-          <a:prstGeom prst="rect">
-            <a:avLst/>
-          </a:prstGeom>
-          <a:noFill/>
-          <a:ln/>
-        </p:spPr>
-        <p:txBody>
-          <a:bodyPr wrap="square" lIns="0" tIns="0" rIns="0" bIns="0" rtlCol="0" anchor="ctr"/>
-          <a:lstStyle/>
-          <a:p>
-            <a:pPr indent="0" marL="0">
-              <a:lnSpc>
-                <a:spcPts val="1700"/>
-              </a:lnSpc>
-              <a:buNone/>
-            </a:pPr>
-            <a:r>
-              <a:rPr lang="en-US" sz="1250" dirty="0">
-                <a:solidFill>
-                  <a:srgbClr val="2B2B2B"/>
-                </a:solidFill>
-                <a:latin typeface="Calibri" pitchFamily="34" charset="0"/>
-                <a:ea typeface="Calibri" pitchFamily="34" charset="-122"/>
-                <a:cs typeface="Calibri" pitchFamily="34" charset="-120"/>
-              </a:rPr>
-              <a:t>Thin on mid-size. TN holds the sow plants.</a:t>
-            </a:r>
-            <a:endParaRPr lang="en-US" sz="1250" dirty="0"/>
-          </a:p>
-          <a:p>
-            <a:pPr indent="0" marL="0">
-              <a:lnSpc>
-                <a:spcPts val="1700"/>
-              </a:lnSpc>
-              <a:buNone/>
-            </a:pPr>
-            <a:r>
-              <a:rPr lang="en-US" sz="1250" dirty="0">
-                <a:solidFill>
-                  <a:srgbClr val="2B2B2B"/>
-                </a:solidFill>
-                <a:latin typeface="Calibri" pitchFamily="34" charset="0"/>
-                <a:ea typeface="Calibri" pitchFamily="34" charset="-122"/>
-                <a:cs typeface="Calibri" pitchFamily="34" charset="-120"/>
-              </a:rPr>
-              <a:t>Virginia could not be enumerated online —</a:t>
-            </a:r>
-            <a:endParaRPr lang="en-US" sz="1250" dirty="0"/>
-          </a:p>
-          <a:p>
-            <a:pPr indent="0" marL="0">
-              <a:lnSpc>
-                <a:spcPts val="1700"/>
-              </a:lnSpc>
-              <a:buNone/>
-            </a:pPr>
-            <a:r>
-              <a:rPr lang="en-US" sz="1250" dirty="0">
-                <a:solidFill>
-                  <a:srgbClr val="2B2B2B"/>
-                </a:solidFill>
-                <a:latin typeface="Calibri" pitchFamily="34" charset="0"/>
-                <a:ea typeface="Calibri" pitchFamily="34" charset="-122"/>
-                <a:cs typeface="Calibri" pitchFamily="34" charset="-120"/>
-              </a:rPr>
-              <a:t>one call to VDACS closes it.</a:t>
-            </a:r>
-            <a:endParaRPr lang="en-US" sz="1250" dirty="0"/>
-          </a:p>
-        </p:txBody>
-      </p:sp>
-      <p:sp>
-        <p:nvSpPr>
-          <p:cNvPr id="17" name="Shape 15"/>
-          <p:cNvSpPr/>
-          <p:nvPr/>
-        </p:nvSpPr>
-        <p:spPr>
-          <a:xfrm>
-            <a:off x="548640" y="3931920"/>
-            <a:ext cx="5349240" cy="1609344"/>
-          </a:xfrm>
-          <a:prstGeom prst="roundRect">
-            <a:avLst>
-              <a:gd name="adj" fmla="val 4545"/>
-            </a:avLst>
-          </a:prstGeom>
-          <a:solidFill>
-            <a:srgbClr val="F7F0F1"/>
-          </a:solidFill>
-          <a:ln w="12700">
-            <a:solidFill>
-              <a:srgbClr val="F7F0F1"/>
-            </a:solidFill>
-            <a:prstDash val="solid"/>
-          </a:ln>
-        </p:spPr>
-      </p:sp>
-      <p:sp>
-        <p:nvSpPr>
-          <p:cNvPr id="18" name="Shape 16"/>
-          <p:cNvSpPr/>
-          <p:nvPr/>
-        </p:nvSpPr>
-        <p:spPr>
-          <a:xfrm>
-            <a:off x="859536" y="4206240"/>
-            <a:ext cx="365760" cy="365760"/>
-          </a:xfrm>
-          <a:prstGeom prst="ellipse">
-            <a:avLst/>
-          </a:prstGeom>
-          <a:solidFill>
-            <a:srgbClr val="6D2E46"/>
-          </a:solidFill>
-          <a:ln w="12700">
-            <a:solidFill>
-              <a:srgbClr val="6D2E46"/>
-            </a:solidFill>
-            <a:prstDash val="solid"/>
-          </a:ln>
-        </p:spPr>
-      </p:sp>
-      <p:sp>
-        <p:nvSpPr>
-          <p:cNvPr id="19" name="Text 17"/>
-          <p:cNvSpPr/>
-          <p:nvPr/>
-        </p:nvSpPr>
-        <p:spPr>
-          <a:xfrm>
-            <a:off x="859536" y="4206240"/>
-            <a:ext cx="365760" cy="365760"/>
-          </a:xfrm>
-          <a:prstGeom prst="rect">
-            <a:avLst/>
-          </a:prstGeom>
-          <a:noFill/>
-          <a:ln/>
-        </p:spPr>
-        <p:txBody>
-          <a:bodyPr wrap="square" lIns="0" tIns="0" rIns="0" bIns="0" rtlCol="0" anchor="ctr"/>
-          <a:lstStyle/>
-          <a:p>
-            <a:pPr algn="ctr" indent="0" marL="0">
-              <a:buNone/>
-            </a:pPr>
-            <a:r>
-              <a:rPr lang="en-US" sz="1400" b="1" dirty="0">
-                <a:solidFill>
-                  <a:srgbClr val="FFFFFF"/>
-                </a:solidFill>
-                <a:latin typeface="Calibri" pitchFamily="34" charset="0"/>
-                <a:ea typeface="Calibri" pitchFamily="34" charset="-122"/>
-                <a:cs typeface="Calibri" pitchFamily="34" charset="-120"/>
-              </a:rPr>
-              <a:t>3</a:t>
-            </a:r>
-            <a:endParaRPr lang="en-US" sz="1400" dirty="0"/>
-          </a:p>
-        </p:txBody>
-      </p:sp>
-      <p:sp>
-        <p:nvSpPr>
-          <p:cNvPr id="20" name="Text 18"/>
-          <p:cNvSpPr/>
-          <p:nvPr/>
-        </p:nvSpPr>
-        <p:spPr>
-          <a:xfrm>
-            <a:off x="1371600" y="4187952"/>
-            <a:ext cx="4297680" cy="365760"/>
-          </a:xfrm>
-          <a:prstGeom prst="rect">
-            <a:avLst/>
-          </a:prstGeom>
-          <a:noFill/>
-          <a:ln/>
-        </p:spPr>
-        <p:txBody>
-          <a:bodyPr wrap="square" lIns="0" tIns="0" rIns="0" bIns="0" rtlCol="0" anchor="ctr"/>
-          <a:lstStyle/>
-          <a:p>
-            <a:pPr indent="0" marL="0">
-              <a:buNone/>
-            </a:pPr>
-            <a:r>
-              <a:rPr lang="en-US" sz="1800" b="1" dirty="0">
-                <a:solidFill>
-                  <a:srgbClr val="6D2E46"/>
-                </a:solidFill>
-                <a:latin typeface="Cambria" pitchFamily="34" charset="0"/>
-                <a:ea typeface="Cambria" pitchFamily="34" charset="-122"/>
-                <a:cs typeface="Cambria" pitchFamily="34" charset="-120"/>
-              </a:rPr>
-              <a:t>Midwest &amp; National</a:t>
-            </a:r>
-            <a:endParaRPr lang="en-US" sz="1800" dirty="0"/>
-          </a:p>
-        </p:txBody>
-      </p:sp>
-      <p:sp>
-        <p:nvSpPr>
-          <p:cNvPr id="21" name="Text 19"/>
-          <p:cNvSpPr/>
-          <p:nvPr/>
-        </p:nvSpPr>
-        <p:spPr>
-          <a:xfrm>
-            <a:off x="859536" y="4645152"/>
-            <a:ext cx="4754880" cy="822960"/>
-          </a:xfrm>
-          <a:prstGeom prst="rect">
-            <a:avLst/>
-          </a:prstGeom>
-          <a:noFill/>
-          <a:ln/>
-        </p:spPr>
-        <p:txBody>
-          <a:bodyPr wrap="square" lIns="0" tIns="0" rIns="0" bIns="0" rtlCol="0" anchor="ctr"/>
-          <a:lstStyle/>
-          <a:p>
-            <a:pPr indent="0" marL="0">
-              <a:lnSpc>
-                <a:spcPts val="1700"/>
-              </a:lnSpc>
-              <a:buNone/>
-            </a:pPr>
-            <a:r>
-              <a:rPr lang="en-US" sz="1250" dirty="0">
-                <a:solidFill>
-                  <a:srgbClr val="2B2B2B"/>
-                </a:solidFill>
-                <a:latin typeface="Calibri" pitchFamily="34" charset="0"/>
-                <a:ea typeface="Calibri" pitchFamily="34" charset="-122"/>
-                <a:cs typeface="Calibri" pitchFamily="34" charset="-120"/>
-              </a:rPr>
-              <a:t>Where the 2,500–5,000 band actually lives.</a:t>
-            </a:r>
-            <a:endParaRPr lang="en-US" sz="1250" dirty="0"/>
-          </a:p>
-          <a:p>
-            <a:pPr indent="0" marL="0">
-              <a:lnSpc>
-                <a:spcPts val="1700"/>
-              </a:lnSpc>
-              <a:buNone/>
-            </a:pPr>
-            <a:r>
-              <a:rPr lang="en-US" sz="1250" dirty="0">
-                <a:solidFill>
-                  <a:srgbClr val="2B2B2B"/>
-                </a:solidFill>
-                <a:latin typeface="Calibri" pitchFamily="34" charset="0"/>
-                <a:ea typeface="Calibri" pitchFamily="34" charset="-122"/>
-                <a:cs typeface="Calibri" pitchFamily="34" charset="-120"/>
-              </a:rPr>
-              <a:t>Only ~49 plants nationally sit in that class.</a:t>
-            </a:r>
-            <a:endParaRPr lang="en-US" sz="1250" dirty="0"/>
-          </a:p>
-        </p:txBody>
-      </p:sp>
-      <p:sp>
-        <p:nvSpPr>
-          <p:cNvPr id="22" name="Shape 20"/>
-          <p:cNvSpPr/>
-          <p:nvPr/>
-        </p:nvSpPr>
-        <p:spPr>
-          <a:xfrm>
-            <a:off x="6263640" y="3931920"/>
-            <a:ext cx="5349240" cy="1609344"/>
-          </a:xfrm>
-          <a:prstGeom prst="roundRect">
-            <a:avLst>
-              <a:gd name="adj" fmla="val 4545"/>
-            </a:avLst>
-          </a:prstGeom>
-          <a:solidFill>
-            <a:srgbClr val="F7F0F1"/>
-          </a:solidFill>
-          <a:ln w="12700">
-            <a:solidFill>
-              <a:srgbClr val="F7F0F1"/>
-            </a:solidFill>
-            <a:prstDash val="solid"/>
-          </a:ln>
-        </p:spPr>
-      </p:sp>
-      <p:sp>
-        <p:nvSpPr>
-          <p:cNvPr id="23" name="Shape 21"/>
-          <p:cNvSpPr/>
-          <p:nvPr/>
-        </p:nvSpPr>
-        <p:spPr>
-          <a:xfrm>
-            <a:off x="6574536" y="4206240"/>
-            <a:ext cx="365760" cy="365760"/>
-          </a:xfrm>
-          <a:prstGeom prst="ellipse">
-            <a:avLst/>
-          </a:prstGeom>
-          <a:solidFill>
-            <a:srgbClr val="6D2E46"/>
-          </a:solidFill>
-          <a:ln w="12700">
-            <a:solidFill>
-              <a:srgbClr val="6D2E46"/>
-            </a:solidFill>
-            <a:prstDash val="solid"/>
-          </a:ln>
-        </p:spPr>
-      </p:sp>
-      <p:sp>
-        <p:nvSpPr>
-          <p:cNvPr id="24" name="Text 22"/>
-          <p:cNvSpPr/>
-          <p:nvPr/>
-        </p:nvSpPr>
-        <p:spPr>
-          <a:xfrm>
-            <a:off x="6574536" y="4206240"/>
-            <a:ext cx="365760" cy="365760"/>
-          </a:xfrm>
-          <a:prstGeom prst="rect">
-            <a:avLst/>
-          </a:prstGeom>
-          <a:noFill/>
-          <a:ln/>
-        </p:spPr>
-        <p:txBody>
-          <a:bodyPr wrap="square" lIns="0" tIns="0" rIns="0" bIns="0" rtlCol="0" anchor="ctr"/>
-          <a:lstStyle/>
-          <a:p>
-            <a:pPr algn="ctr" indent="0" marL="0">
-              <a:buNone/>
-            </a:pPr>
-            <a:r>
-              <a:rPr lang="en-US" sz="1400" b="1" dirty="0">
-                <a:solidFill>
-                  <a:srgbClr val="FFFFFF"/>
-                </a:solidFill>
-                <a:latin typeface="Calibri" pitchFamily="34" charset="0"/>
-                <a:ea typeface="Calibri" pitchFamily="34" charset="-122"/>
-                <a:cs typeface="Calibri" pitchFamily="34" charset="-120"/>
-              </a:rPr>
-              <a:t>4</a:t>
-            </a:r>
-            <a:endParaRPr lang="en-US" sz="1400" dirty="0"/>
-          </a:p>
-        </p:txBody>
-      </p:sp>
-      <p:sp>
-        <p:nvSpPr>
-          <p:cNvPr id="25" name="Text 23"/>
-          <p:cNvSpPr/>
-          <p:nvPr/>
-        </p:nvSpPr>
-        <p:spPr>
-          <a:xfrm>
-            <a:off x="7086600" y="4187952"/>
-            <a:ext cx="4297680" cy="365760"/>
-          </a:xfrm>
-          <a:prstGeom prst="rect">
-            <a:avLst/>
-          </a:prstGeom>
-          <a:noFill/>
-          <a:ln/>
-        </p:spPr>
-        <p:txBody>
-          <a:bodyPr wrap="square" lIns="0" tIns="0" rIns="0" bIns="0" rtlCol="0" anchor="ctr"/>
-          <a:lstStyle/>
-          <a:p>
-            <a:pPr indent="0" marL="0">
-              <a:buNone/>
-            </a:pPr>
-            <a:r>
-              <a:rPr lang="en-US" sz="1800" b="1" dirty="0">
-                <a:solidFill>
-                  <a:srgbClr val="6D2E46"/>
-                </a:solidFill>
-                <a:latin typeface="Cambria" pitchFamily="34" charset="0"/>
-                <a:ea typeface="Cambria" pitchFamily="34" charset="-122"/>
-                <a:cs typeface="Cambria" pitchFamily="34" charset="-120"/>
-              </a:rPr>
-              <a:t>Pennsylvania</a:t>
-            </a:r>
-            <a:endParaRPr lang="en-US" sz="1800" dirty="0"/>
-          </a:p>
-        </p:txBody>
-      </p:sp>
-      <p:sp>
-        <p:nvSpPr>
-          <p:cNvPr id="26" name="Text 24"/>
-          <p:cNvSpPr/>
-          <p:nvPr/>
-        </p:nvSpPr>
-        <p:spPr>
-          <a:xfrm>
-            <a:off x="6574536" y="4645152"/>
-            <a:ext cx="4754880" cy="822960"/>
-          </a:xfrm>
-          <a:prstGeom prst="rect">
-            <a:avLst/>
-          </a:prstGeom>
-          <a:noFill/>
-          <a:ln/>
-        </p:spPr>
-        <p:txBody>
-          <a:bodyPr wrap="square" lIns="0" tIns="0" rIns="0" bIns="0" rtlCol="0" anchor="ctr"/>
-          <a:lstStyle/>
-          <a:p>
-            <a:pPr indent="0" marL="0">
-              <a:lnSpc>
-                <a:spcPts val="1700"/>
-              </a:lnSpc>
-              <a:buNone/>
-            </a:pPr>
-            <a:r>
-              <a:rPr lang="en-US" sz="1250" dirty="0">
-                <a:solidFill>
-                  <a:srgbClr val="2B2B2B"/>
-                </a:solidFill>
-                <a:latin typeface="Calibri" pitchFamily="34" charset="0"/>
-                <a:ea typeface="Calibri" pitchFamily="34" charset="-122"/>
-                <a:cs typeface="Calibri" pitchFamily="34" charset="-120"/>
-              </a:rPr>
-              <a:t>Export-certified plants sit beside the tissue</a:t>
-            </a:r>
-            <a:endParaRPr lang="en-US" sz="1250" dirty="0"/>
-          </a:p>
-          <a:p>
-            <a:pPr indent="0" marL="0">
-              <a:lnSpc>
-                <a:spcPts val="1700"/>
-              </a:lnSpc>
-              <a:buNone/>
-            </a:pPr>
-            <a:r>
-              <a:rPr lang="en-US" sz="1250" dirty="0">
-                <a:solidFill>
-                  <a:srgbClr val="2B2B2B"/>
-                </a:solidFill>
-                <a:latin typeface="Calibri" pitchFamily="34" charset="0"/>
-                <a:ea typeface="Calibri" pitchFamily="34" charset="-122"/>
-                <a:cs typeface="Calibri" pitchFamily="34" charset="-120"/>
-              </a:rPr>
-              <a:t>firms that already buy there — a possible</a:t>
-            </a:r>
-            <a:endParaRPr lang="en-US" sz="1250" dirty="0"/>
-          </a:p>
-          <a:p>
-            <a:pPr indent="0" marL="0">
-              <a:lnSpc>
-                <a:spcPts val="1700"/>
-              </a:lnSpc>
-              <a:buNone/>
-            </a:pPr>
-            <a:r>
-              <a:rPr lang="en-US" sz="1250" dirty="0">
-                <a:solidFill>
-                  <a:srgbClr val="2B2B2B"/>
-                </a:solidFill>
-                <a:latin typeface="Calibri" pitchFamily="34" charset="0"/>
-                <a:ea typeface="Calibri" pitchFamily="34" charset="-122"/>
-                <a:cs typeface="Calibri" pitchFamily="34" charset="-120"/>
-              </a:rPr>
-              <a:t>ready-made precedent for Model A.</a:t>
-            </a:r>
-            <a:endParaRPr lang="en-US" sz="1250" dirty="0"/>
-          </a:p>
-        </p:txBody>
-      </p:sp>
-      <p:sp>
-        <p:nvSpPr>
-          <p:cNvPr id="27" name="Text 25"/>
-          <p:cNvSpPr/>
-          <p:nvPr/>
-        </p:nvSpPr>
-        <p:spPr>
-          <a:xfrm>
-            <a:off x="548640" y="5870448"/>
-            <a:ext cx="11064240" cy="320040"/>
-          </a:xfrm>
-          <a:prstGeom prst="rect">
-            <a:avLst/>
-          </a:prstGeom>
-          <a:noFill/>
-          <a:ln/>
-        </p:spPr>
-        <p:txBody>
-          <a:bodyPr wrap="square" lIns="0" tIns="0" rIns="0" bIns="0" rtlCol="0" anchor="ctr"/>
-          <a:lstStyle/>
-          <a:p>
-            <a:pPr indent="0" marL="0">
-              <a:buNone/>
-            </a:pPr>
-            <a:r>
-              <a:rPr lang="en-US" sz="1400" i="1" dirty="0">
-                <a:solidFill>
-                  <a:srgbClr val="6D2E46"/>
-                </a:solidFill>
-                <a:latin typeface="Calibri" pitchFamily="34" charset="0"/>
-                <a:ea typeface="Calibri" pitchFamily="34" charset="-122"/>
-                <a:cs typeface="Calibri" pitchFamily="34" charset="-120"/>
-              </a:rPr>
-              <a:t>Discuss:  how much weight do we give geographic proximity?</a:t>
-            </a:r>
-            <a:endParaRPr lang="en-US" sz="1400" dirty="0"/>
+                <a:latin typeface="Calibri" pitchFamily="34" charset="0"/>
+                <a:ea typeface="Calibri" pitchFamily="34" charset="-122"/>
+                <a:cs typeface="Calibri" pitchFamily="34" charset="-120"/>
+              </a:rPr>
+              <a:t>Discuss:  how much weight do we give geographic proximity — and do we split domestic vs EU by region?</a:t>
+            </a:r>
+            <a:endParaRPr lang="en-US" sz="1350" dirty="0"/>
           </a:p>
         </p:txBody>
       </p:sp>

--- a/Tissue Supplier Research/Supplier_Strategy_Meeting.pptx
+++ b/Tissue Supplier Research/Supplier_Strategy_Meeting.pptx
@@ -11,9 +11,10 @@
     <p:sldId id="259" r:id="rId5"/>
     <p:sldId id="260" r:id="rId6"/>
     <p:sldId id="261" r:id="rId7"/>
+    <p:sldId id="262" r:id="rId8"/>
   </p:sldIdLst>
   <p:notesMasterIdLst>
-    <p:notesMasterId r:id="rId8"/>
+    <p:notesMasterId r:id="rId9"/>
   </p:notesMasterIdLst>
   <p:sldSz cx="12192000" cy="6858000"/>
   <p:notesSz cx="6858000" cy="12192000"/>
@@ -2345,7 +2346,7 @@
           <a:p>
             <a:r>
               <a:rPr lang="en-US" dirty="0"/>
-              <a:t>The process is a straw man — the point is to agree the shape and the gates, not the detail.</a:t>
+              <a:t>Model B already exists at these suppliers. Animal Biotech's risk is traceability to a listed origin establishment — without a named, APHIS/TRACES-listed abattoir there is no EU health certificate. The reason to call the green-lit plants is to get a real price per block so we can compare against our own fully-loaded cost (TTLC), not just what we pay at the door.</a:t>
             </a:r>
             <a:endParaRPr lang="en-US" dirty="0"/>
           </a:p>
@@ -2369,6 +2370,94 @@
             <a:fld id="{F7021451-1387-4CA6-816F-3879F97B5CBC}" type="slidenum">
               <a:rPr lang="en-US"/>
               <a:t>6</a:t>
+            </a:fld>
+            <a:endParaRPr lang="en-US"/>
+          </a:p>
+        </p:txBody>
+      </p:sp>
+    </p:spTree>
+    <p:extLst>
+      <p:ext uri="{BB962C8B-B14F-4D97-AF65-F5344CB8AC3E}">
+        <p14:creationId xmlns:p14="http://schemas.microsoft.com/office/powerpoint/2010/main" val="1024086991"/>
+      </p:ext>
+    </p:extLst>
+  </p:cSld>
+  <p:clrMapOvr>
+    <a:masterClrMapping/>
+  </p:clrMapOvr>
+</p:notes>
+</file>
+
+<file path=ppt/notesSlides/notesSlide7.xml><?xml version="1.0" encoding="utf-8"?>
+<p:notes xmlns:a="http://schemas.openxmlformats.org/drawingml/2006/main" xmlns:r="http://schemas.openxmlformats.org/officeDocument/2006/relationships" xmlns:p="http://schemas.openxmlformats.org/presentationml/2006/main">
+  <p:cSld>
+    <p:spTree>
+      <p:nvGrpSpPr>
+        <p:cNvPr id="1" name=""/>
+        <p:cNvGrpSpPr/>
+        <p:nvPr/>
+      </p:nvGrpSpPr>
+      <p:grpSpPr>
+        <a:xfrm>
+          <a:off x="0" y="0"/>
+          <a:ext cx="0" cy="0"/>
+          <a:chOff x="0" y="0"/>
+          <a:chExt cx="0" cy="0"/>
+        </a:xfrm>
+      </p:grpSpPr>
+      <p:sp>
+        <p:nvSpPr>
+          <p:cNvPr id="2" name="Slide Image Placeholder 1"/>
+          <p:cNvSpPr>
+            <a:spLocks noGrp="1" noRot="1" noChangeAspect="1"/>
+          </p:cNvSpPr>
+          <p:nvPr>
+            <p:ph type="sldImg"/>
+          </p:nvPr>
+        </p:nvSpPr>
+        <p:spPr/>
+      </p:sp>
+      <p:sp>
+        <p:nvSpPr>
+          <p:cNvPr id="3" name="Notes Placeholder 2"/>
+          <p:cNvSpPr>
+            <a:spLocks noGrp="1"/>
+          </p:cNvSpPr>
+          <p:nvPr>
+            <p:ph type="body" idx="1"/>
+          </p:nvPr>
+        </p:nvSpPr>
+        <p:spPr/>
+        <p:txBody>
+          <a:bodyPr/>
+          <a:lstStyle/>
+          <a:p>
+            <a:r>
+              <a:rPr lang="en-US" dirty="0"/>
+              <a:t>The process is a straw man — the point is to agree the shape and the gates, not the detail.</a:t>
+            </a:r>
+            <a:endParaRPr lang="en-US" dirty="0"/>
+          </a:p>
+        </p:txBody>
+      </p:sp>
+      <p:sp>
+        <p:nvSpPr>
+          <p:cNvPr id="4" name="Slide Number Placeholder 3"/>
+          <p:cNvSpPr>
+            <a:spLocks noGrp="1"/>
+          </p:cNvSpPr>
+          <p:nvPr>
+            <p:ph type="sldNum" sz="quarter" idx="10"/>
+          </p:nvPr>
+        </p:nvSpPr>
+        <p:spPr/>
+        <p:txBody>
+          <a:bodyPr/>
+          <a:lstStyle/>
+          <a:p>
+            <a:fld id="{F7021451-1387-4CA6-816F-3879F97B5CBC}" type="slidenum">
+              <a:rPr lang="en-US"/>
+              <a:t>7</a:t>
             </a:fld>
             <a:endParaRPr lang="en-US"/>
           </a:p>
@@ -6348,6 +6437,1454 @@
                 <a:ea typeface="Calibri" pitchFamily="34" charset="-122"/>
                 <a:cs typeface="Calibri" pitchFamily="34" charset="-120"/>
               </a:rPr>
+              <a:t>4b · MODEL B — ORGAN SPECIALISTS</a:t>
+            </a:r>
+            <a:endParaRPr lang="en-US" sz="1200" dirty="0"/>
+          </a:p>
+        </p:txBody>
+      </p:sp>
+      <p:sp>
+        <p:nvSpPr>
+          <p:cNvPr id="3" name="Text 1"/>
+          <p:cNvSpPr/>
+          <p:nvPr/>
+        </p:nvSpPr>
+        <p:spPr>
+          <a:xfrm>
+            <a:off x="548640" y="676656"/>
+            <a:ext cx="8778240" cy="658368"/>
+          </a:xfrm>
+          <a:prstGeom prst="rect">
+            <a:avLst/>
+          </a:prstGeom>
+          <a:noFill/>
+          <a:ln/>
+        </p:spPr>
+        <p:txBody>
+          <a:bodyPr wrap="square" lIns="0" tIns="0" rIns="0" bIns="0" rtlCol="0" anchor="ctr"/>
+          <a:lstStyle/>
+          <a:p>
+            <a:pPr indent="0" marL="0">
+              <a:buNone/>
+            </a:pPr>
+            <a:r>
+              <a:rPr lang="en-US" sz="3400" b="1" dirty="0">
+                <a:solidFill>
+                  <a:srgbClr val="6D2E46"/>
+                </a:solidFill>
+                <a:latin typeface="Cambria" pitchFamily="34" charset="0"/>
+                <a:ea typeface="Cambria" pitchFamily="34" charset="-122"/>
+                <a:cs typeface="Cambria" pitchFamily="34" charset="-120"/>
+              </a:rPr>
+              <a:t>Who can already do this</a:t>
+            </a:r>
+            <a:endParaRPr lang="en-US" sz="3400" dirty="0"/>
+          </a:p>
+        </p:txBody>
+      </p:sp>
+      <p:sp>
+        <p:nvSpPr>
+          <p:cNvPr id="4" name="Text 2"/>
+          <p:cNvSpPr/>
+          <p:nvPr/>
+        </p:nvSpPr>
+        <p:spPr>
+          <a:xfrm>
+            <a:off x="548640" y="1481328"/>
+            <a:ext cx="11064240" cy="274320"/>
+          </a:xfrm>
+          <a:prstGeom prst="rect">
+            <a:avLst/>
+          </a:prstGeom>
+          <a:noFill/>
+          <a:ln/>
+        </p:spPr>
+        <p:txBody>
+          <a:bodyPr wrap="square" lIns="0" tIns="0" rIns="0" bIns="0" rtlCol="0" anchor="ctr"/>
+          <a:lstStyle/>
+          <a:p>
+            <a:pPr indent="0" marL="0">
+              <a:buNone/>
+            </a:pPr>
+            <a:r>
+              <a:rPr lang="en-US" sz="1400" dirty="0">
+                <a:solidFill>
+                  <a:srgbClr val="2B2B2B"/>
+                </a:solidFill>
+                <a:latin typeface="Calibri" pitchFamily="34" charset="0"/>
+                <a:ea typeface="Calibri" pitchFamily="34" charset="-122"/>
+                <a:cs typeface="Calibri" pitchFamily="34" charset="-120"/>
+              </a:rPr>
+              <a:t>Plants and suppliers that ALREADY harvest organs to a customer's written spec. With these, Model B is not a build — it exists.</a:t>
+            </a:r>
+            <a:endParaRPr lang="en-US" sz="1400" dirty="0"/>
+          </a:p>
+        </p:txBody>
+      </p:sp>
+      <p:sp>
+        <p:nvSpPr>
+          <p:cNvPr id="5" name="Text 3"/>
+          <p:cNvSpPr/>
+          <p:nvPr/>
+        </p:nvSpPr>
+        <p:spPr>
+          <a:xfrm>
+            <a:off x="548640" y="1828800"/>
+            <a:ext cx="7315200" cy="256032"/>
+          </a:xfrm>
+          <a:prstGeom prst="rect">
+            <a:avLst/>
+          </a:prstGeom>
+          <a:noFill/>
+          <a:ln/>
+        </p:spPr>
+        <p:txBody>
+          <a:bodyPr wrap="square" lIns="0" tIns="0" rIns="0" bIns="0" rtlCol="0" anchor="ctr"/>
+          <a:lstStyle/>
+          <a:p>
+            <a:pPr indent="0" marL="0">
+              <a:buNone/>
+            </a:pPr>
+            <a:r>
+              <a:rPr lang="en-US" sz="1150" b="1" spc="150" kern="0" dirty="0">
+                <a:solidFill>
+                  <a:srgbClr val="A26769"/>
+                </a:solidFill>
+                <a:latin typeface="Calibri" pitchFamily="34" charset="0"/>
+                <a:ea typeface="Calibri" pitchFamily="34" charset="-122"/>
+                <a:cs typeface="Calibri" pitchFamily="34" charset="-120"/>
+              </a:rPr>
+              <a:t>GREEN-LIT — REACH OUT</a:t>
+            </a:r>
+            <a:endParaRPr lang="en-US" sz="1150" dirty="0"/>
+          </a:p>
+        </p:txBody>
+      </p:sp>
+      <p:sp>
+        <p:nvSpPr>
+          <p:cNvPr id="6" name="Shape 4"/>
+          <p:cNvSpPr/>
+          <p:nvPr/>
+        </p:nvSpPr>
+        <p:spPr>
+          <a:xfrm>
+            <a:off x="548640" y="2139696"/>
+            <a:ext cx="2633472" cy="1755648"/>
+          </a:xfrm>
+          <a:prstGeom prst="roundRect">
+            <a:avLst>
+              <a:gd name="adj" fmla="val 4167"/>
+            </a:avLst>
+          </a:prstGeom>
+          <a:solidFill>
+            <a:srgbClr val="F7F0F1"/>
+          </a:solidFill>
+          <a:ln w="12700">
+            <a:solidFill>
+              <a:srgbClr val="F7F0F1"/>
+            </a:solidFill>
+            <a:prstDash val="solid"/>
+          </a:ln>
+        </p:spPr>
+      </p:sp>
+      <p:sp>
+        <p:nvSpPr>
+          <p:cNvPr id="7" name="Shape 5"/>
+          <p:cNvSpPr/>
+          <p:nvPr/>
+        </p:nvSpPr>
+        <p:spPr>
+          <a:xfrm>
+            <a:off x="731520" y="2304288"/>
+            <a:ext cx="182880" cy="182880"/>
+          </a:xfrm>
+          <a:prstGeom prst="ellipse">
+            <a:avLst/>
+          </a:prstGeom>
+          <a:solidFill>
+            <a:srgbClr val="2E7D4F"/>
+          </a:solidFill>
+          <a:ln w="12700">
+            <a:solidFill>
+              <a:srgbClr val="2E7D4F"/>
+            </a:solidFill>
+            <a:prstDash val="solid"/>
+          </a:ln>
+        </p:spPr>
+      </p:sp>
+      <p:sp>
+        <p:nvSpPr>
+          <p:cNvPr id="8" name="Text 6"/>
+          <p:cNvSpPr/>
+          <p:nvPr/>
+        </p:nvSpPr>
+        <p:spPr>
+          <a:xfrm>
+            <a:off x="987552" y="2249424"/>
+            <a:ext cx="2103120" cy="292608"/>
+          </a:xfrm>
+          <a:prstGeom prst="rect">
+            <a:avLst/>
+          </a:prstGeom>
+          <a:noFill/>
+          <a:ln/>
+        </p:spPr>
+        <p:txBody>
+          <a:bodyPr wrap="square" lIns="0" tIns="0" rIns="0" bIns="0" rtlCol="0" anchor="ctr"/>
+          <a:lstStyle/>
+          <a:p>
+            <a:pPr indent="0" marL="0">
+              <a:buNone/>
+            </a:pPr>
+            <a:r>
+              <a:rPr lang="en-US" sz="1350" b="1" dirty="0">
+                <a:solidFill>
+                  <a:srgbClr val="6D2E46"/>
+                </a:solidFill>
+                <a:latin typeface="Cambria" pitchFamily="34" charset="0"/>
+                <a:ea typeface="Cambria" pitchFamily="34" charset="-122"/>
+                <a:cs typeface="Cambria" pitchFamily="34" charset="-120"/>
+              </a:rPr>
+              <a:t>Smithfield BioScience</a:t>
+            </a:r>
+            <a:endParaRPr lang="en-US" sz="1350" dirty="0"/>
+          </a:p>
+        </p:txBody>
+      </p:sp>
+      <p:sp>
+        <p:nvSpPr>
+          <p:cNvPr id="9" name="Text 7"/>
+          <p:cNvSpPr/>
+          <p:nvPr/>
+        </p:nvSpPr>
+        <p:spPr>
+          <a:xfrm>
+            <a:off x="731520" y="2560320"/>
+            <a:ext cx="2286000" cy="201168"/>
+          </a:xfrm>
+          <a:prstGeom prst="rect">
+            <a:avLst/>
+          </a:prstGeom>
+          <a:noFill/>
+          <a:ln/>
+        </p:spPr>
+        <p:txBody>
+          <a:bodyPr wrap="square" lIns="0" tIns="0" rIns="0" bIns="0" rtlCol="0" anchor="ctr"/>
+          <a:lstStyle/>
+          <a:p>
+            <a:pPr indent="0" marL="0">
+              <a:buNone/>
+            </a:pPr>
+            <a:r>
+              <a:rPr lang="en-US" sz="1000" i="1" dirty="0">
+                <a:solidFill>
+                  <a:srgbClr val="A26769"/>
+                </a:solidFill>
+                <a:latin typeface="Calibri" pitchFamily="34" charset="0"/>
+                <a:ea typeface="Calibri" pitchFamily="34" charset="-122"/>
+                <a:cs typeface="Calibri" pitchFamily="34" charset="-120"/>
+              </a:rPr>
+              <a:t>Tar Heel NC · Denison IA</a:t>
+            </a:r>
+            <a:endParaRPr lang="en-US" sz="1000" dirty="0"/>
+          </a:p>
+        </p:txBody>
+      </p:sp>
+      <p:sp>
+        <p:nvSpPr>
+          <p:cNvPr id="10" name="Text 8"/>
+          <p:cNvSpPr/>
+          <p:nvPr/>
+        </p:nvSpPr>
+        <p:spPr>
+          <a:xfrm>
+            <a:off x="731520" y="2798064"/>
+            <a:ext cx="2340864" cy="1005840"/>
+          </a:xfrm>
+          <a:prstGeom prst="rect">
+            <a:avLst/>
+          </a:prstGeom>
+          <a:noFill/>
+          <a:ln/>
+        </p:spPr>
+        <p:txBody>
+          <a:bodyPr wrap="square" lIns="0" tIns="0" rIns="0" bIns="0" rtlCol="0" anchor="ctr"/>
+          <a:lstStyle/>
+          <a:p>
+            <a:pPr indent="0" marL="0">
+              <a:lnSpc>
+                <a:spcPts val="1300"/>
+              </a:lnSpc>
+              <a:buNone/>
+            </a:pPr>
+            <a:r>
+              <a:rPr lang="en-US" sz="1050" dirty="0">
+                <a:solidFill>
+                  <a:srgbClr val="2B2B2B"/>
+                </a:solidFill>
+                <a:latin typeface="Calibri" pitchFamily="34" charset="0"/>
+                <a:ea typeface="Calibri" pitchFamily="34" charset="-122"/>
+                <a:cs typeface="Calibri" pitchFamily="34" charset="-120"/>
+              </a:rPr>
+              <a:t>The only verified organ programme:</a:t>
+            </a:r>
+            <a:endParaRPr lang="en-US" sz="1050" dirty="0"/>
+          </a:p>
+          <a:p>
+            <a:pPr indent="0" marL="0">
+              <a:lnSpc>
+                <a:spcPts val="1300"/>
+              </a:lnSpc>
+              <a:buNone/>
+            </a:pPr>
+            <a:r>
+              <a:rPr lang="en-US" sz="1050" dirty="0">
+                <a:solidFill>
+                  <a:srgbClr val="2B2B2B"/>
+                </a:solidFill>
+                <a:latin typeface="Calibri" pitchFamily="34" charset="0"/>
+                <a:ea typeface="Calibri" pitchFamily="34" charset="-122"/>
+                <a:cs typeface="Calibri" pitchFamily="34" charset="-120"/>
+              </a:rPr>
+              <a:t>valves, aorta, pericardium, peritoneum,</a:t>
+            </a:r>
+            <a:endParaRPr lang="en-US" sz="1050" dirty="0"/>
+          </a:p>
+          <a:p>
+            <a:pPr indent="0" marL="0">
+              <a:lnSpc>
+                <a:spcPts val="1300"/>
+              </a:lnSpc>
+              <a:buNone/>
+            </a:pPr>
+            <a:r>
+              <a:rPr lang="en-US" sz="1050" dirty="0">
+                <a:solidFill>
+                  <a:srgbClr val="2B2B2B"/>
+                </a:solidFill>
+                <a:latin typeface="Calibri" pitchFamily="34" charset="0"/>
+                <a:ea typeface="Calibri" pitchFamily="34" charset="-122"/>
+                <a:cs typeface="Calibri" pitchFamily="34" charset="-120"/>
+              </a:rPr>
+              <a:t>mucosa, pancreas. Existing EU pharma trade.</a:t>
+            </a:r>
+            <a:endParaRPr lang="en-US" sz="1050" dirty="0"/>
+          </a:p>
+        </p:txBody>
+      </p:sp>
+      <p:sp>
+        <p:nvSpPr>
+          <p:cNvPr id="11" name="Shape 9"/>
+          <p:cNvSpPr/>
+          <p:nvPr/>
+        </p:nvSpPr>
+        <p:spPr>
+          <a:xfrm>
+            <a:off x="3383280" y="2139696"/>
+            <a:ext cx="2633472" cy="1755648"/>
+          </a:xfrm>
+          <a:prstGeom prst="roundRect">
+            <a:avLst>
+              <a:gd name="adj" fmla="val 4167"/>
+            </a:avLst>
+          </a:prstGeom>
+          <a:solidFill>
+            <a:srgbClr val="F7F0F1"/>
+          </a:solidFill>
+          <a:ln w="12700">
+            <a:solidFill>
+              <a:srgbClr val="F7F0F1"/>
+            </a:solidFill>
+            <a:prstDash val="solid"/>
+          </a:ln>
+        </p:spPr>
+      </p:sp>
+      <p:sp>
+        <p:nvSpPr>
+          <p:cNvPr id="12" name="Shape 10"/>
+          <p:cNvSpPr/>
+          <p:nvPr/>
+        </p:nvSpPr>
+        <p:spPr>
+          <a:xfrm>
+            <a:off x="3566160" y="2304288"/>
+            <a:ext cx="182880" cy="182880"/>
+          </a:xfrm>
+          <a:prstGeom prst="ellipse">
+            <a:avLst/>
+          </a:prstGeom>
+          <a:solidFill>
+            <a:srgbClr val="2E7D4F"/>
+          </a:solidFill>
+          <a:ln w="12700">
+            <a:solidFill>
+              <a:srgbClr val="2E7D4F"/>
+            </a:solidFill>
+            <a:prstDash val="solid"/>
+          </a:ln>
+        </p:spPr>
+      </p:sp>
+      <p:sp>
+        <p:nvSpPr>
+          <p:cNvPr id="13" name="Text 11"/>
+          <p:cNvSpPr/>
+          <p:nvPr/>
+        </p:nvSpPr>
+        <p:spPr>
+          <a:xfrm>
+            <a:off x="3822192" y="2249424"/>
+            <a:ext cx="2103120" cy="292608"/>
+          </a:xfrm>
+          <a:prstGeom prst="rect">
+            <a:avLst/>
+          </a:prstGeom>
+          <a:noFill/>
+          <a:ln/>
+        </p:spPr>
+        <p:txBody>
+          <a:bodyPr wrap="square" lIns="0" tIns="0" rIns="0" bIns="0" rtlCol="0" anchor="ctr"/>
+          <a:lstStyle/>
+          <a:p>
+            <a:pPr indent="0" marL="0">
+              <a:buNone/>
+            </a:pPr>
+            <a:r>
+              <a:rPr lang="en-US" sz="1350" b="1" dirty="0">
+                <a:solidFill>
+                  <a:srgbClr val="6D2E46"/>
+                </a:solidFill>
+                <a:latin typeface="Cambria" pitchFamily="34" charset="0"/>
+                <a:ea typeface="Cambria" pitchFamily="34" charset="-122"/>
+                <a:cs typeface="Cambria" pitchFamily="34" charset="-120"/>
+              </a:rPr>
+              <a:t>Midwest Research Swine</a:t>
+            </a:r>
+            <a:endParaRPr lang="en-US" sz="1350" dirty="0"/>
+          </a:p>
+        </p:txBody>
+      </p:sp>
+      <p:sp>
+        <p:nvSpPr>
+          <p:cNvPr id="14" name="Text 12"/>
+          <p:cNvSpPr/>
+          <p:nvPr/>
+        </p:nvSpPr>
+        <p:spPr>
+          <a:xfrm>
+            <a:off x="3566160" y="2560320"/>
+            <a:ext cx="2286000" cy="201168"/>
+          </a:xfrm>
+          <a:prstGeom prst="rect">
+            <a:avLst/>
+          </a:prstGeom>
+          <a:noFill/>
+          <a:ln/>
+        </p:spPr>
+        <p:txBody>
+          <a:bodyPr wrap="square" lIns="0" tIns="0" rIns="0" bIns="0" rtlCol="0" anchor="ctr"/>
+          <a:lstStyle/>
+          <a:p>
+            <a:pPr indent="0" marL="0">
+              <a:buNone/>
+            </a:pPr>
+            <a:r>
+              <a:rPr lang="en-US" sz="1000" i="1" dirty="0">
+                <a:solidFill>
+                  <a:srgbClr val="A26769"/>
+                </a:solidFill>
+                <a:latin typeface="Calibri" pitchFamily="34" charset="0"/>
+                <a:ea typeface="Calibri" pitchFamily="34" charset="-122"/>
+                <a:cs typeface="Calibri" pitchFamily="34" charset="-120"/>
+              </a:rPr>
+              <a:t>Glencoe MN</a:t>
+            </a:r>
+            <a:endParaRPr lang="en-US" sz="1000" dirty="0"/>
+          </a:p>
+        </p:txBody>
+      </p:sp>
+      <p:sp>
+        <p:nvSpPr>
+          <p:cNvPr id="15" name="Text 13"/>
+          <p:cNvSpPr/>
+          <p:nvPr/>
+        </p:nvSpPr>
+        <p:spPr>
+          <a:xfrm>
+            <a:off x="3566160" y="2798064"/>
+            <a:ext cx="2340864" cy="1005840"/>
+          </a:xfrm>
+          <a:prstGeom prst="rect">
+            <a:avLst/>
+          </a:prstGeom>
+          <a:noFill/>
+          <a:ln/>
+        </p:spPr>
+        <p:txBody>
+          <a:bodyPr wrap="square" lIns="0" tIns="0" rIns="0" bIns="0" rtlCol="0" anchor="ctr"/>
+          <a:lstStyle/>
+          <a:p>
+            <a:pPr indent="0" marL="0">
+              <a:lnSpc>
+                <a:spcPts val="1300"/>
+              </a:lnSpc>
+              <a:buNone/>
+            </a:pPr>
+            <a:r>
+              <a:rPr lang="en-US" sz="1050" dirty="0">
+                <a:solidFill>
+                  <a:srgbClr val="2B2B2B"/>
+                </a:solidFill>
+                <a:latin typeface="Calibri" pitchFamily="34" charset="0"/>
+                <a:ea typeface="Calibri" pitchFamily="34" charset="-122"/>
+                <a:cs typeface="Calibri" pitchFamily="34" charset="-120"/>
+              </a:rPr>
+              <a:t>Porcine-only abattoir + tissue facility.</a:t>
+            </a:r>
+            <a:endParaRPr lang="en-US" sz="1050" dirty="0"/>
+          </a:p>
+          <a:p>
+            <a:pPr indent="0" marL="0">
+              <a:lnSpc>
+                <a:spcPts val="1300"/>
+              </a:lnSpc>
+              <a:buNone/>
+            </a:pPr>
+            <a:r>
+              <a:rPr lang="en-US" sz="1050" dirty="0">
+                <a:solidFill>
+                  <a:srgbClr val="2B2B2B"/>
+                </a:solidFill>
+                <a:latin typeface="Calibri" pitchFamily="34" charset="0"/>
+                <a:ea typeface="Calibri" pitchFamily="34" charset="-122"/>
+                <a:cs typeface="Calibri" pitchFamily="34" charset="-120"/>
+              </a:rPr>
+              <a:t>ISO 13485 + 22442-2, USDA Class B/R.</a:t>
+            </a:r>
+            <a:endParaRPr lang="en-US" sz="1050" dirty="0"/>
+          </a:p>
+          <a:p>
+            <a:pPr indent="0" marL="0">
+              <a:lnSpc>
+                <a:spcPts val="1300"/>
+              </a:lnSpc>
+              <a:buNone/>
+            </a:pPr>
+            <a:r>
+              <a:rPr lang="en-US" sz="1050" dirty="0">
+                <a:solidFill>
+                  <a:srgbClr val="2B2B2B"/>
+                </a:solidFill>
+                <a:latin typeface="Calibri" pitchFamily="34" charset="0"/>
+                <a:ea typeface="Calibri" pitchFamily="34" charset="-122"/>
+                <a:cs typeface="Calibri" pitchFamily="34" charset="-120"/>
+              </a:rPr>
+              <a:t>Already ships internationally.</a:t>
+            </a:r>
+            <a:endParaRPr lang="en-US" sz="1050" dirty="0"/>
+          </a:p>
+        </p:txBody>
+      </p:sp>
+      <p:sp>
+        <p:nvSpPr>
+          <p:cNvPr id="16" name="Shape 14"/>
+          <p:cNvSpPr/>
+          <p:nvPr/>
+        </p:nvSpPr>
+        <p:spPr>
+          <a:xfrm>
+            <a:off x="6217920" y="2139696"/>
+            <a:ext cx="2633472" cy="1755648"/>
+          </a:xfrm>
+          <a:prstGeom prst="roundRect">
+            <a:avLst>
+              <a:gd name="adj" fmla="val 4167"/>
+            </a:avLst>
+          </a:prstGeom>
+          <a:solidFill>
+            <a:srgbClr val="F7F0F1"/>
+          </a:solidFill>
+          <a:ln w="12700">
+            <a:solidFill>
+              <a:srgbClr val="F7F0F1"/>
+            </a:solidFill>
+            <a:prstDash val="solid"/>
+          </a:ln>
+        </p:spPr>
+      </p:sp>
+      <p:sp>
+        <p:nvSpPr>
+          <p:cNvPr id="17" name="Shape 15"/>
+          <p:cNvSpPr/>
+          <p:nvPr/>
+        </p:nvSpPr>
+        <p:spPr>
+          <a:xfrm>
+            <a:off x="6400800" y="2304288"/>
+            <a:ext cx="182880" cy="182880"/>
+          </a:xfrm>
+          <a:prstGeom prst="ellipse">
+            <a:avLst/>
+          </a:prstGeom>
+          <a:solidFill>
+            <a:srgbClr val="2E7D4F"/>
+          </a:solidFill>
+          <a:ln w="12700">
+            <a:solidFill>
+              <a:srgbClr val="2E7D4F"/>
+            </a:solidFill>
+            <a:prstDash val="solid"/>
+          </a:ln>
+        </p:spPr>
+      </p:sp>
+      <p:sp>
+        <p:nvSpPr>
+          <p:cNvPr id="18" name="Text 16"/>
+          <p:cNvSpPr/>
+          <p:nvPr/>
+        </p:nvSpPr>
+        <p:spPr>
+          <a:xfrm>
+            <a:off x="6656832" y="2249424"/>
+            <a:ext cx="2103120" cy="292608"/>
+          </a:xfrm>
+          <a:prstGeom prst="rect">
+            <a:avLst/>
+          </a:prstGeom>
+          <a:noFill/>
+          <a:ln/>
+        </p:spPr>
+        <p:txBody>
+          <a:bodyPr wrap="square" lIns="0" tIns="0" rIns="0" bIns="0" rtlCol="0" anchor="ctr"/>
+          <a:lstStyle/>
+          <a:p>
+            <a:pPr indent="0" marL="0">
+              <a:buNone/>
+            </a:pPr>
+            <a:r>
+              <a:rPr lang="en-US" sz="1350" b="1" dirty="0">
+                <a:solidFill>
+                  <a:srgbClr val="6D2E46"/>
+                </a:solidFill>
+                <a:latin typeface="Cambria" pitchFamily="34" charset="0"/>
+                <a:ea typeface="Cambria" pitchFamily="34" charset="-122"/>
+                <a:cs typeface="Cambria" pitchFamily="34" charset="-120"/>
+              </a:rPr>
+              <a:t>Tissue Source</a:t>
+            </a:r>
+            <a:endParaRPr lang="en-US" sz="1350" dirty="0"/>
+          </a:p>
+        </p:txBody>
+      </p:sp>
+      <p:sp>
+        <p:nvSpPr>
+          <p:cNvPr id="19" name="Text 17"/>
+          <p:cNvSpPr/>
+          <p:nvPr/>
+        </p:nvSpPr>
+        <p:spPr>
+          <a:xfrm>
+            <a:off x="6400800" y="2560320"/>
+            <a:ext cx="2286000" cy="201168"/>
+          </a:xfrm>
+          <a:prstGeom prst="rect">
+            <a:avLst/>
+          </a:prstGeom>
+          <a:noFill/>
+          <a:ln/>
+        </p:spPr>
+        <p:txBody>
+          <a:bodyPr wrap="square" lIns="0" tIns="0" rIns="0" bIns="0" rtlCol="0" anchor="ctr"/>
+          <a:lstStyle/>
+          <a:p>
+            <a:pPr indent="0" marL="0">
+              <a:buNone/>
+            </a:pPr>
+            <a:r>
+              <a:rPr lang="en-US" sz="1000" i="1" dirty="0">
+                <a:solidFill>
+                  <a:srgbClr val="A26769"/>
+                </a:solidFill>
+                <a:latin typeface="Calibri" pitchFamily="34" charset="0"/>
+                <a:ea typeface="Calibri" pitchFamily="34" charset="-122"/>
+                <a:cs typeface="Calibri" pitchFamily="34" charset="-120"/>
+              </a:rPr>
+              <a:t>Frankfort IN</a:t>
+            </a:r>
+            <a:endParaRPr lang="en-US" sz="1000" dirty="0"/>
+          </a:p>
+        </p:txBody>
+      </p:sp>
+      <p:sp>
+        <p:nvSpPr>
+          <p:cNvPr id="20" name="Text 18"/>
+          <p:cNvSpPr/>
+          <p:nvPr/>
+        </p:nvSpPr>
+        <p:spPr>
+          <a:xfrm>
+            <a:off x="6400800" y="2798064"/>
+            <a:ext cx="2340864" cy="1005840"/>
+          </a:xfrm>
+          <a:prstGeom prst="rect">
+            <a:avLst/>
+          </a:prstGeom>
+          <a:noFill/>
+          <a:ln/>
+        </p:spPr>
+        <p:txBody>
+          <a:bodyPr wrap="square" lIns="0" tIns="0" rIns="0" bIns="0" rtlCol="0" anchor="ctr"/>
+          <a:lstStyle/>
+          <a:p>
+            <a:pPr indent="0" marL="0">
+              <a:lnSpc>
+                <a:spcPts val="1300"/>
+              </a:lnSpc>
+              <a:buNone/>
+            </a:pPr>
+            <a:r>
+              <a:rPr lang="en-US" sz="1050" dirty="0">
+                <a:solidFill>
+                  <a:srgbClr val="2B2B2B"/>
+                </a:solidFill>
+                <a:latin typeface="Calibri" pitchFamily="34" charset="0"/>
+                <a:ea typeface="Calibri" pitchFamily="34" charset="-122"/>
+                <a:cs typeface="Calibri" pitchFamily="34" charset="-120"/>
+              </a:rPr>
+              <a:t>EU-cleanest paperwork: ISO 13485 +</a:t>
+            </a:r>
+            <a:endParaRPr lang="en-US" sz="1050" dirty="0"/>
+          </a:p>
+          <a:p>
+            <a:pPr indent="0" marL="0">
+              <a:lnSpc>
+                <a:spcPts val="1300"/>
+              </a:lnSpc>
+              <a:buNone/>
+            </a:pPr>
+            <a:r>
+              <a:rPr lang="en-US" sz="1050" dirty="0">
+                <a:solidFill>
+                  <a:srgbClr val="2B2B2B"/>
+                </a:solidFill>
+                <a:latin typeface="Calibri" pitchFamily="34" charset="0"/>
+                <a:ea typeface="Calibri" pitchFamily="34" charset="-122"/>
+                <a:cs typeface="Calibri" pitchFamily="34" charset="-120"/>
+              </a:rPr>
+              <a:t>22442-2, USDA Class A, ante/post-mortem</a:t>
+            </a:r>
+            <a:endParaRPr lang="en-US" sz="1050" dirty="0"/>
+          </a:p>
+          <a:p>
+            <a:pPr indent="0" marL="0">
+              <a:lnSpc>
+                <a:spcPts val="1300"/>
+              </a:lnSpc>
+              <a:buNone/>
+            </a:pPr>
+            <a:r>
+              <a:rPr lang="en-US" sz="1050" dirty="0">
+                <a:solidFill>
+                  <a:srgbClr val="2B2B2B"/>
+                </a:solidFill>
+                <a:latin typeface="Calibri" pitchFamily="34" charset="0"/>
+                <a:ea typeface="Calibri" pitchFamily="34" charset="-122"/>
+                <a:cs typeface="Calibri" pitchFamily="34" charset="-120"/>
+              </a:rPr>
+              <a:t>inspection, animal-level traceability.</a:t>
+            </a:r>
+            <a:endParaRPr lang="en-US" sz="1050" dirty="0"/>
+          </a:p>
+        </p:txBody>
+      </p:sp>
+      <p:sp>
+        <p:nvSpPr>
+          <p:cNvPr id="21" name="Shape 19"/>
+          <p:cNvSpPr/>
+          <p:nvPr/>
+        </p:nvSpPr>
+        <p:spPr>
+          <a:xfrm>
+            <a:off x="9052560" y="2139696"/>
+            <a:ext cx="2633472" cy="1755648"/>
+          </a:xfrm>
+          <a:prstGeom prst="roundRect">
+            <a:avLst>
+              <a:gd name="adj" fmla="val 4167"/>
+            </a:avLst>
+          </a:prstGeom>
+          <a:solidFill>
+            <a:srgbClr val="F7F0F1"/>
+          </a:solidFill>
+          <a:ln w="12700">
+            <a:solidFill>
+              <a:srgbClr val="F7F0F1"/>
+            </a:solidFill>
+            <a:prstDash val="solid"/>
+          </a:ln>
+        </p:spPr>
+      </p:sp>
+      <p:sp>
+        <p:nvSpPr>
+          <p:cNvPr id="22" name="Shape 20"/>
+          <p:cNvSpPr/>
+          <p:nvPr/>
+        </p:nvSpPr>
+        <p:spPr>
+          <a:xfrm>
+            <a:off x="9235440" y="2304288"/>
+            <a:ext cx="182880" cy="182880"/>
+          </a:xfrm>
+          <a:prstGeom prst="ellipse">
+            <a:avLst/>
+          </a:prstGeom>
+          <a:solidFill>
+            <a:srgbClr val="2E7D4F"/>
+          </a:solidFill>
+          <a:ln w="12700">
+            <a:solidFill>
+              <a:srgbClr val="2E7D4F"/>
+            </a:solidFill>
+            <a:prstDash val="solid"/>
+          </a:ln>
+        </p:spPr>
+      </p:sp>
+      <p:sp>
+        <p:nvSpPr>
+          <p:cNvPr id="23" name="Text 21"/>
+          <p:cNvSpPr/>
+          <p:nvPr/>
+        </p:nvSpPr>
+        <p:spPr>
+          <a:xfrm>
+            <a:off x="9491472" y="2249424"/>
+            <a:ext cx="2103120" cy="292608"/>
+          </a:xfrm>
+          <a:prstGeom prst="rect">
+            <a:avLst/>
+          </a:prstGeom>
+          <a:noFill/>
+          <a:ln/>
+        </p:spPr>
+        <p:txBody>
+          <a:bodyPr wrap="square" lIns="0" tIns="0" rIns="0" bIns="0" rtlCol="0" anchor="ctr"/>
+          <a:lstStyle/>
+          <a:p>
+            <a:pPr indent="0" marL="0">
+              <a:buNone/>
+            </a:pPr>
+            <a:r>
+              <a:rPr lang="en-US" sz="1350" b="1" dirty="0">
+                <a:solidFill>
+                  <a:srgbClr val="6D2E46"/>
+                </a:solidFill>
+                <a:latin typeface="Cambria" pitchFamily="34" charset="0"/>
+                <a:ea typeface="Cambria" pitchFamily="34" charset="-122"/>
+                <a:cs typeface="Cambria" pitchFamily="34" charset="-120"/>
+              </a:rPr>
+              <a:t>Pioneer Packing</a:t>
+            </a:r>
+            <a:endParaRPr lang="en-US" sz="1350" dirty="0"/>
+          </a:p>
+        </p:txBody>
+      </p:sp>
+      <p:sp>
+        <p:nvSpPr>
+          <p:cNvPr id="24" name="Text 22"/>
+          <p:cNvSpPr/>
+          <p:nvPr/>
+        </p:nvSpPr>
+        <p:spPr>
+          <a:xfrm>
+            <a:off x="9235440" y="2560320"/>
+            <a:ext cx="2286000" cy="201168"/>
+          </a:xfrm>
+          <a:prstGeom prst="rect">
+            <a:avLst/>
+          </a:prstGeom>
+          <a:noFill/>
+          <a:ln/>
+        </p:spPr>
+        <p:txBody>
+          <a:bodyPr wrap="square" lIns="0" tIns="0" rIns="0" bIns="0" rtlCol="0" anchor="ctr"/>
+          <a:lstStyle/>
+          <a:p>
+            <a:pPr indent="0" marL="0">
+              <a:buNone/>
+            </a:pPr>
+            <a:r>
+              <a:rPr lang="en-US" sz="1000" i="1" dirty="0">
+                <a:solidFill>
+                  <a:srgbClr val="A26769"/>
+                </a:solidFill>
+                <a:latin typeface="Calibri" pitchFamily="34" charset="0"/>
+                <a:ea typeface="Calibri" pitchFamily="34" charset="-122"/>
+                <a:cs typeface="Calibri" pitchFamily="34" charset="-120"/>
+              </a:rPr>
+              <a:t>Bowling Green OH</a:t>
+            </a:r>
+            <a:endParaRPr lang="en-US" sz="1000" dirty="0"/>
+          </a:p>
+        </p:txBody>
+      </p:sp>
+      <p:sp>
+        <p:nvSpPr>
+          <p:cNvPr id="25" name="Text 23"/>
+          <p:cNvSpPr/>
+          <p:nvPr/>
+        </p:nvSpPr>
+        <p:spPr>
+          <a:xfrm>
+            <a:off x="9235440" y="2798064"/>
+            <a:ext cx="2340864" cy="1005840"/>
+          </a:xfrm>
+          <a:prstGeom prst="rect">
+            <a:avLst/>
+          </a:prstGeom>
+          <a:noFill/>
+          <a:ln/>
+        </p:spPr>
+        <p:txBody>
+          <a:bodyPr wrap="square" lIns="0" tIns="0" rIns="0" bIns="0" rtlCol="0" anchor="ctr"/>
+          <a:lstStyle/>
+          <a:p>
+            <a:pPr indent="0" marL="0">
+              <a:lnSpc>
+                <a:spcPts val="1300"/>
+              </a:lnSpc>
+              <a:buNone/>
+            </a:pPr>
+            <a:r>
+              <a:rPr lang="en-US" sz="1050" dirty="0">
+                <a:solidFill>
+                  <a:srgbClr val="2B2B2B"/>
+                </a:solidFill>
+                <a:latin typeface="Calibri" pitchFamily="34" charset="0"/>
+                <a:ea typeface="Calibri" pitchFamily="34" charset="-122"/>
+                <a:cs typeface="Calibri" pitchFamily="34" charset="-120"/>
+              </a:rPr>
+              <a:t>Sow/boar only. Runs PRE-RIGOR whole hog —</a:t>
+            </a:r>
+            <a:endParaRPr lang="en-US" sz="1050" dirty="0"/>
+          </a:p>
+          <a:p>
+            <a:pPr indent="0" marL="0">
+              <a:lnSpc>
+                <a:spcPts val="1300"/>
+              </a:lnSpc>
+              <a:buNone/>
+            </a:pPr>
+            <a:r>
+              <a:rPr lang="en-US" sz="1050" dirty="0">
+                <a:solidFill>
+                  <a:srgbClr val="2B2B2B"/>
+                </a:solidFill>
+                <a:latin typeface="Calibri" pitchFamily="34" charset="0"/>
+                <a:ea typeface="Calibri" pitchFamily="34" charset="-122"/>
+                <a:cs typeface="Calibri" pitchFamily="34" charset="-120"/>
+              </a:rPr>
+              <a:t>carcass off the floor in 1–1¾ hrs. The speed</a:t>
+            </a:r>
+            <a:endParaRPr lang="en-US" sz="1050" dirty="0"/>
+          </a:p>
+          <a:p>
+            <a:pPr indent="0" marL="0">
+              <a:lnSpc>
+                <a:spcPts val="1300"/>
+              </a:lnSpc>
+              <a:buNone/>
+            </a:pPr>
+            <a:r>
+              <a:rPr lang="en-US" sz="1050" dirty="0">
+                <a:solidFill>
+                  <a:srgbClr val="2B2B2B"/>
+                </a:solidFill>
+                <a:latin typeface="Calibri" pitchFamily="34" charset="0"/>
+                <a:ea typeface="Calibri" pitchFamily="34" charset="-122"/>
+                <a:cs typeface="Calibri" pitchFamily="34" charset="-120"/>
+              </a:rPr>
+              <a:t>discipline we need already exists.</a:t>
+            </a:r>
+            <a:endParaRPr lang="en-US" sz="1050" dirty="0"/>
+          </a:p>
+        </p:txBody>
+      </p:sp>
+      <p:sp>
+        <p:nvSpPr>
+          <p:cNvPr id="26" name="Text 24"/>
+          <p:cNvSpPr/>
+          <p:nvPr/>
+        </p:nvSpPr>
+        <p:spPr>
+          <a:xfrm>
+            <a:off x="548640" y="3968496"/>
+            <a:ext cx="11064240" cy="310896"/>
+          </a:xfrm>
+          <a:prstGeom prst="rect">
+            <a:avLst/>
+          </a:prstGeom>
+          <a:noFill/>
+          <a:ln/>
+        </p:spPr>
+        <p:txBody>
+          <a:bodyPr wrap="square" lIns="0" tIns="0" rIns="0" bIns="0" rtlCol="0" anchor="ctr"/>
+          <a:lstStyle/>
+          <a:p>
+            <a:pPr indent="0" marL="0">
+              <a:buNone/>
+            </a:pPr>
+            <a:r>
+              <a:rPr lang="en-US" sz="1100" i="1" dirty="0">
+                <a:solidFill>
+                  <a:srgbClr val="6E6E6E"/>
+                </a:solidFill>
+                <a:latin typeface="Calibri" pitchFamily="34" charset="0"/>
+                <a:ea typeface="Calibri" pitchFamily="34" charset="-122"/>
+                <a:cs typeface="Calibri" pitchFamily="34" charset="-120"/>
+              </a:rPr>
+              <a:t>Also organ-capable but a DIRECT COMPETITOR — Sustainable Swine Resources (Perry Way WI · Banner Creek KS). Read them; expect Model A access to be refused.</a:t>
+            </a:r>
+            <a:endParaRPr lang="en-US" sz="1100" dirty="0"/>
+          </a:p>
+        </p:txBody>
+      </p:sp>
+      <p:sp>
+        <p:nvSpPr>
+          <p:cNvPr id="27" name="Shape 25"/>
+          <p:cNvSpPr/>
+          <p:nvPr/>
+        </p:nvSpPr>
+        <p:spPr>
+          <a:xfrm>
+            <a:off x="548640" y="4352544"/>
+            <a:ext cx="5394960" cy="1773936"/>
+          </a:xfrm>
+          <a:prstGeom prst="roundRect">
+            <a:avLst>
+              <a:gd name="adj" fmla="val 4124"/>
+            </a:avLst>
+          </a:prstGeom>
+          <a:solidFill>
+            <a:srgbClr val="F6E4E4"/>
+          </a:solidFill>
+          <a:ln w="12700">
+            <a:solidFill>
+              <a:srgbClr val="F6E4E4"/>
+            </a:solidFill>
+            <a:prstDash val="solid"/>
+          </a:ln>
+        </p:spPr>
+      </p:sp>
+      <p:sp>
+        <p:nvSpPr>
+          <p:cNvPr id="28" name="Text 26"/>
+          <p:cNvSpPr/>
+          <p:nvPr/>
+        </p:nvSpPr>
+        <p:spPr>
+          <a:xfrm>
+            <a:off x="804672" y="4498848"/>
+            <a:ext cx="4937760" cy="274320"/>
+          </a:xfrm>
+          <a:prstGeom prst="rect">
+            <a:avLst/>
+          </a:prstGeom>
+          <a:noFill/>
+          <a:ln/>
+        </p:spPr>
+        <p:txBody>
+          <a:bodyPr wrap="square" lIns="0" tIns="0" rIns="0" bIns="0" rtlCol="0" anchor="ctr"/>
+          <a:lstStyle/>
+          <a:p>
+            <a:pPr indent="0" marL="0">
+              <a:buNone/>
+            </a:pPr>
+            <a:r>
+              <a:rPr lang="en-US" sz="1500" b="1" dirty="0">
+                <a:solidFill>
+                  <a:srgbClr val="8C2F39"/>
+                </a:solidFill>
+                <a:latin typeface="Cambria" pitchFamily="34" charset="0"/>
+                <a:ea typeface="Cambria" pitchFamily="34" charset="-122"/>
+                <a:cs typeface="Cambria" pitchFamily="34" charset="-120"/>
+              </a:rPr>
+              <a:t>Why Animal Biotech is an export risk</a:t>
+            </a:r>
+            <a:endParaRPr lang="en-US" sz="1500" dirty="0"/>
+          </a:p>
+        </p:txBody>
+      </p:sp>
+      <p:sp>
+        <p:nvSpPr>
+          <p:cNvPr id="29" name="Text 27"/>
+          <p:cNvSpPr/>
+          <p:nvPr/>
+        </p:nvSpPr>
+        <p:spPr>
+          <a:xfrm>
+            <a:off x="804672" y="4828032"/>
+            <a:ext cx="4892040" cy="1188720"/>
+          </a:xfrm>
+          <a:prstGeom prst="rect">
+            <a:avLst/>
+          </a:prstGeom>
+          <a:noFill/>
+          <a:ln/>
+        </p:spPr>
+        <p:txBody>
+          <a:bodyPr wrap="square" lIns="0" tIns="0" rIns="0" bIns="0" rtlCol="0" anchor="ctr"/>
+          <a:lstStyle/>
+          <a:p>
+            <a:pPr marL="342900" indent="-342900">
+              <a:spcAft>
+                <a:spcPts val="500"/>
+              </a:spcAft>
+              <a:buSzPct val="100000"/>
+              <a:buChar char="•"/>
+            </a:pPr>
+            <a:r>
+              <a:rPr lang="en-US" sz="1100" dirty="0">
+                <a:solidFill>
+                  <a:srgbClr val="6B2028"/>
+                </a:solidFill>
+                <a:latin typeface="Calibri" pitchFamily="34" charset="0"/>
+                <a:ea typeface="Calibri" pitchFamily="34" charset="-122"/>
+                <a:cs typeface="Calibri" pitchFamily="34" charset="-120"/>
+              </a:rPr>
+              <a:t>They say tissue is “harvested at USDA federally inspected abattoirs” — but never name which.</a:t>
+            </a:r>
+            <a:endParaRPr lang="en-US" sz="1100" dirty="0"/>
+          </a:p>
+          <a:p>
+            <a:pPr marL="342900" indent="-342900">
+              <a:spcAft>
+                <a:spcPts val="500"/>
+              </a:spcAft>
+              <a:buSzPct val="100000"/>
+              <a:buChar char="•"/>
+            </a:pPr>
+            <a:r>
+              <a:rPr lang="en-US" sz="1100" dirty="0">
+                <a:solidFill>
+                  <a:srgbClr val="6B2028"/>
+                </a:solidFill>
+                <a:latin typeface="Calibri" pitchFamily="34" charset="0"/>
+                <a:ea typeface="Calibri" pitchFamily="34" charset="-122"/>
+                <a:cs typeface="Calibri" pitchFamily="34" charset="-120"/>
+              </a:rPr>
+              <a:t>EU Cat 3 requires the ORIGIN plant to be APHIS-approved and on the EU TRACES list.</a:t>
+            </a:r>
+            <a:endParaRPr lang="en-US" sz="1100" dirty="0"/>
+          </a:p>
+          <a:p>
+            <a:pPr marL="342900" indent="-342900">
+              <a:spcAft>
+                <a:spcPts val="500"/>
+              </a:spcAft>
+              <a:buSzPct val="100000"/>
+              <a:buChar char="•"/>
+            </a:pPr>
+            <a:r>
+              <a:rPr lang="en-US" sz="1100" dirty="0">
+                <a:solidFill>
+                  <a:srgbClr val="6B2028"/>
+                </a:solidFill>
+                <a:latin typeface="Calibri" pitchFamily="34" charset="0"/>
+                <a:ea typeface="Calibri" pitchFamily="34" charset="-122"/>
+                <a:cs typeface="Calibri" pitchFamily="34" charset="-120"/>
+              </a:rPr>
+              <a:t>No published ISO 13485 / 22442, no TRACES listing, no stated export-document support.</a:t>
+            </a:r>
+            <a:endParaRPr lang="en-US" sz="1100" dirty="0"/>
+          </a:p>
+        </p:txBody>
+      </p:sp>
+      <p:sp>
+        <p:nvSpPr>
+          <p:cNvPr id="30" name="Text 28"/>
+          <p:cNvSpPr/>
+          <p:nvPr/>
+        </p:nvSpPr>
+        <p:spPr>
+          <a:xfrm>
+            <a:off x="804672" y="5833872"/>
+            <a:ext cx="4892040" cy="237744"/>
+          </a:xfrm>
+          <a:prstGeom prst="rect">
+            <a:avLst/>
+          </a:prstGeom>
+          <a:noFill/>
+          <a:ln/>
+        </p:spPr>
+        <p:txBody>
+          <a:bodyPr wrap="square" lIns="0" tIns="0" rIns="0" bIns="0" rtlCol="0" anchor="ctr"/>
+          <a:lstStyle/>
+          <a:p>
+            <a:pPr indent="0" marL="0">
+              <a:buNone/>
+            </a:pPr>
+            <a:r>
+              <a:rPr lang="en-US" sz="1150" b="1" i="1" dirty="0">
+                <a:solidFill>
+                  <a:srgbClr val="8C2F39"/>
+                </a:solidFill>
+                <a:latin typeface="Calibri" pitchFamily="34" charset="0"/>
+                <a:ea typeface="Calibri" pitchFamily="34" charset="-122"/>
+                <a:cs typeface="Calibri" pitchFamily="34" charset="-120"/>
+              </a:rPr>
+              <a:t>You cannot certify what you cannot trace.</a:t>
+            </a:r>
+            <a:endParaRPr lang="en-US" sz="1150" dirty="0"/>
+          </a:p>
+        </p:txBody>
+      </p:sp>
+      <p:sp>
+        <p:nvSpPr>
+          <p:cNvPr id="31" name="Shape 29"/>
+          <p:cNvSpPr/>
+          <p:nvPr/>
+        </p:nvSpPr>
+        <p:spPr>
+          <a:xfrm>
+            <a:off x="6236208" y="4352544"/>
+            <a:ext cx="5376672" cy="1773936"/>
+          </a:xfrm>
+          <a:prstGeom prst="roundRect">
+            <a:avLst>
+              <a:gd name="adj" fmla="val 4124"/>
+            </a:avLst>
+          </a:prstGeom>
+          <a:solidFill>
+            <a:srgbClr val="6D2E46"/>
+          </a:solidFill>
+          <a:ln w="12700">
+            <a:solidFill>
+              <a:srgbClr val="6D2E46"/>
+            </a:solidFill>
+            <a:prstDash val="solid"/>
+          </a:ln>
+        </p:spPr>
+      </p:sp>
+      <p:sp>
+        <p:nvSpPr>
+          <p:cNvPr id="32" name="Text 30"/>
+          <p:cNvSpPr/>
+          <p:nvPr/>
+        </p:nvSpPr>
+        <p:spPr>
+          <a:xfrm>
+            <a:off x="6492240" y="4498848"/>
+            <a:ext cx="4892040" cy="274320"/>
+          </a:xfrm>
+          <a:prstGeom prst="rect">
+            <a:avLst/>
+          </a:prstGeom>
+          <a:noFill/>
+          <a:ln/>
+        </p:spPr>
+        <p:txBody>
+          <a:bodyPr wrap="square" lIns="0" tIns="0" rIns="0" bIns="0" rtlCol="0" anchor="ctr"/>
+          <a:lstStyle/>
+          <a:p>
+            <a:pPr indent="0" marL="0">
+              <a:buNone/>
+            </a:pPr>
+            <a:r>
+              <a:rPr lang="en-US" sz="1500" b="1" dirty="0">
+                <a:solidFill>
+                  <a:srgbClr val="FFFFFF"/>
+                </a:solidFill>
+                <a:latin typeface="Cambria" pitchFamily="34" charset="0"/>
+                <a:ea typeface="Cambria" pitchFamily="34" charset="-122"/>
+                <a:cs typeface="Cambria" pitchFamily="34" charset="-120"/>
+              </a:rPr>
+              <a:t>What to ask them for — and how to judge it</a:t>
+            </a:r>
+            <a:endParaRPr lang="en-US" sz="1500" dirty="0"/>
+          </a:p>
+        </p:txBody>
+      </p:sp>
+      <p:sp>
+        <p:nvSpPr>
+          <p:cNvPr id="33" name="Text 31"/>
+          <p:cNvSpPr/>
+          <p:nvPr/>
+        </p:nvSpPr>
+        <p:spPr>
+          <a:xfrm>
+            <a:off x="6492240" y="4828032"/>
+            <a:ext cx="4846320" cy="1188720"/>
+          </a:xfrm>
+          <a:prstGeom prst="rect">
+            <a:avLst/>
+          </a:prstGeom>
+          <a:noFill/>
+          <a:ln/>
+        </p:spPr>
+        <p:txBody>
+          <a:bodyPr wrap="square" lIns="0" tIns="0" rIns="0" bIns="0" rtlCol="0" anchor="ctr"/>
+          <a:lstStyle/>
+          <a:p>
+            <a:pPr marL="342900" indent="-342900">
+              <a:spcAft>
+                <a:spcPts val="500"/>
+              </a:spcAft>
+              <a:buSzPct val="100000"/>
+              <a:buChar char="•"/>
+            </a:pPr>
+            <a:r>
+              <a:rPr lang="en-US" sz="1100" dirty="0">
+                <a:solidFill>
+                  <a:srgbClr val="ECE2D0"/>
+                </a:solidFill>
+                <a:latin typeface="Calibri" pitchFamily="34" charset="0"/>
+                <a:ea typeface="Calibri" pitchFamily="34" charset="-122"/>
+                <a:cs typeface="Calibri" pitchFamily="34" charset="-120"/>
+              </a:rPr>
+              <a:t>Ask each green-lit supplier for a PRICE PER BLOCK, not per organ.</a:t>
+            </a:r>
+            <a:endParaRPr lang="en-US" sz="1100" dirty="0"/>
+          </a:p>
+          <a:p>
+            <a:pPr marL="342900" indent="-342900">
+              <a:spcAft>
+                <a:spcPts val="500"/>
+              </a:spcAft>
+              <a:buSzPct val="100000"/>
+              <a:buChar char="•"/>
+            </a:pPr>
+            <a:r>
+              <a:rPr lang="en-US" sz="1100" dirty="0">
+                <a:solidFill>
+                  <a:srgbClr val="ECE2D0"/>
+                </a:solidFill>
+                <a:latin typeface="Calibri" pitchFamily="34" charset="0"/>
+                <a:ea typeface="Calibri" pitchFamily="34" charset="-122"/>
+                <a:cs typeface="Calibri" pitchFamily="34" charset="-120"/>
+              </a:rPr>
+              <a:t>Compare it against our TTLC — total true landed cost: harvest labour, line rental, plant fee, inspector time, transport, cold chain and holding, all in.</a:t>
+            </a:r>
+            <a:endParaRPr lang="en-US" sz="1100" dirty="0"/>
+          </a:p>
+          <a:p>
+            <a:pPr marL="342900" indent="-342900">
+              <a:spcAft>
+                <a:spcPts val="500"/>
+              </a:spcAft>
+              <a:buSzPct val="100000"/>
+              <a:buChar char="•"/>
+            </a:pPr>
+            <a:r>
+              <a:rPr lang="en-US" sz="1100" dirty="0">
+                <a:solidFill>
+                  <a:srgbClr val="ECE2D0"/>
+                </a:solidFill>
+                <a:latin typeface="Calibri" pitchFamily="34" charset="0"/>
+                <a:ea typeface="Calibri" pitchFamily="34" charset="-122"/>
+                <a:cs typeface="Calibri" pitchFamily="34" charset="-120"/>
+              </a:rPr>
+              <a:t>Acquisition price alone flatters buying. TTLC is the only fair comparison.</a:t>
+            </a:r>
+            <a:endParaRPr lang="en-US" sz="1100" dirty="0"/>
+          </a:p>
+        </p:txBody>
+      </p:sp>
+      <p:sp>
+        <p:nvSpPr>
+          <p:cNvPr id="34" name="Text 32"/>
+          <p:cNvSpPr/>
+          <p:nvPr/>
+        </p:nvSpPr>
+        <p:spPr>
+          <a:xfrm>
+            <a:off x="6492240" y="5852160"/>
+            <a:ext cx="4846320" cy="237744"/>
+          </a:xfrm>
+          <a:prstGeom prst="rect">
+            <a:avLst/>
+          </a:prstGeom>
+          <a:noFill/>
+          <a:ln/>
+        </p:spPr>
+        <p:txBody>
+          <a:bodyPr wrap="square" lIns="0" tIns="0" rIns="0" bIns="0" rtlCol="0" anchor="ctr"/>
+          <a:lstStyle/>
+          <a:p>
+            <a:pPr indent="0" marL="0">
+              <a:buNone/>
+            </a:pPr>
+            <a:r>
+              <a:rPr lang="en-US" sz="1100" i="1" dirty="0">
+                <a:solidFill>
+                  <a:srgbClr val="A26769"/>
+                </a:solidFill>
+                <a:latin typeface="Calibri" pitchFamily="34" charset="0"/>
+                <a:ea typeface="Calibri" pitchFamily="34" charset="-122"/>
+                <a:cs typeface="Calibri" pitchFamily="34" charset="-120"/>
+              </a:rPr>
+              <a:t>Their quotes feed straight into the TCO Calculator tab.</a:t>
+            </a:r>
+            <a:endParaRPr lang="en-US" sz="1100" dirty="0"/>
+          </a:p>
+        </p:txBody>
+      </p:sp>
+    </p:spTree>
+  </p:cSld>
+  <p:clrMapOvr>
+    <a:masterClrMapping/>
+  </p:clrMapOvr>
+</p:sld>
+</file>
+
+<file path=ppt/slides/slide7.xml><?xml version="1.0" encoding="utf-8"?>
+<p:sld xmlns:a="http://schemas.openxmlformats.org/drawingml/2006/main" xmlns:r="http://schemas.openxmlformats.org/officeDocument/2006/relationships" xmlns:p="http://schemas.openxmlformats.org/presentationml/2006/main">
+  <p:cSld name="Slide 7">
+    <p:spTree>
+      <p:nvGrpSpPr>
+        <p:cNvPr id="1" name=""/>
+        <p:cNvGrpSpPr/>
+        <p:nvPr/>
+      </p:nvGrpSpPr>
+      <p:grpSpPr>
+        <a:xfrm>
+          <a:off x="0" y="0"/>
+          <a:ext cx="0" cy="0"/>
+          <a:chOff x="0" y="0"/>
+          <a:chExt cx="0" cy="0"/>
+        </a:xfrm>
+      </p:grpSpPr>
+      <p:sp>
+        <p:nvSpPr>
+          <p:cNvPr id="2" name="Text 0"/>
+          <p:cNvSpPr/>
+          <p:nvPr/>
+        </p:nvSpPr>
+        <p:spPr>
+          <a:xfrm>
+            <a:off x="548640" y="384048"/>
+            <a:ext cx="7315200" cy="274320"/>
+          </a:xfrm>
+          <a:prstGeom prst="rect">
+            <a:avLst/>
+          </a:prstGeom>
+          <a:noFill/>
+          <a:ln/>
+        </p:spPr>
+        <p:txBody>
+          <a:bodyPr wrap="square" lIns="0" tIns="0" rIns="0" bIns="0" rtlCol="0" anchor="ctr"/>
+          <a:lstStyle/>
+          <a:p>
+            <a:pPr indent="0" marL="0">
+              <a:buNone/>
+            </a:pPr>
+            <a:r>
+              <a:rPr lang="en-US" sz="1200" b="1" spc="200" kern="0" dirty="0">
+                <a:solidFill>
+                  <a:srgbClr val="A26769"/>
+                </a:solidFill>
+                <a:latin typeface="Calibri" pitchFamily="34" charset="0"/>
+                <a:ea typeface="Calibri" pitchFamily="34" charset="-122"/>
+                <a:cs typeface="Calibri" pitchFamily="34" charset="-120"/>
+              </a:rPr>
               <a:t>5 · NEXT STEPS</a:t>
             </a:r>
             <a:endParaRPr lang="en-US" sz="1200" dirty="0"/>

--- a/Tissue Supplier Research/Supplier_Strategy_Meeting.pptx
+++ b/Tissue Supplier Research/Supplier_Strategy_Meeting.pptx
@@ -3292,11 +3292,11 @@
         <p:spPr>
           <a:xfrm>
             <a:off x="548640" y="2761488"/>
-            <a:ext cx="5349240" cy="2286000"/>
+            <a:ext cx="5349240" cy="2395728"/>
           </a:xfrm>
           <a:prstGeom prst="roundRect">
             <a:avLst>
-              <a:gd name="adj" fmla="val 3200"/>
+              <a:gd name="adj" fmla="val 3053"/>
             </a:avLst>
           </a:prstGeom>
           <a:solidFill>
@@ -3421,8 +3421,8 @@
         </p:nvSpPr>
         <p:spPr>
           <a:xfrm>
-            <a:off x="932688" y="3675888"/>
-            <a:ext cx="4617720" cy="1188720"/>
+            <a:off x="932688" y="3621024"/>
+            <a:ext cx="4617720" cy="1426464"/>
           </a:xfrm>
           <a:prstGeom prst="rect">
             <a:avLst/>
@@ -3436,12 +3436,12 @@
           <a:p>
             <a:pPr indent="0" marL="0">
               <a:lnSpc>
-                <a:spcPts val="2000"/>
+                <a:spcPts val="1800"/>
               </a:lnSpc>
               <a:buNone/>
             </a:pPr>
             <a:r>
-              <a:rPr lang="en-US" sz="1400" dirty="0">
+              <a:rPr lang="en-US" sz="1300" dirty="0">
                 <a:solidFill>
                   <a:srgbClr val="2B2B2B"/>
                 </a:solidFill>
@@ -3451,17 +3451,17 @@
               </a:rPr>
               <a:t>What kind of supplier are we actually buying?</a:t>
             </a:r>
-            <a:endParaRPr lang="en-US" sz="1400" dirty="0"/>
+            <a:endParaRPr lang="en-US" sz="1300" dirty="0"/>
           </a:p>
           <a:p>
             <a:pPr indent="0" marL="0">
               <a:lnSpc>
-                <a:spcPts val="2000"/>
+                <a:spcPts val="1800"/>
               </a:lnSpc>
               <a:buNone/>
             </a:pPr>
             <a:r>
-              <a:rPr lang="en-US" sz="1400" dirty="0">
+              <a:rPr lang="en-US" sz="1300" dirty="0">
                 <a:solidFill>
                   <a:srgbClr val="2B2B2B"/>
                 </a:solidFill>
@@ -3471,17 +3471,17 @@
               </a:rPr>
               <a:t>Size tier · certifications · welfare culture ·</a:t>
             </a:r>
-            <a:endParaRPr lang="en-US" sz="1400" dirty="0"/>
+            <a:endParaRPr lang="en-US" sz="1300" dirty="0"/>
           </a:p>
           <a:p>
             <a:pPr indent="0" marL="0">
               <a:lnSpc>
-                <a:spcPts val="2000"/>
+                <a:spcPts val="1800"/>
               </a:lnSpc>
               <a:buNone/>
             </a:pPr>
             <a:r>
-              <a:rPr lang="en-US" sz="1400" dirty="0">
+              <a:rPr lang="en-US" sz="1300" dirty="0">
                 <a:solidFill>
                   <a:srgbClr val="2B2B2B"/>
                 </a:solidFill>
@@ -3489,9 +3489,49 @@
                 <a:ea typeface="Calibri" pitchFamily="34" charset="-122"/>
                 <a:cs typeface="Calibri" pitchFamily="34" charset="-120"/>
               </a:rPr>
-              <a:t>Model A or Model B · which regions.</a:t>
-            </a:r>
-            <a:endParaRPr lang="en-US" sz="1400" dirty="0"/>
+              <a:t>Model A or Model B · which regions ·</a:t>
+            </a:r>
+            <a:endParaRPr lang="en-US" sz="1300" dirty="0"/>
+          </a:p>
+          <a:p>
+            <a:pPr indent="0" marL="0">
+              <a:lnSpc>
+                <a:spcPts val="1800"/>
+              </a:lnSpc>
+              <a:buNone/>
+            </a:pPr>
+            <a:r>
+              <a:rPr lang="en-US" sz="1300" dirty="0">
+                <a:solidFill>
+                  <a:srgbClr val="2B2B2B"/>
+                </a:solidFill>
+                <a:latin typeface="Calibri" pitchFamily="34" charset="0"/>
+                <a:ea typeface="Calibri" pitchFamily="34" charset="-122"/>
+                <a:cs typeface="Calibri" pitchFamily="34" charset="-120"/>
+              </a:rPr>
+              <a:t>and organ-direct suppliers (Smithfield BioScience,</a:t>
+            </a:r>
+            <a:endParaRPr lang="en-US" sz="1300" dirty="0"/>
+          </a:p>
+          <a:p>
+            <a:pPr indent="0" marL="0">
+              <a:lnSpc>
+                <a:spcPts val="1800"/>
+              </a:lnSpc>
+              <a:buNone/>
+            </a:pPr>
+            <a:r>
+              <a:rPr lang="en-US" sz="1300" dirty="0">
+                <a:solidFill>
+                  <a:srgbClr val="2B2B2B"/>
+                </a:solidFill>
+                <a:latin typeface="Calibri" pitchFamily="34" charset="0"/>
+                <a:ea typeface="Calibri" pitchFamily="34" charset="-122"/>
+                <a:cs typeface="Calibri" pitchFamily="34" charset="-120"/>
+              </a:rPr>
+              <a:t>Midwest Research Swine, Tissue Source).</a:t>
+            </a:r>
+            <a:endParaRPr lang="en-US" sz="1300" dirty="0"/>
           </a:p>
         </p:txBody>
       </p:sp>
@@ -3504,11 +3544,11 @@
         <p:spPr>
           <a:xfrm>
             <a:off x="6263640" y="2761488"/>
-            <a:ext cx="5349240" cy="2286000"/>
+            <a:ext cx="5349240" cy="2395728"/>
           </a:xfrm>
           <a:prstGeom prst="roundRect">
             <a:avLst>
-              <a:gd name="adj" fmla="val 3200"/>
+              <a:gd name="adj" fmla="val 3053"/>
             </a:avLst>
           </a:prstGeom>
           <a:solidFill>
@@ -3633,8 +3673,8 @@
         </p:nvSpPr>
         <p:spPr>
           <a:xfrm>
-            <a:off x="6647688" y="3675888"/>
-            <a:ext cx="4617720" cy="1188720"/>
+            <a:off x="6647688" y="3621024"/>
+            <a:ext cx="4617720" cy="1426464"/>
           </a:xfrm>
           <a:prstGeom prst="rect">
             <a:avLst/>
@@ -3648,12 +3688,12 @@
           <a:p>
             <a:pPr indent="0" marL="0">
               <a:lnSpc>
-                <a:spcPts val="2000"/>
+                <a:spcPts val="1800"/>
               </a:lnSpc>
               <a:buNone/>
             </a:pPr>
             <a:r>
-              <a:rPr lang="en-US" sz="1400" dirty="0">
+              <a:rPr lang="en-US" sz="1300" dirty="0">
                 <a:solidFill>
                   <a:srgbClr val="2B2B2B"/>
                 </a:solidFill>
@@ -3663,17 +3703,17 @@
               </a:rPr>
               <a:t>How we go from Tissue Supplier LEAD to</a:t>
             </a:r>
-            <a:endParaRPr lang="en-US" sz="1400" dirty="0"/>
+            <a:endParaRPr lang="en-US" sz="1300" dirty="0"/>
           </a:p>
           <a:p>
             <a:pPr indent="0" marL="0">
               <a:lnSpc>
-                <a:spcPts val="2000"/>
+                <a:spcPts val="1800"/>
               </a:lnSpc>
               <a:buNone/>
             </a:pPr>
             <a:r>
-              <a:rPr lang="en-US" sz="1400" dirty="0">
+              <a:rPr lang="en-US" sz="1300" dirty="0">
                 <a:solidFill>
                   <a:srgbClr val="2B2B2B"/>
                 </a:solidFill>
@@ -3683,17 +3723,17 @@
               </a:rPr>
               <a:t>Tissue Supplier ONBOARDED — the steps, the</a:t>
             </a:r>
-            <a:endParaRPr lang="en-US" sz="1400" dirty="0"/>
+            <a:endParaRPr lang="en-US" sz="1300" dirty="0"/>
           </a:p>
           <a:p>
             <a:pPr indent="0" marL="0">
               <a:lnSpc>
-                <a:spcPts val="2000"/>
+                <a:spcPts val="1800"/>
               </a:lnSpc>
               <a:buNone/>
             </a:pPr>
             <a:r>
-              <a:rPr lang="en-US" sz="1400" dirty="0">
+              <a:rPr lang="en-US" sz="1300" dirty="0">
                 <a:solidFill>
                   <a:srgbClr val="2B2B2B"/>
                 </a:solidFill>
@@ -3703,7 +3743,7 @@
               </a:rPr>
               <a:t>gates, and who owns each one.</a:t>
             </a:r>
-            <a:endParaRPr lang="en-US" sz="1400" dirty="0"/>
+            <a:endParaRPr lang="en-US" sz="1300" dirty="0"/>
           </a:p>
         </p:txBody>
       </p:sp>
@@ -3715,7 +3755,7 @@
         </p:nvSpPr>
         <p:spPr>
           <a:xfrm>
-            <a:off x="548640" y="5349240"/>
+            <a:off x="548640" y="5468112"/>
             <a:ext cx="11064240" cy="320040"/>
           </a:xfrm>
           <a:prstGeom prst="rect">
@@ -6283,11 +6323,11 @@
         <p:spPr>
           <a:xfrm>
             <a:off x="548640" y="4956048"/>
-            <a:ext cx="11064240" cy="786384"/>
+            <a:ext cx="11064240" cy="932688"/>
           </a:xfrm>
           <a:prstGeom prst="roundRect">
             <a:avLst>
-              <a:gd name="adj" fmla="val 9302"/>
+              <a:gd name="adj" fmla="val 7843"/>
             </a:avLst>
           </a:prstGeom>
           <a:solidFill>
@@ -6309,24 +6349,24 @@
         </p:nvSpPr>
         <p:spPr>
           <a:xfrm>
-            <a:off x="822960" y="4956048"/>
-            <a:ext cx="10515600" cy="786384"/>
-          </a:xfrm>
-          <a:prstGeom prst="rect">
-            <a:avLst/>
-          </a:prstGeom>
-          <a:noFill/>
-          <a:ln/>
-        </p:spPr>
-        <p:txBody>
-          <a:bodyPr wrap="square" lIns="0" tIns="0" rIns="0" bIns="0" rtlCol="0" anchor="ctr"/>
-          <a:lstStyle/>
-          <a:p>
-            <a:pPr indent="0" marL="0">
-              <a:buNone/>
-            </a:pPr>
-            <a:r>
-              <a:rPr lang="en-US" sz="1350" b="1" dirty="0">
+            <a:off x="822960" y="5084064"/>
+            <a:ext cx="4572000" cy="274320"/>
+          </a:xfrm>
+          <a:prstGeom prst="rect">
+            <a:avLst/>
+          </a:prstGeom>
+          <a:noFill/>
+          <a:ln/>
+        </p:spPr>
+        <p:txBody>
+          <a:bodyPr wrap="square" lIns="0" tIns="0" rIns="0" bIns="0" rtlCol="0" anchor="ctr"/>
+          <a:lstStyle/>
+          <a:p>
+            <a:pPr indent="0" marL="0">
+              <a:buNone/>
+            </a:pPr>
+            <a:r>
+              <a:rPr lang="en-US" sz="1200" b="1" dirty="0">
                 <a:solidFill>
                   <a:srgbClr val="8C2F39"/>
                 </a:solidFill>
@@ -6334,9 +6374,9 @@
                 <a:ea typeface="Calibri" pitchFamily="34" charset="-122"/>
                 <a:cs typeface="Calibri" pitchFamily="34" charset="-120"/>
               </a:rPr>
-              <a:t>Two lanes, not one:   DOMESTIC — Nahunta anchors it, state-inspected is fine.    EU-BOUND — federally-inspected plant, APHIS-listed, no exceptions.</a:t>
-            </a:r>
-            <a:endParaRPr lang="en-US" sz="1350" dirty="0"/>
+              <a:t>Discussion Notes:</a:t>
+            </a:r>
+            <a:endParaRPr lang="en-US" sz="1200" dirty="0"/>
           </a:p>
         </p:txBody>
       </p:sp>
@@ -6348,7 +6388,7 @@
         </p:nvSpPr>
         <p:spPr>
           <a:xfrm>
-            <a:off x="548640" y="5907024"/>
+            <a:off x="548640" y="6035040"/>
             <a:ext cx="11064240" cy="320040"/>
           </a:xfrm>
           <a:prstGeom prst="rect">
@@ -9328,104 +9368,26 @@
       </p:sp>
       <p:sp>
         <p:nvSpPr>
-          <p:cNvPr id="41" name="Text 39"/>
-          <p:cNvSpPr/>
-          <p:nvPr/>
-        </p:nvSpPr>
-        <p:spPr>
-          <a:xfrm>
-            <a:off x="548640" y="4315968"/>
-            <a:ext cx="11064240" cy="292608"/>
-          </a:xfrm>
-          <a:prstGeom prst="rect">
-            <a:avLst/>
-          </a:prstGeom>
-          <a:noFill/>
-          <a:ln/>
-        </p:spPr>
-        <p:txBody>
-          <a:bodyPr wrap="square" lIns="0" tIns="0" rIns="0" bIns="0" rtlCol="0" anchor="ctr"/>
-          <a:lstStyle/>
-          <a:p>
-            <a:pPr indent="0" marL="0">
-              <a:buNone/>
-            </a:pPr>
-            <a:r>
-              <a:rPr lang="en-US" sz="1250" i="1" dirty="0">
-                <a:solidFill>
-                  <a:srgbClr val="6E6E6E"/>
-                </a:solidFill>
-                <a:latin typeface="Calibri" pitchFamily="34" charset="0"/>
-                <a:ea typeface="Calibri" pitchFamily="34" charset="-122"/>
-                <a:cs typeface="Calibri" pitchFamily="34" charset="-120"/>
-              </a:rPr>
-              <a:t>Each arrow is a GATE — we only spend the next step's effort if the previous one passed.</a:t>
-            </a:r>
-            <a:endParaRPr lang="en-US" sz="1250" dirty="0"/>
-          </a:p>
-        </p:txBody>
-      </p:sp>
-      <p:sp>
-        <p:nvSpPr>
-          <p:cNvPr id="42" name="Text 40"/>
-          <p:cNvSpPr/>
-          <p:nvPr/>
-        </p:nvSpPr>
-        <p:spPr>
-          <a:xfrm>
-            <a:off x="548640" y="4809744"/>
-            <a:ext cx="7315200" cy="274320"/>
-          </a:xfrm>
-          <a:prstGeom prst="rect">
-            <a:avLst/>
-          </a:prstGeom>
-          <a:noFill/>
-          <a:ln/>
-        </p:spPr>
-        <p:txBody>
-          <a:bodyPr wrap="square" lIns="0" tIns="0" rIns="0" bIns="0" rtlCol="0" anchor="ctr"/>
-          <a:lstStyle/>
-          <a:p>
-            <a:pPr indent="0" marL="0">
-              <a:buNone/>
-            </a:pPr>
-            <a:r>
-              <a:rPr lang="en-US" sz="1200" b="1" spc="150" kern="0" dirty="0">
-                <a:solidFill>
-                  <a:srgbClr val="A26769"/>
-                </a:solidFill>
-                <a:latin typeface="Calibri" pitchFamily="34" charset="0"/>
-                <a:ea typeface="Calibri" pitchFamily="34" charset="-122"/>
-                <a:cs typeface="Calibri" pitchFamily="34" charset="-120"/>
-              </a:rPr>
-              <a:t>IMMEDIATE ACTIONS</a:t>
-            </a:r>
-            <a:endParaRPr lang="en-US" sz="1200" dirty="0"/>
-          </a:p>
-        </p:txBody>
-      </p:sp>
-      <p:sp>
-        <p:nvSpPr>
-          <p:cNvPr id="43" name="Shape 41"/>
-          <p:cNvSpPr/>
-          <p:nvPr/>
-        </p:nvSpPr>
-        <p:spPr>
-          <a:xfrm>
-            <a:off x="548640" y="5138928"/>
-            <a:ext cx="3566160" cy="822960"/>
+          <p:cNvPr id="41" name="Shape 39"/>
+          <p:cNvSpPr/>
+          <p:nvPr/>
+        </p:nvSpPr>
+        <p:spPr>
+          <a:xfrm>
+            <a:off x="548640" y="4443984"/>
+            <a:ext cx="11064240" cy="1170432"/>
           </a:xfrm>
           <a:prstGeom prst="roundRect">
             <a:avLst>
-              <a:gd name="adj" fmla="val 8889"/>
+              <a:gd name="adj" fmla="val 6250"/>
             </a:avLst>
           </a:prstGeom>
           <a:solidFill>
-            <a:srgbClr val="F7F0F1"/>
+            <a:srgbClr val="F6E4E4"/>
           </a:solidFill>
           <a:ln w="12700">
             <a:solidFill>
-              <a:srgbClr val="F7F0F1"/>
+              <a:srgbClr val="F6E4E4"/>
             </a:solidFill>
             <a:prstDash val="solid"/>
           </a:ln>
@@ -9433,328 +9395,79 @@
       </p:sp>
       <p:sp>
         <p:nvSpPr>
-          <p:cNvPr id="44" name="Text 42"/>
-          <p:cNvSpPr/>
-          <p:nvPr/>
-        </p:nvSpPr>
-        <p:spPr>
-          <a:xfrm>
-            <a:off x="749808" y="5230368"/>
-            <a:ext cx="3200400" cy="274320"/>
-          </a:xfrm>
-          <a:prstGeom prst="rect">
-            <a:avLst/>
-          </a:prstGeom>
-          <a:noFill/>
-          <a:ln/>
-        </p:spPr>
-        <p:txBody>
-          <a:bodyPr wrap="square" lIns="0" tIns="0" rIns="0" bIns="0" rtlCol="0" anchor="ctr"/>
-          <a:lstStyle/>
-          <a:p>
-            <a:pPr indent="0" marL="0">
-              <a:buNone/>
-            </a:pPr>
-            <a:r>
-              <a:rPr lang="en-US" sz="1350" b="1" dirty="0">
+          <p:cNvPr id="42" name="Text 40"/>
+          <p:cNvSpPr/>
+          <p:nvPr/>
+        </p:nvSpPr>
+        <p:spPr>
+          <a:xfrm>
+            <a:off x="822960" y="4572000"/>
+            <a:ext cx="4572000" cy="274320"/>
+          </a:xfrm>
+          <a:prstGeom prst="rect">
+            <a:avLst/>
+          </a:prstGeom>
+          <a:noFill/>
+          <a:ln/>
+        </p:spPr>
+        <p:txBody>
+          <a:bodyPr wrap="square" lIns="0" tIns="0" rIns="0" bIns="0" rtlCol="0" anchor="ctr"/>
+          <a:lstStyle/>
+          <a:p>
+            <a:pPr indent="0" marL="0">
+              <a:buNone/>
+            </a:pPr>
+            <a:r>
+              <a:rPr lang="en-US" sz="1200" b="1" dirty="0">
+                <a:solidFill>
+                  <a:srgbClr val="8C2F39"/>
+                </a:solidFill>
+                <a:latin typeface="Calibri" pitchFamily="34" charset="0"/>
+                <a:ea typeface="Calibri" pitchFamily="34" charset="-122"/>
+                <a:cs typeface="Calibri" pitchFamily="34" charset="-120"/>
+              </a:rPr>
+              <a:t>Discussion Notes:</a:t>
+            </a:r>
+            <a:endParaRPr lang="en-US" sz="1200" dirty="0"/>
+          </a:p>
+        </p:txBody>
+      </p:sp>
+      <p:sp>
+        <p:nvSpPr>
+          <p:cNvPr id="43" name="Text 41"/>
+          <p:cNvSpPr/>
+          <p:nvPr/>
+        </p:nvSpPr>
+        <p:spPr>
+          <a:xfrm>
+            <a:off x="548640" y="5760720"/>
+            <a:ext cx="11064240" cy="310896"/>
+          </a:xfrm>
+          <a:prstGeom prst="rect">
+            <a:avLst/>
+          </a:prstGeom>
+          <a:noFill/>
+          <a:ln/>
+        </p:spPr>
+        <p:txBody>
+          <a:bodyPr wrap="square" lIns="0" tIns="0" rIns="0" bIns="0" rtlCol="0" anchor="ctr"/>
+          <a:lstStyle/>
+          <a:p>
+            <a:pPr indent="0" marL="0">
+              <a:buNone/>
+            </a:pPr>
+            <a:r>
+              <a:rPr lang="en-US" sz="1350" i="1" dirty="0">
                 <a:solidFill>
                   <a:srgbClr val="6D2E46"/>
                 </a:solidFill>
-                <a:latin typeface="Cambria" pitchFamily="34" charset="0"/>
-                <a:ea typeface="Cambria" pitchFamily="34" charset="-122"/>
-                <a:cs typeface="Cambria" pitchFamily="34" charset="-120"/>
-              </a:rPr>
-              <a:t>Write the anatomical spec</a:t>
+                <a:latin typeface="Calibri" pitchFamily="34" charset="0"/>
+                <a:ea typeface="Calibri" pitchFamily="34" charset="-122"/>
+                <a:cs typeface="Calibri" pitchFamily="34" charset="-120"/>
+              </a:rPr>
+              <a:t>Parking lot:  revisit the supplier questionnaire.</a:t>
             </a:r>
             <a:endParaRPr lang="en-US" sz="1350" dirty="0"/>
-          </a:p>
-        </p:txBody>
-      </p:sp>
-      <p:sp>
-        <p:nvSpPr>
-          <p:cNvPr id="45" name="Text 43"/>
-          <p:cNvSpPr/>
-          <p:nvPr/>
-        </p:nvSpPr>
-        <p:spPr>
-          <a:xfrm>
-            <a:off x="749808" y="5504688"/>
-            <a:ext cx="3200400" cy="384048"/>
-          </a:xfrm>
-          <a:prstGeom prst="rect">
-            <a:avLst/>
-          </a:prstGeom>
-          <a:noFill/>
-          <a:ln/>
-        </p:spPr>
-        <p:txBody>
-          <a:bodyPr wrap="square" lIns="0" tIns="0" rIns="0" bIns="0" rtlCol="0" anchor="ctr"/>
-          <a:lstStyle/>
-          <a:p>
-            <a:pPr indent="0" marL="0">
-              <a:buNone/>
-            </a:pPr>
-            <a:r>
-              <a:rPr lang="en-US" sz="1100" dirty="0">
-                <a:solidFill>
-                  <a:srgbClr val="6E6E6E"/>
-                </a:solidFill>
-                <a:latin typeface="Calibri" pitchFamily="34" charset="0"/>
-                <a:ea typeface="Calibri" pitchFamily="34" charset="-122"/>
-                <a:cs typeface="Calibri" pitchFamily="34" charset="-120"/>
-              </a:rPr>
-              <a:t>Sow or market hog? It decides half the list.</a:t>
-            </a:r>
-            <a:endParaRPr lang="en-US" sz="1100" dirty="0"/>
-          </a:p>
-        </p:txBody>
-      </p:sp>
-      <p:sp>
-        <p:nvSpPr>
-          <p:cNvPr id="46" name="Shape 44"/>
-          <p:cNvSpPr/>
-          <p:nvPr/>
-        </p:nvSpPr>
-        <p:spPr>
-          <a:xfrm>
-            <a:off x="4325112" y="5138928"/>
-            <a:ext cx="3566160" cy="822960"/>
-          </a:xfrm>
-          <a:prstGeom prst="roundRect">
-            <a:avLst>
-              <a:gd name="adj" fmla="val 8889"/>
-            </a:avLst>
-          </a:prstGeom>
-          <a:solidFill>
-            <a:srgbClr val="F7F0F1"/>
-          </a:solidFill>
-          <a:ln w="12700">
-            <a:solidFill>
-              <a:srgbClr val="F7F0F1"/>
-            </a:solidFill>
-            <a:prstDash val="solid"/>
-          </a:ln>
-        </p:spPr>
-      </p:sp>
-      <p:sp>
-        <p:nvSpPr>
-          <p:cNvPr id="47" name="Text 45"/>
-          <p:cNvSpPr/>
-          <p:nvPr/>
-        </p:nvSpPr>
-        <p:spPr>
-          <a:xfrm>
-            <a:off x="4526280" y="5230368"/>
-            <a:ext cx="3200400" cy="274320"/>
-          </a:xfrm>
-          <a:prstGeom prst="rect">
-            <a:avLst/>
-          </a:prstGeom>
-          <a:noFill/>
-          <a:ln/>
-        </p:spPr>
-        <p:txBody>
-          <a:bodyPr wrap="square" lIns="0" tIns="0" rIns="0" bIns="0" rtlCol="0" anchor="ctr"/>
-          <a:lstStyle/>
-          <a:p>
-            <a:pPr indent="0" marL="0">
-              <a:buNone/>
-            </a:pPr>
-            <a:r>
-              <a:rPr lang="en-US" sz="1350" b="1" dirty="0">
-                <a:solidFill>
-                  <a:srgbClr val="6D2E46"/>
-                </a:solidFill>
-                <a:latin typeface="Cambria" pitchFamily="34" charset="0"/>
-                <a:ea typeface="Cambria" pitchFamily="34" charset="-122"/>
-                <a:cs typeface="Cambria" pitchFamily="34" charset="-120"/>
-              </a:rPr>
-              <a:t>Email APHIS VS</a:t>
-            </a:r>
-            <a:endParaRPr lang="en-US" sz="1350" dirty="0"/>
-          </a:p>
-        </p:txBody>
-      </p:sp>
-      <p:sp>
-        <p:nvSpPr>
-          <p:cNvPr id="48" name="Text 46"/>
-          <p:cNvSpPr/>
-          <p:nvPr/>
-        </p:nvSpPr>
-        <p:spPr>
-          <a:xfrm>
-            <a:off x="4526280" y="5504688"/>
-            <a:ext cx="3200400" cy="384048"/>
-          </a:xfrm>
-          <a:prstGeom prst="rect">
-            <a:avLst/>
-          </a:prstGeom>
-          <a:noFill/>
-          <a:ln/>
-        </p:spPr>
-        <p:txBody>
-          <a:bodyPr wrap="square" lIns="0" tIns="0" rIns="0" bIns="0" rtlCol="0" anchor="ctr"/>
-          <a:lstStyle/>
-          <a:p>
-            <a:pPr indent="0" marL="0">
-              <a:buNone/>
-            </a:pPr>
-            <a:r>
-              <a:rPr lang="en-US" sz="1100" dirty="0">
-                <a:solidFill>
-                  <a:srgbClr val="6E6E6E"/>
-                </a:solidFill>
-                <a:latin typeface="Calibri" pitchFamily="34" charset="0"/>
-                <a:ea typeface="Calibri" pitchFamily="34" charset="-122"/>
-                <a:cs typeface="Calibri" pitchFamily="34" charset="-120"/>
-              </a:rPr>
-              <a:t>What must a federal plant hold to carry EU work.</a:t>
-            </a:r>
-            <a:endParaRPr lang="en-US" sz="1100" dirty="0"/>
-          </a:p>
-        </p:txBody>
-      </p:sp>
-      <p:sp>
-        <p:nvSpPr>
-          <p:cNvPr id="49" name="Shape 47"/>
-          <p:cNvSpPr/>
-          <p:nvPr/>
-        </p:nvSpPr>
-        <p:spPr>
-          <a:xfrm>
-            <a:off x="8101584" y="5138928"/>
-            <a:ext cx="3566160" cy="822960"/>
-          </a:xfrm>
-          <a:prstGeom prst="roundRect">
-            <a:avLst>
-              <a:gd name="adj" fmla="val 8889"/>
-            </a:avLst>
-          </a:prstGeom>
-          <a:solidFill>
-            <a:srgbClr val="F7F0F1"/>
-          </a:solidFill>
-          <a:ln w="12700">
-            <a:solidFill>
-              <a:srgbClr val="F7F0F1"/>
-            </a:solidFill>
-            <a:prstDash val="solid"/>
-          </a:ln>
-        </p:spPr>
-      </p:sp>
-      <p:sp>
-        <p:nvSpPr>
-          <p:cNvPr id="50" name="Text 48"/>
-          <p:cNvSpPr/>
-          <p:nvPr/>
-        </p:nvSpPr>
-        <p:spPr>
-          <a:xfrm>
-            <a:off x="8302752" y="5230368"/>
-            <a:ext cx="3200400" cy="274320"/>
-          </a:xfrm>
-          <a:prstGeom prst="rect">
-            <a:avLst/>
-          </a:prstGeom>
-          <a:noFill/>
-          <a:ln/>
-        </p:spPr>
-        <p:txBody>
-          <a:bodyPr wrap="square" lIns="0" tIns="0" rIns="0" bIns="0" rtlCol="0" anchor="ctr"/>
-          <a:lstStyle/>
-          <a:p>
-            <a:pPr indent="0" marL="0">
-              <a:buNone/>
-            </a:pPr>
-            <a:r>
-              <a:rPr lang="en-US" sz="1350" b="1" dirty="0">
-                <a:solidFill>
-                  <a:srgbClr val="6D2E46"/>
-                </a:solidFill>
-                <a:latin typeface="Cambria" pitchFamily="34" charset="0"/>
-                <a:ea typeface="Cambria" pitchFamily="34" charset="-122"/>
-                <a:cs typeface="Cambria" pitchFamily="34" charset="-120"/>
-              </a:rPr>
-              <a:t>Interview the collectors</a:t>
-            </a:r>
-            <a:endParaRPr lang="en-US" sz="1350" dirty="0"/>
-          </a:p>
-        </p:txBody>
-      </p:sp>
-      <p:sp>
-        <p:nvSpPr>
-          <p:cNvPr id="51" name="Text 49"/>
-          <p:cNvSpPr/>
-          <p:nvPr/>
-        </p:nvSpPr>
-        <p:spPr>
-          <a:xfrm>
-            <a:off x="8302752" y="5504688"/>
-            <a:ext cx="3200400" cy="384048"/>
-          </a:xfrm>
-          <a:prstGeom prst="rect">
-            <a:avLst/>
-          </a:prstGeom>
-          <a:noFill/>
-          <a:ln/>
-        </p:spPr>
-        <p:txBody>
-          <a:bodyPr wrap="square" lIns="0" tIns="0" rIns="0" bIns="0" rtlCol="0" anchor="ctr"/>
-          <a:lstStyle/>
-          <a:p>
-            <a:pPr indent="0" marL="0">
-              <a:buNone/>
-            </a:pPr>
-            <a:r>
-              <a:rPr lang="en-US" sz="1100" dirty="0">
-                <a:solidFill>
-                  <a:srgbClr val="6E6E6E"/>
-                </a:solidFill>
-                <a:latin typeface="Calibri" pitchFamily="34" charset="0"/>
-                <a:ea typeface="Calibri" pitchFamily="34" charset="-122"/>
-                <a:cs typeface="Calibri" pitchFamily="34" charset="-120"/>
-              </a:rPr>
-              <a:t>They already run Model A inside other plants.</a:t>
-            </a:r>
-            <a:endParaRPr lang="en-US" sz="1100" dirty="0"/>
-          </a:p>
-        </p:txBody>
-      </p:sp>
-      <p:sp>
-        <p:nvSpPr>
-          <p:cNvPr id="52" name="Text 50"/>
-          <p:cNvSpPr/>
-          <p:nvPr/>
-        </p:nvSpPr>
-        <p:spPr>
-          <a:xfrm>
-            <a:off x="548640" y="6108192"/>
-            <a:ext cx="11064240" cy="292608"/>
-          </a:xfrm>
-          <a:prstGeom prst="rect">
-            <a:avLst/>
-          </a:prstGeom>
-          <a:noFill/>
-          <a:ln/>
-        </p:spPr>
-        <p:txBody>
-          <a:bodyPr wrap="square" lIns="0" tIns="0" rIns="0" bIns="0" rtlCol="0" anchor="ctr"/>
-          <a:lstStyle/>
-          <a:p>
-            <a:pPr indent="0" marL="0">
-              <a:buNone/>
-            </a:pPr>
-            <a:r>
-              <a:rPr lang="en-US" sz="1300" i="1" dirty="0">
-                <a:solidFill>
-                  <a:srgbClr val="6D2E46"/>
-                </a:solidFill>
-                <a:latin typeface="Calibri" pitchFamily="34" charset="0"/>
-                <a:ea typeface="Calibri" pitchFamily="34" charset="-122"/>
-                <a:cs typeface="Calibri" pitchFamily="34" charset="-120"/>
-              </a:rPr>
-              <a:t>Parking lot:  revisit the supplier questionnaire.</a:t>
-            </a:r>
-            <a:endParaRPr lang="en-US" sz="1300" dirty="0"/>
           </a:p>
         </p:txBody>
       </p:sp>

--- a/Tissue Supplier Research/Supplier_Strategy_Meeting.pptx
+++ b/Tissue Supplier Research/Supplier_Strategy_Meeting.pptx
@@ -4,6 +4,9 @@
   <p:sldMasterIdLst>
     <p:sldMasterId id="2147483648" r:id="rId1"/>
   </p:sldMasterIdLst>
+  <p:notesMasterIdLst>
+    <p:notesMasterId r:id="rId9"/>
+  </p:notesMasterIdLst>
   <p:sldIdLst>
     <p:sldId id="256" r:id="rId2"/>
     <p:sldId id="257" r:id="rId3"/>
@@ -13,9 +16,6 @@
     <p:sldId id="261" r:id="rId7"/>
     <p:sldId id="262" r:id="rId8"/>
   </p:sldIdLst>
-  <p:notesMasterIdLst>
-    <p:notesMasterId r:id="rId9"/>
-  </p:notesMasterIdLst>
   <p:sldSz cx="12192000" cy="6858000"/>
   <p:notesSz cx="6858000" cy="12192000"/>
   <p:defaultTextStyle>
@@ -110,13 +110,20 @@
       </a:defRPr>
     </a:lvl9pPr>
   </p:defaultTextStyle>
+  <p:extLst>
+    <p:ext uri="{EFAFB233-063F-42B5-8137-9DF3F51BA10A}">
+      <p15:sldGuideLst xmlns:p15="http://schemas.microsoft.com/office/powerpoint/2012/main"/>
+    </p:ext>
+  </p:extLst>
 </p:presentation>
 </file>
 
 <file path=ppt/charts/chart1.xml><?xml version="1.0" encoding="utf-8"?>
-<c:chartSpace xmlns:c="http://schemas.openxmlformats.org/drawingml/2006/chart" xmlns:a="http://schemas.openxmlformats.org/drawingml/2006/main" xmlns:r="http://schemas.openxmlformats.org/officeDocument/2006/relationships">
+<c:chartSpace xmlns:c="http://schemas.openxmlformats.org/drawingml/2006/chart" xmlns:a="http://schemas.openxmlformats.org/drawingml/2006/main" xmlns:r="http://schemas.openxmlformats.org/officeDocument/2006/relationships" xmlns:c16r2="http://schemas.microsoft.com/office/drawing/2015/06/chart">
   <c:date1904 val="0"/>
+  <c:lang val="en-US"/>
   <c:roundedCorners val="1"/>
+  <c:style val="2"/>
   <c:chart>
     <c:title>
       <c:tx>
@@ -133,7 +140,7 @@
               </a:defRPr>
             </a:pPr>
             <a:r>
-              <a:rPr sz="1400" b="0" i="0" u="none" strike="noStrike">
+              <a:rPr lang="en-US" sz="1400" b="0" i="0" u="none" strike="noStrike">
                 <a:solidFill>
                   <a:srgbClr val="6D2E46"/>
                 </a:solidFill>
@@ -144,7 +151,6 @@
           </a:p>
         </c:rich>
       </c:tx>
-      <c:layout/>
       <c:overlay val="0"/>
     </c:title>
     <c:autoTitleDeleted val="0"/>
@@ -177,18 +183,26 @@
           <c:invertIfNegative val="0"/>
           <c:dLbls>
             <c:numFmt formatCode="#,##0" sourceLinked="0"/>
+            <c:spPr>
+              <a:noFill/>
+              <a:ln>
+                <a:noFill/>
+              </a:ln>
+              <a:effectLst/>
+            </c:spPr>
             <c:txPr>
               <a:bodyPr/>
               <a:lstStyle/>
               <a:p>
                 <a:pPr>
-                  <a:defRPr b="0" i="0" strike="noStrike" sz="900" u="none">
+                  <a:defRPr sz="900" b="0" i="0" u="none" strike="noStrike">
                     <a:solidFill>
                       <a:srgbClr val="FFFFFF"/>
                     </a:solidFill>
                     <a:latin typeface="Calibri"/>
                   </a:defRPr>
                 </a:pPr>
+                <a:endParaRPr lang="en-US"/>
               </a:p>
             </c:txPr>
             <c:dLblPos val="ctr"/>
@@ -199,37 +213,40 @@
             <c:showPercent val="0"/>
             <c:showBubbleSize val="0"/>
             <c:showLeaderLines val="0"/>
+            <c:extLst>
+              <c:ext xmlns:c15="http://schemas.microsoft.com/office/drawing/2012/chart" uri="{CE6537A1-D6FC-4f65-9D91-7224C49458BB}">
+                <c15:showLeaderLines val="0"/>
+              </c:ext>
+            </c:extLst>
           </c:dLbls>
           <c:cat>
-            <c:multiLvlStrRef>
+            <c:strRef>
               <c:f>Sheet1!$A$2:$A$8</c:f>
-              <c:multiLvlStrCache>
+              <c:strCache>
                 <c:ptCount val="7"/>
-                <c:lvl>
-                  <c:pt idx="0">
-                    <c:v>Eastern NC</c:v>
-                  </c:pt>
-                  <c:pt idx="1">
-                    <c:v>Western NC</c:v>
-                  </c:pt>
-                  <c:pt idx="2">
-                    <c:v>SC</c:v>
-                  </c:pt>
-                  <c:pt idx="3">
-                    <c:v>TN</c:v>
-                  </c:pt>
-                  <c:pt idx="4">
-                    <c:v>VA</c:v>
-                  </c:pt>
-                  <c:pt idx="5">
-                    <c:v>Iowa</c:v>
-                  </c:pt>
-                  <c:pt idx="6">
-                    <c:v>Nebraska</c:v>
-                  </c:pt>
-                </c:lvl>
-              </c:multiLvlStrCache>
-            </c:multiLvlStrRef>
+                <c:pt idx="0">
+                  <c:v>Eastern NC</c:v>
+                </c:pt>
+                <c:pt idx="1">
+                  <c:v>Western NC</c:v>
+                </c:pt>
+                <c:pt idx="2">
+                  <c:v>SC</c:v>
+                </c:pt>
+                <c:pt idx="3">
+                  <c:v>TN</c:v>
+                </c:pt>
+                <c:pt idx="4">
+                  <c:v>VA</c:v>
+                </c:pt>
+                <c:pt idx="5">
+                  <c:v>Iowa</c:v>
+                </c:pt>
+                <c:pt idx="6">
+                  <c:v>Nebraska</c:v>
+                </c:pt>
+              </c:strCache>
+            </c:strRef>
           </c:cat>
           <c:val>
             <c:numRef>
@@ -261,6 +278,11 @@
               </c:numCache>
             </c:numRef>
           </c:val>
+          <c:extLst>
+            <c:ext xmlns:c16="http://schemas.microsoft.com/office/drawing/2014/chart" uri="{C3380CC4-5D6E-409C-BE32-E72D297353CC}">
+              <c16:uniqueId val="{00000000-8A7C-40CB-8A81-746579DC55F5}"/>
+            </c:ext>
+          </c:extLst>
         </c:ser>
         <c:ser>
           <c:idx val="1"/>
@@ -285,18 +307,26 @@
           <c:invertIfNegative val="0"/>
           <c:dLbls>
             <c:numFmt formatCode="#,##0" sourceLinked="0"/>
+            <c:spPr>
+              <a:noFill/>
+              <a:ln>
+                <a:noFill/>
+              </a:ln>
+              <a:effectLst/>
+            </c:spPr>
             <c:txPr>
               <a:bodyPr/>
               <a:lstStyle/>
               <a:p>
                 <a:pPr>
-                  <a:defRPr b="0" i="0" strike="noStrike" sz="900" u="none">
+                  <a:defRPr sz="900" b="0" i="0" u="none" strike="noStrike">
                     <a:solidFill>
                       <a:srgbClr val="FFFFFF"/>
                     </a:solidFill>
                     <a:latin typeface="Calibri"/>
                   </a:defRPr>
                 </a:pPr>
+                <a:endParaRPr lang="en-US"/>
               </a:p>
             </c:txPr>
             <c:dLblPos val="ctr"/>
@@ -307,37 +337,40 @@
             <c:showPercent val="0"/>
             <c:showBubbleSize val="0"/>
             <c:showLeaderLines val="0"/>
+            <c:extLst>
+              <c:ext xmlns:c15="http://schemas.microsoft.com/office/drawing/2012/chart" uri="{CE6537A1-D6FC-4f65-9D91-7224C49458BB}">
+                <c15:showLeaderLines val="0"/>
+              </c:ext>
+            </c:extLst>
           </c:dLbls>
           <c:cat>
-            <c:multiLvlStrRef>
+            <c:strRef>
               <c:f>Sheet1!$A$2:$A$8</c:f>
-              <c:multiLvlStrCache>
+              <c:strCache>
                 <c:ptCount val="7"/>
-                <c:lvl>
-                  <c:pt idx="0">
-                    <c:v>Eastern NC</c:v>
-                  </c:pt>
-                  <c:pt idx="1">
-                    <c:v>Western NC</c:v>
-                  </c:pt>
-                  <c:pt idx="2">
-                    <c:v>SC</c:v>
-                  </c:pt>
-                  <c:pt idx="3">
-                    <c:v>TN</c:v>
-                  </c:pt>
-                  <c:pt idx="4">
-                    <c:v>VA</c:v>
-                  </c:pt>
-                  <c:pt idx="5">
-                    <c:v>Iowa</c:v>
-                  </c:pt>
-                  <c:pt idx="6">
-                    <c:v>Nebraska</c:v>
-                  </c:pt>
-                </c:lvl>
-              </c:multiLvlStrCache>
-            </c:multiLvlStrRef>
+                <c:pt idx="0">
+                  <c:v>Eastern NC</c:v>
+                </c:pt>
+                <c:pt idx="1">
+                  <c:v>Western NC</c:v>
+                </c:pt>
+                <c:pt idx="2">
+                  <c:v>SC</c:v>
+                </c:pt>
+                <c:pt idx="3">
+                  <c:v>TN</c:v>
+                </c:pt>
+                <c:pt idx="4">
+                  <c:v>VA</c:v>
+                </c:pt>
+                <c:pt idx="5">
+                  <c:v>Iowa</c:v>
+                </c:pt>
+                <c:pt idx="6">
+                  <c:v>Nebraska</c:v>
+                </c:pt>
+              </c:strCache>
+            </c:strRef>
           </c:cat>
           <c:val>
             <c:numRef>
@@ -369,6 +402,11 @@
               </c:numCache>
             </c:numRef>
           </c:val>
+          <c:extLst>
+            <c:ext xmlns:c16="http://schemas.microsoft.com/office/drawing/2014/chart" uri="{C3380CC4-5D6E-409C-BE32-E72D297353CC}">
+              <c16:uniqueId val="{00000001-8A7C-40CB-8A81-746579DC55F5}"/>
+            </c:ext>
+          </c:extLst>
         </c:ser>
         <c:ser>
           <c:idx val="2"/>
@@ -393,18 +431,26 @@
           <c:invertIfNegative val="0"/>
           <c:dLbls>
             <c:numFmt formatCode="#,##0" sourceLinked="0"/>
+            <c:spPr>
+              <a:noFill/>
+              <a:ln>
+                <a:noFill/>
+              </a:ln>
+              <a:effectLst/>
+            </c:spPr>
             <c:txPr>
               <a:bodyPr/>
               <a:lstStyle/>
               <a:p>
                 <a:pPr>
-                  <a:defRPr b="0" i="0" strike="noStrike" sz="900" u="none">
+                  <a:defRPr sz="900" b="0" i="0" u="none" strike="noStrike">
                     <a:solidFill>
                       <a:srgbClr val="FFFFFF"/>
                     </a:solidFill>
                     <a:latin typeface="Calibri"/>
                   </a:defRPr>
                 </a:pPr>
+                <a:endParaRPr lang="en-US"/>
               </a:p>
             </c:txPr>
             <c:dLblPos val="ctr"/>
@@ -415,37 +461,40 @@
             <c:showPercent val="0"/>
             <c:showBubbleSize val="0"/>
             <c:showLeaderLines val="0"/>
+            <c:extLst>
+              <c:ext xmlns:c15="http://schemas.microsoft.com/office/drawing/2012/chart" uri="{CE6537A1-D6FC-4f65-9D91-7224C49458BB}">
+                <c15:showLeaderLines val="0"/>
+              </c:ext>
+            </c:extLst>
           </c:dLbls>
           <c:cat>
-            <c:multiLvlStrRef>
+            <c:strRef>
               <c:f>Sheet1!$A$2:$A$8</c:f>
-              <c:multiLvlStrCache>
+              <c:strCache>
                 <c:ptCount val="7"/>
-                <c:lvl>
-                  <c:pt idx="0">
-                    <c:v>Eastern NC</c:v>
-                  </c:pt>
-                  <c:pt idx="1">
-                    <c:v>Western NC</c:v>
-                  </c:pt>
-                  <c:pt idx="2">
-                    <c:v>SC</c:v>
-                  </c:pt>
-                  <c:pt idx="3">
-                    <c:v>TN</c:v>
-                  </c:pt>
-                  <c:pt idx="4">
-                    <c:v>VA</c:v>
-                  </c:pt>
-                  <c:pt idx="5">
-                    <c:v>Iowa</c:v>
-                  </c:pt>
-                  <c:pt idx="6">
-                    <c:v>Nebraska</c:v>
-                  </c:pt>
-                </c:lvl>
-              </c:multiLvlStrCache>
-            </c:multiLvlStrRef>
+                <c:pt idx="0">
+                  <c:v>Eastern NC</c:v>
+                </c:pt>
+                <c:pt idx="1">
+                  <c:v>Western NC</c:v>
+                </c:pt>
+                <c:pt idx="2">
+                  <c:v>SC</c:v>
+                </c:pt>
+                <c:pt idx="3">
+                  <c:v>TN</c:v>
+                </c:pt>
+                <c:pt idx="4">
+                  <c:v>VA</c:v>
+                </c:pt>
+                <c:pt idx="5">
+                  <c:v>Iowa</c:v>
+                </c:pt>
+                <c:pt idx="6">
+                  <c:v>Nebraska</c:v>
+                </c:pt>
+              </c:strCache>
+            </c:strRef>
           </c:cat>
           <c:val>
             <c:numRef>
@@ -477,6 +526,11 @@
               </c:numCache>
             </c:numRef>
           </c:val>
+          <c:extLst>
+            <c:ext xmlns:c16="http://schemas.microsoft.com/office/drawing/2014/chart" uri="{C3380CC4-5D6E-409C-BE32-E72D297353CC}">
+              <c16:uniqueId val="{00000002-8A7C-40CB-8A81-746579DC55F5}"/>
+            </c:ext>
+          </c:extLst>
         </c:ser>
         <c:ser>
           <c:idx val="3"/>
@@ -500,19 +554,49 @@
           </c:spPr>
           <c:invertIfNegative val="0"/>
           <c:dLbls>
+            <c:dLbl>
+              <c:idx val="5"/>
+              <c:layout>
+                <c:manualLayout>
+                  <c:x val="-8.6314131579796564E-17"/>
+                  <c:y val="-3.3602150537634476E-2"/>
+                </c:manualLayout>
+              </c:layout>
+              <c:dLblPos val="ctr"/>
+              <c:showLegendKey val="0"/>
+              <c:showVal val="1"/>
+              <c:showCatName val="0"/>
+              <c:showSerName val="0"/>
+              <c:showPercent val="0"/>
+              <c:showBubbleSize val="0"/>
+              <c:extLst>
+                <c:ext xmlns:c15="http://schemas.microsoft.com/office/drawing/2012/chart" uri="{CE6537A1-D6FC-4f65-9D91-7224C49458BB}"/>
+                <c:ext xmlns:c16="http://schemas.microsoft.com/office/drawing/2014/chart" uri="{C3380CC4-5D6E-409C-BE32-E72D297353CC}">
+                  <c16:uniqueId val="{00000004-8A7C-40CB-8A81-746579DC55F5}"/>
+                </c:ext>
+              </c:extLst>
+            </c:dLbl>
             <c:numFmt formatCode="#,##0" sourceLinked="0"/>
+            <c:spPr>
+              <a:noFill/>
+              <a:ln>
+                <a:noFill/>
+              </a:ln>
+              <a:effectLst/>
+            </c:spPr>
             <c:txPr>
               <a:bodyPr/>
               <a:lstStyle/>
               <a:p>
                 <a:pPr>
-                  <a:defRPr b="0" i="0" strike="noStrike" sz="900" u="none">
+                  <a:defRPr sz="900" b="0" i="0" u="none" strike="noStrike">
                     <a:solidFill>
                       <a:srgbClr val="FFFFFF"/>
                     </a:solidFill>
                     <a:latin typeface="Calibri"/>
                   </a:defRPr>
                 </a:pPr>
+                <a:endParaRPr lang="en-US"/>
               </a:p>
             </c:txPr>
             <c:dLblPos val="ctr"/>
@@ -523,37 +607,40 @@
             <c:showPercent val="0"/>
             <c:showBubbleSize val="0"/>
             <c:showLeaderLines val="0"/>
+            <c:extLst>
+              <c:ext xmlns:c15="http://schemas.microsoft.com/office/drawing/2012/chart" uri="{CE6537A1-D6FC-4f65-9D91-7224C49458BB}">
+                <c15:showLeaderLines val="0"/>
+              </c:ext>
+            </c:extLst>
           </c:dLbls>
           <c:cat>
-            <c:multiLvlStrRef>
+            <c:strRef>
               <c:f>Sheet1!$A$2:$A$8</c:f>
-              <c:multiLvlStrCache>
+              <c:strCache>
                 <c:ptCount val="7"/>
-                <c:lvl>
-                  <c:pt idx="0">
-                    <c:v>Eastern NC</c:v>
-                  </c:pt>
-                  <c:pt idx="1">
-                    <c:v>Western NC</c:v>
-                  </c:pt>
-                  <c:pt idx="2">
-                    <c:v>SC</c:v>
-                  </c:pt>
-                  <c:pt idx="3">
-                    <c:v>TN</c:v>
-                  </c:pt>
-                  <c:pt idx="4">
-                    <c:v>VA</c:v>
-                  </c:pt>
-                  <c:pt idx="5">
-                    <c:v>Iowa</c:v>
-                  </c:pt>
-                  <c:pt idx="6">
-                    <c:v>Nebraska</c:v>
-                  </c:pt>
-                </c:lvl>
-              </c:multiLvlStrCache>
-            </c:multiLvlStrRef>
+                <c:pt idx="0">
+                  <c:v>Eastern NC</c:v>
+                </c:pt>
+                <c:pt idx="1">
+                  <c:v>Western NC</c:v>
+                </c:pt>
+                <c:pt idx="2">
+                  <c:v>SC</c:v>
+                </c:pt>
+                <c:pt idx="3">
+                  <c:v>TN</c:v>
+                </c:pt>
+                <c:pt idx="4">
+                  <c:v>VA</c:v>
+                </c:pt>
+                <c:pt idx="5">
+                  <c:v>Iowa</c:v>
+                </c:pt>
+                <c:pt idx="6">
+                  <c:v>Nebraska</c:v>
+                </c:pt>
+              </c:strCache>
+            </c:strRef>
           </c:cat>
           <c:val>
             <c:numRef>
@@ -585,23 +672,13 @@
               </c:numCache>
             </c:numRef>
           </c:val>
+          <c:extLst>
+            <c:ext xmlns:c16="http://schemas.microsoft.com/office/drawing/2014/chart" uri="{C3380CC4-5D6E-409C-BE32-E72D297353CC}">
+              <c16:uniqueId val="{00000003-8A7C-40CB-8A81-746579DC55F5}"/>
+            </c:ext>
+          </c:extLst>
         </c:ser>
         <c:dLbls>
-          <c:numFmt formatCode="#,##0" sourceLinked="0"/>
-          <c:txPr>
-            <a:bodyPr/>
-            <a:lstStyle/>
-            <a:p>
-              <a:pPr>
-                <a:defRPr b="0" i="0" strike="noStrike" sz="900" u="none">
-                  <a:solidFill>
-                    <a:srgbClr val="FFFFFF"/>
-                  </a:solidFill>
-                  <a:latin typeface="Calibri"/>
-                </a:defRPr>
-              </a:pPr>
-            </a:p>
-          </c:txPr>
           <c:dLblPos val="ctr"/>
           <c:showLegendKey val="0"/>
           <c:showVal val="1"/>
@@ -609,13 +686,11 @@
           <c:showSerName val="0"/>
           <c:showPercent val="0"/>
           <c:showBubbleSize val="0"/>
-          <c:showLeaderLines val="0"/>
         </c:dLbls>
         <c:gapWidth val="50"/>
         <c:overlap val="100"/>
         <c:axId val="2094734554"/>
         <c:axId val="2094734552"/>
-        <c:axId val="2094734556"/>
       </c:barChart>
       <c:catAx>
         <c:axId val="2094734554"/>
@@ -656,6 +731,7 @@
         <c:crosses val="autoZero"/>
         <c:auto val="1"/>
         <c:lblAlgn val="ctr"/>
+        <c:lblOffset val="100"/>
         <c:noMultiLvlLbl val="1"/>
       </c:catAx>
       <c:valAx>
@@ -744,6 +820,7 @@
     </c:legend>
     <c:plotVisOnly val="1"/>
     <c:dispBlanksAs val="span"/>
+    <c:showDLblsOverMax val="1"/>
   </c:chart>
   <c:spPr>
     <a:noFill/>
@@ -759,9 +836,11 @@
 </file>
 
 <file path=ppt/charts/chart2.xml><?xml version="1.0" encoding="utf-8"?>
-<c:chartSpace xmlns:c="http://schemas.openxmlformats.org/drawingml/2006/chart" xmlns:a="http://schemas.openxmlformats.org/drawingml/2006/main" xmlns:r="http://schemas.openxmlformats.org/officeDocument/2006/relationships">
+<c:chartSpace xmlns:c="http://schemas.openxmlformats.org/drawingml/2006/chart" xmlns:a="http://schemas.openxmlformats.org/drawingml/2006/main" xmlns:r="http://schemas.openxmlformats.org/officeDocument/2006/relationships" xmlns:c16r2="http://schemas.microsoft.com/office/drawing/2015/06/chart">
   <c:date1904 val="0"/>
+  <c:lang val="en-US"/>
   <c:roundedCorners val="1"/>
+  <c:style val="2"/>
   <c:chart>
     <c:title>
       <c:tx>
@@ -778,7 +857,7 @@
               </a:defRPr>
             </a:pPr>
             <a:r>
-              <a:rPr sz="1400" b="0" i="0" u="none" strike="noStrike">
+              <a:rPr lang="en-US" sz="1400" b="0" i="0" u="none" strike="noStrike">
                 <a:solidFill>
                   <a:srgbClr val="6D2E46"/>
                 </a:solidFill>
@@ -789,7 +868,6 @@
           </a:p>
         </c:rich>
       </c:tx>
-      <c:layout/>
       <c:overlay val="0"/>
     </c:title>
     <c:autoTitleDeleted val="0"/>
@@ -822,18 +900,26 @@
           <c:invertIfNegative val="0"/>
           <c:dLbls>
             <c:numFmt formatCode="#,##0" sourceLinked="0"/>
+            <c:spPr>
+              <a:noFill/>
+              <a:ln>
+                <a:noFill/>
+              </a:ln>
+              <a:effectLst/>
+            </c:spPr>
             <c:txPr>
               <a:bodyPr/>
               <a:lstStyle/>
               <a:p>
                 <a:pPr>
-                  <a:defRPr b="0" i="0" strike="noStrike" sz="900" u="none">
+                  <a:defRPr sz="900" b="0" i="0" u="none" strike="noStrike">
                     <a:solidFill>
                       <a:srgbClr val="3A3A3A"/>
                     </a:solidFill>
                     <a:latin typeface="Calibri"/>
                   </a:defRPr>
                 </a:pPr>
+                <a:endParaRPr lang="en-US"/>
               </a:p>
             </c:txPr>
             <c:dLblPos val="ctr"/>
@@ -844,37 +930,40 @@
             <c:showPercent val="0"/>
             <c:showBubbleSize val="0"/>
             <c:showLeaderLines val="0"/>
+            <c:extLst>
+              <c:ext xmlns:c15="http://schemas.microsoft.com/office/drawing/2012/chart" uri="{CE6537A1-D6FC-4f65-9D91-7224C49458BB}">
+                <c15:showLeaderLines val="0"/>
+              </c:ext>
+            </c:extLst>
           </c:dLbls>
           <c:cat>
-            <c:multiLvlStrRef>
+            <c:strRef>
               <c:f>Sheet1!$A$2:$A$8</c:f>
-              <c:multiLvlStrCache>
+              <c:strCache>
                 <c:ptCount val="7"/>
-                <c:lvl>
-                  <c:pt idx="0">
-                    <c:v>Eastern NC</c:v>
-                  </c:pt>
-                  <c:pt idx="1">
-                    <c:v>Western NC</c:v>
-                  </c:pt>
-                  <c:pt idx="2">
-                    <c:v>SC</c:v>
-                  </c:pt>
-                  <c:pt idx="3">
-                    <c:v>TN</c:v>
-                  </c:pt>
-                  <c:pt idx="4">
-                    <c:v>VA</c:v>
-                  </c:pt>
-                  <c:pt idx="5">
-                    <c:v>Iowa</c:v>
-                  </c:pt>
-                  <c:pt idx="6">
-                    <c:v>Nebraska</c:v>
-                  </c:pt>
-                </c:lvl>
-              </c:multiLvlStrCache>
-            </c:multiLvlStrRef>
+                <c:pt idx="0">
+                  <c:v>Eastern NC</c:v>
+                </c:pt>
+                <c:pt idx="1">
+                  <c:v>Western NC</c:v>
+                </c:pt>
+                <c:pt idx="2">
+                  <c:v>SC</c:v>
+                </c:pt>
+                <c:pt idx="3">
+                  <c:v>TN</c:v>
+                </c:pt>
+                <c:pt idx="4">
+                  <c:v>VA</c:v>
+                </c:pt>
+                <c:pt idx="5">
+                  <c:v>Iowa</c:v>
+                </c:pt>
+                <c:pt idx="6">
+                  <c:v>Nebraska</c:v>
+                </c:pt>
+              </c:strCache>
+            </c:strRef>
           </c:cat>
           <c:val>
             <c:numRef>
@@ -906,6 +995,11 @@
               </c:numCache>
             </c:numRef>
           </c:val>
+          <c:extLst>
+            <c:ext xmlns:c16="http://schemas.microsoft.com/office/drawing/2014/chart" uri="{C3380CC4-5D6E-409C-BE32-E72D297353CC}">
+              <c16:uniqueId val="{00000000-F8EC-45DF-BC0B-332ECDADB56E}"/>
+            </c:ext>
+          </c:extLst>
         </c:ser>
         <c:ser>
           <c:idx val="1"/>
@@ -930,18 +1024,26 @@
           <c:invertIfNegative val="0"/>
           <c:dLbls>
             <c:numFmt formatCode="#,##0" sourceLinked="0"/>
+            <c:spPr>
+              <a:noFill/>
+              <a:ln>
+                <a:noFill/>
+              </a:ln>
+              <a:effectLst/>
+            </c:spPr>
             <c:txPr>
               <a:bodyPr/>
               <a:lstStyle/>
               <a:p>
                 <a:pPr>
-                  <a:defRPr b="0" i="0" strike="noStrike" sz="900" u="none">
+                  <a:defRPr sz="900" b="0" i="0" u="none" strike="noStrike">
                     <a:solidFill>
                       <a:srgbClr val="3A3A3A"/>
                     </a:solidFill>
                     <a:latin typeface="Calibri"/>
                   </a:defRPr>
                 </a:pPr>
+                <a:endParaRPr lang="en-US"/>
               </a:p>
             </c:txPr>
             <c:dLblPos val="ctr"/>
@@ -952,37 +1054,40 @@
             <c:showPercent val="0"/>
             <c:showBubbleSize val="0"/>
             <c:showLeaderLines val="0"/>
+            <c:extLst>
+              <c:ext xmlns:c15="http://schemas.microsoft.com/office/drawing/2012/chart" uri="{CE6537A1-D6FC-4f65-9D91-7224C49458BB}">
+                <c15:showLeaderLines val="0"/>
+              </c:ext>
+            </c:extLst>
           </c:dLbls>
           <c:cat>
-            <c:multiLvlStrRef>
+            <c:strRef>
               <c:f>Sheet1!$A$2:$A$8</c:f>
-              <c:multiLvlStrCache>
+              <c:strCache>
                 <c:ptCount val="7"/>
-                <c:lvl>
-                  <c:pt idx="0">
-                    <c:v>Eastern NC</c:v>
-                  </c:pt>
-                  <c:pt idx="1">
-                    <c:v>Western NC</c:v>
-                  </c:pt>
-                  <c:pt idx="2">
-                    <c:v>SC</c:v>
-                  </c:pt>
-                  <c:pt idx="3">
-                    <c:v>TN</c:v>
-                  </c:pt>
-                  <c:pt idx="4">
-                    <c:v>VA</c:v>
-                  </c:pt>
-                  <c:pt idx="5">
-                    <c:v>Iowa</c:v>
-                  </c:pt>
-                  <c:pt idx="6">
-                    <c:v>Nebraska</c:v>
-                  </c:pt>
-                </c:lvl>
-              </c:multiLvlStrCache>
-            </c:multiLvlStrRef>
+                <c:pt idx="0">
+                  <c:v>Eastern NC</c:v>
+                </c:pt>
+                <c:pt idx="1">
+                  <c:v>Western NC</c:v>
+                </c:pt>
+                <c:pt idx="2">
+                  <c:v>SC</c:v>
+                </c:pt>
+                <c:pt idx="3">
+                  <c:v>TN</c:v>
+                </c:pt>
+                <c:pt idx="4">
+                  <c:v>VA</c:v>
+                </c:pt>
+                <c:pt idx="5">
+                  <c:v>Iowa</c:v>
+                </c:pt>
+                <c:pt idx="6">
+                  <c:v>Nebraska</c:v>
+                </c:pt>
+              </c:strCache>
+            </c:strRef>
           </c:cat>
           <c:val>
             <c:numRef>
@@ -1014,6 +1119,11 @@
               </c:numCache>
             </c:numRef>
           </c:val>
+          <c:extLst>
+            <c:ext xmlns:c16="http://schemas.microsoft.com/office/drawing/2014/chart" uri="{C3380CC4-5D6E-409C-BE32-E72D297353CC}">
+              <c16:uniqueId val="{00000001-F8EC-45DF-BC0B-332ECDADB56E}"/>
+            </c:ext>
+          </c:extLst>
         </c:ser>
         <c:ser>
           <c:idx val="2"/>
@@ -1038,18 +1148,26 @@
           <c:invertIfNegative val="0"/>
           <c:dLbls>
             <c:numFmt formatCode="#,##0" sourceLinked="0"/>
+            <c:spPr>
+              <a:noFill/>
+              <a:ln>
+                <a:noFill/>
+              </a:ln>
+              <a:effectLst/>
+            </c:spPr>
             <c:txPr>
               <a:bodyPr/>
               <a:lstStyle/>
               <a:p>
                 <a:pPr>
-                  <a:defRPr b="0" i="0" strike="noStrike" sz="900" u="none">
+                  <a:defRPr sz="900" b="0" i="0" u="none" strike="noStrike">
                     <a:solidFill>
                       <a:srgbClr val="3A3A3A"/>
                     </a:solidFill>
                     <a:latin typeface="Calibri"/>
                   </a:defRPr>
                 </a:pPr>
+                <a:endParaRPr lang="en-US"/>
               </a:p>
             </c:txPr>
             <c:dLblPos val="ctr"/>
@@ -1060,37 +1178,40 @@
             <c:showPercent val="0"/>
             <c:showBubbleSize val="0"/>
             <c:showLeaderLines val="0"/>
+            <c:extLst>
+              <c:ext xmlns:c15="http://schemas.microsoft.com/office/drawing/2012/chart" uri="{CE6537A1-D6FC-4f65-9D91-7224C49458BB}">
+                <c15:showLeaderLines val="0"/>
+              </c:ext>
+            </c:extLst>
           </c:dLbls>
           <c:cat>
-            <c:multiLvlStrRef>
+            <c:strRef>
               <c:f>Sheet1!$A$2:$A$8</c:f>
-              <c:multiLvlStrCache>
+              <c:strCache>
                 <c:ptCount val="7"/>
-                <c:lvl>
-                  <c:pt idx="0">
-                    <c:v>Eastern NC</c:v>
-                  </c:pt>
-                  <c:pt idx="1">
-                    <c:v>Western NC</c:v>
-                  </c:pt>
-                  <c:pt idx="2">
-                    <c:v>SC</c:v>
-                  </c:pt>
-                  <c:pt idx="3">
-                    <c:v>TN</c:v>
-                  </c:pt>
-                  <c:pt idx="4">
-                    <c:v>VA</c:v>
-                  </c:pt>
-                  <c:pt idx="5">
-                    <c:v>Iowa</c:v>
-                  </c:pt>
-                  <c:pt idx="6">
-                    <c:v>Nebraska</c:v>
-                  </c:pt>
-                </c:lvl>
-              </c:multiLvlStrCache>
-            </c:multiLvlStrRef>
+                <c:pt idx="0">
+                  <c:v>Eastern NC</c:v>
+                </c:pt>
+                <c:pt idx="1">
+                  <c:v>Western NC</c:v>
+                </c:pt>
+                <c:pt idx="2">
+                  <c:v>SC</c:v>
+                </c:pt>
+                <c:pt idx="3">
+                  <c:v>TN</c:v>
+                </c:pt>
+                <c:pt idx="4">
+                  <c:v>VA</c:v>
+                </c:pt>
+                <c:pt idx="5">
+                  <c:v>Iowa</c:v>
+                </c:pt>
+                <c:pt idx="6">
+                  <c:v>Nebraska</c:v>
+                </c:pt>
+              </c:strCache>
+            </c:strRef>
           </c:cat>
           <c:val>
             <c:numRef>
@@ -1122,6 +1243,11 @@
               </c:numCache>
             </c:numRef>
           </c:val>
+          <c:extLst>
+            <c:ext xmlns:c16="http://schemas.microsoft.com/office/drawing/2014/chart" uri="{C3380CC4-5D6E-409C-BE32-E72D297353CC}">
+              <c16:uniqueId val="{00000002-F8EC-45DF-BC0B-332ECDADB56E}"/>
+            </c:ext>
+          </c:extLst>
         </c:ser>
         <c:ser>
           <c:idx val="3"/>
@@ -1146,18 +1272,26 @@
           <c:invertIfNegative val="0"/>
           <c:dLbls>
             <c:numFmt formatCode="#,##0" sourceLinked="0"/>
+            <c:spPr>
+              <a:noFill/>
+              <a:ln>
+                <a:noFill/>
+              </a:ln>
+              <a:effectLst/>
+            </c:spPr>
             <c:txPr>
               <a:bodyPr/>
               <a:lstStyle/>
               <a:p>
                 <a:pPr>
-                  <a:defRPr b="0" i="0" strike="noStrike" sz="900" u="none">
+                  <a:defRPr sz="900" b="0" i="0" u="none" strike="noStrike">
                     <a:solidFill>
                       <a:srgbClr val="3A3A3A"/>
                     </a:solidFill>
                     <a:latin typeface="Calibri"/>
                   </a:defRPr>
                 </a:pPr>
+                <a:endParaRPr lang="en-US"/>
               </a:p>
             </c:txPr>
             <c:dLblPos val="ctr"/>
@@ -1168,37 +1302,40 @@
             <c:showPercent val="0"/>
             <c:showBubbleSize val="0"/>
             <c:showLeaderLines val="0"/>
+            <c:extLst>
+              <c:ext xmlns:c15="http://schemas.microsoft.com/office/drawing/2012/chart" uri="{CE6537A1-D6FC-4f65-9D91-7224C49458BB}">
+                <c15:showLeaderLines val="0"/>
+              </c:ext>
+            </c:extLst>
           </c:dLbls>
           <c:cat>
-            <c:multiLvlStrRef>
+            <c:strRef>
               <c:f>Sheet1!$A$2:$A$8</c:f>
-              <c:multiLvlStrCache>
+              <c:strCache>
                 <c:ptCount val="7"/>
-                <c:lvl>
-                  <c:pt idx="0">
-                    <c:v>Eastern NC</c:v>
-                  </c:pt>
-                  <c:pt idx="1">
-                    <c:v>Western NC</c:v>
-                  </c:pt>
-                  <c:pt idx="2">
-                    <c:v>SC</c:v>
-                  </c:pt>
-                  <c:pt idx="3">
-                    <c:v>TN</c:v>
-                  </c:pt>
-                  <c:pt idx="4">
-                    <c:v>VA</c:v>
-                  </c:pt>
-                  <c:pt idx="5">
-                    <c:v>Iowa</c:v>
-                  </c:pt>
-                  <c:pt idx="6">
-                    <c:v>Nebraska</c:v>
-                  </c:pt>
-                </c:lvl>
-              </c:multiLvlStrCache>
-            </c:multiLvlStrRef>
+                <c:pt idx="0">
+                  <c:v>Eastern NC</c:v>
+                </c:pt>
+                <c:pt idx="1">
+                  <c:v>Western NC</c:v>
+                </c:pt>
+                <c:pt idx="2">
+                  <c:v>SC</c:v>
+                </c:pt>
+                <c:pt idx="3">
+                  <c:v>TN</c:v>
+                </c:pt>
+                <c:pt idx="4">
+                  <c:v>VA</c:v>
+                </c:pt>
+                <c:pt idx="5">
+                  <c:v>Iowa</c:v>
+                </c:pt>
+                <c:pt idx="6">
+                  <c:v>Nebraska</c:v>
+                </c:pt>
+              </c:strCache>
+            </c:strRef>
           </c:cat>
           <c:val>
             <c:numRef>
@@ -1230,6 +1367,11 @@
               </c:numCache>
             </c:numRef>
           </c:val>
+          <c:extLst>
+            <c:ext xmlns:c16="http://schemas.microsoft.com/office/drawing/2014/chart" uri="{C3380CC4-5D6E-409C-BE32-E72D297353CC}">
+              <c16:uniqueId val="{00000003-F8EC-45DF-BC0B-332ECDADB56E}"/>
+            </c:ext>
+          </c:extLst>
         </c:ser>
         <c:ser>
           <c:idx val="4"/>
@@ -1254,18 +1396,26 @@
           <c:invertIfNegative val="0"/>
           <c:dLbls>
             <c:numFmt formatCode="#,##0" sourceLinked="0"/>
+            <c:spPr>
+              <a:noFill/>
+              <a:ln>
+                <a:noFill/>
+              </a:ln>
+              <a:effectLst/>
+            </c:spPr>
             <c:txPr>
               <a:bodyPr/>
               <a:lstStyle/>
               <a:p>
                 <a:pPr>
-                  <a:defRPr b="0" i="0" strike="noStrike" sz="900" u="none">
+                  <a:defRPr sz="900" b="0" i="0" u="none" strike="noStrike">
                     <a:solidFill>
                       <a:srgbClr val="3A3A3A"/>
                     </a:solidFill>
                     <a:latin typeface="Calibri"/>
                   </a:defRPr>
                 </a:pPr>
+                <a:endParaRPr lang="en-US"/>
               </a:p>
             </c:txPr>
             <c:dLblPos val="ctr"/>
@@ -1276,37 +1426,40 @@
             <c:showPercent val="0"/>
             <c:showBubbleSize val="0"/>
             <c:showLeaderLines val="0"/>
+            <c:extLst>
+              <c:ext xmlns:c15="http://schemas.microsoft.com/office/drawing/2012/chart" uri="{CE6537A1-D6FC-4f65-9D91-7224C49458BB}">
+                <c15:showLeaderLines val="0"/>
+              </c:ext>
+            </c:extLst>
           </c:dLbls>
           <c:cat>
-            <c:multiLvlStrRef>
+            <c:strRef>
               <c:f>Sheet1!$A$2:$A$8</c:f>
-              <c:multiLvlStrCache>
+              <c:strCache>
                 <c:ptCount val="7"/>
-                <c:lvl>
-                  <c:pt idx="0">
-                    <c:v>Eastern NC</c:v>
-                  </c:pt>
-                  <c:pt idx="1">
-                    <c:v>Western NC</c:v>
-                  </c:pt>
-                  <c:pt idx="2">
-                    <c:v>SC</c:v>
-                  </c:pt>
-                  <c:pt idx="3">
-                    <c:v>TN</c:v>
-                  </c:pt>
-                  <c:pt idx="4">
-                    <c:v>VA</c:v>
-                  </c:pt>
-                  <c:pt idx="5">
-                    <c:v>Iowa</c:v>
-                  </c:pt>
-                  <c:pt idx="6">
-                    <c:v>Nebraska</c:v>
-                  </c:pt>
-                </c:lvl>
-              </c:multiLvlStrCache>
-            </c:multiLvlStrRef>
+                <c:pt idx="0">
+                  <c:v>Eastern NC</c:v>
+                </c:pt>
+                <c:pt idx="1">
+                  <c:v>Western NC</c:v>
+                </c:pt>
+                <c:pt idx="2">
+                  <c:v>SC</c:v>
+                </c:pt>
+                <c:pt idx="3">
+                  <c:v>TN</c:v>
+                </c:pt>
+                <c:pt idx="4">
+                  <c:v>VA</c:v>
+                </c:pt>
+                <c:pt idx="5">
+                  <c:v>Iowa</c:v>
+                </c:pt>
+                <c:pt idx="6">
+                  <c:v>Nebraska</c:v>
+                </c:pt>
+              </c:strCache>
+            </c:strRef>
           </c:cat>
           <c:val>
             <c:numRef>
@@ -1338,23 +1491,13 @@
               </c:numCache>
             </c:numRef>
           </c:val>
+          <c:extLst>
+            <c:ext xmlns:c16="http://schemas.microsoft.com/office/drawing/2014/chart" uri="{C3380CC4-5D6E-409C-BE32-E72D297353CC}">
+              <c16:uniqueId val="{00000004-F8EC-45DF-BC0B-332ECDADB56E}"/>
+            </c:ext>
+          </c:extLst>
         </c:ser>
         <c:dLbls>
-          <c:numFmt formatCode="#,##0" sourceLinked="0"/>
-          <c:txPr>
-            <a:bodyPr/>
-            <a:lstStyle/>
-            <a:p>
-              <a:pPr>
-                <a:defRPr b="0" i="0" strike="noStrike" sz="900" u="none">
-                  <a:solidFill>
-                    <a:srgbClr val="3A3A3A"/>
-                  </a:solidFill>
-                  <a:latin typeface="Calibri"/>
-                </a:defRPr>
-              </a:pPr>
-            </a:p>
-          </c:txPr>
           <c:dLblPos val="ctr"/>
           <c:showLegendKey val="0"/>
           <c:showVal val="1"/>
@@ -1362,13 +1505,11 @@
           <c:showSerName val="0"/>
           <c:showPercent val="0"/>
           <c:showBubbleSize val="0"/>
-          <c:showLeaderLines val="0"/>
         </c:dLbls>
         <c:gapWidth val="50"/>
         <c:overlap val="100"/>
         <c:axId val="2094734554"/>
         <c:axId val="2094734552"/>
-        <c:axId val="2094734556"/>
       </c:barChart>
       <c:catAx>
         <c:axId val="2094734554"/>
@@ -1409,6 +1550,7 @@
         <c:crosses val="autoZero"/>
         <c:auto val="1"/>
         <c:lblAlgn val="ctr"/>
+        <c:lblOffset val="100"/>
         <c:noMultiLvlLbl val="1"/>
       </c:catAx>
       <c:valAx>
@@ -1497,6 +1639,7 @@
     </c:legend>
     <c:plotVisOnly val="1"/>
     <c:dispBlanksAs val="span"/>
+    <c:showDLblsOverMax val="1"/>
   </c:chart>
   <c:spPr>
     <a:noFill/>
@@ -1505,6 +1648,529 @@
     </a:ln>
     <a:effectLst/>
   </c:spPr>
+  <c:externalData r:id="rId1">
+    <c:autoUpdate val="0"/>
+  </c:externalData>
+</c:chartSpace>
+</file>
+
+<file path=ppt/charts/chart3.xml><?xml version="1.0" encoding="utf-8"?>
+<c:chartSpace xmlns:c="http://schemas.openxmlformats.org/drawingml/2006/chart" xmlns:a="http://schemas.openxmlformats.org/drawingml/2006/main" xmlns:r="http://schemas.openxmlformats.org/officeDocument/2006/relationships">
+  <c:date1904 val="0"/>
+  <c:chart>
+    <c:autoTitleDeleted val="1"/>
+    <c:plotArea>
+      <c:barChart>
+        <c:barDir val="col"/>
+        <c:grouping val="stacked"/>
+        <c:ser>
+          <c:idx val="0"/>
+          <c:order val="0"/>
+          <c:tx>
+            <c:strRef>
+              <c:f>Sheet1!$B$1</c:f>
+              <c:strCache>
+                <c:ptCount val="1"/>
+                <c:pt idx="0">
+                  <c:v>Small  0–300</c:v>
+                </c:pt>
+              </c:strCache>
+            </c:strRef>
+          </c:tx>
+          <c:spPr>
+            <a:solidFill>
+              <a:srgbClr val="9C6B76"/>
+            </a:solidFill>
+            <a:ln>
+              <a:noFill/>
+            </a:ln>
+          </c:spPr>
+          <c:cat>
+            <c:strRef>
+              <c:f>Sheet1!$A$2:$A$8</c:f>
+              <c:strCache>
+                <c:ptCount val="7"/>
+                <c:pt idx="0">
+                  <c:v>Eastern NC</c:v>
+                </c:pt>
+                <c:pt idx="1">
+                  <c:v>Western NC</c:v>
+                </c:pt>
+                <c:pt idx="2">
+                  <c:v>SC</c:v>
+                </c:pt>
+                <c:pt idx="3">
+                  <c:v>TN</c:v>
+                </c:pt>
+                <c:pt idx="4">
+                  <c:v>VA</c:v>
+                </c:pt>
+                <c:pt idx="5">
+                  <c:v>Iowa</c:v>
+                </c:pt>
+                <c:pt idx="6">
+                  <c:v>Nebraska</c:v>
+                </c:pt>
+              </c:strCache>
+            </c:strRef>
+          </c:cat>
+          <c:val>
+            <c:numRef>
+              <c:f>Sheet1!$B$2:$B$8</c:f>
+              <c:numCache>
+                <c:formatCode>General</c:formatCode>
+                <c:ptCount val="7"/>
+                <c:pt idx="0">
+                  <c:v>2</c:v>
+                </c:pt>
+                <c:pt idx="1">
+                  <c:v>6</c:v>
+                </c:pt>
+                <c:pt idx="2">
+                  <c:v>2</c:v>
+                </c:pt>
+                <c:pt idx="3">
+                  <c:v>1</c:v>
+                </c:pt>
+                <c:pt idx="4">
+                  <c:v>2</c:v>
+                </c:pt>
+                <c:pt idx="5">
+                  <c:v>1</c:v>
+                </c:pt>
+              </c:numCache>
+            </c:numRef>
+          </c:val>
+        </c:ser>
+        <c:ser>
+          <c:idx val="1"/>
+          <c:order val="1"/>
+          <c:tx>
+            <c:strRef>
+              <c:f>Sheet1!$C$1</c:f>
+              <c:strCache>
+                <c:ptCount val="1"/>
+                <c:pt idx="0">
+                  <c:v>Medium  350–2,500</c:v>
+                </c:pt>
+              </c:strCache>
+            </c:strRef>
+          </c:tx>
+          <c:spPr>
+            <a:solidFill>
+              <a:srgbClr val="6D2E46"/>
+            </a:solidFill>
+            <a:ln>
+              <a:noFill/>
+            </a:ln>
+          </c:spPr>
+          <c:cat>
+            <c:strRef>
+              <c:f>Sheet1!$A$2:$A$8</c:f>
+              <c:strCache>
+                <c:ptCount val="7"/>
+                <c:pt idx="0">
+                  <c:v>Eastern NC</c:v>
+                </c:pt>
+                <c:pt idx="1">
+                  <c:v>Western NC</c:v>
+                </c:pt>
+                <c:pt idx="2">
+                  <c:v>SC</c:v>
+                </c:pt>
+                <c:pt idx="3">
+                  <c:v>TN</c:v>
+                </c:pt>
+                <c:pt idx="4">
+                  <c:v>VA</c:v>
+                </c:pt>
+                <c:pt idx="5">
+                  <c:v>Iowa</c:v>
+                </c:pt>
+                <c:pt idx="6">
+                  <c:v>Nebraska</c:v>
+                </c:pt>
+              </c:strCache>
+            </c:strRef>
+          </c:cat>
+          <c:val>
+            <c:numRef>
+              <c:f>Sheet1!$C$2:$C$8</c:f>
+              <c:numCache>
+                <c:formatCode>General</c:formatCode>
+                <c:ptCount val="7"/>
+                <c:pt idx="0">
+                  <c:v>3</c:v>
+                </c:pt>
+                <c:pt idx="3">
+                  <c:v>1</c:v>
+                </c:pt>
+                <c:pt idx="4">
+                  <c:v>1</c:v>
+                </c:pt>
+              </c:numCache>
+            </c:numRef>
+          </c:val>
+        </c:ser>
+        <c:ser>
+          <c:idx val="2"/>
+          <c:order val="2"/>
+          <c:tx>
+            <c:strRef>
+              <c:f>Sheet1!$D$1</c:f>
+              <c:strCache>
+                <c:ptCount val="1"/>
+                <c:pt idx="0">
+                  <c:v>Med-High  2,500–5,000</c:v>
+                </c:pt>
+              </c:strCache>
+            </c:strRef>
+          </c:tx>
+          <c:spPr>
+            <a:solidFill>
+              <a:srgbClr val="A9601F"/>
+            </a:solidFill>
+            <a:ln>
+              <a:noFill/>
+            </a:ln>
+          </c:spPr>
+          <c:cat>
+            <c:strRef>
+              <c:f>Sheet1!$A$2:$A$8</c:f>
+              <c:strCache>
+                <c:ptCount val="7"/>
+                <c:pt idx="0">
+                  <c:v>Eastern NC</c:v>
+                </c:pt>
+                <c:pt idx="1">
+                  <c:v>Western NC</c:v>
+                </c:pt>
+                <c:pt idx="2">
+                  <c:v>SC</c:v>
+                </c:pt>
+                <c:pt idx="3">
+                  <c:v>TN</c:v>
+                </c:pt>
+                <c:pt idx="4">
+                  <c:v>VA</c:v>
+                </c:pt>
+                <c:pt idx="5">
+                  <c:v>Iowa</c:v>
+                </c:pt>
+                <c:pt idx="6">
+                  <c:v>Nebraska</c:v>
+                </c:pt>
+              </c:strCache>
+            </c:strRef>
+          </c:cat>
+          <c:val>
+            <c:numRef>
+              <c:f>Sheet1!$D$2:$D$8</c:f>
+              <c:numCache>
+                <c:formatCode>General</c:formatCode>
+                <c:ptCount val="7"/>
+                <c:pt idx="0">
+                  <c:v>1</c:v>
+                </c:pt>
+                <c:pt idx="3">
+                  <c:v>2</c:v>
+                </c:pt>
+              </c:numCache>
+            </c:numRef>
+          </c:val>
+        </c:ser>
+        <c:ser>
+          <c:idx val="3"/>
+          <c:order val="3"/>
+          <c:tx>
+            <c:strRef>
+              <c:f>Sheet1!$E$1</c:f>
+              <c:strCache>
+                <c:ptCount val="1"/>
+                <c:pt idx="0">
+                  <c:v>High  5,000+</c:v>
+                </c:pt>
+              </c:strCache>
+            </c:strRef>
+          </c:tx>
+          <c:spPr>
+            <a:solidFill>
+              <a:srgbClr val="3D1A29"/>
+            </a:solidFill>
+            <a:ln>
+              <a:noFill/>
+            </a:ln>
+          </c:spPr>
+          <c:cat>
+            <c:strRef>
+              <c:f>Sheet1!$A$2:$A$8</c:f>
+              <c:strCache>
+                <c:ptCount val="7"/>
+                <c:pt idx="0">
+                  <c:v>Eastern NC</c:v>
+                </c:pt>
+                <c:pt idx="1">
+                  <c:v>Western NC</c:v>
+                </c:pt>
+                <c:pt idx="2">
+                  <c:v>SC</c:v>
+                </c:pt>
+                <c:pt idx="3">
+                  <c:v>TN</c:v>
+                </c:pt>
+                <c:pt idx="4">
+                  <c:v>VA</c:v>
+                </c:pt>
+                <c:pt idx="5">
+                  <c:v>Iowa</c:v>
+                </c:pt>
+                <c:pt idx="6">
+                  <c:v>Nebraska</c:v>
+                </c:pt>
+              </c:strCache>
+            </c:strRef>
+          </c:cat>
+          <c:val>
+            <c:numRef>
+              <c:f>Sheet1!$E$2:$E$8</c:f>
+              <c:numCache>
+                <c:formatCode>General</c:formatCode>
+                <c:ptCount val="7"/>
+                <c:pt idx="0">
+                  <c:v>2</c:v>
+                </c:pt>
+                <c:pt idx="3">
+                  <c:v>1</c:v>
+                </c:pt>
+                <c:pt idx="5">
+                  <c:v>6</c:v>
+                </c:pt>
+                <c:pt idx="6">
+                  <c:v>1</c:v>
+                </c:pt>
+              </c:numCache>
+            </c:numRef>
+          </c:val>
+        </c:ser>
+        <c:ser>
+          <c:idx val="4"/>
+          <c:order val="4"/>
+          <c:tx>
+            <c:strRef>
+              <c:f>Sheet1!$F$1</c:f>
+              <c:strCache>
+                <c:ptCount val="1"/>
+                <c:pt idx="0">
+                  <c:v>To confirm</c:v>
+                </c:pt>
+              </c:strCache>
+            </c:strRef>
+          </c:tx>
+          <c:spPr>
+            <a:solidFill>
+              <a:srgbClr val="7A7075"/>
+            </a:solidFill>
+            <a:ln>
+              <a:noFill/>
+            </a:ln>
+          </c:spPr>
+          <c:cat>
+            <c:strRef>
+              <c:f>Sheet1!$A$2:$A$8</c:f>
+              <c:strCache>
+                <c:ptCount val="7"/>
+                <c:pt idx="0">
+                  <c:v>Eastern NC</c:v>
+                </c:pt>
+                <c:pt idx="1">
+                  <c:v>Western NC</c:v>
+                </c:pt>
+                <c:pt idx="2">
+                  <c:v>SC</c:v>
+                </c:pt>
+                <c:pt idx="3">
+                  <c:v>TN</c:v>
+                </c:pt>
+                <c:pt idx="4">
+                  <c:v>VA</c:v>
+                </c:pt>
+                <c:pt idx="5">
+                  <c:v>Iowa</c:v>
+                </c:pt>
+                <c:pt idx="6">
+                  <c:v>Nebraska</c:v>
+                </c:pt>
+              </c:strCache>
+            </c:strRef>
+          </c:cat>
+          <c:val>
+            <c:numRef>
+              <c:f>Sheet1!$F$2:$F$8</c:f>
+              <c:numCache>
+                <c:formatCode>General</c:formatCode>
+                <c:ptCount val="7"/>
+                <c:pt idx="0">
+                  <c:v>6</c:v>
+                </c:pt>
+                <c:pt idx="1">
+                  <c:v>8</c:v>
+                </c:pt>
+                <c:pt idx="2">
+                  <c:v>3</c:v>
+                </c:pt>
+                <c:pt idx="3">
+                  <c:v>2</c:v>
+                </c:pt>
+                <c:pt idx="4">
+                  <c:v>2</c:v>
+                </c:pt>
+                <c:pt idx="5">
+                  <c:v>1</c:v>
+                </c:pt>
+              </c:numCache>
+            </c:numRef>
+          </c:val>
+        </c:ser>
+        <c:dLbls>
+          <c:txPr>
+            <a:bodyPr/>
+            <a:lstStyle/>
+            <a:p>
+              <a:pPr>
+                <a:defRPr sz="1200" b="1">
+                  <a:solidFill>
+                    <a:srgbClr val="FFFFFF"/>
+                  </a:solidFill>
+                  <a:latin typeface="Calibri"/>
+                </a:defRPr>
+              </a:pPr>
+            </a:p>
+          </c:txPr>
+          <c:dLblPos val="ctr"/>
+          <c:showLegendKey val="0"/>
+          <c:showVal val="1"/>
+          <c:showCatName val="0"/>
+          <c:showSerName val="0"/>
+          <c:showPercent val="0"/>
+          <c:showBubbleSize val="0"/>
+          <c:showLeaderLines val="1"/>
+        </c:dLbls>
+        <c:gapWidth val="55"/>
+        <c:overlap val="100"/>
+        <c:axId val="-2068027336"/>
+        <c:axId val="-2113994440"/>
+      </c:barChart>
+      <c:catAx>
+        <c:axId val="-2068027336"/>
+        <c:scaling>
+          <c:orientation val="minMax"/>
+        </c:scaling>
+        <c:delete val="0"/>
+        <c:axPos val="b"/>
+        <c:majorTickMark val="out"/>
+        <c:minorTickMark val="none"/>
+        <c:tickLblPos val="nextTo"/>
+        <c:spPr>
+          <a:ln>
+            <a:solidFill>
+              <a:srgbClr val="D8CCD0"/>
+            </a:solidFill>
+          </a:ln>
+        </c:spPr>
+        <c:txPr>
+          <a:bodyPr/>
+          <a:lstStyle/>
+          <a:p>
+            <a:pPr>
+              <a:defRPr sz="1200" b="1">
+                <a:solidFill>
+                  <a:srgbClr val="2B2B2B"/>
+                </a:solidFill>
+                <a:latin typeface="Calibri"/>
+              </a:defRPr>
+            </a:pPr>
+          </a:p>
+        </c:txPr>
+        <c:crossAx val="-2113994440"/>
+        <c:crosses val="autoZero"/>
+        <c:auto val="1"/>
+        <c:lblAlgn val="ctr"/>
+        <c:lblOffset val="100"/>
+        <c:noMultiLvlLbl val="0"/>
+      </c:catAx>
+      <c:valAx>
+        <c:axId val="-2113994440"/>
+        <c:scaling>
+          <c:max val="16.0"/>
+        </c:scaling>
+        <c:delete val="0"/>
+        <c:axPos val="l"/>
+        <c:majorGridlines>
+          <c:spPr>
+            <a:ln>
+              <a:solidFill>
+                <a:srgbClr val="EDE4E6"/>
+              </a:solidFill>
+            </a:ln>
+          </c:spPr>
+        </c:majorGridlines>
+        <c:majorTickMark val="out"/>
+        <c:minorTickMark val="none"/>
+        <c:tickLblPos val="nextTo"/>
+        <c:spPr>
+          <a:ln>
+            <a:noFill/>
+          </a:ln>
+        </c:spPr>
+        <c:txPr>
+          <a:bodyPr/>
+          <a:lstStyle/>
+          <a:p>
+            <a:pPr>
+              <a:defRPr sz="1000">
+                <a:solidFill>
+                  <a:srgbClr val="6E6E6E"/>
+                </a:solidFill>
+                <a:latin typeface="Calibri"/>
+              </a:defRPr>
+            </a:pPr>
+          </a:p>
+        </c:txPr>
+        <c:crossAx val="-2068027336"/>
+        <c:crosses val="autoZero"/>
+        <c:majorUnit val="4.0"/>
+      </c:valAx>
+    </c:plotArea>
+    <c:legend>
+      <c:legendPos val="b"/>
+      <c:overlay val="0"/>
+      <c:txPr>
+        <a:bodyPr/>
+        <a:lstStyle/>
+        <a:p>
+          <a:pPr>
+            <a:defRPr sz="1100">
+              <a:solidFill>
+                <a:srgbClr val="2B2B2B"/>
+              </a:solidFill>
+              <a:latin typeface="Calibri"/>
+            </a:defRPr>
+          </a:pPr>
+        </a:p>
+      </c:txPr>
+    </c:legend>
+    <c:dispBlanksAs val="gap"/>
+  </c:chart>
+  <c:txPr>
+    <a:bodyPr/>
+    <a:lstStyle/>
+    <a:p>
+      <a:pPr>
+        <a:defRPr sz="1800"/>
+      </a:pPr>
+      <a:endParaRPr lang="en-US"/>
+    </a:p>
+  </c:txPr>
   <c:externalData r:id="rId1">
     <c:autoUpdate val="0"/>
   </c:externalData>
@@ -1533,234 +2199,10 @@
           <a:chExt cx="0" cy="0"/>
         </a:xfrm>
       </p:grpSpPr>
-      <p:sp>
-        <p:nvSpPr>
-          <p:cNvPr id="2" name="Header Placeholder 1"/>
-          <p:cNvSpPr>
-            <a:spLocks noGrp="1"/>
-          </p:cNvSpPr>
-          <p:nvPr>
-            <p:ph type="hdr" sz="quarter"/>
-          </p:nvPr>
-        </p:nvSpPr>
-        <p:spPr>
-          <a:xfrm>
-            <a:off x="0" y="0"/>
-            <a:ext cx="2971800" cy="458788"/>
-          </a:xfrm>
-          <a:prstGeom prst="rect">
-            <a:avLst/>
-          </a:prstGeom>
-        </p:spPr>
-        <p:txBody>
-          <a:bodyPr vert="horz" lIns="91440" tIns="45720" rIns="91440" bIns="45720" rtlCol="0"/>
-          <a:lstStyle>
-            <a:lvl1pPr algn="l">
-              <a:defRPr sz="1200"/>
-            </a:lvl1pPr>
-          </a:lstStyle>
-          <a:p>
-            <a:endParaRPr lang="en-US"/>
-          </a:p>
-        </p:txBody>
-      </p:sp>
-      <p:sp>
-        <p:nvSpPr>
-          <p:cNvPr id="3" name="Date Placeholder 2"/>
-          <p:cNvSpPr>
-            <a:spLocks noGrp="1"/>
-          </p:cNvSpPr>
-          <p:nvPr>
-            <p:ph type="dt" idx="1"/>
-          </p:nvPr>
-        </p:nvSpPr>
-        <p:spPr>
-          <a:xfrm>
-            <a:off x="3884613" y="0"/>
-            <a:ext cx="2971800" cy="458788"/>
-          </a:xfrm>
-          <a:prstGeom prst="rect">
-            <a:avLst/>
-          </a:prstGeom>
-        </p:spPr>
-        <p:txBody>
-          <a:bodyPr vert="horz" lIns="91440" tIns="45720" rIns="91440" bIns="45720" rtlCol="0"/>
-          <a:lstStyle>
-            <a:lvl1pPr algn="r">
-              <a:defRPr sz="1200"/>
-            </a:lvl1pPr>
-          </a:lstStyle>
-          <a:p>
-            <a:fld id="{5282F153-3F37-0F45-9E97-73ACFA13230C}" type="datetimeFigureOut">
-              <a:rPr lang="en-US"/>
-              <a:t>7/23/19</a:t>
-            </a:fld>
-            <a:endParaRPr lang="en-US"/>
-          </a:p>
-        </p:txBody>
-      </p:sp>
-      <p:sp>
-        <p:nvSpPr>
-          <p:cNvPr id="4" name="Slide Image Placeholder 3"/>
-          <p:cNvSpPr>
-            <a:spLocks noGrp="1" noRot="1" noChangeAspect="1"/>
-          </p:cNvSpPr>
-          <p:nvPr>
-            <p:ph type="sldImg" idx="2"/>
-          </p:nvPr>
-        </p:nvSpPr>
-        <p:spPr>
-          <a:xfrm>
-            <a:off x="685800" y="1143000"/>
-            <a:ext cx="5486400" cy="3086100"/>
-          </a:xfrm>
-          <a:prstGeom prst="rect">
-            <a:avLst/>
-          </a:prstGeom>
-          <a:noFill/>
-          <a:ln w="12700">
-            <a:solidFill>
-              <a:prstClr val="black"/>
-            </a:solidFill>
-          </a:ln>
-        </p:spPr>
-        <p:txBody>
-          <a:bodyPr vert="horz" lIns="91440" tIns="45720" rIns="91440" bIns="45720" rtlCol="0" anchor="ctr"/>
-          <a:lstStyle/>
-          <a:p>
-            <a:endParaRPr lang="en-US"/>
-          </a:p>
-        </p:txBody>
-      </p:sp>
-      <p:sp>
-        <p:nvSpPr>
-          <p:cNvPr id="5" name="Notes Placeholder 4"/>
-          <p:cNvSpPr>
-            <a:spLocks noGrp="1"/>
-          </p:cNvSpPr>
-          <p:nvPr>
-            <p:ph type="body" sz="quarter" idx="3"/>
-          </p:nvPr>
-        </p:nvSpPr>
-        <p:spPr>
-          <a:xfrm>
-            <a:off x="685800" y="4400550"/>
-            <a:ext cx="5486400" cy="3600450"/>
-          </a:xfrm>
-          <a:prstGeom prst="rect">
-            <a:avLst/>
-          </a:prstGeom>
-        </p:spPr>
-        <p:txBody>
-          <a:bodyPr vert="horz" lIns="91440" tIns="45720" rIns="91440" bIns="45720" rtlCol="0"/>
-          <a:lstStyle/>
-          <a:p>
-            <a:pPr lvl="0"/>
-            <a:r>
-              <a:rPr lang="en-US"/>
-              <a:t>Click to edit Master text styles</a:t>
-            </a:r>
-          </a:p>
-          <a:p>
-            <a:pPr lvl="1"/>
-            <a:r>
-              <a:rPr lang="en-US"/>
-              <a:t>Second level</a:t>
-            </a:r>
-          </a:p>
-          <a:p>
-            <a:pPr lvl="2"/>
-            <a:r>
-              <a:rPr lang="en-US"/>
-              <a:t>Third level</a:t>
-            </a:r>
-          </a:p>
-          <a:p>
-            <a:pPr lvl="3"/>
-            <a:r>
-              <a:rPr lang="en-US"/>
-              <a:t>Fourth level</a:t>
-            </a:r>
-          </a:p>
-          <a:p>
-            <a:pPr lvl="4"/>
-            <a:r>
-              <a:rPr lang="en-US"/>
-              <a:t>Fifth level</a:t>
-            </a:r>
-          </a:p>
-        </p:txBody>
-      </p:sp>
-      <p:sp>
-        <p:nvSpPr>
-          <p:cNvPr id="6" name="Footer Placeholder 5"/>
-          <p:cNvSpPr>
-            <a:spLocks noGrp="1"/>
-          </p:cNvSpPr>
-          <p:nvPr>
-            <p:ph type="ftr" sz="quarter" idx="4"/>
-          </p:nvPr>
-        </p:nvSpPr>
-        <p:spPr>
-          <a:xfrm>
-            <a:off x="0" y="8685213"/>
-            <a:ext cx="2971800" cy="458787"/>
-          </a:xfrm>
-          <a:prstGeom prst="rect">
-            <a:avLst/>
-          </a:prstGeom>
-        </p:spPr>
-        <p:txBody>
-          <a:bodyPr vert="horz" lIns="91440" tIns="45720" rIns="91440" bIns="45720" rtlCol="0" anchor="b"/>
-          <a:lstStyle>
-            <a:lvl1pPr algn="l">
-              <a:defRPr sz="1200"/>
-            </a:lvl1pPr>
-          </a:lstStyle>
-          <a:p>
-            <a:endParaRPr lang="en-US"/>
-          </a:p>
-        </p:txBody>
-      </p:sp>
-      <p:sp>
-        <p:nvSpPr>
-          <p:cNvPr id="7" name="Slide Number Placeholder 6"/>
-          <p:cNvSpPr>
-            <a:spLocks noGrp="1"/>
-          </p:cNvSpPr>
-          <p:nvPr>
-            <p:ph type="sldNum" sz="quarter" idx="5"/>
-          </p:nvPr>
-        </p:nvSpPr>
-        <p:spPr>
-          <a:xfrm>
-            <a:off x="3884613" y="8685213"/>
-            <a:ext cx="2971800" cy="458787"/>
-          </a:xfrm>
-          <a:prstGeom prst="rect">
-            <a:avLst/>
-          </a:prstGeom>
-        </p:spPr>
-        <p:txBody>
-          <a:bodyPr vert="horz" lIns="91440" tIns="45720" rIns="91440" bIns="45720" rtlCol="0" anchor="b"/>
-          <a:lstStyle>
-            <a:lvl1pPr algn="r">
-              <a:defRPr sz="1200"/>
-            </a:lvl1pPr>
-          </a:lstStyle>
-          <a:p>
-            <a:fld id="{CE5E9CC1-C706-0F49-92D6-E571CC5EEA8F}" type="slidenum">
-              <a:rPr lang="en-US"/>
-              <a:t>‹#›</a:t>
-            </a:fld>
-            <a:endParaRPr lang="en-US"/>
-          </a:p>
-        </p:txBody>
-      </p:sp>
     </p:spTree>
     <p:extLst>
       <p:ext uri="{BB962C8B-B14F-4D97-AF65-F5344CB8AC3E}">
-        <p14:creationId xmlns:p14="http://schemas.microsoft.com/office/powerpoint/2010/main" val="1024086991"/>
+        <p14:creationId xmlns:p14="http://schemas.microsoft.com/office/powerpoint/2010/main" val="657071067"/>
       </p:ext>
     </p:extLst>
   </p:cSld>
@@ -1908,7 +2350,6 @@
               <a:rPr lang="en-US" dirty="0"/>
               <a:t>Purpose: leave with a strategy and an agreed outreach process. Pre-read is the 12-tab workbook.</a:t>
             </a:r>
-            <a:endParaRPr lang="en-US" dirty="0"/>
           </a:p>
         </p:txBody>
       </p:sp>
@@ -1996,7 +2437,6 @@
               <a:rPr lang="en-US" dirty="0"/>
               <a:t>Frame the decision. Lead time is the reason this is urgent. Two outcomes: strategy, and the outreach process.</a:t>
             </a:r>
-            <a:endParaRPr lang="en-US" dirty="0"/>
           </a:p>
         </p:txBody>
       </p:sp>
@@ -2084,7 +2524,6 @@
               <a:rPr lang="en-US" dirty="0"/>
               <a:t>Two decisions here: any further requirements, and the weighting. Also flag sow vs market hog — it decides roughly half the candidate pool.</a:t>
             </a:r>
-            <a:endParaRPr lang="en-US" dirty="0"/>
           </a:p>
         </p:txBody>
       </p:sp>
@@ -2172,7 +2611,6 @@
               <a:rPr lang="en-US" dirty="0"/>
               <a:t>Eastern NC: 14 plants, 10 federal/TA — the export-capable base and the aggregation cluster. Western NC: 14 plants but small and largely state-inspected, so domestic only. Iowa: 8 plants, 6 High tier. Nebraska: 1. Proximity matters because aggregation only works if plants share one crew.</a:t>
             </a:r>
-            <a:endParaRPr lang="en-US" dirty="0"/>
           </a:p>
         </p:txBody>
       </p:sp>
@@ -2260,7 +2698,6 @@
               <a:rPr lang="en-US" dirty="0"/>
               <a:t>The model may differ by tier: Model A suits small plants, Model B suits large ones.</a:t>
             </a:r>
-            <a:endParaRPr lang="en-US" dirty="0"/>
           </a:p>
         </p:txBody>
       </p:sp>
@@ -2348,7 +2785,6 @@
               <a:rPr lang="en-US" dirty="0"/>
               <a:t>Model B already exists at these suppliers. Animal Biotech's risk is traceability to a listed origin establishment — without a named, APHIS/TRACES-listed abattoir there is no EU health certificate. The reason to call the green-lit plants is to get a real price per block so we can compare against our own fully-loaded cost (TTLC), not just what we pay at the door.</a:t>
             </a:r>
-            <a:endParaRPr lang="en-US" dirty="0"/>
           </a:p>
         </p:txBody>
       </p:sp>
@@ -2436,7 +2872,6 @@
               <a:rPr lang="en-US" dirty="0"/>
               <a:t>The process is a straw man — the point is to agree the shape and the gates, not the detail.</a:t>
             </a:r>
-            <a:endParaRPr lang="en-US" dirty="0"/>
           </a:p>
         </p:txBody>
       </p:sp>
@@ -2509,6 +2944,11 @@
 <file path=ppt/slideMasters/slideMaster1.xml><?xml version="1.0" encoding="utf-8"?>
 <p:sldMaster xmlns:a="http://schemas.openxmlformats.org/drawingml/2006/main" xmlns:r="http://schemas.openxmlformats.org/officeDocument/2006/relationships" xmlns:p="http://schemas.openxmlformats.org/presentationml/2006/main">
   <p:cSld>
+    <p:bg>
+      <p:bgRef idx="1001">
+        <a:schemeClr val="bg1"/>
+      </p:bgRef>
+    </p:bg>
     <p:spTree>
       <p:nvGrpSpPr>
         <p:cNvPr id="1" name=""/>
@@ -2791,6 +3231,7 @@
         <a:solidFill>
           <a:srgbClr val="6D2E46"/>
         </a:solidFill>
+        <a:effectLst/>
       </p:bgPr>
     </p:bg>
     <p:spTree>
@@ -2831,6 +3272,13 @@
             <a:prstDash val="solid"/>
           </a:ln>
         </p:spPr>
+        <p:txBody>
+          <a:bodyPr/>
+          <a:lstStyle/>
+          <a:p>
+            <a:endParaRPr lang="en-US"/>
+          </a:p>
+        </p:txBody>
       </p:sp>
       <p:sp>
         <p:nvSpPr>
@@ -2856,6 +3304,13 @@
             <a:prstDash val="solid"/>
           </a:ln>
         </p:spPr>
+        <p:txBody>
+          <a:bodyPr/>
+          <a:lstStyle/>
+          <a:p>
+            <a:endParaRPr lang="en-US"/>
+          </a:p>
+        </p:txBody>
       </p:sp>
       <p:sp>
         <p:nvSpPr>
@@ -2878,11 +3333,11 @@
           <a:bodyPr wrap="square" lIns="0" tIns="0" rIns="0" bIns="0" rtlCol="0" anchor="ctr"/>
           <a:lstStyle/>
           <a:p>
-            <a:pPr indent="0" marL="0">
-              <a:buNone/>
-            </a:pPr>
-            <a:r>
-              <a:rPr lang="en-US" sz="1200" b="1" spc="200" kern="0" dirty="0">
+            <a:pPr marL="0" indent="0">
+              <a:buNone/>
+            </a:pPr>
+            <a:r>
+              <a:rPr lang="en-US" sz="1200" b="1" kern="0" spc="200" dirty="0">
                 <a:solidFill>
                   <a:srgbClr val="A26769"/>
                 </a:solidFill>
@@ -2917,7 +3372,7 @@
           <a:bodyPr wrap="square" lIns="0" tIns="0" rIns="0" bIns="0" rtlCol="0" anchor="ctr"/>
           <a:lstStyle/>
           <a:p>
-            <a:pPr indent="0" marL="0">
+            <a:pPr marL="0" indent="0">
               <a:lnSpc>
                 <a:spcPts val="5000"/>
               </a:lnSpc>
@@ -2937,7 +3392,7 @@
             <a:endParaRPr lang="en-US" sz="4600" dirty="0"/>
           </a:p>
           <a:p>
-            <a:pPr indent="0" marL="0">
+            <a:pPr marL="0" indent="0">
               <a:lnSpc>
                 <a:spcPts val="5000"/>
               </a:lnSpc>
@@ -2979,7 +3434,7 @@
           <a:bodyPr wrap="square" lIns="0" tIns="0" rIns="0" bIns="0" rtlCol="0" anchor="ctr"/>
           <a:lstStyle/>
           <a:p>
-            <a:pPr indent="0" marL="0">
+            <a:pPr marL="0" indent="0">
               <a:buNone/>
             </a:pPr>
             <a:r>
@@ -2994,45 +3449,6 @@
               <a:t>Agreeing the strategy, the requirements, and how we approach suppliers</a:t>
             </a:r>
             <a:endParaRPr lang="en-US" sz="1600" dirty="0"/>
-          </a:p>
-        </p:txBody>
-      </p:sp>
-      <p:sp>
-        <p:nvSpPr>
-          <p:cNvPr id="7" name="Text 5"/>
-          <p:cNvSpPr/>
-          <p:nvPr/>
-        </p:nvSpPr>
-        <p:spPr>
-          <a:xfrm>
-            <a:off x="822960" y="5394960"/>
-            <a:ext cx="8412480" cy="274320"/>
-          </a:xfrm>
-          <a:prstGeom prst="rect">
-            <a:avLst/>
-          </a:prstGeom>
-          <a:noFill/>
-          <a:ln/>
-        </p:spPr>
-        <p:txBody>
-          <a:bodyPr wrap="square" lIns="0" tIns="0" rIns="0" bIns="0" rtlCol="0" anchor="ctr"/>
-          <a:lstStyle/>
-          <a:p>
-            <a:pPr indent="0" marL="0">
-              <a:buNone/>
-            </a:pPr>
-            <a:r>
-              <a:rPr lang="en-US" sz="1200" dirty="0">
-                <a:solidFill>
-                  <a:srgbClr val="A26769"/>
-                </a:solidFill>
-                <a:latin typeface="Calibri" pitchFamily="34" charset="0"/>
-                <a:ea typeface="Calibri" pitchFamily="34" charset="-122"/>
-                <a:cs typeface="Calibri" pitchFamily="34" charset="-120"/>
-              </a:rPr>
-              <a:t>60 minutes  ·  Company stakeholders  ·  Pre-read: Tissue Supplier Study</a:t>
-            </a:r>
-            <a:endParaRPr lang="en-US" sz="1200" dirty="0"/>
           </a:p>
         </p:txBody>
       </p:sp>
@@ -3082,11 +3498,11 @@
           <a:bodyPr wrap="square" lIns="0" tIns="0" rIns="0" bIns="0" rtlCol="0" anchor="ctr"/>
           <a:lstStyle/>
           <a:p>
-            <a:pPr indent="0" marL="0">
-              <a:buNone/>
-            </a:pPr>
-            <a:r>
-              <a:rPr lang="en-US" sz="1200" b="1" spc="200" kern="0" dirty="0">
+            <a:pPr marL="0" indent="0">
+              <a:buNone/>
+            </a:pPr>
+            <a:r>
+              <a:rPr lang="en-US" sz="1200" b="1" kern="0" spc="200" dirty="0">
                 <a:solidFill>
                   <a:srgbClr val="A26769"/>
                 </a:solidFill>
@@ -3121,7 +3537,7 @@
           <a:bodyPr wrap="square" lIns="0" tIns="0" rIns="0" bIns="0" rtlCol="0" anchor="ctr"/>
           <a:lstStyle/>
           <a:p>
-            <a:pPr indent="0" marL="0">
+            <a:pPr marL="0" indent="0">
               <a:buNone/>
             </a:pPr>
             <a:r>
@@ -3165,6 +3581,13 @@
             <a:prstDash val="solid"/>
           </a:ln>
         </p:spPr>
+        <p:txBody>
+          <a:bodyPr/>
+          <a:lstStyle/>
+          <a:p>
+            <a:endParaRPr lang="en-US"/>
+          </a:p>
+        </p:txBody>
       </p:sp>
       <p:sp>
         <p:nvSpPr>
@@ -3187,7 +3610,7 @@
           <a:bodyPr wrap="square" lIns="0" tIns="0" rIns="0" bIns="0" rtlCol="0" anchor="ctr"/>
           <a:lstStyle/>
           <a:p>
-            <a:pPr algn="ctr" indent="0" marL="0">
+            <a:pPr marL="0" indent="0" algn="ctr">
               <a:buNone/>
             </a:pPr>
             <a:r>
@@ -3226,7 +3649,7 @@
           <a:bodyPr wrap="square" lIns="0" tIns="0" rIns="0" bIns="0" rtlCol="0" anchor="ctr"/>
           <a:lstStyle/>
           <a:p>
-            <a:pPr indent="0" marL="0">
+            <a:pPr marL="0" indent="0">
               <a:buNone/>
             </a:pPr>
             <a:r>
@@ -3265,11 +3688,11 @@
           <a:bodyPr wrap="square" lIns="0" tIns="0" rIns="0" bIns="0" rtlCol="0" anchor="ctr"/>
           <a:lstStyle/>
           <a:p>
-            <a:pPr indent="0" marL="0">
-              <a:buNone/>
-            </a:pPr>
-            <a:r>
-              <a:rPr lang="en-US" sz="1200" b="1" spc="150" kern="0" dirty="0">
+            <a:pPr marL="0" indent="0">
+              <a:buNone/>
+            </a:pPr>
+            <a:r>
+              <a:rPr lang="en-US" sz="1200" b="1" kern="0" spc="150" dirty="0">
                 <a:solidFill>
                   <a:srgbClr val="A26769"/>
                 </a:solidFill>
@@ -3309,6 +3732,13 @@
             <a:prstDash val="solid"/>
           </a:ln>
         </p:spPr>
+        <p:txBody>
+          <a:bodyPr/>
+          <a:lstStyle/>
+          <a:p>
+            <a:endParaRPr lang="en-US"/>
+          </a:p>
+        </p:txBody>
       </p:sp>
       <p:sp>
         <p:nvSpPr>
@@ -3334,6 +3764,13 @@
             <a:prstDash val="solid"/>
           </a:ln>
         </p:spPr>
+        <p:txBody>
+          <a:bodyPr/>
+          <a:lstStyle/>
+          <a:p>
+            <a:endParaRPr lang="en-US"/>
+          </a:p>
+        </p:txBody>
       </p:sp>
       <p:sp>
         <p:nvSpPr>
@@ -3356,7 +3793,7 @@
           <a:bodyPr wrap="square" lIns="0" tIns="0" rIns="0" bIns="0" rtlCol="0" anchor="ctr"/>
           <a:lstStyle/>
           <a:p>
-            <a:pPr algn="ctr" indent="0" marL="0">
+            <a:pPr marL="0" indent="0" algn="ctr">
               <a:buNone/>
             </a:pPr>
             <a:r>
@@ -3395,7 +3832,7 @@
           <a:bodyPr wrap="square" lIns="0" tIns="0" rIns="0" bIns="0" rtlCol="0" anchor="ctr"/>
           <a:lstStyle/>
           <a:p>
-            <a:pPr indent="0" marL="0">
+            <a:pPr marL="0" indent="0">
               <a:buNone/>
             </a:pPr>
             <a:r>
@@ -3434,7 +3871,7 @@
           <a:bodyPr wrap="square" lIns="0" tIns="0" rIns="0" bIns="0" rtlCol="0" anchor="ctr"/>
           <a:lstStyle/>
           <a:p>
-            <a:pPr indent="0" marL="0">
+            <a:pPr marL="0" indent="0">
               <a:lnSpc>
                 <a:spcPts val="1800"/>
               </a:lnSpc>
@@ -3454,7 +3891,7 @@
             <a:endParaRPr lang="en-US" sz="1300" dirty="0"/>
           </a:p>
           <a:p>
-            <a:pPr indent="0" marL="0">
+            <a:pPr marL="0" indent="0">
               <a:lnSpc>
                 <a:spcPts val="1800"/>
               </a:lnSpc>
@@ -3474,7 +3911,7 @@
             <a:endParaRPr lang="en-US" sz="1300" dirty="0"/>
           </a:p>
           <a:p>
-            <a:pPr indent="0" marL="0">
+            <a:pPr marL="0" indent="0">
               <a:lnSpc>
                 <a:spcPts val="1800"/>
               </a:lnSpc>
@@ -3494,7 +3931,7 @@
             <a:endParaRPr lang="en-US" sz="1300" dirty="0"/>
           </a:p>
           <a:p>
-            <a:pPr indent="0" marL="0">
+            <a:pPr marL="0" indent="0">
               <a:lnSpc>
                 <a:spcPts val="1800"/>
               </a:lnSpc>
@@ -3514,7 +3951,7 @@
             <a:endParaRPr lang="en-US" sz="1300" dirty="0"/>
           </a:p>
           <a:p>
-            <a:pPr indent="0" marL="0">
+            <a:pPr marL="0" indent="0">
               <a:lnSpc>
                 <a:spcPts val="1800"/>
               </a:lnSpc>
@@ -3561,6 +3998,13 @@
             <a:prstDash val="solid"/>
           </a:ln>
         </p:spPr>
+        <p:txBody>
+          <a:bodyPr/>
+          <a:lstStyle/>
+          <a:p>
+            <a:endParaRPr lang="en-US"/>
+          </a:p>
+        </p:txBody>
       </p:sp>
       <p:sp>
         <p:nvSpPr>
@@ -3586,6 +4030,13 @@
             <a:prstDash val="solid"/>
           </a:ln>
         </p:spPr>
+        <p:txBody>
+          <a:bodyPr/>
+          <a:lstStyle/>
+          <a:p>
+            <a:endParaRPr lang="en-US"/>
+          </a:p>
+        </p:txBody>
       </p:sp>
       <p:sp>
         <p:nvSpPr>
@@ -3608,7 +4059,7 @@
           <a:bodyPr wrap="square" lIns="0" tIns="0" rIns="0" bIns="0" rtlCol="0" anchor="ctr"/>
           <a:lstStyle/>
           <a:p>
-            <a:pPr algn="ctr" indent="0" marL="0">
+            <a:pPr marL="0" indent="0" algn="ctr">
               <a:buNone/>
             </a:pPr>
             <a:r>
@@ -3647,7 +4098,7 @@
           <a:bodyPr wrap="square" lIns="0" tIns="0" rIns="0" bIns="0" rtlCol="0" anchor="ctr"/>
           <a:lstStyle/>
           <a:p>
-            <a:pPr indent="0" marL="0">
+            <a:pPr marL="0" indent="0">
               <a:buNone/>
             </a:pPr>
             <a:r>
@@ -3686,7 +4137,7 @@
           <a:bodyPr wrap="square" lIns="0" tIns="0" rIns="0" bIns="0" rtlCol="0" anchor="ctr"/>
           <a:lstStyle/>
           <a:p>
-            <a:pPr indent="0" marL="0">
+            <a:pPr marL="0" indent="0">
               <a:lnSpc>
                 <a:spcPts val="1800"/>
               </a:lnSpc>
@@ -3706,7 +4157,7 @@
             <a:endParaRPr lang="en-US" sz="1300" dirty="0"/>
           </a:p>
           <a:p>
-            <a:pPr indent="0" marL="0">
+            <a:pPr marL="0" indent="0">
               <a:lnSpc>
                 <a:spcPts val="1800"/>
               </a:lnSpc>
@@ -3726,7 +4177,7 @@
             <a:endParaRPr lang="en-US" sz="1300" dirty="0"/>
           </a:p>
           <a:p>
-            <a:pPr indent="0" marL="0">
+            <a:pPr marL="0" indent="0">
               <a:lnSpc>
                 <a:spcPts val="1800"/>
               </a:lnSpc>
@@ -3768,7 +4219,7 @@
           <a:bodyPr wrap="square" lIns="0" tIns="0" rIns="0" bIns="0" rtlCol="0" anchor="ctr"/>
           <a:lstStyle/>
           <a:p>
-            <a:pPr indent="0" marL="0">
+            <a:pPr marL="0" indent="0">
               <a:buNone/>
             </a:pPr>
             <a:r>
@@ -3832,11 +4283,11 @@
           <a:bodyPr wrap="square" lIns="0" tIns="0" rIns="0" bIns="0" rtlCol="0" anchor="ctr"/>
           <a:lstStyle/>
           <a:p>
-            <a:pPr indent="0" marL="0">
-              <a:buNone/>
-            </a:pPr>
-            <a:r>
-              <a:rPr lang="en-US" sz="1200" b="1" spc="200" kern="0" dirty="0">
+            <a:pPr marL="0" indent="0">
+              <a:buNone/>
+            </a:pPr>
+            <a:r>
+              <a:rPr lang="en-US" sz="1200" b="1" kern="0" spc="200" dirty="0">
                 <a:solidFill>
                   <a:srgbClr val="A26769"/>
                 </a:solidFill>
@@ -3871,7 +4322,7 @@
           <a:bodyPr wrap="square" lIns="0" tIns="0" rIns="0" bIns="0" rtlCol="0" anchor="ctr"/>
           <a:lstStyle/>
           <a:p>
-            <a:pPr indent="0" marL="0">
+            <a:pPr marL="0" indent="0">
               <a:buNone/>
             </a:pPr>
             <a:r>
@@ -3915,6 +4366,13 @@
             <a:prstDash val="solid"/>
           </a:ln>
         </p:spPr>
+        <p:txBody>
+          <a:bodyPr/>
+          <a:lstStyle/>
+          <a:p>
+            <a:endParaRPr lang="en-US"/>
+          </a:p>
+        </p:txBody>
       </p:sp>
       <p:sp>
         <p:nvSpPr>
@@ -3937,7 +4395,7 @@
           <a:bodyPr wrap="square" lIns="0" tIns="0" rIns="0" bIns="0" rtlCol="0" anchor="ctr"/>
           <a:lstStyle/>
           <a:p>
-            <a:pPr algn="ctr" indent="0" marL="0">
+            <a:pPr marL="0" indent="0" algn="ctr">
               <a:buNone/>
             </a:pPr>
             <a:r>
@@ -3976,11 +4434,11 @@
           <a:bodyPr wrap="square" lIns="0" tIns="0" rIns="0" bIns="0" rtlCol="0" anchor="ctr"/>
           <a:lstStyle/>
           <a:p>
-            <a:pPr indent="0" marL="0">
-              <a:buNone/>
-            </a:pPr>
-            <a:r>
-              <a:rPr lang="en-US" sz="1200" b="1" spc="150" kern="0" dirty="0">
+            <a:pPr marL="0" indent="0">
+              <a:buNone/>
+            </a:pPr>
+            <a:r>
+              <a:rPr lang="en-US" sz="1200" b="1" kern="0" spc="150" dirty="0">
                 <a:solidFill>
                   <a:srgbClr val="A26769"/>
                 </a:solidFill>
@@ -4020,6 +4478,13 @@
             <a:prstDash val="solid"/>
           </a:ln>
         </p:spPr>
+        <p:txBody>
+          <a:bodyPr/>
+          <a:lstStyle/>
+          <a:p>
+            <a:endParaRPr lang="en-US"/>
+          </a:p>
+        </p:txBody>
       </p:sp>
       <p:sp>
         <p:nvSpPr>
@@ -4042,11 +4507,11 @@
           <a:bodyPr wrap="square" lIns="0" tIns="0" rIns="0" bIns="0" rtlCol="0" anchor="ctr"/>
           <a:lstStyle/>
           <a:p>
-            <a:pPr indent="0" marL="0">
-              <a:buNone/>
-            </a:pPr>
-            <a:r>
-              <a:rPr lang="en-US" sz="1150" b="1" spc="100" kern="0" dirty="0">
+            <a:pPr marL="0" indent="0">
+              <a:buNone/>
+            </a:pPr>
+            <a:r>
+              <a:rPr lang="en-US" sz="1150" b="1" kern="0" spc="100" dirty="0">
                 <a:solidFill>
                   <a:srgbClr val="A26769"/>
                 </a:solidFill>
@@ -4081,7 +4546,7 @@
           <a:bodyPr wrap="square" lIns="0" tIns="0" rIns="0" bIns="0" rtlCol="0" anchor="ctr"/>
           <a:lstStyle/>
           <a:p>
-            <a:pPr indent="0" marL="0">
+            <a:pPr marL="0" indent="0">
               <a:buNone/>
             </a:pPr>
             <a:r>
@@ -4120,7 +4585,7 @@
           <a:bodyPr wrap="square" lIns="0" tIns="0" rIns="0" bIns="0" rtlCol="0" anchor="ctr"/>
           <a:lstStyle/>
           <a:p>
-            <a:pPr indent="0" marL="0">
+            <a:pPr marL="0" indent="0">
               <a:lnSpc>
                 <a:spcPts val="1400"/>
               </a:lnSpc>
@@ -4140,7 +4605,7 @@
             <a:endParaRPr lang="en-US" sz="1150" dirty="0"/>
           </a:p>
           <a:p>
-            <a:pPr indent="0" marL="0">
+            <a:pPr marL="0" indent="0">
               <a:lnSpc>
                 <a:spcPts val="1400"/>
               </a:lnSpc>
@@ -4187,6 +4652,13 @@
             <a:prstDash val="solid"/>
           </a:ln>
         </p:spPr>
+        <p:txBody>
+          <a:bodyPr/>
+          <a:lstStyle/>
+          <a:p>
+            <a:endParaRPr lang="en-US"/>
+          </a:p>
+        </p:txBody>
       </p:sp>
       <p:sp>
         <p:nvSpPr>
@@ -4209,11 +4681,11 @@
           <a:bodyPr wrap="square" lIns="0" tIns="0" rIns="0" bIns="0" rtlCol="0" anchor="ctr"/>
           <a:lstStyle/>
           <a:p>
-            <a:pPr indent="0" marL="0">
-              <a:buNone/>
-            </a:pPr>
-            <a:r>
-              <a:rPr lang="en-US" sz="1150" b="1" spc="100" kern="0" dirty="0">
+            <a:pPr marL="0" indent="0">
+              <a:buNone/>
+            </a:pPr>
+            <a:r>
+              <a:rPr lang="en-US" sz="1150" b="1" kern="0" spc="100" dirty="0">
                 <a:solidFill>
                   <a:srgbClr val="ECE2D0"/>
                 </a:solidFill>
@@ -4248,7 +4720,7 @@
           <a:bodyPr wrap="square" lIns="0" tIns="0" rIns="0" bIns="0" rtlCol="0" anchor="ctr"/>
           <a:lstStyle/>
           <a:p>
-            <a:pPr indent="0" marL="0">
+            <a:pPr marL="0" indent="0">
               <a:buNone/>
             </a:pPr>
             <a:r>
@@ -4287,7 +4759,7 @@
           <a:bodyPr wrap="square" lIns="0" tIns="0" rIns="0" bIns="0" rtlCol="0" anchor="ctr"/>
           <a:lstStyle/>
           <a:p>
-            <a:pPr indent="0" marL="0">
+            <a:pPr marL="0" indent="0">
               <a:lnSpc>
                 <a:spcPts val="1400"/>
               </a:lnSpc>
@@ -4307,7 +4779,7 @@
             <a:endParaRPr lang="en-US" sz="1150" dirty="0"/>
           </a:p>
           <a:p>
-            <a:pPr indent="0" marL="0">
+            <a:pPr marL="0" indent="0">
               <a:lnSpc>
                 <a:spcPts val="1400"/>
               </a:lnSpc>
@@ -4354,6 +4826,13 @@
             <a:prstDash val="solid"/>
           </a:ln>
         </p:spPr>
+        <p:txBody>
+          <a:bodyPr/>
+          <a:lstStyle/>
+          <a:p>
+            <a:endParaRPr lang="en-US"/>
+          </a:p>
+        </p:txBody>
       </p:sp>
       <p:sp>
         <p:nvSpPr>
@@ -4376,11 +4855,11 @@
           <a:bodyPr wrap="square" lIns="0" tIns="0" rIns="0" bIns="0" rtlCol="0" anchor="ctr"/>
           <a:lstStyle/>
           <a:p>
-            <a:pPr indent="0" marL="0">
-              <a:buNone/>
-            </a:pPr>
-            <a:r>
-              <a:rPr lang="en-US" sz="1150" b="1" spc="100" kern="0" dirty="0">
+            <a:pPr marL="0" indent="0">
+              <a:buNone/>
+            </a:pPr>
+            <a:r>
+              <a:rPr lang="en-US" sz="1150" b="1" kern="0" spc="100" dirty="0">
                 <a:solidFill>
                   <a:srgbClr val="ECE2D0"/>
                 </a:solidFill>
@@ -4415,7 +4894,7 @@
           <a:bodyPr wrap="square" lIns="0" tIns="0" rIns="0" bIns="0" rtlCol="0" anchor="ctr"/>
           <a:lstStyle/>
           <a:p>
-            <a:pPr indent="0" marL="0">
+            <a:pPr marL="0" indent="0">
               <a:buNone/>
             </a:pPr>
             <a:r>
@@ -4454,7 +4933,7 @@
           <a:bodyPr wrap="square" lIns="0" tIns="0" rIns="0" bIns="0" rtlCol="0" anchor="ctr"/>
           <a:lstStyle/>
           <a:p>
-            <a:pPr indent="0" marL="0">
+            <a:pPr marL="0" indent="0">
               <a:lnSpc>
                 <a:spcPts val="1400"/>
               </a:lnSpc>
@@ -4474,7 +4953,7 @@
             <a:endParaRPr lang="en-US" sz="1150" dirty="0"/>
           </a:p>
           <a:p>
-            <a:pPr indent="0" marL="0">
+            <a:pPr marL="0" indent="0">
               <a:lnSpc>
                 <a:spcPts val="1400"/>
               </a:lnSpc>
@@ -4521,6 +5000,13 @@
             <a:prstDash val="solid"/>
           </a:ln>
         </p:spPr>
+        <p:txBody>
+          <a:bodyPr/>
+          <a:lstStyle/>
+          <a:p>
+            <a:endParaRPr lang="en-US"/>
+          </a:p>
+        </p:txBody>
       </p:sp>
       <p:sp>
         <p:nvSpPr>
@@ -4543,11 +5029,11 @@
           <a:bodyPr wrap="square" lIns="0" tIns="0" rIns="0" bIns="0" rtlCol="0" anchor="ctr"/>
           <a:lstStyle/>
           <a:p>
-            <a:pPr indent="0" marL="0">
-              <a:buNone/>
-            </a:pPr>
-            <a:r>
-              <a:rPr lang="en-US" sz="1150" b="1" spc="100" kern="0" dirty="0">
+            <a:pPr marL="0" indent="0">
+              <a:buNone/>
+            </a:pPr>
+            <a:r>
+              <a:rPr lang="en-US" sz="1150" b="1" kern="0" spc="100" dirty="0">
                 <a:solidFill>
                   <a:srgbClr val="A26769"/>
                 </a:solidFill>
@@ -4582,7 +5068,7 @@
           <a:bodyPr wrap="square" lIns="0" tIns="0" rIns="0" bIns="0" rtlCol="0" anchor="ctr"/>
           <a:lstStyle/>
           <a:p>
-            <a:pPr indent="0" marL="0">
+            <a:pPr marL="0" indent="0">
               <a:buNone/>
             </a:pPr>
             <a:r>
@@ -4621,7 +5107,7 @@
           <a:bodyPr wrap="square" lIns="0" tIns="0" rIns="0" bIns="0" rtlCol="0" anchor="ctr"/>
           <a:lstStyle/>
           <a:p>
-            <a:pPr indent="0" marL="0">
+            <a:pPr marL="0" indent="0">
               <a:lnSpc>
                 <a:spcPts val="1400"/>
               </a:lnSpc>
@@ -4641,7 +5127,7 @@
             <a:endParaRPr lang="en-US" sz="1150" dirty="0"/>
           </a:p>
           <a:p>
-            <a:pPr indent="0" marL="0">
+            <a:pPr marL="0" indent="0">
               <a:lnSpc>
                 <a:spcPts val="1400"/>
               </a:lnSpc>
@@ -4683,7 +5169,7 @@
           <a:bodyPr wrap="square" lIns="0" tIns="0" rIns="0" bIns="0" rtlCol="0" anchor="ctr"/>
           <a:lstStyle/>
           <a:p>
-            <a:pPr indent="0" marL="0">
+            <a:pPr marL="0" indent="0">
               <a:buNone/>
             </a:pPr>
             <a:r>
@@ -4722,11 +5208,11 @@
           <a:bodyPr wrap="square" lIns="0" tIns="0" rIns="0" bIns="0" rtlCol="0" anchor="ctr"/>
           <a:lstStyle/>
           <a:p>
-            <a:pPr indent="0" marL="0">
-              <a:buNone/>
-            </a:pPr>
-            <a:r>
-              <a:rPr lang="en-US" sz="1200" b="1" spc="150" kern="0" dirty="0">
+            <a:pPr marL="0" indent="0">
+              <a:buNone/>
+            </a:pPr>
+            <a:r>
+              <a:rPr lang="en-US" sz="1200" b="1" kern="0" spc="150" dirty="0">
                 <a:solidFill>
                   <a:srgbClr val="A26769"/>
                 </a:solidFill>
@@ -4766,6 +5252,13 @@
             <a:prstDash val="solid"/>
           </a:ln>
         </p:spPr>
+        <p:txBody>
+          <a:bodyPr/>
+          <a:lstStyle/>
+          <a:p>
+            <a:endParaRPr lang="en-US"/>
+          </a:p>
+        </p:txBody>
       </p:sp>
       <p:sp>
         <p:nvSpPr>
@@ -4788,7 +5281,7 @@
           <a:bodyPr wrap="square" lIns="0" tIns="0" rIns="0" bIns="0" rtlCol="0" anchor="ctr"/>
           <a:lstStyle/>
           <a:p>
-            <a:pPr indent="0" marL="0">
+            <a:pPr marL="0" indent="0">
               <a:buNone/>
             </a:pPr>
             <a:r>
@@ -4827,7 +5320,7 @@
           <a:bodyPr wrap="square" lIns="0" tIns="0" rIns="0" bIns="0" rtlCol="0" anchor="ctr"/>
           <a:lstStyle/>
           <a:p>
-            <a:pPr indent="0" marL="0">
+            <a:pPr marL="0" indent="0">
               <a:buNone/>
             </a:pPr>
             <a:r>
@@ -4871,6 +5364,13 @@
             <a:prstDash val="solid"/>
           </a:ln>
         </p:spPr>
+        <p:txBody>
+          <a:bodyPr/>
+          <a:lstStyle/>
+          <a:p>
+            <a:endParaRPr lang="en-US"/>
+          </a:p>
+        </p:txBody>
       </p:sp>
       <p:sp>
         <p:nvSpPr>
@@ -4893,7 +5393,7 @@
           <a:bodyPr wrap="square" lIns="0" tIns="0" rIns="0" bIns="0" rtlCol="0" anchor="ctr"/>
           <a:lstStyle/>
           <a:p>
-            <a:pPr indent="0" marL="0">
+            <a:pPr marL="0" indent="0">
               <a:buNone/>
             </a:pPr>
             <a:r>
@@ -4932,7 +5432,7 @@
           <a:bodyPr wrap="square" lIns="0" tIns="0" rIns="0" bIns="0" rtlCol="0" anchor="ctr"/>
           <a:lstStyle/>
           <a:p>
-            <a:pPr indent="0" marL="0">
+            <a:pPr marL="0" indent="0">
               <a:buNone/>
             </a:pPr>
             <a:r>
@@ -4976,6 +5476,13 @@
             <a:prstDash val="solid"/>
           </a:ln>
         </p:spPr>
+        <p:txBody>
+          <a:bodyPr/>
+          <a:lstStyle/>
+          <a:p>
+            <a:endParaRPr lang="en-US"/>
+          </a:p>
+        </p:txBody>
       </p:sp>
       <p:sp>
         <p:nvSpPr>
@@ -4998,7 +5505,7 @@
           <a:bodyPr wrap="square" lIns="0" tIns="0" rIns="0" bIns="0" rtlCol="0" anchor="ctr"/>
           <a:lstStyle/>
           <a:p>
-            <a:pPr indent="0" marL="0">
+            <a:pPr marL="0" indent="0">
               <a:buNone/>
             </a:pPr>
             <a:r>
@@ -5037,7 +5544,7 @@
           <a:bodyPr wrap="square" lIns="0" tIns="0" rIns="0" bIns="0" rtlCol="0" anchor="ctr"/>
           <a:lstStyle/>
           <a:p>
-            <a:pPr indent="0" marL="0">
+            <a:pPr marL="0" indent="0">
               <a:buNone/>
             </a:pPr>
             <a:r>
@@ -5081,6 +5588,13 @@
             <a:prstDash val="solid"/>
           </a:ln>
         </p:spPr>
+        <p:txBody>
+          <a:bodyPr/>
+          <a:lstStyle/>
+          <a:p>
+            <a:endParaRPr lang="en-US"/>
+          </a:p>
+        </p:txBody>
       </p:sp>
       <p:sp>
         <p:nvSpPr>
@@ -5103,7 +5617,7 @@
           <a:bodyPr wrap="square" lIns="0" tIns="0" rIns="0" bIns="0" rtlCol="0" anchor="ctr"/>
           <a:lstStyle/>
           <a:p>
-            <a:pPr indent="0" marL="0">
+            <a:pPr marL="0" indent="0">
               <a:buNone/>
             </a:pPr>
             <a:r>
@@ -5115,7 +5629,7 @@
                 <a:ea typeface="Calibri" pitchFamily="34" charset="-122"/>
                 <a:cs typeface="Calibri" pitchFamily="34" charset="-120"/>
               </a:rPr>
-              <a:t>Confirmed: Nahunta is domestic-only. Anything EU-bound must come from a federally-inspected (USDA / Talmadge-Aiken) plant — two supply chains, planned separately.</a:t>
+              <a:t>Nahunta is domestic-only. Anything EU-bound must come from a federally-inspected (USDA / Talmadge-Aiken) plant — two supply chains, planned separately.</a:t>
             </a:r>
             <a:endParaRPr lang="en-US" sz="1300" dirty="0"/>
           </a:p>
@@ -5142,7 +5656,7 @@
           <a:bodyPr wrap="square" lIns="0" tIns="0" rIns="0" bIns="0" rtlCol="0" anchor="ctr"/>
           <a:lstStyle/>
           <a:p>
-            <a:pPr indent="0" marL="0">
+            <a:pPr marL="0" indent="0">
               <a:buNone/>
             </a:pPr>
             <a:r>
@@ -5187,8 +5701,8 @@
       </p:grpSpPr>
       <p:sp>
         <p:nvSpPr>
-          <p:cNvPr id="2" name="Text 0"/>
-          <p:cNvSpPr/>
+          <p:cNvPr id="2" name="TextBox 1"/>
+          <p:cNvSpPr txBox="1"/>
           <p:nvPr/>
         </p:nvSpPr>
         <p:spPr>
@@ -5200,72 +5714,64 @@
             <a:avLst/>
           </a:prstGeom>
           <a:noFill/>
-          <a:ln/>
-        </p:spPr>
-        <p:txBody>
-          <a:bodyPr wrap="square" lIns="0" tIns="0" rIns="0" bIns="0" rtlCol="0" anchor="ctr"/>
-          <a:lstStyle/>
-          <a:p>
-            <a:pPr indent="0" marL="0">
-              <a:buNone/>
-            </a:pPr>
-            <a:r>
-              <a:rPr lang="en-US" sz="1200" b="1" spc="200" kern="0" dirty="0">
+        </p:spPr>
+        <p:txBody>
+          <a:bodyPr wrap="square" lIns="0" rIns="0" tIns="0" bIns="0" anchor="t">
+            <a:spAutoFit/>
+          </a:bodyPr>
+          <a:lstStyle/>
+          <a:p>
+            <a:pPr algn="l"/>
+            <a:r>
+              <a:rPr sz="1200" b="1" i="0">
                 <a:solidFill>
                   <a:srgbClr val="A26769"/>
                 </a:solidFill>
-                <a:latin typeface="Calibri" pitchFamily="34" charset="0"/>
-                <a:ea typeface="Calibri" pitchFamily="34" charset="-122"/>
-                <a:cs typeface="Calibri" pitchFamily="34" charset="-120"/>
+                <a:latin typeface="Calibri"/>
               </a:rPr>
               <a:t>3 · REVIEW REGIONS</a:t>
             </a:r>
-            <a:endParaRPr lang="en-US" sz="1200" dirty="0"/>
-          </a:p>
-        </p:txBody>
-      </p:sp>
-      <p:sp>
-        <p:nvSpPr>
-          <p:cNvPr id="3" name="Text 1"/>
-          <p:cNvSpPr/>
+          </a:p>
+        </p:txBody>
+      </p:sp>
+      <p:sp>
+        <p:nvSpPr>
+          <p:cNvPr id="3" name="TextBox 2"/>
+          <p:cNvSpPr txBox="1"/>
           <p:nvPr/>
         </p:nvSpPr>
         <p:spPr>
           <a:xfrm>
             <a:off x="548640" y="676656"/>
-            <a:ext cx="8778240" cy="658368"/>
-          </a:xfrm>
-          <a:prstGeom prst="rect">
-            <a:avLst/>
-          </a:prstGeom>
-          <a:noFill/>
-          <a:ln/>
-        </p:spPr>
-        <p:txBody>
-          <a:bodyPr wrap="square" lIns="0" tIns="0" rIns="0" bIns="0" rtlCol="0" anchor="ctr"/>
-          <a:lstStyle/>
-          <a:p>
-            <a:pPr indent="0" marL="0">
-              <a:buNone/>
-            </a:pPr>
-            <a:r>
-              <a:rPr lang="en-US" sz="3400" b="1" dirty="0">
+            <a:ext cx="8778240" cy="566928"/>
+          </a:xfrm>
+          <a:prstGeom prst="rect">
+            <a:avLst/>
+          </a:prstGeom>
+          <a:noFill/>
+        </p:spPr>
+        <p:txBody>
+          <a:bodyPr wrap="square" lIns="0" rIns="0" tIns="0" bIns="0" anchor="t">
+            <a:spAutoFit/>
+          </a:bodyPr>
+          <a:lstStyle/>
+          <a:p>
+            <a:pPr algn="l"/>
+            <a:r>
+              <a:rPr sz="3400" b="1" i="0">
                 <a:solidFill>
                   <a:srgbClr val="6D2E46"/>
                 </a:solidFill>
-                <a:latin typeface="Cambria" pitchFamily="34" charset="0"/>
-                <a:ea typeface="Cambria" pitchFamily="34" charset="-122"/>
-                <a:cs typeface="Cambria" pitchFamily="34" charset="-120"/>
+                <a:latin typeface="Cambria"/>
               </a:rPr>
               <a:t>Where the supply actually is</a:t>
             </a:r>
-            <a:endParaRPr lang="en-US" sz="3400" dirty="0"/>
-          </a:p>
-        </p:txBody>
-      </p:sp>
-      <p:sp>
-        <p:nvSpPr>
-          <p:cNvPr id="4" name="Shape 2"/>
+          </a:p>
+        </p:txBody>
+      </p:sp>
+      <p:sp>
+        <p:nvSpPr>
+          <p:cNvPr id="4" name="Rounded Rectangle 3"/>
           <p:cNvSpPr/>
           <p:nvPr/>
         </p:nvSpPr>
@@ -5276,244 +5782,1147 @@
           </a:xfrm>
           <a:prstGeom prst="roundRect">
             <a:avLst>
-              <a:gd name="adj" fmla="val 45455"/>
+              <a:gd name="adj" fmla="val 6000"/>
             </a:avLst>
           </a:prstGeom>
           <a:solidFill>
             <a:srgbClr val="ECE2D0"/>
           </a:solidFill>
-          <a:ln w="12700">
-            <a:solidFill>
-              <a:srgbClr val="ECE2D0"/>
-            </a:solidFill>
-            <a:prstDash val="solid"/>
+          <a:ln>
+            <a:noFill/>
           </a:ln>
-        </p:spPr>
-      </p:sp>
-      <p:sp>
-        <p:nvSpPr>
-          <p:cNvPr id="5" name="Text 3"/>
-          <p:cNvSpPr/>
-          <p:nvPr/>
-        </p:nvSpPr>
-        <p:spPr>
-          <a:xfrm>
-            <a:off x="10607040" y="457200"/>
-            <a:ext cx="1005840" cy="402336"/>
-          </a:xfrm>
-          <a:prstGeom prst="rect">
-            <a:avLst/>
-          </a:prstGeom>
-          <a:noFill/>
-          <a:ln/>
-        </p:spPr>
-        <p:txBody>
-          <a:bodyPr wrap="square" lIns="0" tIns="0" rIns="0" bIns="0" rtlCol="0" anchor="ctr"/>
-          <a:lstStyle/>
-          <a:p>
-            <a:pPr algn="ctr" indent="0" marL="0">
-              <a:buNone/>
-            </a:pPr>
-            <a:r>
-              <a:rPr lang="en-US" sz="1200" b="1" dirty="0">
+          <a:effectLst/>
+        </p:spPr>
+        <p:style>
+          <a:lnRef idx="1">
+            <a:schemeClr val="accent1"/>
+          </a:lnRef>
+          <a:fillRef idx="3">
+            <a:schemeClr val="accent1"/>
+          </a:fillRef>
+          <a:effectRef idx="2">
+            <a:schemeClr val="accent1"/>
+          </a:effectRef>
+          <a:fontRef idx="minor">
+            <a:schemeClr val="lt1"/>
+          </a:fontRef>
+        </p:style>
+        <p:txBody>
+          <a:bodyPr rtlCol="0" anchor="ctr"/>
+          <a:lstStyle/>
+          <a:p/>
+        </p:txBody>
+      </p:sp>
+      <p:sp>
+        <p:nvSpPr>
+          <p:cNvPr id="5" name="TextBox 4"/>
+          <p:cNvSpPr txBox="1"/>
+          <p:nvPr/>
+        </p:nvSpPr>
+        <p:spPr>
+          <a:xfrm>
+            <a:off x="10607040" y="530352"/>
+            <a:ext cx="1005840" cy="274320"/>
+          </a:xfrm>
+          <a:prstGeom prst="rect">
+            <a:avLst/>
+          </a:prstGeom>
+          <a:noFill/>
+        </p:spPr>
+        <p:txBody>
+          <a:bodyPr wrap="square" lIns="0" rIns="0" tIns="0" bIns="0" anchor="t">
+            <a:spAutoFit/>
+          </a:bodyPr>
+          <a:lstStyle/>
+          <a:p>
+            <a:pPr algn="ctr"/>
+            <a:r>
+              <a:rPr sz="1200" b="1" i="0">
                 <a:solidFill>
                   <a:srgbClr val="6D2E46"/>
                 </a:solidFill>
-                <a:latin typeface="Calibri" pitchFamily="34" charset="0"/>
-                <a:ea typeface="Calibri" pitchFamily="34" charset="-122"/>
-                <a:cs typeface="Calibri" pitchFamily="34" charset="-120"/>
+                <a:latin typeface="Calibri"/>
               </a:rPr>
               <a:t>10 min</a:t>
             </a:r>
-            <a:endParaRPr lang="en-US" sz="1200" dirty="0"/>
-          </a:p>
-        </p:txBody>
-      </p:sp>
-      <p:sp>
-        <p:nvSpPr>
-          <p:cNvPr id="6" name="Text 4"/>
-          <p:cNvSpPr/>
-          <p:nvPr/>
-        </p:nvSpPr>
-        <p:spPr>
-          <a:xfrm>
-            <a:off x="548640" y="1517904"/>
-            <a:ext cx="11064240" cy="292608"/>
-          </a:xfrm>
-          <a:prstGeom prst="rect">
-            <a:avLst/>
-          </a:prstGeom>
-          <a:noFill/>
-          <a:ln/>
-        </p:spPr>
-        <p:txBody>
-          <a:bodyPr wrap="square" lIns="0" tIns="0" rIns="0" bIns="0" rtlCol="0" anchor="ctr"/>
-          <a:lstStyle/>
-          <a:p>
-            <a:pPr indent="0" marL="0">
-              <a:buNone/>
-            </a:pPr>
-            <a:r>
-              <a:rPr lang="en-US" sz="1400" dirty="0">
+          </a:p>
+        </p:txBody>
+      </p:sp>
+      <p:sp>
+        <p:nvSpPr>
+          <p:cNvPr id="6" name="TextBox 5"/>
+          <p:cNvSpPr txBox="1"/>
+          <p:nvPr/>
+        </p:nvSpPr>
+        <p:spPr>
+          <a:xfrm>
+            <a:off x="548640" y="1371600"/>
+            <a:ext cx="11064240" cy="274320"/>
+          </a:xfrm>
+          <a:prstGeom prst="rect">
+            <a:avLst/>
+          </a:prstGeom>
+          <a:noFill/>
+        </p:spPr>
+        <p:txBody>
+          <a:bodyPr wrap="square" lIns="0" rIns="0" tIns="0" bIns="0" anchor="t">
+            <a:spAutoFit/>
+          </a:bodyPr>
+          <a:lstStyle/>
+          <a:p>
+            <a:pPr algn="l"/>
+            <a:r>
+              <a:rPr sz="1400" b="0" i="0">
                 <a:solidFill>
                   <a:srgbClr val="2B2B2B"/>
                 </a:solidFill>
-                <a:latin typeface="Calibri" pitchFamily="34" charset="0"/>
-                <a:ea typeface="Calibri" pitchFamily="34" charset="-122"/>
-                <a:cs typeface="Calibri" pitchFamily="34" charset="-120"/>
-              </a:rPr>
-              <a:t>54 plants across our target areas. Certification decides whether a plant can ever serve EU work; size decides the operating model.</a:t>
-            </a:r>
-            <a:endParaRPr lang="en-US" sz="1400" dirty="0"/>
+                <a:latin typeface="Calibri"/>
+              </a:rPr>
+              <a:t>54 plants across our target areas, sized by weekly hog volume.</a:t>
+            </a:r>
           </a:p>
         </p:txBody>
       </p:sp>
       <p:graphicFrame>
         <p:nvGraphicFramePr>
-          <p:cNvPr id="7" name="Chart 0" descr=""/>
-          <p:cNvGraphicFramePr/>
+          <p:cNvPr id="7" name="Chart 6"/>
+          <p:cNvGraphicFramePr>
+            <a:graphicFrameLocks noGrp="1"/>
+          </p:cNvGraphicFramePr>
           <p:nvPr/>
         </p:nvGraphicFramePr>
         <p:xfrm>
-          <a:off x="548640" y="1938528"/>
-          <a:ext cx="5394960" cy="3401568"/>
+          <a:off x="548640" y="1737360"/>
+          <a:ext cx="11064240" cy="2697480"/>
         </p:xfrm>
-        <a:graphic xmlns:a="http://schemas.openxmlformats.org/drawingml/2006/main">
+        <a:graphic>
           <a:graphicData uri="http://schemas.openxmlformats.org/drawingml/2006/chart">
-            <c:chart xmlns:c="http://schemas.openxmlformats.org/drawingml/2006/chart" r:id="rId1"/>
+            <c:chart xmlns:c="http://schemas.openxmlformats.org/drawingml/2006/chart" r:id="rId5"/>
           </a:graphicData>
         </a:graphic>
       </p:graphicFrame>
-      <p:graphicFrame>
-        <p:nvGraphicFramePr>
-          <p:cNvPr id="8" name="Chart 1" descr=""/>
-          <p:cNvGraphicFramePr/>
-          <p:nvPr/>
-        </p:nvGraphicFramePr>
-        <p:xfrm>
-          <a:off x="6236208" y="1938528"/>
-          <a:ext cx="5376672" cy="3401568"/>
-        </p:xfrm>
-        <a:graphic xmlns:a="http://schemas.openxmlformats.org/drawingml/2006/main">
-          <a:graphicData uri="http://schemas.openxmlformats.org/drawingml/2006/chart">
-            <c:chart xmlns:c="http://schemas.openxmlformats.org/drawingml/2006/chart" r:id="rId2"/>
-          </a:graphicData>
-        </a:graphic>
-      </p:graphicFrame>
-      <p:sp>
-        <p:nvSpPr>
-          <p:cNvPr id="9" name="Text 5"/>
-          <p:cNvSpPr/>
-          <p:nvPr/>
-        </p:nvSpPr>
-        <p:spPr>
-          <a:xfrm>
-            <a:off x="548640" y="5431536"/>
-            <a:ext cx="11064240" cy="384048"/>
-          </a:xfrm>
-          <a:prstGeom prst="rect">
-            <a:avLst/>
-          </a:prstGeom>
-          <a:noFill/>
-          <a:ln/>
-        </p:spPr>
-        <p:txBody>
-          <a:bodyPr wrap="square" lIns="0" tIns="0" rIns="0" bIns="0" rtlCol="0" anchor="ctr"/>
-          <a:lstStyle/>
-          <a:p>
-            <a:pPr indent="0" marL="0">
-              <a:buNone/>
-            </a:pPr>
-            <a:r>
-              <a:rPr lang="en-US" sz="1300" b="1" dirty="0">
+      <p:sp>
+        <p:nvSpPr>
+          <p:cNvPr id="8" name="TextBox 7"/>
+          <p:cNvSpPr txBox="1"/>
+          <p:nvPr/>
+        </p:nvSpPr>
+        <p:spPr>
+          <a:xfrm>
+            <a:off x="548640" y="4590288"/>
+            <a:ext cx="8229600" cy="256032"/>
+          </a:xfrm>
+          <a:prstGeom prst="rect">
+            <a:avLst/>
+          </a:prstGeom>
+          <a:noFill/>
+        </p:spPr>
+        <p:txBody>
+          <a:bodyPr wrap="square" lIns="0" rIns="0" tIns="0" bIns="0" anchor="t">
+            <a:spAutoFit/>
+          </a:bodyPr>
+          <a:lstStyle/>
+          <a:p>
+            <a:pPr algn="l"/>
+            <a:r>
+              <a:rPr sz="1200" b="1" i="0">
+                <a:solidFill>
+                  <a:srgbClr val="A26769"/>
+                </a:solidFill>
+                <a:latin typeface="Calibri"/>
+              </a:rPr>
+              <a:t>EASTERN NC — WHERE OUR NAMED PLANTS SIT, BY SIZE</a:t>
+            </a:r>
+          </a:p>
+        </p:txBody>
+      </p:sp>
+      <p:sp>
+        <p:nvSpPr>
+          <p:cNvPr id="9" name="Rounded Rectangle 8"/>
+          <p:cNvSpPr/>
+          <p:nvPr/>
+        </p:nvSpPr>
+        <p:spPr>
+          <a:xfrm>
+            <a:off x="548640" y="4901184"/>
+            <a:ext cx="2633472" cy="1170432"/>
+          </a:xfrm>
+          <a:prstGeom prst="roundRect">
+            <a:avLst>
+              <a:gd name="adj" fmla="val 6000"/>
+            </a:avLst>
+          </a:prstGeom>
+          <a:solidFill>
+            <a:srgbClr val="F7F0F1"/>
+          </a:solidFill>
+          <a:ln>
+            <a:noFill/>
+          </a:ln>
+          <a:effectLst/>
+        </p:spPr>
+        <p:style>
+          <a:lnRef idx="1">
+            <a:schemeClr val="accent1"/>
+          </a:lnRef>
+          <a:fillRef idx="3">
+            <a:schemeClr val="accent1"/>
+          </a:fillRef>
+          <a:effectRef idx="2">
+            <a:schemeClr val="accent1"/>
+          </a:effectRef>
+          <a:fontRef idx="minor">
+            <a:schemeClr val="lt1"/>
+          </a:fontRef>
+        </p:style>
+        <p:txBody>
+          <a:bodyPr rtlCol="0" anchor="ctr"/>
+          <a:lstStyle/>
+          <a:p/>
+        </p:txBody>
+      </p:sp>
+      <p:sp>
+        <p:nvSpPr>
+          <p:cNvPr id="10" name="Rounded Rectangle 9"/>
+          <p:cNvSpPr/>
+          <p:nvPr/>
+        </p:nvSpPr>
+        <p:spPr>
+          <a:xfrm>
+            <a:off x="694944" y="5010912"/>
+            <a:ext cx="932688" cy="219456"/>
+          </a:xfrm>
+          <a:prstGeom prst="roundRect">
+            <a:avLst>
+              <a:gd name="adj" fmla="val 35000"/>
+            </a:avLst>
+          </a:prstGeom>
+          <a:solidFill>
+            <a:srgbClr val="7A7075"/>
+          </a:solidFill>
+          <a:ln>
+            <a:noFill/>
+          </a:ln>
+          <a:effectLst/>
+        </p:spPr>
+        <p:style>
+          <a:lnRef idx="1">
+            <a:schemeClr val="accent1"/>
+          </a:lnRef>
+          <a:fillRef idx="3">
+            <a:schemeClr val="accent1"/>
+          </a:fillRef>
+          <a:effectRef idx="2">
+            <a:schemeClr val="accent1"/>
+          </a:effectRef>
+          <a:fontRef idx="minor">
+            <a:schemeClr val="lt1"/>
+          </a:fontRef>
+        </p:style>
+        <p:txBody>
+          <a:bodyPr rtlCol="0" anchor="ctr"/>
+          <a:lstStyle/>
+          <a:p>
+            <a:pPr algn="ctr"/>
+          </a:p>
+        </p:txBody>
+      </p:sp>
+      <p:sp>
+        <p:nvSpPr>
+          <p:cNvPr id="11" name="TextBox 10"/>
+          <p:cNvSpPr txBox="1"/>
+          <p:nvPr/>
+        </p:nvSpPr>
+        <p:spPr>
+          <a:xfrm>
+            <a:off x="694944" y="5038344"/>
+            <a:ext cx="932688" cy="182880"/>
+          </a:xfrm>
+          <a:prstGeom prst="rect">
+            <a:avLst/>
+          </a:prstGeom>
+          <a:noFill/>
+        </p:spPr>
+        <p:txBody>
+          <a:bodyPr wrap="square" lIns="0" rIns="0" tIns="0" bIns="0" anchor="t">
+            <a:spAutoFit/>
+          </a:bodyPr>
+          <a:lstStyle/>
+          <a:p>
+            <a:pPr algn="ctr"/>
+            <a:r>
+              <a:rPr sz="850" b="1" i="0">
+                <a:solidFill>
+                  <a:srgbClr val="FFFFFF"/>
+                </a:solidFill>
+                <a:latin typeface="Calibri"/>
+              </a:rPr>
+              <a:t>TO CONFIRM</a:t>
+            </a:r>
+          </a:p>
+        </p:txBody>
+      </p:sp>
+      <p:sp>
+        <p:nvSpPr>
+          <p:cNvPr id="12" name="TextBox 11"/>
+          <p:cNvSpPr txBox="1"/>
+          <p:nvPr/>
+        </p:nvSpPr>
+        <p:spPr>
+          <a:xfrm>
+            <a:off x="694944" y="5285232"/>
+            <a:ext cx="2377440" cy="237744"/>
+          </a:xfrm>
+          <a:prstGeom prst="rect">
+            <a:avLst/>
+          </a:prstGeom>
+          <a:noFill/>
+        </p:spPr>
+        <p:txBody>
+          <a:bodyPr wrap="square" lIns="0" rIns="0" tIns="0" bIns="0" anchor="t">
+            <a:spAutoFit/>
+          </a:bodyPr>
+          <a:lstStyle/>
+          <a:p>
+            <a:pPr algn="l"/>
+            <a:r>
+              <a:rPr sz="1300" b="1" i="0">
                 <a:solidFill>
                   <a:srgbClr val="6D2E46"/>
                 </a:solidFill>
-                <a:latin typeface="Calibri" pitchFamily="34" charset="0"/>
-                <a:ea typeface="Calibri" pitchFamily="34" charset="-122"/>
-                <a:cs typeface="Calibri" pitchFamily="34" charset="-120"/>
-              </a:rPr>
-              <a:t>Eastern NC holds the export-eligible plants and the real volume. Western NC is small and state-inspected. Iowa is all High tier.</a:t>
-            </a:r>
-            <a:endParaRPr lang="en-US" sz="1300" dirty="0"/>
-          </a:p>
-        </p:txBody>
-      </p:sp>
-      <p:sp>
-        <p:nvSpPr>
-          <p:cNvPr id="10" name="Text 6"/>
-          <p:cNvSpPr/>
-          <p:nvPr/>
-        </p:nvSpPr>
-        <p:spPr>
-          <a:xfrm>
-            <a:off x="548640" y="5833872"/>
-            <a:ext cx="11064240" cy="329184"/>
-          </a:xfrm>
-          <a:prstGeom prst="rect">
-            <a:avLst/>
-          </a:prstGeom>
-          <a:noFill/>
-          <a:ln/>
-        </p:spPr>
-        <p:txBody>
-          <a:bodyPr wrap="square" lIns="0" tIns="0" rIns="0" bIns="0" rtlCol="0" anchor="ctr"/>
-          <a:lstStyle/>
-          <a:p>
-            <a:pPr indent="0" marL="0">
-              <a:buNone/>
-            </a:pPr>
-            <a:r>
-              <a:rPr lang="en-US" sz="1050" i="1" dirty="0">
+                <a:latin typeface="Cambria"/>
+              </a:rPr>
+              <a:t>Custom Quality Packers</a:t>
+            </a:r>
+          </a:p>
+        </p:txBody>
+      </p:sp>
+      <p:sp>
+        <p:nvSpPr>
+          <p:cNvPr id="13" name="TextBox 12"/>
+          <p:cNvSpPr txBox="1"/>
+          <p:nvPr/>
+        </p:nvSpPr>
+        <p:spPr>
+          <a:xfrm>
+            <a:off x="694944" y="5513832"/>
+            <a:ext cx="2377440" cy="182880"/>
+          </a:xfrm>
+          <a:prstGeom prst="rect">
+            <a:avLst/>
+          </a:prstGeom>
+          <a:noFill/>
+        </p:spPr>
+        <p:txBody>
+          <a:bodyPr wrap="square" lIns="0" rIns="0" tIns="0" bIns="0" anchor="t">
+            <a:spAutoFit/>
+          </a:bodyPr>
+          <a:lstStyle/>
+          <a:p>
+            <a:pPr algn="l"/>
+            <a:r>
+              <a:rPr sz="950" b="0" i="1">
+                <a:solidFill>
+                  <a:srgbClr val="A26769"/>
+                </a:solidFill>
+                <a:latin typeface="Calibri"/>
+              </a:rPr>
+              <a:t>TA-20129 · Sims</a:t>
+            </a:r>
+          </a:p>
+        </p:txBody>
+      </p:sp>
+      <p:sp>
+        <p:nvSpPr>
+          <p:cNvPr id="14" name="TextBox 13"/>
+          <p:cNvSpPr txBox="1"/>
+          <p:nvPr/>
+        </p:nvSpPr>
+        <p:spPr>
+          <a:xfrm>
+            <a:off x="694944" y="5705856"/>
+            <a:ext cx="2395728" cy="310896"/>
+          </a:xfrm>
+          <a:prstGeom prst="rect">
+            <a:avLst/>
+          </a:prstGeom>
+          <a:noFill/>
+        </p:spPr>
+        <p:txBody>
+          <a:bodyPr wrap="square" lIns="0" rIns="0" tIns="0" bIns="0" anchor="t">
+            <a:spAutoFit/>
+          </a:bodyPr>
+          <a:lstStyle/>
+          <a:p>
+            <a:pPr algn="l"/>
+            <a:r>
+              <a:rPr sz="950" b="0" i="0">
+                <a:solidFill>
+                  <a:srgbClr val="2B2B2B"/>
+                </a:solidFill>
+                <a:latin typeface="Calibri"/>
+              </a:rPr>
+              <a:t>likely Small — high-touch, one animal at a time</a:t>
+            </a:r>
+          </a:p>
+        </p:txBody>
+      </p:sp>
+      <p:sp>
+        <p:nvSpPr>
+          <p:cNvPr id="15" name="Rounded Rectangle 14"/>
+          <p:cNvSpPr/>
+          <p:nvPr/>
+        </p:nvSpPr>
+        <p:spPr>
+          <a:xfrm>
+            <a:off x="3383280" y="4901184"/>
+            <a:ext cx="2633472" cy="1170432"/>
+          </a:xfrm>
+          <a:prstGeom prst="roundRect">
+            <a:avLst>
+              <a:gd name="adj" fmla="val 6000"/>
+            </a:avLst>
+          </a:prstGeom>
+          <a:solidFill>
+            <a:srgbClr val="F7F0F1"/>
+          </a:solidFill>
+          <a:ln>
+            <a:noFill/>
+          </a:ln>
+          <a:effectLst/>
+        </p:spPr>
+        <p:style>
+          <a:lnRef idx="1">
+            <a:schemeClr val="accent1"/>
+          </a:lnRef>
+          <a:fillRef idx="3">
+            <a:schemeClr val="accent1"/>
+          </a:fillRef>
+          <a:effectRef idx="2">
+            <a:schemeClr val="accent1"/>
+          </a:effectRef>
+          <a:fontRef idx="minor">
+            <a:schemeClr val="lt1"/>
+          </a:fontRef>
+        </p:style>
+        <p:txBody>
+          <a:bodyPr rtlCol="0" anchor="ctr"/>
+          <a:lstStyle/>
+          <a:p/>
+        </p:txBody>
+      </p:sp>
+      <p:sp>
+        <p:nvSpPr>
+          <p:cNvPr id="16" name="Rounded Rectangle 15"/>
+          <p:cNvSpPr/>
+          <p:nvPr/>
+        </p:nvSpPr>
+        <p:spPr>
+          <a:xfrm>
+            <a:off x="3529584" y="5010912"/>
+            <a:ext cx="932688" cy="219456"/>
+          </a:xfrm>
+          <a:prstGeom prst="roundRect">
+            <a:avLst>
+              <a:gd name="adj" fmla="val 35000"/>
+            </a:avLst>
+          </a:prstGeom>
+          <a:solidFill>
+            <a:srgbClr val="6D2E46"/>
+          </a:solidFill>
+          <a:ln>
+            <a:noFill/>
+          </a:ln>
+          <a:effectLst/>
+        </p:spPr>
+        <p:style>
+          <a:lnRef idx="1">
+            <a:schemeClr val="accent1"/>
+          </a:lnRef>
+          <a:fillRef idx="3">
+            <a:schemeClr val="accent1"/>
+          </a:fillRef>
+          <a:effectRef idx="2">
+            <a:schemeClr val="accent1"/>
+          </a:effectRef>
+          <a:fontRef idx="minor">
+            <a:schemeClr val="lt1"/>
+          </a:fontRef>
+        </p:style>
+        <p:txBody>
+          <a:bodyPr rtlCol="0" anchor="ctr"/>
+          <a:lstStyle/>
+          <a:p>
+            <a:pPr algn="ctr"/>
+          </a:p>
+        </p:txBody>
+      </p:sp>
+      <p:sp>
+        <p:nvSpPr>
+          <p:cNvPr id="17" name="TextBox 16"/>
+          <p:cNvSpPr txBox="1"/>
+          <p:nvPr/>
+        </p:nvSpPr>
+        <p:spPr>
+          <a:xfrm>
+            <a:off x="3529584" y="5038344"/>
+            <a:ext cx="932688" cy="182880"/>
+          </a:xfrm>
+          <a:prstGeom prst="rect">
+            <a:avLst/>
+          </a:prstGeom>
+          <a:noFill/>
+        </p:spPr>
+        <p:txBody>
+          <a:bodyPr wrap="square" lIns="0" rIns="0" tIns="0" bIns="0" anchor="t">
+            <a:spAutoFit/>
+          </a:bodyPr>
+          <a:lstStyle/>
+          <a:p>
+            <a:pPr algn="ctr"/>
+            <a:r>
+              <a:rPr sz="850" b="1" i="0">
+                <a:solidFill>
+                  <a:srgbClr val="FFFFFF"/>
+                </a:solidFill>
+                <a:latin typeface="Calibri"/>
+              </a:rPr>
+              <a:t>MEDIUM</a:t>
+            </a:r>
+          </a:p>
+        </p:txBody>
+      </p:sp>
+      <p:sp>
+        <p:nvSpPr>
+          <p:cNvPr id="18" name="TextBox 17"/>
+          <p:cNvSpPr txBox="1"/>
+          <p:nvPr/>
+        </p:nvSpPr>
+        <p:spPr>
+          <a:xfrm>
+            <a:off x="3529584" y="5285232"/>
+            <a:ext cx="2377440" cy="237744"/>
+          </a:xfrm>
+          <a:prstGeom prst="rect">
+            <a:avLst/>
+          </a:prstGeom>
+          <a:noFill/>
+        </p:spPr>
+        <p:txBody>
+          <a:bodyPr wrap="square" lIns="0" rIns="0" tIns="0" bIns="0" anchor="t">
+            <a:spAutoFit/>
+          </a:bodyPr>
+          <a:lstStyle/>
+          <a:p>
+            <a:pPr algn="l"/>
+            <a:r>
+              <a:rPr sz="1300" b="1" i="0">
+                <a:solidFill>
+                  <a:srgbClr val="6D2E46"/>
+                </a:solidFill>
+                <a:latin typeface="Cambria"/>
+              </a:rPr>
+              <a:t>Nahunta</a:t>
+            </a:r>
+          </a:p>
+        </p:txBody>
+      </p:sp>
+      <p:sp>
+        <p:nvSpPr>
+          <p:cNvPr id="19" name="TextBox 18"/>
+          <p:cNvSpPr txBox="1"/>
+          <p:nvPr/>
+        </p:nvSpPr>
+        <p:spPr>
+          <a:xfrm>
+            <a:off x="3529584" y="5513832"/>
+            <a:ext cx="2377440" cy="182880"/>
+          </a:xfrm>
+          <a:prstGeom prst="rect">
+            <a:avLst/>
+          </a:prstGeom>
+          <a:noFill/>
+        </p:spPr>
+        <p:txBody>
+          <a:bodyPr wrap="square" lIns="0" rIns="0" tIns="0" bIns="0" anchor="t">
+            <a:spAutoFit/>
+          </a:bodyPr>
+          <a:lstStyle/>
+          <a:p>
+            <a:pPr algn="l"/>
+            <a:r>
+              <a:rPr sz="950" b="0" i="1">
+                <a:solidFill>
+                  <a:srgbClr val="A26769"/>
+                </a:solidFill>
+                <a:latin typeface="Calibri"/>
+              </a:rPr>
+              <a:t>P-80A · Pikeville</a:t>
+            </a:r>
+          </a:p>
+        </p:txBody>
+      </p:sp>
+      <p:sp>
+        <p:nvSpPr>
+          <p:cNvPr id="20" name="TextBox 19"/>
+          <p:cNvSpPr txBox="1"/>
+          <p:nvPr/>
+        </p:nvSpPr>
+        <p:spPr>
+          <a:xfrm>
+            <a:off x="3529584" y="5705856"/>
+            <a:ext cx="2395728" cy="310896"/>
+          </a:xfrm>
+          <a:prstGeom prst="rect">
+            <a:avLst/>
+          </a:prstGeom>
+          <a:noFill/>
+        </p:spPr>
+        <p:txBody>
+          <a:bodyPr wrap="square" lIns="0" rIns="0" tIns="0" bIns="0" anchor="t">
+            <a:spAutoFit/>
+          </a:bodyPr>
+          <a:lstStyle/>
+          <a:p>
+            <a:pPr algn="l"/>
+            <a:r>
+              <a:rPr sz="950" b="0" i="0">
+                <a:solidFill>
+                  <a:srgbClr val="2B2B2B"/>
+                </a:solidFill>
+                <a:latin typeface="Calibri"/>
+              </a:rPr>
+              <a:t>~500 / wk  ·  state-inspected → domestic only</a:t>
+            </a:r>
+          </a:p>
+        </p:txBody>
+      </p:sp>
+      <p:sp>
+        <p:nvSpPr>
+          <p:cNvPr id="21" name="Rounded Rectangle 20"/>
+          <p:cNvSpPr/>
+          <p:nvPr/>
+        </p:nvSpPr>
+        <p:spPr>
+          <a:xfrm>
+            <a:off x="6217920" y="4901184"/>
+            <a:ext cx="2633472" cy="1170432"/>
+          </a:xfrm>
+          <a:prstGeom prst="roundRect">
+            <a:avLst>
+              <a:gd name="adj" fmla="val 6000"/>
+            </a:avLst>
+          </a:prstGeom>
+          <a:solidFill>
+            <a:srgbClr val="F7F0F1"/>
+          </a:solidFill>
+          <a:ln>
+            <a:noFill/>
+          </a:ln>
+          <a:effectLst/>
+        </p:spPr>
+        <p:style>
+          <a:lnRef idx="1">
+            <a:schemeClr val="accent1"/>
+          </a:lnRef>
+          <a:fillRef idx="3">
+            <a:schemeClr val="accent1"/>
+          </a:fillRef>
+          <a:effectRef idx="2">
+            <a:schemeClr val="accent1"/>
+          </a:effectRef>
+          <a:fontRef idx="minor">
+            <a:schemeClr val="lt1"/>
+          </a:fontRef>
+        </p:style>
+        <p:txBody>
+          <a:bodyPr rtlCol="0" anchor="ctr"/>
+          <a:lstStyle/>
+          <a:p/>
+        </p:txBody>
+      </p:sp>
+      <p:sp>
+        <p:nvSpPr>
+          <p:cNvPr id="22" name="Rounded Rectangle 21"/>
+          <p:cNvSpPr/>
+          <p:nvPr/>
+        </p:nvSpPr>
+        <p:spPr>
+          <a:xfrm>
+            <a:off x="6364224" y="5010912"/>
+            <a:ext cx="932688" cy="219456"/>
+          </a:xfrm>
+          <a:prstGeom prst="roundRect">
+            <a:avLst>
+              <a:gd name="adj" fmla="val 35000"/>
+            </a:avLst>
+          </a:prstGeom>
+          <a:solidFill>
+            <a:srgbClr val="6D2E46"/>
+          </a:solidFill>
+          <a:ln>
+            <a:noFill/>
+          </a:ln>
+          <a:effectLst/>
+        </p:spPr>
+        <p:style>
+          <a:lnRef idx="1">
+            <a:schemeClr val="accent1"/>
+          </a:lnRef>
+          <a:fillRef idx="3">
+            <a:schemeClr val="accent1"/>
+          </a:fillRef>
+          <a:effectRef idx="2">
+            <a:schemeClr val="accent1"/>
+          </a:effectRef>
+          <a:fontRef idx="minor">
+            <a:schemeClr val="lt1"/>
+          </a:fontRef>
+        </p:style>
+        <p:txBody>
+          <a:bodyPr rtlCol="0" anchor="ctr"/>
+          <a:lstStyle/>
+          <a:p>
+            <a:pPr algn="ctr"/>
+          </a:p>
+        </p:txBody>
+      </p:sp>
+      <p:sp>
+        <p:nvSpPr>
+          <p:cNvPr id="23" name="TextBox 22"/>
+          <p:cNvSpPr txBox="1"/>
+          <p:nvPr/>
+        </p:nvSpPr>
+        <p:spPr>
+          <a:xfrm>
+            <a:off x="6364224" y="5038344"/>
+            <a:ext cx="932688" cy="182880"/>
+          </a:xfrm>
+          <a:prstGeom prst="rect">
+            <a:avLst/>
+          </a:prstGeom>
+          <a:noFill/>
+        </p:spPr>
+        <p:txBody>
+          <a:bodyPr wrap="square" lIns="0" rIns="0" tIns="0" bIns="0" anchor="t">
+            <a:spAutoFit/>
+          </a:bodyPr>
+          <a:lstStyle/>
+          <a:p>
+            <a:pPr algn="ctr"/>
+            <a:r>
+              <a:rPr sz="850" b="1" i="0">
+                <a:solidFill>
+                  <a:srgbClr val="FFFFFF"/>
+                </a:solidFill>
+                <a:latin typeface="Calibri"/>
+              </a:rPr>
+              <a:t>MEDIUM</a:t>
+            </a:r>
+          </a:p>
+        </p:txBody>
+      </p:sp>
+      <p:sp>
+        <p:nvSpPr>
+          <p:cNvPr id="24" name="TextBox 23"/>
+          <p:cNvSpPr txBox="1"/>
+          <p:nvPr/>
+        </p:nvSpPr>
+        <p:spPr>
+          <a:xfrm>
+            <a:off x="6364224" y="5285232"/>
+            <a:ext cx="2377440" cy="237744"/>
+          </a:xfrm>
+          <a:prstGeom prst="rect">
+            <a:avLst/>
+          </a:prstGeom>
+          <a:noFill/>
+        </p:spPr>
+        <p:txBody>
+          <a:bodyPr wrap="square" lIns="0" rIns="0" tIns="0" bIns="0" anchor="t">
+            <a:spAutoFit/>
+          </a:bodyPr>
+          <a:lstStyle/>
+          <a:p>
+            <a:pPr algn="l"/>
+            <a:r>
+              <a:rPr sz="1300" b="1" i="0">
+                <a:solidFill>
+                  <a:srgbClr val="6D2E46"/>
+                </a:solidFill>
+                <a:latin typeface="Cambria"/>
+              </a:rPr>
+              <a:t>Martin's Pork Products</a:t>
+            </a:r>
+          </a:p>
+        </p:txBody>
+      </p:sp>
+      <p:sp>
+        <p:nvSpPr>
+          <p:cNvPr id="25" name="TextBox 24"/>
+          <p:cNvSpPr txBox="1"/>
+          <p:nvPr/>
+        </p:nvSpPr>
+        <p:spPr>
+          <a:xfrm>
+            <a:off x="6364224" y="5513832"/>
+            <a:ext cx="2377440" cy="182880"/>
+          </a:xfrm>
+          <a:prstGeom prst="rect">
+            <a:avLst/>
+          </a:prstGeom>
+          <a:noFill/>
+        </p:spPr>
+        <p:txBody>
+          <a:bodyPr wrap="square" lIns="0" rIns="0" tIns="0" bIns="0" anchor="t">
+            <a:spAutoFit/>
+          </a:bodyPr>
+          <a:lstStyle/>
+          <a:p>
+            <a:pPr algn="l"/>
+            <a:r>
+              <a:rPr sz="950" b="0" i="1">
+                <a:solidFill>
+                  <a:srgbClr val="A26769"/>
+                </a:solidFill>
+                <a:latin typeface="Calibri"/>
+              </a:rPr>
+              <a:t>TA-6720 · Falcon</a:t>
+            </a:r>
+          </a:p>
+        </p:txBody>
+      </p:sp>
+      <p:sp>
+        <p:nvSpPr>
+          <p:cNvPr id="26" name="TextBox 25"/>
+          <p:cNvSpPr txBox="1"/>
+          <p:nvPr/>
+        </p:nvSpPr>
+        <p:spPr>
+          <a:xfrm>
+            <a:off x="6364224" y="5705856"/>
+            <a:ext cx="2395728" cy="310896"/>
+          </a:xfrm>
+          <a:prstGeom prst="rect">
+            <a:avLst/>
+          </a:prstGeom>
+          <a:noFill/>
+        </p:spPr>
+        <p:txBody>
+          <a:bodyPr wrap="square" lIns="0" rIns="0" tIns="0" bIns="0" anchor="t">
+            <a:spAutoFit/>
+          </a:bodyPr>
+          <a:lstStyle/>
+          <a:p>
+            <a:pPr algn="l"/>
+            <a:r>
+              <a:rPr sz="950" b="0" i="0">
+                <a:solidFill>
+                  <a:srgbClr val="2B2B2B"/>
+                </a:solidFill>
+                <a:latin typeface="Calibri"/>
+              </a:rPr>
+              <a:t>200–1,500 / wk  ·  federal TA → export-eligible</a:t>
+            </a:r>
+          </a:p>
+        </p:txBody>
+      </p:sp>
+      <p:sp>
+        <p:nvSpPr>
+          <p:cNvPr id="27" name="Rounded Rectangle 26"/>
+          <p:cNvSpPr/>
+          <p:nvPr/>
+        </p:nvSpPr>
+        <p:spPr>
+          <a:xfrm>
+            <a:off x="9052560" y="4901184"/>
+            <a:ext cx="2633472" cy="1170432"/>
+          </a:xfrm>
+          <a:prstGeom prst="roundRect">
+            <a:avLst>
+              <a:gd name="adj" fmla="val 6000"/>
+            </a:avLst>
+          </a:prstGeom>
+          <a:solidFill>
+            <a:srgbClr val="F7F0F1"/>
+          </a:solidFill>
+          <a:ln>
+            <a:noFill/>
+          </a:ln>
+          <a:effectLst/>
+        </p:spPr>
+        <p:style>
+          <a:lnRef idx="1">
+            <a:schemeClr val="accent1"/>
+          </a:lnRef>
+          <a:fillRef idx="3">
+            <a:schemeClr val="accent1"/>
+          </a:fillRef>
+          <a:effectRef idx="2">
+            <a:schemeClr val="accent1"/>
+          </a:effectRef>
+          <a:fontRef idx="minor">
+            <a:schemeClr val="lt1"/>
+          </a:fontRef>
+        </p:style>
+        <p:txBody>
+          <a:bodyPr rtlCol="0" anchor="ctr"/>
+          <a:lstStyle/>
+          <a:p/>
+        </p:txBody>
+      </p:sp>
+      <p:sp>
+        <p:nvSpPr>
+          <p:cNvPr id="28" name="Rounded Rectangle 27"/>
+          <p:cNvSpPr/>
+          <p:nvPr/>
+        </p:nvSpPr>
+        <p:spPr>
+          <a:xfrm>
+            <a:off x="9198864" y="5010912"/>
+            <a:ext cx="932688" cy="219456"/>
+          </a:xfrm>
+          <a:prstGeom prst="roundRect">
+            <a:avLst>
+              <a:gd name="adj" fmla="val 35000"/>
+            </a:avLst>
+          </a:prstGeom>
+          <a:solidFill>
+            <a:srgbClr val="6D2E46"/>
+          </a:solidFill>
+          <a:ln>
+            <a:noFill/>
+          </a:ln>
+          <a:effectLst/>
+        </p:spPr>
+        <p:style>
+          <a:lnRef idx="1">
+            <a:schemeClr val="accent1"/>
+          </a:lnRef>
+          <a:fillRef idx="3">
+            <a:schemeClr val="accent1"/>
+          </a:fillRef>
+          <a:effectRef idx="2">
+            <a:schemeClr val="accent1"/>
+          </a:effectRef>
+          <a:fontRef idx="minor">
+            <a:schemeClr val="lt1"/>
+          </a:fontRef>
+        </p:style>
+        <p:txBody>
+          <a:bodyPr rtlCol="0" anchor="ctr"/>
+          <a:lstStyle/>
+          <a:p>
+            <a:pPr algn="ctr"/>
+          </a:p>
+        </p:txBody>
+      </p:sp>
+      <p:sp>
+        <p:nvSpPr>
+          <p:cNvPr id="29" name="TextBox 28"/>
+          <p:cNvSpPr txBox="1"/>
+          <p:nvPr/>
+        </p:nvSpPr>
+        <p:spPr>
+          <a:xfrm>
+            <a:off x="9198864" y="5038344"/>
+            <a:ext cx="932688" cy="182880"/>
+          </a:xfrm>
+          <a:prstGeom prst="rect">
+            <a:avLst/>
+          </a:prstGeom>
+          <a:noFill/>
+        </p:spPr>
+        <p:txBody>
+          <a:bodyPr wrap="square" lIns="0" rIns="0" tIns="0" bIns="0" anchor="t">
+            <a:spAutoFit/>
+          </a:bodyPr>
+          <a:lstStyle/>
+          <a:p>
+            <a:pPr algn="ctr"/>
+            <a:r>
+              <a:rPr sz="850" b="1" i="0">
+                <a:solidFill>
+                  <a:srgbClr val="FFFFFF"/>
+                </a:solidFill>
+                <a:latin typeface="Calibri"/>
+              </a:rPr>
+              <a:t>MEDIUM</a:t>
+            </a:r>
+          </a:p>
+        </p:txBody>
+      </p:sp>
+      <p:sp>
+        <p:nvSpPr>
+          <p:cNvPr id="30" name="TextBox 29"/>
+          <p:cNvSpPr txBox="1"/>
+          <p:nvPr/>
+        </p:nvSpPr>
+        <p:spPr>
+          <a:xfrm>
+            <a:off x="9198864" y="5285232"/>
+            <a:ext cx="2377440" cy="237744"/>
+          </a:xfrm>
+          <a:prstGeom prst="rect">
+            <a:avLst/>
+          </a:prstGeom>
+          <a:noFill/>
+        </p:spPr>
+        <p:txBody>
+          <a:bodyPr wrap="square" lIns="0" rIns="0" tIns="0" bIns="0" anchor="t">
+            <a:spAutoFit/>
+          </a:bodyPr>
+          <a:lstStyle/>
+          <a:p>
+            <a:pPr algn="l"/>
+            <a:r>
+              <a:rPr sz="1300" b="1" i="0">
+                <a:solidFill>
+                  <a:srgbClr val="6D2E46"/>
+                </a:solidFill>
+                <a:latin typeface="Cambria"/>
+              </a:rPr>
+              <a:t>Parks Family Meats</a:t>
+            </a:r>
+          </a:p>
+        </p:txBody>
+      </p:sp>
+      <p:sp>
+        <p:nvSpPr>
+          <p:cNvPr id="31" name="TextBox 30"/>
+          <p:cNvSpPr txBox="1"/>
+          <p:nvPr/>
+        </p:nvSpPr>
+        <p:spPr>
+          <a:xfrm>
+            <a:off x="9198864" y="5513832"/>
+            <a:ext cx="2377440" cy="182880"/>
+          </a:xfrm>
+          <a:prstGeom prst="rect">
+            <a:avLst/>
+          </a:prstGeom>
+          <a:noFill/>
+        </p:spPr>
+        <p:txBody>
+          <a:bodyPr wrap="square" lIns="0" rIns="0" tIns="0" bIns="0" anchor="t">
+            <a:spAutoFit/>
+          </a:bodyPr>
+          <a:lstStyle/>
+          <a:p>
+            <a:pPr algn="l"/>
+            <a:r>
+              <a:rPr sz="950" b="0" i="1">
+                <a:solidFill>
+                  <a:srgbClr val="A26769"/>
+                </a:solidFill>
+                <a:latin typeface="Calibri"/>
+              </a:rPr>
+              <a:t>TA-18296A · Warsaw</a:t>
+            </a:r>
+          </a:p>
+        </p:txBody>
+      </p:sp>
+      <p:sp>
+        <p:nvSpPr>
+          <p:cNvPr id="32" name="TextBox 31"/>
+          <p:cNvSpPr txBox="1"/>
+          <p:nvPr/>
+        </p:nvSpPr>
+        <p:spPr>
+          <a:xfrm>
+            <a:off x="9198864" y="5705856"/>
+            <a:ext cx="2395728" cy="310896"/>
+          </a:xfrm>
+          <a:prstGeom prst="rect">
+            <a:avLst/>
+          </a:prstGeom>
+          <a:noFill/>
+        </p:spPr>
+        <p:txBody>
+          <a:bodyPr wrap="square" lIns="0" rIns="0" tIns="0" bIns="0" anchor="t">
+            <a:spAutoFit/>
+          </a:bodyPr>
+          <a:lstStyle/>
+          <a:p>
+            <a:pPr algn="l"/>
+            <a:r>
+              <a:rPr sz="950" b="0" i="0">
+                <a:solidFill>
+                  <a:srgbClr val="2B2B2B"/>
+                </a:solidFill>
+                <a:latin typeface="Calibri"/>
+              </a:rPr>
+              <a:t>~1,750–2,000 / wk  ·  but ROASTER pigs, 10–150 lb</a:t>
+            </a:r>
+          </a:p>
+        </p:txBody>
+      </p:sp>
+      <p:sp>
+        <p:nvSpPr>
+          <p:cNvPr id="33" name="TextBox 32"/>
+          <p:cNvSpPr txBox="1"/>
+          <p:nvPr/>
+        </p:nvSpPr>
+        <p:spPr>
+          <a:xfrm>
+            <a:off x="548640" y="6199632"/>
+            <a:ext cx="11064240" cy="274320"/>
+          </a:xfrm>
+          <a:prstGeom prst="rect">
+            <a:avLst/>
+          </a:prstGeom>
+          <a:noFill/>
+        </p:spPr>
+        <p:txBody>
+          <a:bodyPr wrap="square" lIns="0" rIns="0" tIns="0" bIns="0" anchor="t">
+            <a:spAutoFit/>
+          </a:bodyPr>
+          <a:lstStyle/>
+          <a:p>
+            <a:pPr algn="l"/>
+            <a:r>
+              <a:rPr sz="1250" b="1" i="0">
+                <a:solidFill>
+                  <a:srgbClr val="6D2E46"/>
+                </a:solidFill>
+                <a:latin typeface="Calibri"/>
+              </a:rPr>
+              <a:t>Three of our four Eastern NC candidates sit in MEDIUM — and 10 of Eastern NC’s 14 plants are federally inspected, the only export-eligible base.</a:t>
+            </a:r>
+          </a:p>
+        </p:txBody>
+      </p:sp>
+      <p:sp>
+        <p:nvSpPr>
+          <p:cNvPr id="34" name="TextBox 33"/>
+          <p:cNvSpPr txBox="1"/>
+          <p:nvPr/>
+        </p:nvSpPr>
+        <p:spPr>
+          <a:xfrm>
+            <a:off x="548640" y="6473952"/>
+            <a:ext cx="11064240" cy="237744"/>
+          </a:xfrm>
+          <a:prstGeom prst="rect">
+            <a:avLst/>
+          </a:prstGeom>
+          <a:noFill/>
+        </p:spPr>
+        <p:txBody>
+          <a:bodyPr wrap="square" lIns="0" rIns="0" tIns="0" bIns="0" anchor="t">
+            <a:spAutoFit/>
+          </a:bodyPr>
+          <a:lstStyle/>
+          <a:p>
+            <a:pPr algn="l"/>
+            <a:r>
+              <a:rPr sz="950" b="0" i="1">
                 <a:solidFill>
                   <a:srgbClr val="6E6E6E"/>
                 </a:solidFill>
-                <a:latin typeface="Calibri" pitchFamily="34" charset="0"/>
-                <a:ea typeface="Calibri" pitchFamily="34" charset="-122"/>
-                <a:cs typeface="Calibri" pitchFamily="34" charset="-120"/>
-              </a:rPr>
-              <a:t>Distinct named plants only — roll-ups excluded to avoid double-counting. 20 further plants sit elsewhere in the Midwest / nationally. Pennsylvania out of scope.</a:t>
-            </a:r>
-            <a:endParaRPr lang="en-US" sz="1050" dirty="0"/>
-          </a:p>
-        </p:txBody>
-      </p:sp>
-      <p:sp>
-        <p:nvSpPr>
-          <p:cNvPr id="11" name="Text 7"/>
-          <p:cNvSpPr/>
-          <p:nvPr/>
-        </p:nvSpPr>
-        <p:spPr>
-          <a:xfrm>
-            <a:off x="548640" y="6199632"/>
-            <a:ext cx="11064240" cy="329184"/>
-          </a:xfrm>
-          <a:prstGeom prst="rect">
-            <a:avLst/>
-          </a:prstGeom>
-          <a:noFill/>
-          <a:ln/>
-        </p:spPr>
-        <p:txBody>
-          <a:bodyPr wrap="square" lIns="0" tIns="0" rIns="0" bIns="0" rtlCol="0" anchor="ctr"/>
-          <a:lstStyle/>
-          <a:p>
-            <a:pPr indent="0" marL="0">
-              <a:buNone/>
-            </a:pPr>
-            <a:r>
-              <a:rPr lang="en-US" sz="1350" i="1" dirty="0">
-                <a:solidFill>
-                  <a:srgbClr val="6D2E46"/>
-                </a:solidFill>
-                <a:latin typeface="Calibri" pitchFamily="34" charset="0"/>
-                <a:ea typeface="Calibri" pitchFamily="34" charset="-122"/>
-                <a:cs typeface="Calibri" pitchFamily="34" charset="-120"/>
-              </a:rPr>
-              <a:t>Discuss:  how much weight do we give geographic proximity — and do we split domestic vs EU by region?</a:t>
-            </a:r>
-            <a:endParaRPr lang="en-US" sz="1350" dirty="0"/>
+                <a:latin typeface="Calibri"/>
+              </a:rPr>
+              <a:t>Distinct named plants only; roll-ups excluded. 20 further plants sit elsewhere in the Midwest / nationally. Pennsylvania out of scope.</a:t>
+            </a:r>
           </a:p>
         </p:txBody>
       </p:sp>
@@ -5563,11 +6972,11 @@
           <a:bodyPr wrap="square" lIns="0" tIns="0" rIns="0" bIns="0" rtlCol="0" anchor="ctr"/>
           <a:lstStyle/>
           <a:p>
-            <a:pPr indent="0" marL="0">
-              <a:buNone/>
-            </a:pPr>
-            <a:r>
-              <a:rPr lang="en-US" sz="1200" b="1" spc="200" kern="0" dirty="0">
+            <a:pPr marL="0" indent="0">
+              <a:buNone/>
+            </a:pPr>
+            <a:r>
+              <a:rPr lang="en-US" sz="1200" b="1" kern="0" spc="200" dirty="0">
                 <a:solidFill>
                   <a:srgbClr val="A26769"/>
                 </a:solidFill>
@@ -5602,7 +7011,7 @@
           <a:bodyPr wrap="square" lIns="0" tIns="0" rIns="0" bIns="0" rtlCol="0" anchor="ctr"/>
           <a:lstStyle/>
           <a:p>
-            <a:pPr indent="0" marL="0">
+            <a:pPr marL="0" indent="0">
               <a:buNone/>
             </a:pPr>
             <a:r>
@@ -5646,6 +7055,13 @@
             <a:prstDash val="solid"/>
           </a:ln>
         </p:spPr>
+        <p:txBody>
+          <a:bodyPr/>
+          <a:lstStyle/>
+          <a:p>
+            <a:endParaRPr lang="en-US"/>
+          </a:p>
+        </p:txBody>
       </p:sp>
       <p:sp>
         <p:nvSpPr>
@@ -5668,7 +7084,7 @@
           <a:bodyPr wrap="square" lIns="0" tIns="0" rIns="0" bIns="0" rtlCol="0" anchor="ctr"/>
           <a:lstStyle/>
           <a:p>
-            <a:pPr algn="ctr" indent="0" marL="0">
+            <a:pPr marL="0" indent="0" algn="ctr">
               <a:buNone/>
             </a:pPr>
             <a:r>
@@ -5712,6 +7128,13 @@
             <a:prstDash val="solid"/>
           </a:ln>
         </p:spPr>
+        <p:txBody>
+          <a:bodyPr/>
+          <a:lstStyle/>
+          <a:p>
+            <a:endParaRPr lang="en-US"/>
+          </a:p>
+        </p:txBody>
       </p:sp>
       <p:sp>
         <p:nvSpPr>
@@ -5737,6 +7160,13 @@
             <a:prstDash val="solid"/>
           </a:ln>
         </p:spPr>
+        <p:txBody>
+          <a:bodyPr/>
+          <a:lstStyle/>
+          <a:p>
+            <a:endParaRPr lang="en-US"/>
+          </a:p>
+        </p:txBody>
       </p:sp>
       <p:sp>
         <p:nvSpPr>
@@ -5759,7 +7189,7 @@
           <a:bodyPr wrap="square" lIns="0" tIns="0" rIns="0" bIns="0" rtlCol="0" anchor="ctr"/>
           <a:lstStyle/>
           <a:p>
-            <a:pPr algn="ctr" indent="0" marL="0">
+            <a:pPr marL="0" indent="0" algn="ctr">
               <a:buNone/>
             </a:pPr>
             <a:r>
@@ -5798,11 +7228,11 @@
           <a:bodyPr wrap="square" lIns="0" tIns="0" rIns="0" bIns="0" rtlCol="0" anchor="ctr"/>
           <a:lstStyle/>
           <a:p>
-            <a:pPr indent="0" marL="0">
-              <a:buNone/>
-            </a:pPr>
-            <a:r>
-              <a:rPr lang="en-US" sz="1100" b="1" spc="150" kern="0" dirty="0">
+            <a:pPr marL="0" indent="0">
+              <a:buNone/>
+            </a:pPr>
+            <a:r>
+              <a:rPr lang="en-US" sz="1100" b="1" kern="0" spc="150" dirty="0">
                 <a:solidFill>
                   <a:srgbClr val="A26769"/>
                 </a:solidFill>
@@ -5837,7 +7267,7 @@
           <a:bodyPr wrap="square" lIns="0" tIns="0" rIns="0" bIns="0" rtlCol="0" anchor="ctr"/>
           <a:lstStyle/>
           <a:p>
-            <a:pPr indent="0" marL="0">
+            <a:pPr marL="0" indent="0">
               <a:buNone/>
             </a:pPr>
             <a:r>
@@ -5876,7 +7306,7 @@
           <a:bodyPr wrap="square" lIns="0" tIns="0" rIns="0" bIns="0" rtlCol="0" anchor="ctr"/>
           <a:lstStyle/>
           <a:p>
-            <a:pPr indent="0" marL="0">
+            <a:pPr marL="0" indent="0">
               <a:buNone/>
             </a:pPr>
             <a:r>
@@ -6026,6 +7456,13 @@
             <a:prstDash val="solid"/>
           </a:ln>
         </p:spPr>
+        <p:txBody>
+          <a:bodyPr/>
+          <a:lstStyle/>
+          <a:p>
+            <a:endParaRPr lang="en-US"/>
+          </a:p>
+        </p:txBody>
       </p:sp>
       <p:sp>
         <p:nvSpPr>
@@ -6051,6 +7488,13 @@
             <a:prstDash val="solid"/>
           </a:ln>
         </p:spPr>
+        <p:txBody>
+          <a:bodyPr/>
+          <a:lstStyle/>
+          <a:p>
+            <a:endParaRPr lang="en-US"/>
+          </a:p>
+        </p:txBody>
       </p:sp>
       <p:sp>
         <p:nvSpPr>
@@ -6073,7 +7517,7 @@
           <a:bodyPr wrap="square" lIns="0" tIns="0" rIns="0" bIns="0" rtlCol="0" anchor="ctr"/>
           <a:lstStyle/>
           <a:p>
-            <a:pPr algn="ctr" indent="0" marL="0">
+            <a:pPr marL="0" indent="0" algn="ctr">
               <a:buNone/>
             </a:pPr>
             <a:r>
@@ -6112,11 +7556,11 @@
           <a:bodyPr wrap="square" lIns="0" tIns="0" rIns="0" bIns="0" rtlCol="0" anchor="ctr"/>
           <a:lstStyle/>
           <a:p>
-            <a:pPr indent="0" marL="0">
-              <a:buNone/>
-            </a:pPr>
-            <a:r>
-              <a:rPr lang="en-US" sz="1100" b="1" spc="150" kern="0" dirty="0">
+            <a:pPr marL="0" indent="0">
+              <a:buNone/>
+            </a:pPr>
+            <a:r>
+              <a:rPr lang="en-US" sz="1100" b="1" kern="0" spc="150" dirty="0">
                 <a:solidFill>
                   <a:srgbClr val="A26769"/>
                 </a:solidFill>
@@ -6151,7 +7595,7 @@
           <a:bodyPr wrap="square" lIns="0" tIns="0" rIns="0" bIns="0" rtlCol="0" anchor="ctr"/>
           <a:lstStyle/>
           <a:p>
-            <a:pPr indent="0" marL="0">
+            <a:pPr marL="0" indent="0">
               <a:buNone/>
             </a:pPr>
             <a:r>
@@ -6190,7 +7634,7 @@
           <a:bodyPr wrap="square" lIns="0" tIns="0" rIns="0" bIns="0" rtlCol="0" anchor="ctr"/>
           <a:lstStyle/>
           <a:p>
-            <a:pPr indent="0" marL="0">
+            <a:pPr marL="0" indent="0">
               <a:buNone/>
             </a:pPr>
             <a:r>
@@ -6340,6 +7784,13 @@
             <a:prstDash val="solid"/>
           </a:ln>
         </p:spPr>
+        <p:txBody>
+          <a:bodyPr/>
+          <a:lstStyle/>
+          <a:p>
+            <a:endParaRPr lang="en-US"/>
+          </a:p>
+        </p:txBody>
       </p:sp>
       <p:sp>
         <p:nvSpPr>
@@ -6362,7 +7813,7 @@
           <a:bodyPr wrap="square" lIns="0" tIns="0" rIns="0" bIns="0" rtlCol="0" anchor="ctr"/>
           <a:lstStyle/>
           <a:p>
-            <a:pPr indent="0" marL="0">
+            <a:pPr marL="0" indent="0">
               <a:buNone/>
             </a:pPr>
             <a:r>
@@ -6401,7 +7852,7 @@
           <a:bodyPr wrap="square" lIns="0" tIns="0" rIns="0" bIns="0" rtlCol="0" anchor="ctr"/>
           <a:lstStyle/>
           <a:p>
-            <a:pPr indent="0" marL="0">
+            <a:pPr marL="0" indent="0">
               <a:buNone/>
             </a:pPr>
             <a:r>
@@ -6465,11 +7916,11 @@
           <a:bodyPr wrap="square" lIns="0" tIns="0" rIns="0" bIns="0" rtlCol="0" anchor="ctr"/>
           <a:lstStyle/>
           <a:p>
-            <a:pPr indent="0" marL="0">
-              <a:buNone/>
-            </a:pPr>
-            <a:r>
-              <a:rPr lang="en-US" sz="1200" b="1" spc="200" kern="0" dirty="0">
+            <a:pPr marL="0" indent="0">
+              <a:buNone/>
+            </a:pPr>
+            <a:r>
+              <a:rPr lang="en-US" sz="1200" b="1" kern="0" spc="200" dirty="0">
                 <a:solidFill>
                   <a:srgbClr val="A26769"/>
                 </a:solidFill>
@@ -6504,7 +7955,7 @@
           <a:bodyPr wrap="square" lIns="0" tIns="0" rIns="0" bIns="0" rtlCol="0" anchor="ctr"/>
           <a:lstStyle/>
           <a:p>
-            <a:pPr indent="0" marL="0">
+            <a:pPr marL="0" indent="0">
               <a:buNone/>
             </a:pPr>
             <a:r>
@@ -6543,7 +7994,7 @@
           <a:bodyPr wrap="square" lIns="0" tIns="0" rIns="0" bIns="0" rtlCol="0" anchor="ctr"/>
           <a:lstStyle/>
           <a:p>
-            <a:pPr indent="0" marL="0">
+            <a:pPr marL="0" indent="0">
               <a:buNone/>
             </a:pPr>
             <a:r>
@@ -6582,11 +8033,11 @@
           <a:bodyPr wrap="square" lIns="0" tIns="0" rIns="0" bIns="0" rtlCol="0" anchor="ctr"/>
           <a:lstStyle/>
           <a:p>
-            <a:pPr indent="0" marL="0">
-              <a:buNone/>
-            </a:pPr>
-            <a:r>
-              <a:rPr lang="en-US" sz="1150" b="1" spc="150" kern="0" dirty="0">
+            <a:pPr marL="0" indent="0">
+              <a:buNone/>
+            </a:pPr>
+            <a:r>
+              <a:rPr lang="en-US" sz="1150" b="1" kern="0" spc="150" dirty="0">
                 <a:solidFill>
                   <a:srgbClr val="A26769"/>
                 </a:solidFill>
@@ -6626,6 +8077,13 @@
             <a:prstDash val="solid"/>
           </a:ln>
         </p:spPr>
+        <p:txBody>
+          <a:bodyPr/>
+          <a:lstStyle/>
+          <a:p>
+            <a:endParaRPr lang="en-US"/>
+          </a:p>
+        </p:txBody>
       </p:sp>
       <p:sp>
         <p:nvSpPr>
@@ -6651,6 +8109,13 @@
             <a:prstDash val="solid"/>
           </a:ln>
         </p:spPr>
+        <p:txBody>
+          <a:bodyPr/>
+          <a:lstStyle/>
+          <a:p>
+            <a:endParaRPr lang="en-US"/>
+          </a:p>
+        </p:txBody>
       </p:sp>
       <p:sp>
         <p:nvSpPr>
@@ -6673,7 +8138,7 @@
           <a:bodyPr wrap="square" lIns="0" tIns="0" rIns="0" bIns="0" rtlCol="0" anchor="ctr"/>
           <a:lstStyle/>
           <a:p>
-            <a:pPr indent="0" marL="0">
+            <a:pPr marL="0" indent="0">
               <a:buNone/>
             </a:pPr>
             <a:r>
@@ -6712,7 +8177,7 @@
           <a:bodyPr wrap="square" lIns="0" tIns="0" rIns="0" bIns="0" rtlCol="0" anchor="ctr"/>
           <a:lstStyle/>
           <a:p>
-            <a:pPr indent="0" marL="0">
+            <a:pPr marL="0" indent="0">
               <a:buNone/>
             </a:pPr>
             <a:r>
@@ -6751,7 +8216,7 @@
           <a:bodyPr wrap="square" lIns="0" tIns="0" rIns="0" bIns="0" rtlCol="0" anchor="ctr"/>
           <a:lstStyle/>
           <a:p>
-            <a:pPr indent="0" marL="0">
+            <a:pPr marL="0" indent="0">
               <a:lnSpc>
                 <a:spcPts val="1300"/>
               </a:lnSpc>
@@ -6771,7 +8236,7 @@
             <a:endParaRPr lang="en-US" sz="1050" dirty="0"/>
           </a:p>
           <a:p>
-            <a:pPr indent="0" marL="0">
+            <a:pPr marL="0" indent="0">
               <a:lnSpc>
                 <a:spcPts val="1300"/>
               </a:lnSpc>
@@ -6791,7 +8256,7 @@
             <a:endParaRPr lang="en-US" sz="1050" dirty="0"/>
           </a:p>
           <a:p>
-            <a:pPr indent="0" marL="0">
+            <a:pPr marL="0" indent="0">
               <a:lnSpc>
                 <a:spcPts val="1300"/>
               </a:lnSpc>
@@ -6838,6 +8303,13 @@
             <a:prstDash val="solid"/>
           </a:ln>
         </p:spPr>
+        <p:txBody>
+          <a:bodyPr/>
+          <a:lstStyle/>
+          <a:p>
+            <a:endParaRPr lang="en-US"/>
+          </a:p>
+        </p:txBody>
       </p:sp>
       <p:sp>
         <p:nvSpPr>
@@ -6863,6 +8335,13 @@
             <a:prstDash val="solid"/>
           </a:ln>
         </p:spPr>
+        <p:txBody>
+          <a:bodyPr/>
+          <a:lstStyle/>
+          <a:p>
+            <a:endParaRPr lang="en-US"/>
+          </a:p>
+        </p:txBody>
       </p:sp>
       <p:sp>
         <p:nvSpPr>
@@ -6885,7 +8364,7 @@
           <a:bodyPr wrap="square" lIns="0" tIns="0" rIns="0" bIns="0" rtlCol="0" anchor="ctr"/>
           <a:lstStyle/>
           <a:p>
-            <a:pPr indent="0" marL="0">
+            <a:pPr marL="0" indent="0">
               <a:buNone/>
             </a:pPr>
             <a:r>
@@ -6924,7 +8403,7 @@
           <a:bodyPr wrap="square" lIns="0" tIns="0" rIns="0" bIns="0" rtlCol="0" anchor="ctr"/>
           <a:lstStyle/>
           <a:p>
-            <a:pPr indent="0" marL="0">
+            <a:pPr marL="0" indent="0">
               <a:buNone/>
             </a:pPr>
             <a:r>
@@ -6963,7 +8442,7 @@
           <a:bodyPr wrap="square" lIns="0" tIns="0" rIns="0" bIns="0" rtlCol="0" anchor="ctr"/>
           <a:lstStyle/>
           <a:p>
-            <a:pPr indent="0" marL="0">
+            <a:pPr marL="0" indent="0">
               <a:lnSpc>
                 <a:spcPts val="1300"/>
               </a:lnSpc>
@@ -6983,7 +8462,7 @@
             <a:endParaRPr lang="en-US" sz="1050" dirty="0"/>
           </a:p>
           <a:p>
-            <a:pPr indent="0" marL="0">
+            <a:pPr marL="0" indent="0">
               <a:lnSpc>
                 <a:spcPts val="1300"/>
               </a:lnSpc>
@@ -7003,7 +8482,7 @@
             <a:endParaRPr lang="en-US" sz="1050" dirty="0"/>
           </a:p>
           <a:p>
-            <a:pPr indent="0" marL="0">
+            <a:pPr marL="0" indent="0">
               <a:lnSpc>
                 <a:spcPts val="1300"/>
               </a:lnSpc>
@@ -7050,6 +8529,13 @@
             <a:prstDash val="solid"/>
           </a:ln>
         </p:spPr>
+        <p:txBody>
+          <a:bodyPr/>
+          <a:lstStyle/>
+          <a:p>
+            <a:endParaRPr lang="en-US"/>
+          </a:p>
+        </p:txBody>
       </p:sp>
       <p:sp>
         <p:nvSpPr>
@@ -7075,6 +8561,13 @@
             <a:prstDash val="solid"/>
           </a:ln>
         </p:spPr>
+        <p:txBody>
+          <a:bodyPr/>
+          <a:lstStyle/>
+          <a:p>
+            <a:endParaRPr lang="en-US"/>
+          </a:p>
+        </p:txBody>
       </p:sp>
       <p:sp>
         <p:nvSpPr>
@@ -7097,7 +8590,7 @@
           <a:bodyPr wrap="square" lIns="0" tIns="0" rIns="0" bIns="0" rtlCol="0" anchor="ctr"/>
           <a:lstStyle/>
           <a:p>
-            <a:pPr indent="0" marL="0">
+            <a:pPr marL="0" indent="0">
               <a:buNone/>
             </a:pPr>
             <a:r>
@@ -7136,7 +8629,7 @@
           <a:bodyPr wrap="square" lIns="0" tIns="0" rIns="0" bIns="0" rtlCol="0" anchor="ctr"/>
           <a:lstStyle/>
           <a:p>
-            <a:pPr indent="0" marL="0">
+            <a:pPr marL="0" indent="0">
               <a:buNone/>
             </a:pPr>
             <a:r>
@@ -7175,7 +8668,7 @@
           <a:bodyPr wrap="square" lIns="0" tIns="0" rIns="0" bIns="0" rtlCol="0" anchor="ctr"/>
           <a:lstStyle/>
           <a:p>
-            <a:pPr indent="0" marL="0">
+            <a:pPr marL="0" indent="0">
               <a:lnSpc>
                 <a:spcPts val="1300"/>
               </a:lnSpc>
@@ -7195,7 +8688,7 @@
             <a:endParaRPr lang="en-US" sz="1050" dirty="0"/>
           </a:p>
           <a:p>
-            <a:pPr indent="0" marL="0">
+            <a:pPr marL="0" indent="0">
               <a:lnSpc>
                 <a:spcPts val="1300"/>
               </a:lnSpc>
@@ -7215,7 +8708,7 @@
             <a:endParaRPr lang="en-US" sz="1050" dirty="0"/>
           </a:p>
           <a:p>
-            <a:pPr indent="0" marL="0">
+            <a:pPr marL="0" indent="0">
               <a:lnSpc>
                 <a:spcPts val="1300"/>
               </a:lnSpc>
@@ -7262,6 +8755,13 @@
             <a:prstDash val="solid"/>
           </a:ln>
         </p:spPr>
+        <p:txBody>
+          <a:bodyPr/>
+          <a:lstStyle/>
+          <a:p>
+            <a:endParaRPr lang="en-US"/>
+          </a:p>
+        </p:txBody>
       </p:sp>
       <p:sp>
         <p:nvSpPr>
@@ -7287,6 +8787,13 @@
             <a:prstDash val="solid"/>
           </a:ln>
         </p:spPr>
+        <p:txBody>
+          <a:bodyPr/>
+          <a:lstStyle/>
+          <a:p>
+            <a:endParaRPr lang="en-US"/>
+          </a:p>
+        </p:txBody>
       </p:sp>
       <p:sp>
         <p:nvSpPr>
@@ -7309,7 +8816,7 @@
           <a:bodyPr wrap="square" lIns="0" tIns="0" rIns="0" bIns="0" rtlCol="0" anchor="ctr"/>
           <a:lstStyle/>
           <a:p>
-            <a:pPr indent="0" marL="0">
+            <a:pPr marL="0" indent="0">
               <a:buNone/>
             </a:pPr>
             <a:r>
@@ -7348,7 +8855,7 @@
           <a:bodyPr wrap="square" lIns="0" tIns="0" rIns="0" bIns="0" rtlCol="0" anchor="ctr"/>
           <a:lstStyle/>
           <a:p>
-            <a:pPr indent="0" marL="0">
+            <a:pPr marL="0" indent="0">
               <a:buNone/>
             </a:pPr>
             <a:r>
@@ -7387,7 +8894,7 @@
           <a:bodyPr wrap="square" lIns="0" tIns="0" rIns="0" bIns="0" rtlCol="0" anchor="ctr"/>
           <a:lstStyle/>
           <a:p>
-            <a:pPr indent="0" marL="0">
+            <a:pPr marL="0" indent="0">
               <a:lnSpc>
                 <a:spcPts val="1300"/>
               </a:lnSpc>
@@ -7407,7 +8914,7 @@
             <a:endParaRPr lang="en-US" sz="1050" dirty="0"/>
           </a:p>
           <a:p>
-            <a:pPr indent="0" marL="0">
+            <a:pPr marL="0" indent="0">
               <a:lnSpc>
                 <a:spcPts val="1300"/>
               </a:lnSpc>
@@ -7427,7 +8934,7 @@
             <a:endParaRPr lang="en-US" sz="1050" dirty="0"/>
           </a:p>
           <a:p>
-            <a:pPr indent="0" marL="0">
+            <a:pPr marL="0" indent="0">
               <a:lnSpc>
                 <a:spcPts val="1300"/>
               </a:lnSpc>
@@ -7469,7 +8976,7 @@
           <a:bodyPr wrap="square" lIns="0" tIns="0" rIns="0" bIns="0" rtlCol="0" anchor="ctr"/>
           <a:lstStyle/>
           <a:p>
-            <a:pPr indent="0" marL="0">
+            <a:pPr marL="0" indent="0">
               <a:buNone/>
             </a:pPr>
             <a:r>
@@ -7481,7 +8988,7 @@
                 <a:ea typeface="Calibri" pitchFamily="34" charset="-122"/>
                 <a:cs typeface="Calibri" pitchFamily="34" charset="-120"/>
               </a:rPr>
-              <a:t>Also organ-capable but a DIRECT COMPETITOR — Sustainable Swine Resources (Perry Way WI · Banner Creek KS). Read them; expect Model A access to be refused.</a:t>
+              <a:t>Also organ-capable but a DIRECT COMPETITOR — Sustainable Swine Resources (Perry Way WI · Banner Creek KS)</a:t>
             </a:r>
             <a:endParaRPr lang="en-US" sz="1100" dirty="0"/>
           </a:p>
@@ -7495,8 +9002,8 @@
         </p:nvSpPr>
         <p:spPr>
           <a:xfrm>
-            <a:off x="548640" y="4352544"/>
-            <a:ext cx="5394960" cy="1773936"/>
+            <a:off x="548640" y="4352543"/>
+            <a:ext cx="5394960" cy="1987871"/>
           </a:xfrm>
           <a:prstGeom prst="roundRect">
             <a:avLst>
@@ -7513,6 +9020,13 @@
             <a:prstDash val="solid"/>
           </a:ln>
         </p:spPr>
+        <p:txBody>
+          <a:bodyPr/>
+          <a:lstStyle/>
+          <a:p>
+            <a:endParaRPr lang="en-US"/>
+          </a:p>
+        </p:txBody>
       </p:sp>
       <p:sp>
         <p:nvSpPr>
@@ -7535,7 +9049,7 @@
           <a:bodyPr wrap="square" lIns="0" tIns="0" rIns="0" bIns="0" rtlCol="0" anchor="ctr"/>
           <a:lstStyle/>
           <a:p>
-            <a:pPr indent="0" marL="0">
+            <a:pPr marL="0" indent="0">
               <a:buNone/>
             </a:pPr>
             <a:r>
@@ -7646,7 +9160,7 @@
         </p:nvSpPr>
         <p:spPr>
           <a:xfrm>
-            <a:off x="804672" y="5833872"/>
+            <a:off x="822960" y="5990700"/>
             <a:ext cx="4892040" cy="237744"/>
           </a:xfrm>
           <a:prstGeom prst="rect">
@@ -7659,7 +9173,7 @@
           <a:bodyPr wrap="square" lIns="0" tIns="0" rIns="0" bIns="0" rtlCol="0" anchor="ctr"/>
           <a:lstStyle/>
           <a:p>
-            <a:pPr indent="0" marL="0">
+            <a:pPr marL="0" indent="0">
               <a:buNone/>
             </a:pPr>
             <a:r>
@@ -7685,7 +9199,7 @@
         </p:nvSpPr>
         <p:spPr>
           <a:xfrm>
-            <a:off x="6236208" y="4352544"/>
+            <a:off x="6144768" y="4407408"/>
             <a:ext cx="5376672" cy="1773936"/>
           </a:xfrm>
           <a:prstGeom prst="roundRect">
@@ -7703,6 +9217,13 @@
             <a:prstDash val="solid"/>
           </a:ln>
         </p:spPr>
+        <p:txBody>
+          <a:bodyPr/>
+          <a:lstStyle/>
+          <a:p>
+            <a:endParaRPr lang="en-US"/>
+          </a:p>
+        </p:txBody>
       </p:sp>
       <p:sp>
         <p:nvSpPr>
@@ -7725,7 +9246,7 @@
           <a:bodyPr wrap="square" lIns="0" tIns="0" rIns="0" bIns="0" rtlCol="0" anchor="ctr"/>
           <a:lstStyle/>
           <a:p>
-            <a:pPr indent="0" marL="0">
+            <a:pPr marL="0" indent="0">
               <a:buNone/>
             </a:pPr>
             <a:r>
@@ -7735,9 +9256,8 @@
                 </a:solidFill>
                 <a:latin typeface="Cambria" pitchFamily="34" charset="0"/>
                 <a:ea typeface="Cambria" pitchFamily="34" charset="-122"/>
-                <a:cs typeface="Cambria" pitchFamily="34" charset="-120"/>
-              </a:rPr>
-              <a:t>What to ask them for — and how to judge it</a:t>
+              </a:rPr>
+              <a:t>TTLC analysis by blocks.</a:t>
             </a:r>
             <a:endParaRPr lang="en-US" sz="1500" dirty="0"/>
           </a:p>
@@ -7780,9 +9300,8 @@
                 <a:ea typeface="Calibri" pitchFamily="34" charset="-122"/>
                 <a:cs typeface="Calibri" pitchFamily="34" charset="-120"/>
               </a:rPr>
-              <a:t>Ask each green-lit supplier for a PRICE PER BLOCK, not per organ.</a:t>
-            </a:r>
-            <a:endParaRPr lang="en-US" sz="1100" dirty="0"/>
+              <a:t>Ask each green-lit supplier for a PRICE PER BLOCK.</a:t>
+            </a:r>
           </a:p>
           <a:p>
             <a:pPr marL="342900" indent="-342900">
@@ -7802,66 +9321,6 @@
                 <a:cs typeface="Calibri" pitchFamily="34" charset="-120"/>
               </a:rPr>
               <a:t>Compare it against our TTLC — total true landed cost: harvest labour, line rental, plant fee, inspector time, transport, cold chain and holding, all in.</a:t>
-            </a:r>
-            <a:endParaRPr lang="en-US" sz="1100" dirty="0"/>
-          </a:p>
-          <a:p>
-            <a:pPr marL="342900" indent="-342900">
-              <a:spcAft>
-                <a:spcPts val="500"/>
-              </a:spcAft>
-              <a:buSzPct val="100000"/>
-              <a:buChar char="•"/>
-            </a:pPr>
-            <a:r>
-              <a:rPr lang="en-US" sz="1100" dirty="0">
-                <a:solidFill>
-                  <a:srgbClr val="ECE2D0"/>
-                </a:solidFill>
-                <a:latin typeface="Calibri" pitchFamily="34" charset="0"/>
-                <a:ea typeface="Calibri" pitchFamily="34" charset="-122"/>
-                <a:cs typeface="Calibri" pitchFamily="34" charset="-120"/>
-              </a:rPr>
-              <a:t>Acquisition price alone flatters buying. TTLC is the only fair comparison.</a:t>
-            </a:r>
-            <a:endParaRPr lang="en-US" sz="1100" dirty="0"/>
-          </a:p>
-        </p:txBody>
-      </p:sp>
-      <p:sp>
-        <p:nvSpPr>
-          <p:cNvPr id="34" name="Text 32"/>
-          <p:cNvSpPr/>
-          <p:nvPr/>
-        </p:nvSpPr>
-        <p:spPr>
-          <a:xfrm>
-            <a:off x="6492240" y="5852160"/>
-            <a:ext cx="4846320" cy="237744"/>
-          </a:xfrm>
-          <a:prstGeom prst="rect">
-            <a:avLst/>
-          </a:prstGeom>
-          <a:noFill/>
-          <a:ln/>
-        </p:spPr>
-        <p:txBody>
-          <a:bodyPr wrap="square" lIns="0" tIns="0" rIns="0" bIns="0" rtlCol="0" anchor="ctr"/>
-          <a:lstStyle/>
-          <a:p>
-            <a:pPr indent="0" marL="0">
-              <a:buNone/>
-            </a:pPr>
-            <a:r>
-              <a:rPr lang="en-US" sz="1100" i="1" dirty="0">
-                <a:solidFill>
-                  <a:srgbClr val="A26769"/>
-                </a:solidFill>
-                <a:latin typeface="Calibri" pitchFamily="34" charset="0"/>
-                <a:ea typeface="Calibri" pitchFamily="34" charset="-122"/>
-                <a:cs typeface="Calibri" pitchFamily="34" charset="-120"/>
-              </a:rPr>
-              <a:t>Their quotes feed straight into the TCO Calculator tab.</a:t>
             </a:r>
             <a:endParaRPr lang="en-US" sz="1100" dirty="0"/>
           </a:p>
@@ -7913,11 +9372,11 @@
           <a:bodyPr wrap="square" lIns="0" tIns="0" rIns="0" bIns="0" rtlCol="0" anchor="ctr"/>
           <a:lstStyle/>
           <a:p>
-            <a:pPr indent="0" marL="0">
-              <a:buNone/>
-            </a:pPr>
-            <a:r>
-              <a:rPr lang="en-US" sz="1200" b="1" spc="200" kern="0" dirty="0">
+            <a:pPr marL="0" indent="0">
+              <a:buNone/>
+            </a:pPr>
+            <a:r>
+              <a:rPr lang="en-US" sz="1200" b="1" kern="0" spc="200" dirty="0">
                 <a:solidFill>
                   <a:srgbClr val="A26769"/>
                 </a:solidFill>
@@ -7952,7 +9411,7 @@
           <a:bodyPr wrap="square" lIns="0" tIns="0" rIns="0" bIns="0" rtlCol="0" anchor="ctr"/>
           <a:lstStyle/>
           <a:p>
-            <a:pPr indent="0" marL="0">
+            <a:pPr marL="0" indent="0">
               <a:buNone/>
             </a:pPr>
             <a:r>
@@ -7996,6 +9455,13 @@
             <a:prstDash val="solid"/>
           </a:ln>
         </p:spPr>
+        <p:txBody>
+          <a:bodyPr/>
+          <a:lstStyle/>
+          <a:p>
+            <a:endParaRPr lang="en-US"/>
+          </a:p>
+        </p:txBody>
       </p:sp>
       <p:sp>
         <p:nvSpPr>
@@ -8018,7 +9484,7 @@
           <a:bodyPr wrap="square" lIns="0" tIns="0" rIns="0" bIns="0" rtlCol="0" anchor="ctr"/>
           <a:lstStyle/>
           <a:p>
-            <a:pPr algn="ctr" indent="0" marL="0">
+            <a:pPr marL="0" indent="0" algn="ctr">
               <a:buNone/>
             </a:pPr>
             <a:r>
@@ -8057,7 +9523,7 @@
           <a:bodyPr wrap="square" lIns="0" tIns="0" rIns="0" bIns="0" rtlCol="0" anchor="ctr"/>
           <a:lstStyle/>
           <a:p>
-            <a:pPr indent="0" marL="0">
+            <a:pPr marL="0" indent="0">
               <a:buNone/>
             </a:pPr>
             <a:r>
@@ -8101,6 +9567,13 @@
             <a:prstDash val="solid"/>
           </a:ln>
         </p:spPr>
+        <p:txBody>
+          <a:bodyPr/>
+          <a:lstStyle/>
+          <a:p>
+            <a:endParaRPr lang="en-US"/>
+          </a:p>
+        </p:txBody>
       </p:sp>
       <p:sp>
         <p:nvSpPr>
@@ -8126,6 +9599,13 @@
             <a:prstDash val="solid"/>
           </a:ln>
         </p:spPr>
+        <p:txBody>
+          <a:bodyPr/>
+          <a:lstStyle/>
+          <a:p>
+            <a:endParaRPr lang="en-US"/>
+          </a:p>
+        </p:txBody>
       </p:sp>
       <p:sp>
         <p:nvSpPr>
@@ -8148,7 +9628,7 @@
           <a:bodyPr wrap="square" lIns="0" tIns="0" rIns="0" bIns="0" rtlCol="0" anchor="ctr"/>
           <a:lstStyle/>
           <a:p>
-            <a:pPr algn="ctr" indent="0" marL="0">
+            <a:pPr marL="0" indent="0" algn="ctr">
               <a:buNone/>
             </a:pPr>
             <a:r>
@@ -8187,7 +9667,7 @@
           <a:bodyPr wrap="square" lIns="0" tIns="0" rIns="0" bIns="0" rtlCol="0" anchor="ctr"/>
           <a:lstStyle/>
           <a:p>
-            <a:pPr indent="0" marL="0">
+            <a:pPr marL="0" indent="0">
               <a:buNone/>
             </a:pPr>
             <a:r>
@@ -8226,7 +9706,7 @@
           <a:bodyPr wrap="square" lIns="0" tIns="0" rIns="0" bIns="0" rtlCol="0" anchor="ctr"/>
           <a:lstStyle/>
           <a:p>
-            <a:pPr indent="0" marL="0">
+            <a:pPr marL="0" indent="0">
               <a:buNone/>
             </a:pPr>
             <a:r>
@@ -8265,7 +9745,7 @@
           <a:bodyPr wrap="square" lIns="0" tIns="0" rIns="0" bIns="0" rtlCol="0" anchor="ctr"/>
           <a:lstStyle/>
           <a:p>
-            <a:pPr indent="0" marL="0">
+            <a:pPr marL="0" indent="0">
               <a:lnSpc>
                 <a:spcPts val="1500"/>
               </a:lnSpc>
@@ -8307,7 +9787,7 @@
           <a:bodyPr wrap="square" lIns="0" tIns="0" rIns="0" bIns="0" rtlCol="0" anchor="ctr"/>
           <a:lstStyle/>
           <a:p>
-            <a:pPr algn="ctr" indent="0" marL="0">
+            <a:pPr marL="0" indent="0" algn="ctr">
               <a:buNone/>
             </a:pPr>
             <a:r>
@@ -8351,6 +9831,13 @@
             <a:prstDash val="solid"/>
           </a:ln>
         </p:spPr>
+        <p:txBody>
+          <a:bodyPr/>
+          <a:lstStyle/>
+          <a:p>
+            <a:endParaRPr lang="en-US"/>
+          </a:p>
+        </p:txBody>
       </p:sp>
       <p:sp>
         <p:nvSpPr>
@@ -8376,6 +9863,13 @@
             <a:prstDash val="solid"/>
           </a:ln>
         </p:spPr>
+        <p:txBody>
+          <a:bodyPr/>
+          <a:lstStyle/>
+          <a:p>
+            <a:endParaRPr lang="en-US"/>
+          </a:p>
+        </p:txBody>
       </p:sp>
       <p:sp>
         <p:nvSpPr>
@@ -8398,7 +9892,7 @@
           <a:bodyPr wrap="square" lIns="0" tIns="0" rIns="0" bIns="0" rtlCol="0" anchor="ctr"/>
           <a:lstStyle/>
           <a:p>
-            <a:pPr algn="ctr" indent="0" marL="0">
+            <a:pPr marL="0" indent="0" algn="ctr">
               <a:buNone/>
             </a:pPr>
             <a:r>
@@ -8437,7 +9931,7 @@
           <a:bodyPr wrap="square" lIns="0" tIns="0" rIns="0" bIns="0" rtlCol="0" anchor="ctr"/>
           <a:lstStyle/>
           <a:p>
-            <a:pPr indent="0" marL="0">
+            <a:pPr marL="0" indent="0">
               <a:buNone/>
             </a:pPr>
             <a:r>
@@ -8476,7 +9970,7 @@
           <a:bodyPr wrap="square" lIns="0" tIns="0" rIns="0" bIns="0" rtlCol="0" anchor="ctr"/>
           <a:lstStyle/>
           <a:p>
-            <a:pPr indent="0" marL="0">
+            <a:pPr marL="0" indent="0">
               <a:buNone/>
             </a:pPr>
             <a:r>
@@ -8515,7 +10009,7 @@
           <a:bodyPr wrap="square" lIns="0" tIns="0" rIns="0" bIns="0" rtlCol="0" anchor="ctr"/>
           <a:lstStyle/>
           <a:p>
-            <a:pPr indent="0" marL="0">
+            <a:pPr marL="0" indent="0">
               <a:lnSpc>
                 <a:spcPts val="1500"/>
               </a:lnSpc>
@@ -8535,7 +10029,7 @@
             <a:endParaRPr lang="en-US" sz="1150" dirty="0"/>
           </a:p>
           <a:p>
-            <a:pPr indent="0" marL="0">
+            <a:pPr marL="0" indent="0">
               <a:lnSpc>
                 <a:spcPts val="1500"/>
               </a:lnSpc>
@@ -8577,7 +10071,7 @@
           <a:bodyPr wrap="square" lIns="0" tIns="0" rIns="0" bIns="0" rtlCol="0" anchor="ctr"/>
           <a:lstStyle/>
           <a:p>
-            <a:pPr algn="ctr" indent="0" marL="0">
+            <a:pPr marL="0" indent="0" algn="ctr">
               <a:buNone/>
             </a:pPr>
             <a:r>
@@ -8621,6 +10115,13 @@
             <a:prstDash val="solid"/>
           </a:ln>
         </p:spPr>
+        <p:txBody>
+          <a:bodyPr/>
+          <a:lstStyle/>
+          <a:p>
+            <a:endParaRPr lang="en-US"/>
+          </a:p>
+        </p:txBody>
       </p:sp>
       <p:sp>
         <p:nvSpPr>
@@ -8646,6 +10147,13 @@
             <a:prstDash val="solid"/>
           </a:ln>
         </p:spPr>
+        <p:txBody>
+          <a:bodyPr/>
+          <a:lstStyle/>
+          <a:p>
+            <a:endParaRPr lang="en-US"/>
+          </a:p>
+        </p:txBody>
       </p:sp>
       <p:sp>
         <p:nvSpPr>
@@ -8668,7 +10176,7 @@
           <a:bodyPr wrap="square" lIns="0" tIns="0" rIns="0" bIns="0" rtlCol="0" anchor="ctr"/>
           <a:lstStyle/>
           <a:p>
-            <a:pPr algn="ctr" indent="0" marL="0">
+            <a:pPr marL="0" indent="0" algn="ctr">
               <a:buNone/>
             </a:pPr>
             <a:r>
@@ -8707,7 +10215,7 @@
           <a:bodyPr wrap="square" lIns="0" tIns="0" rIns="0" bIns="0" rtlCol="0" anchor="ctr"/>
           <a:lstStyle/>
           <a:p>
-            <a:pPr indent="0" marL="0">
+            <a:pPr marL="0" indent="0">
               <a:buNone/>
             </a:pPr>
             <a:r>
@@ -8746,7 +10254,7 @@
           <a:bodyPr wrap="square" lIns="0" tIns="0" rIns="0" bIns="0" rtlCol="0" anchor="ctr"/>
           <a:lstStyle/>
           <a:p>
-            <a:pPr indent="0" marL="0">
+            <a:pPr marL="0" indent="0">
               <a:buNone/>
             </a:pPr>
             <a:r>
@@ -8785,7 +10293,7 @@
           <a:bodyPr wrap="square" lIns="0" tIns="0" rIns="0" bIns="0" rtlCol="0" anchor="ctr"/>
           <a:lstStyle/>
           <a:p>
-            <a:pPr indent="0" marL="0">
+            <a:pPr marL="0" indent="0">
               <a:lnSpc>
                 <a:spcPts val="1500"/>
               </a:lnSpc>
@@ -8805,7 +10313,7 @@
             <a:endParaRPr lang="en-US" sz="1150" dirty="0"/>
           </a:p>
           <a:p>
-            <a:pPr indent="0" marL="0">
+            <a:pPr marL="0" indent="0">
               <a:lnSpc>
                 <a:spcPts val="1500"/>
               </a:lnSpc>
@@ -8847,7 +10355,7 @@
           <a:bodyPr wrap="square" lIns="0" tIns="0" rIns="0" bIns="0" rtlCol="0" anchor="ctr"/>
           <a:lstStyle/>
           <a:p>
-            <a:pPr algn="ctr" indent="0" marL="0">
+            <a:pPr marL="0" indent="0" algn="ctr">
               <a:buNone/>
             </a:pPr>
             <a:r>
@@ -8891,6 +10399,13 @@
             <a:prstDash val="solid"/>
           </a:ln>
         </p:spPr>
+        <p:txBody>
+          <a:bodyPr/>
+          <a:lstStyle/>
+          <a:p>
+            <a:endParaRPr lang="en-US"/>
+          </a:p>
+        </p:txBody>
       </p:sp>
       <p:sp>
         <p:nvSpPr>
@@ -8916,6 +10431,13 @@
             <a:prstDash val="solid"/>
           </a:ln>
         </p:spPr>
+        <p:txBody>
+          <a:bodyPr/>
+          <a:lstStyle/>
+          <a:p>
+            <a:endParaRPr lang="en-US"/>
+          </a:p>
+        </p:txBody>
       </p:sp>
       <p:sp>
         <p:nvSpPr>
@@ -8938,7 +10460,7 @@
           <a:bodyPr wrap="square" lIns="0" tIns="0" rIns="0" bIns="0" rtlCol="0" anchor="ctr"/>
           <a:lstStyle/>
           <a:p>
-            <a:pPr algn="ctr" indent="0" marL="0">
+            <a:pPr marL="0" indent="0" algn="ctr">
               <a:buNone/>
             </a:pPr>
             <a:r>
@@ -8977,7 +10499,7 @@
           <a:bodyPr wrap="square" lIns="0" tIns="0" rIns="0" bIns="0" rtlCol="0" anchor="ctr"/>
           <a:lstStyle/>
           <a:p>
-            <a:pPr indent="0" marL="0">
+            <a:pPr marL="0" indent="0">
               <a:buNone/>
             </a:pPr>
             <a:r>
@@ -9016,7 +10538,7 @@
           <a:bodyPr wrap="square" lIns="0" tIns="0" rIns="0" bIns="0" rtlCol="0" anchor="ctr"/>
           <a:lstStyle/>
           <a:p>
-            <a:pPr indent="0" marL="0">
+            <a:pPr marL="0" indent="0">
               <a:buNone/>
             </a:pPr>
             <a:r>
@@ -9055,7 +10577,7 @@
           <a:bodyPr wrap="square" lIns="0" tIns="0" rIns="0" bIns="0" rtlCol="0" anchor="ctr"/>
           <a:lstStyle/>
           <a:p>
-            <a:pPr indent="0" marL="0">
+            <a:pPr marL="0" indent="0">
               <a:lnSpc>
                 <a:spcPts val="1500"/>
               </a:lnSpc>
@@ -9075,7 +10597,7 @@
             <a:endParaRPr lang="en-US" sz="1150" dirty="0"/>
           </a:p>
           <a:p>
-            <a:pPr indent="0" marL="0">
+            <a:pPr marL="0" indent="0">
               <a:lnSpc>
                 <a:spcPts val="1500"/>
               </a:lnSpc>
@@ -9117,7 +10639,7 @@
           <a:bodyPr wrap="square" lIns="0" tIns="0" rIns="0" bIns="0" rtlCol="0" anchor="ctr"/>
           <a:lstStyle/>
           <a:p>
-            <a:pPr algn="ctr" indent="0" marL="0">
+            <a:pPr marL="0" indent="0" algn="ctr">
               <a:buNone/>
             </a:pPr>
             <a:r>
@@ -9161,6 +10683,13 @@
             <a:prstDash val="solid"/>
           </a:ln>
         </p:spPr>
+        <p:txBody>
+          <a:bodyPr/>
+          <a:lstStyle/>
+          <a:p>
+            <a:endParaRPr lang="en-US"/>
+          </a:p>
+        </p:txBody>
       </p:sp>
       <p:sp>
         <p:nvSpPr>
@@ -9186,6 +10715,13 @@
             <a:prstDash val="solid"/>
           </a:ln>
         </p:spPr>
+        <p:txBody>
+          <a:bodyPr/>
+          <a:lstStyle/>
+          <a:p>
+            <a:endParaRPr lang="en-US"/>
+          </a:p>
+        </p:txBody>
       </p:sp>
       <p:sp>
         <p:nvSpPr>
@@ -9208,7 +10744,7 @@
           <a:bodyPr wrap="square" lIns="0" tIns="0" rIns="0" bIns="0" rtlCol="0" anchor="ctr"/>
           <a:lstStyle/>
           <a:p>
-            <a:pPr algn="ctr" indent="0" marL="0">
+            <a:pPr marL="0" indent="0" algn="ctr">
               <a:buNone/>
             </a:pPr>
             <a:r>
@@ -9247,7 +10783,7 @@
           <a:bodyPr wrap="square" lIns="0" tIns="0" rIns="0" bIns="0" rtlCol="0" anchor="ctr"/>
           <a:lstStyle/>
           <a:p>
-            <a:pPr indent="0" marL="0">
+            <a:pPr marL="0" indent="0">
               <a:buNone/>
             </a:pPr>
             <a:r>
@@ -9286,7 +10822,7 @@
           <a:bodyPr wrap="square" lIns="0" tIns="0" rIns="0" bIns="0" rtlCol="0" anchor="ctr"/>
           <a:lstStyle/>
           <a:p>
-            <a:pPr indent="0" marL="0">
+            <a:pPr marL="0" indent="0">
               <a:buNone/>
             </a:pPr>
             <a:r>
@@ -9325,7 +10861,7 @@
           <a:bodyPr wrap="square" lIns="0" tIns="0" rIns="0" bIns="0" rtlCol="0" anchor="ctr"/>
           <a:lstStyle/>
           <a:p>
-            <a:pPr indent="0" marL="0">
+            <a:pPr marL="0" indent="0">
               <a:lnSpc>
                 <a:spcPts val="1500"/>
               </a:lnSpc>
@@ -9345,7 +10881,7 @@
             <a:endParaRPr lang="en-US" sz="1150" dirty="0"/>
           </a:p>
           <a:p>
-            <a:pPr indent="0" marL="0">
+            <a:pPr marL="0" indent="0">
               <a:lnSpc>
                 <a:spcPts val="1500"/>
               </a:lnSpc>
@@ -9392,6 +10928,13 @@
             <a:prstDash val="solid"/>
           </a:ln>
         </p:spPr>
+        <p:txBody>
+          <a:bodyPr/>
+          <a:lstStyle/>
+          <a:p>
+            <a:endParaRPr lang="en-US"/>
+          </a:p>
+        </p:txBody>
       </p:sp>
       <p:sp>
         <p:nvSpPr>
@@ -9414,7 +10957,7 @@
           <a:bodyPr wrap="square" lIns="0" tIns="0" rIns="0" bIns="0" rtlCol="0" anchor="ctr"/>
           <a:lstStyle/>
           <a:p>
-            <a:pPr indent="0" marL="0">
+            <a:pPr marL="0" indent="0">
               <a:buNone/>
             </a:pPr>
             <a:r>
@@ -9453,7 +10996,7 @@
           <a:bodyPr wrap="square" lIns="0" tIns="0" rIns="0" bIns="0" rtlCol="0" anchor="ctr"/>
           <a:lstStyle/>
           <a:p>
-            <a:pPr indent="0" marL="0">
+            <a:pPr marL="0" indent="0">
               <a:buNone/>
             </a:pPr>
             <a:r>
@@ -9772,4 +11315,319 @@
     </a:ext>
   </a:extLst>
 </a:theme>
+</file>
+
+<file path=ppt/theme/theme2.xml><?xml version="1.0" encoding="utf-8"?>
+<a:theme xmlns:a="http://schemas.openxmlformats.org/drawingml/2006/main" name="Office Theme">
+  <a:themeElements>
+    <a:clrScheme name="Office">
+      <a:dk1>
+        <a:sysClr val="windowText" lastClr="000000"/>
+      </a:dk1>
+      <a:lt1>
+        <a:sysClr val="window" lastClr="FFFFFF"/>
+      </a:lt1>
+      <a:dk2>
+        <a:srgbClr val="0E2841"/>
+      </a:dk2>
+      <a:lt2>
+        <a:srgbClr val="E8E8E8"/>
+      </a:lt2>
+      <a:accent1>
+        <a:srgbClr val="156082"/>
+      </a:accent1>
+      <a:accent2>
+        <a:srgbClr val="E97132"/>
+      </a:accent2>
+      <a:accent3>
+        <a:srgbClr val="196B24"/>
+      </a:accent3>
+      <a:accent4>
+        <a:srgbClr val="0F9ED5"/>
+      </a:accent4>
+      <a:accent5>
+        <a:srgbClr val="A02B93"/>
+      </a:accent5>
+      <a:accent6>
+        <a:srgbClr val="4EA72E"/>
+      </a:accent6>
+      <a:hlink>
+        <a:srgbClr val="467886"/>
+      </a:hlink>
+      <a:folHlink>
+        <a:srgbClr val="96607D"/>
+      </a:folHlink>
+    </a:clrScheme>
+    <a:fontScheme name="Office">
+      <a:majorFont>
+        <a:latin typeface="Aptos Display" panose="02110004020202020204"/>
+        <a:ea typeface=""/>
+        <a:cs typeface=""/>
+        <a:font script="Jpan" typeface="游ゴシック Light"/>
+        <a:font script="Hang" typeface="맑은 고딕"/>
+        <a:font script="Hans" typeface="等线 Light"/>
+        <a:font script="Hant" typeface="新細明體"/>
+        <a:font script="Arab" typeface="Times New Roman"/>
+        <a:font script="Hebr" typeface="Times New Roman"/>
+        <a:font script="Thai" typeface="Angsana New"/>
+        <a:font script="Ethi" typeface="Nyala"/>
+        <a:font script="Beng" typeface="Vrinda"/>
+        <a:font script="Gujr" typeface="Shruti"/>
+        <a:font script="Khmr" typeface="MoolBoran"/>
+        <a:font script="Knda" typeface="Tunga"/>
+        <a:font script="Guru" typeface="Raavi"/>
+        <a:font script="Cans" typeface="Euphemia"/>
+        <a:font script="Cher" typeface="Plantagenet Cherokee"/>
+        <a:font script="Yiii" typeface="Microsoft Yi Baiti"/>
+        <a:font script="Tibt" typeface="Microsoft Himalaya"/>
+        <a:font script="Thaa" typeface="MV Boli"/>
+        <a:font script="Deva" typeface="Mangal"/>
+        <a:font script="Telu" typeface="Gautami"/>
+        <a:font script="Taml" typeface="Latha"/>
+        <a:font script="Syrc" typeface="Estrangelo Edessa"/>
+        <a:font script="Orya" typeface="Kalinga"/>
+        <a:font script="Mlym" typeface="Kartika"/>
+        <a:font script="Laoo" typeface="DokChampa"/>
+        <a:font script="Sinh" typeface="Iskoola Pota"/>
+        <a:font script="Mong" typeface="Mongolian Baiti"/>
+        <a:font script="Viet" typeface="Times New Roman"/>
+        <a:font script="Uigh" typeface="Microsoft Uighur"/>
+        <a:font script="Geor" typeface="Sylfaen"/>
+        <a:font script="Armn" typeface="Arial"/>
+        <a:font script="Bugi" typeface="Leelawadee UI"/>
+        <a:font script="Bopo" typeface="Microsoft JhengHei"/>
+        <a:font script="Java" typeface="Javanese Text"/>
+        <a:font script="Lisu" typeface="Segoe UI"/>
+        <a:font script="Mymr" typeface="Myanmar Text"/>
+        <a:font script="Nkoo" typeface="Ebrima"/>
+        <a:font script="Olck" typeface="Nirmala UI"/>
+        <a:font script="Osma" typeface="Ebrima"/>
+        <a:font script="Phag" typeface="Phagspa"/>
+        <a:font script="Syrn" typeface="Estrangelo Edessa"/>
+        <a:font script="Syrj" typeface="Estrangelo Edessa"/>
+        <a:font script="Syre" typeface="Estrangelo Edessa"/>
+        <a:font script="Sora" typeface="Nirmala UI"/>
+        <a:font script="Tale" typeface="Microsoft Tai Le"/>
+        <a:font script="Talu" typeface="Microsoft New Tai Lue"/>
+        <a:font script="Tfng" typeface="Ebrima"/>
+      </a:majorFont>
+      <a:minorFont>
+        <a:latin typeface="Aptos" panose="02110004020202020204"/>
+        <a:ea typeface=""/>
+        <a:cs typeface=""/>
+        <a:font script="Jpan" typeface="游ゴシック"/>
+        <a:font script="Hang" typeface="맑은 고딕"/>
+        <a:font script="Hans" typeface="等线"/>
+        <a:font script="Hant" typeface="新細明體"/>
+        <a:font script="Arab" typeface="Arial"/>
+        <a:font script="Hebr" typeface="Arial"/>
+        <a:font script="Thai" typeface="Cordia New"/>
+        <a:font script="Ethi" typeface="Nyala"/>
+        <a:font script="Beng" typeface="Vrinda"/>
+        <a:font script="Gujr" typeface="Shruti"/>
+        <a:font script="Khmr" typeface="DaunPenh"/>
+        <a:font script="Knda" typeface="Tunga"/>
+        <a:font script="Guru" typeface="Raavi"/>
+        <a:font script="Cans" typeface="Euphemia"/>
+        <a:font script="Cher" typeface="Plantagenet Cherokee"/>
+        <a:font script="Yiii" typeface="Microsoft Yi Baiti"/>
+        <a:font script="Tibt" typeface="Microsoft Himalaya"/>
+        <a:font script="Thaa" typeface="MV Boli"/>
+        <a:font script="Deva" typeface="Mangal"/>
+        <a:font script="Telu" typeface="Gautami"/>
+        <a:font script="Taml" typeface="Latha"/>
+        <a:font script="Syrc" typeface="Estrangelo Edessa"/>
+        <a:font script="Orya" typeface="Kalinga"/>
+        <a:font script="Mlym" typeface="Kartika"/>
+        <a:font script="Laoo" typeface="DokChampa"/>
+        <a:font script="Sinh" typeface="Iskoola Pota"/>
+        <a:font script="Mong" typeface="Mongolian Baiti"/>
+        <a:font script="Viet" typeface="Arial"/>
+        <a:font script="Uigh" typeface="Microsoft Uighur"/>
+        <a:font script="Geor" typeface="Sylfaen"/>
+        <a:font script="Armn" typeface="Arial"/>
+        <a:font script="Bugi" typeface="Leelawadee UI"/>
+        <a:font script="Bopo" typeface="Microsoft JhengHei"/>
+        <a:font script="Java" typeface="Javanese Text"/>
+        <a:font script="Lisu" typeface="Segoe UI"/>
+        <a:font script="Mymr" typeface="Myanmar Text"/>
+        <a:font script="Nkoo" typeface="Ebrima"/>
+        <a:font script="Olck" typeface="Nirmala UI"/>
+        <a:font script="Osma" typeface="Ebrima"/>
+        <a:font script="Phag" typeface="Phagspa"/>
+        <a:font script="Syrn" typeface="Estrangelo Edessa"/>
+        <a:font script="Syrj" typeface="Estrangelo Edessa"/>
+        <a:font script="Syre" typeface="Estrangelo Edessa"/>
+        <a:font script="Sora" typeface="Nirmala UI"/>
+        <a:font script="Tale" typeface="Microsoft Tai Le"/>
+        <a:font script="Talu" typeface="Microsoft New Tai Lue"/>
+        <a:font script="Tfng" typeface="Ebrima"/>
+      </a:minorFont>
+    </a:fontScheme>
+    <a:fmtScheme name="Office">
+      <a:fillStyleLst>
+        <a:solidFill>
+          <a:schemeClr val="phClr"/>
+        </a:solidFill>
+        <a:gradFill rotWithShape="1">
+          <a:gsLst>
+            <a:gs pos="0">
+              <a:schemeClr val="phClr">
+                <a:lumMod val="110000"/>
+                <a:satMod val="105000"/>
+                <a:tint val="67000"/>
+              </a:schemeClr>
+            </a:gs>
+            <a:gs pos="50000">
+              <a:schemeClr val="phClr">
+                <a:lumMod val="105000"/>
+                <a:satMod val="103000"/>
+                <a:tint val="73000"/>
+              </a:schemeClr>
+            </a:gs>
+            <a:gs pos="100000">
+              <a:schemeClr val="phClr">
+                <a:lumMod val="105000"/>
+                <a:satMod val="109000"/>
+                <a:tint val="81000"/>
+              </a:schemeClr>
+            </a:gs>
+          </a:gsLst>
+          <a:lin ang="5400000" scaled="0"/>
+        </a:gradFill>
+        <a:gradFill rotWithShape="1">
+          <a:gsLst>
+            <a:gs pos="0">
+              <a:schemeClr val="phClr">
+                <a:satMod val="103000"/>
+                <a:lumMod val="102000"/>
+                <a:tint val="94000"/>
+              </a:schemeClr>
+            </a:gs>
+            <a:gs pos="50000">
+              <a:schemeClr val="phClr">
+                <a:satMod val="110000"/>
+                <a:lumMod val="100000"/>
+                <a:shade val="100000"/>
+              </a:schemeClr>
+            </a:gs>
+            <a:gs pos="100000">
+              <a:schemeClr val="phClr">
+                <a:lumMod val="99000"/>
+                <a:satMod val="120000"/>
+                <a:shade val="78000"/>
+              </a:schemeClr>
+            </a:gs>
+          </a:gsLst>
+          <a:lin ang="5400000" scaled="0"/>
+        </a:gradFill>
+      </a:fillStyleLst>
+      <a:lnStyleLst>
+        <a:ln w="12700" cap="flat" cmpd="sng" algn="ctr">
+          <a:solidFill>
+            <a:schemeClr val="phClr"/>
+          </a:solidFill>
+          <a:prstDash val="solid"/>
+          <a:miter lim="800000"/>
+        </a:ln>
+        <a:ln w="19050" cap="flat" cmpd="sng" algn="ctr">
+          <a:solidFill>
+            <a:schemeClr val="phClr"/>
+          </a:solidFill>
+          <a:prstDash val="solid"/>
+          <a:miter lim="800000"/>
+        </a:ln>
+        <a:ln w="25400" cap="flat" cmpd="sng" algn="ctr">
+          <a:solidFill>
+            <a:schemeClr val="phClr"/>
+          </a:solidFill>
+          <a:prstDash val="solid"/>
+          <a:miter lim="800000"/>
+        </a:ln>
+      </a:lnStyleLst>
+      <a:effectStyleLst>
+        <a:effectStyle>
+          <a:effectLst/>
+        </a:effectStyle>
+        <a:effectStyle>
+          <a:effectLst/>
+        </a:effectStyle>
+        <a:effectStyle>
+          <a:effectLst>
+            <a:outerShdw blurRad="57150" dist="19050" dir="5400000" algn="ctr" rotWithShape="0">
+              <a:srgbClr val="000000">
+                <a:alpha val="63000"/>
+              </a:srgbClr>
+            </a:outerShdw>
+          </a:effectLst>
+        </a:effectStyle>
+      </a:effectStyleLst>
+      <a:bgFillStyleLst>
+        <a:solidFill>
+          <a:schemeClr val="phClr"/>
+        </a:solidFill>
+        <a:solidFill>
+          <a:schemeClr val="phClr">
+            <a:tint val="95000"/>
+            <a:satMod val="170000"/>
+          </a:schemeClr>
+        </a:solidFill>
+        <a:gradFill rotWithShape="1">
+          <a:gsLst>
+            <a:gs pos="0">
+              <a:schemeClr val="phClr">
+                <a:tint val="93000"/>
+                <a:satMod val="150000"/>
+                <a:shade val="98000"/>
+                <a:lumMod val="102000"/>
+              </a:schemeClr>
+            </a:gs>
+            <a:gs pos="50000">
+              <a:schemeClr val="phClr">
+                <a:tint val="98000"/>
+                <a:satMod val="130000"/>
+                <a:shade val="90000"/>
+                <a:lumMod val="103000"/>
+              </a:schemeClr>
+            </a:gs>
+            <a:gs pos="100000">
+              <a:schemeClr val="phClr">
+                <a:shade val="63000"/>
+                <a:satMod val="120000"/>
+              </a:schemeClr>
+            </a:gs>
+          </a:gsLst>
+          <a:lin ang="5400000" scaled="0"/>
+        </a:gradFill>
+      </a:bgFillStyleLst>
+    </a:fmtScheme>
+  </a:themeElements>
+  <a:objectDefaults>
+    <a:lnDef>
+      <a:spPr/>
+      <a:bodyPr/>
+      <a:lstStyle/>
+      <a:style>
+        <a:lnRef idx="2">
+          <a:schemeClr val="accent1"/>
+        </a:lnRef>
+        <a:fillRef idx="0">
+          <a:schemeClr val="accent1"/>
+        </a:fillRef>
+        <a:effectRef idx="1">
+          <a:schemeClr val="accent1"/>
+        </a:effectRef>
+        <a:fontRef idx="minor">
+          <a:schemeClr val="tx1"/>
+        </a:fontRef>
+      </a:style>
+    </a:lnDef>
+  </a:objectDefaults>
+  <a:extraClrSchemeLst/>
+  <a:extLst>
+    <a:ext uri="{05A4C25C-085E-4340-85A3-A5531E510DB2}">
+      <thm15:themeFamily xmlns:thm15="http://schemas.microsoft.com/office/thememl/2012/main" name="Office Theme" id="{2E142A2C-CD16-42D6-873A-C26D2A0506FA}" vid="{1BDDFF52-6CD6-40A5-AB3C-68EB2F1E4D0A}"/>
+    </a:ext>
+  </a:extLst>
+</a:theme>
 </file>
--- a/Tissue Supplier Research/Supplier_Strategy_Meeting.pptx
+++ b/Tissue Supplier Research/Supplier_Strategy_Meeting.pptx
@@ -2011,6 +2011,529 @@
                 <c:ptCount val="7"/>
                 <c:pt idx="0">
                   <c:v>6</c:v>
+                </c:pt>
+                <c:pt idx="1">
+                  <c:v>8</c:v>
+                </c:pt>
+                <c:pt idx="2">
+                  <c:v>3</c:v>
+                </c:pt>
+                <c:pt idx="3">
+                  <c:v>2</c:v>
+                </c:pt>
+                <c:pt idx="4">
+                  <c:v>2</c:v>
+                </c:pt>
+                <c:pt idx="5">
+                  <c:v>1</c:v>
+                </c:pt>
+              </c:numCache>
+            </c:numRef>
+          </c:val>
+        </c:ser>
+        <c:dLbls>
+          <c:txPr>
+            <a:bodyPr/>
+            <a:lstStyle/>
+            <a:p>
+              <a:pPr>
+                <a:defRPr sz="1200" b="1">
+                  <a:solidFill>
+                    <a:srgbClr val="FFFFFF"/>
+                  </a:solidFill>
+                  <a:latin typeface="Calibri"/>
+                </a:defRPr>
+              </a:pPr>
+            </a:p>
+          </c:txPr>
+          <c:dLblPos val="ctr"/>
+          <c:showLegendKey val="0"/>
+          <c:showVal val="1"/>
+          <c:showCatName val="0"/>
+          <c:showSerName val="0"/>
+          <c:showPercent val="0"/>
+          <c:showBubbleSize val="0"/>
+          <c:showLeaderLines val="1"/>
+        </c:dLbls>
+        <c:gapWidth val="55"/>
+        <c:overlap val="100"/>
+        <c:axId val="-2068027336"/>
+        <c:axId val="-2113994440"/>
+      </c:barChart>
+      <c:catAx>
+        <c:axId val="-2068027336"/>
+        <c:scaling>
+          <c:orientation val="minMax"/>
+        </c:scaling>
+        <c:delete val="0"/>
+        <c:axPos val="b"/>
+        <c:majorTickMark val="out"/>
+        <c:minorTickMark val="none"/>
+        <c:tickLblPos val="nextTo"/>
+        <c:spPr>
+          <a:ln>
+            <a:solidFill>
+              <a:srgbClr val="D8CCD0"/>
+            </a:solidFill>
+          </a:ln>
+        </c:spPr>
+        <c:txPr>
+          <a:bodyPr/>
+          <a:lstStyle/>
+          <a:p>
+            <a:pPr>
+              <a:defRPr sz="1200" b="1">
+                <a:solidFill>
+                  <a:srgbClr val="2B2B2B"/>
+                </a:solidFill>
+                <a:latin typeface="Calibri"/>
+              </a:defRPr>
+            </a:pPr>
+          </a:p>
+        </c:txPr>
+        <c:crossAx val="-2113994440"/>
+        <c:crosses val="autoZero"/>
+        <c:auto val="1"/>
+        <c:lblAlgn val="ctr"/>
+        <c:lblOffset val="100"/>
+        <c:noMultiLvlLbl val="0"/>
+      </c:catAx>
+      <c:valAx>
+        <c:axId val="-2113994440"/>
+        <c:scaling>
+          <c:max val="16.0"/>
+        </c:scaling>
+        <c:delete val="0"/>
+        <c:axPos val="l"/>
+        <c:majorGridlines>
+          <c:spPr>
+            <a:ln>
+              <a:solidFill>
+                <a:srgbClr val="EDE4E6"/>
+              </a:solidFill>
+            </a:ln>
+          </c:spPr>
+        </c:majorGridlines>
+        <c:majorTickMark val="out"/>
+        <c:minorTickMark val="none"/>
+        <c:tickLblPos val="nextTo"/>
+        <c:spPr>
+          <a:ln>
+            <a:noFill/>
+          </a:ln>
+        </c:spPr>
+        <c:txPr>
+          <a:bodyPr/>
+          <a:lstStyle/>
+          <a:p>
+            <a:pPr>
+              <a:defRPr sz="1000">
+                <a:solidFill>
+                  <a:srgbClr val="6E6E6E"/>
+                </a:solidFill>
+                <a:latin typeface="Calibri"/>
+              </a:defRPr>
+            </a:pPr>
+          </a:p>
+        </c:txPr>
+        <c:crossAx val="-2068027336"/>
+        <c:crosses val="autoZero"/>
+        <c:majorUnit val="4.0"/>
+      </c:valAx>
+    </c:plotArea>
+    <c:legend>
+      <c:legendPos val="b"/>
+      <c:overlay val="0"/>
+      <c:txPr>
+        <a:bodyPr/>
+        <a:lstStyle/>
+        <a:p>
+          <a:pPr>
+            <a:defRPr sz="1100">
+              <a:solidFill>
+                <a:srgbClr val="2B2B2B"/>
+              </a:solidFill>
+              <a:latin typeface="Calibri"/>
+            </a:defRPr>
+          </a:pPr>
+        </a:p>
+      </c:txPr>
+    </c:legend>
+    <c:dispBlanksAs val="gap"/>
+  </c:chart>
+  <c:txPr>
+    <a:bodyPr/>
+    <a:lstStyle/>
+    <a:p>
+      <a:pPr>
+        <a:defRPr sz="1800"/>
+      </a:pPr>
+      <a:endParaRPr lang="en-US"/>
+    </a:p>
+  </c:txPr>
+  <c:externalData r:id="rId1">
+    <c:autoUpdate val="0"/>
+  </c:externalData>
+</c:chartSpace>
+</file>
+
+<file path=ppt/charts/chart4.xml><?xml version="1.0" encoding="utf-8"?>
+<c:chartSpace xmlns:c="http://schemas.openxmlformats.org/drawingml/2006/chart" xmlns:a="http://schemas.openxmlformats.org/drawingml/2006/main" xmlns:r="http://schemas.openxmlformats.org/officeDocument/2006/relationships">
+  <c:date1904 val="0"/>
+  <c:chart>
+    <c:autoTitleDeleted val="1"/>
+    <c:plotArea>
+      <c:barChart>
+        <c:barDir val="col"/>
+        <c:grouping val="stacked"/>
+        <c:ser>
+          <c:idx val="0"/>
+          <c:order val="0"/>
+          <c:tx>
+            <c:strRef>
+              <c:f>Sheet1!$B$1</c:f>
+              <c:strCache>
+                <c:ptCount val="1"/>
+                <c:pt idx="0">
+                  <c:v>Small  0–300</c:v>
+                </c:pt>
+              </c:strCache>
+            </c:strRef>
+          </c:tx>
+          <c:spPr>
+            <a:solidFill>
+              <a:srgbClr val="9C6B76"/>
+            </a:solidFill>
+            <a:ln>
+              <a:noFill/>
+            </a:ln>
+          </c:spPr>
+          <c:cat>
+            <c:strRef>
+              <c:f>Sheet1!$A$2:$A$8</c:f>
+              <c:strCache>
+                <c:ptCount val="7"/>
+                <c:pt idx="0">
+                  <c:v>Eastern NC</c:v>
+                </c:pt>
+                <c:pt idx="1">
+                  <c:v>Western NC</c:v>
+                </c:pt>
+                <c:pt idx="2">
+                  <c:v>SC</c:v>
+                </c:pt>
+                <c:pt idx="3">
+                  <c:v>TN</c:v>
+                </c:pt>
+                <c:pt idx="4">
+                  <c:v>VA</c:v>
+                </c:pt>
+                <c:pt idx="5">
+                  <c:v>Iowa</c:v>
+                </c:pt>
+                <c:pt idx="6">
+                  <c:v>Nebraska</c:v>
+                </c:pt>
+              </c:strCache>
+            </c:strRef>
+          </c:cat>
+          <c:val>
+            <c:numRef>
+              <c:f>Sheet1!$B$2:$B$8</c:f>
+              <c:numCache>
+                <c:formatCode>General</c:formatCode>
+                <c:ptCount val="7"/>
+                <c:pt idx="0">
+                  <c:v>2</c:v>
+                </c:pt>
+                <c:pt idx="1">
+                  <c:v>6</c:v>
+                </c:pt>
+                <c:pt idx="2">
+                  <c:v>2</c:v>
+                </c:pt>
+                <c:pt idx="3">
+                  <c:v>1</c:v>
+                </c:pt>
+                <c:pt idx="4">
+                  <c:v>2</c:v>
+                </c:pt>
+                <c:pt idx="5">
+                  <c:v>1</c:v>
+                </c:pt>
+              </c:numCache>
+            </c:numRef>
+          </c:val>
+        </c:ser>
+        <c:ser>
+          <c:idx val="1"/>
+          <c:order val="1"/>
+          <c:tx>
+            <c:strRef>
+              <c:f>Sheet1!$C$1</c:f>
+              <c:strCache>
+                <c:ptCount val="1"/>
+                <c:pt idx="0">
+                  <c:v>Medium  350–2,500</c:v>
+                </c:pt>
+              </c:strCache>
+            </c:strRef>
+          </c:tx>
+          <c:spPr>
+            <a:solidFill>
+              <a:srgbClr val="6D2E46"/>
+            </a:solidFill>
+            <a:ln>
+              <a:noFill/>
+            </a:ln>
+          </c:spPr>
+          <c:cat>
+            <c:strRef>
+              <c:f>Sheet1!$A$2:$A$8</c:f>
+              <c:strCache>
+                <c:ptCount val="7"/>
+                <c:pt idx="0">
+                  <c:v>Eastern NC</c:v>
+                </c:pt>
+                <c:pt idx="1">
+                  <c:v>Western NC</c:v>
+                </c:pt>
+                <c:pt idx="2">
+                  <c:v>SC</c:v>
+                </c:pt>
+                <c:pt idx="3">
+                  <c:v>TN</c:v>
+                </c:pt>
+                <c:pt idx="4">
+                  <c:v>VA</c:v>
+                </c:pt>
+                <c:pt idx="5">
+                  <c:v>Iowa</c:v>
+                </c:pt>
+                <c:pt idx="6">
+                  <c:v>Nebraska</c:v>
+                </c:pt>
+              </c:strCache>
+            </c:strRef>
+          </c:cat>
+          <c:val>
+            <c:numRef>
+              <c:f>Sheet1!$C$2:$C$8</c:f>
+              <c:numCache>
+                <c:formatCode>General</c:formatCode>
+                <c:ptCount val="7"/>
+                <c:pt idx="0">
+                  <c:v>4</c:v>
+                </c:pt>
+                <c:pt idx="3">
+                  <c:v>1</c:v>
+                </c:pt>
+                <c:pt idx="4">
+                  <c:v>1</c:v>
+                </c:pt>
+              </c:numCache>
+            </c:numRef>
+          </c:val>
+        </c:ser>
+        <c:ser>
+          <c:idx val="2"/>
+          <c:order val="2"/>
+          <c:tx>
+            <c:strRef>
+              <c:f>Sheet1!$D$1</c:f>
+              <c:strCache>
+                <c:ptCount val="1"/>
+                <c:pt idx="0">
+                  <c:v>Med-High  2,500–5,000</c:v>
+                </c:pt>
+              </c:strCache>
+            </c:strRef>
+          </c:tx>
+          <c:spPr>
+            <a:solidFill>
+              <a:srgbClr val="A9601F"/>
+            </a:solidFill>
+            <a:ln>
+              <a:noFill/>
+            </a:ln>
+          </c:spPr>
+          <c:cat>
+            <c:strRef>
+              <c:f>Sheet1!$A$2:$A$8</c:f>
+              <c:strCache>
+                <c:ptCount val="7"/>
+                <c:pt idx="0">
+                  <c:v>Eastern NC</c:v>
+                </c:pt>
+                <c:pt idx="1">
+                  <c:v>Western NC</c:v>
+                </c:pt>
+                <c:pt idx="2">
+                  <c:v>SC</c:v>
+                </c:pt>
+                <c:pt idx="3">
+                  <c:v>TN</c:v>
+                </c:pt>
+                <c:pt idx="4">
+                  <c:v>VA</c:v>
+                </c:pt>
+                <c:pt idx="5">
+                  <c:v>Iowa</c:v>
+                </c:pt>
+                <c:pt idx="6">
+                  <c:v>Nebraska</c:v>
+                </c:pt>
+              </c:strCache>
+            </c:strRef>
+          </c:cat>
+          <c:val>
+            <c:numRef>
+              <c:f>Sheet1!$D$2:$D$8</c:f>
+              <c:numCache>
+                <c:formatCode>General</c:formatCode>
+                <c:ptCount val="7"/>
+                <c:pt idx="0">
+                  <c:v>1</c:v>
+                </c:pt>
+                <c:pt idx="3">
+                  <c:v>2</c:v>
+                </c:pt>
+              </c:numCache>
+            </c:numRef>
+          </c:val>
+        </c:ser>
+        <c:ser>
+          <c:idx val="3"/>
+          <c:order val="3"/>
+          <c:tx>
+            <c:strRef>
+              <c:f>Sheet1!$E$1</c:f>
+              <c:strCache>
+                <c:ptCount val="1"/>
+                <c:pt idx="0">
+                  <c:v>High  5,000+</c:v>
+                </c:pt>
+              </c:strCache>
+            </c:strRef>
+          </c:tx>
+          <c:spPr>
+            <a:solidFill>
+              <a:srgbClr val="3D1A29"/>
+            </a:solidFill>
+            <a:ln>
+              <a:noFill/>
+            </a:ln>
+          </c:spPr>
+          <c:cat>
+            <c:strRef>
+              <c:f>Sheet1!$A$2:$A$8</c:f>
+              <c:strCache>
+                <c:ptCount val="7"/>
+                <c:pt idx="0">
+                  <c:v>Eastern NC</c:v>
+                </c:pt>
+                <c:pt idx="1">
+                  <c:v>Western NC</c:v>
+                </c:pt>
+                <c:pt idx="2">
+                  <c:v>SC</c:v>
+                </c:pt>
+                <c:pt idx="3">
+                  <c:v>TN</c:v>
+                </c:pt>
+                <c:pt idx="4">
+                  <c:v>VA</c:v>
+                </c:pt>
+                <c:pt idx="5">
+                  <c:v>Iowa</c:v>
+                </c:pt>
+                <c:pt idx="6">
+                  <c:v>Nebraska</c:v>
+                </c:pt>
+              </c:strCache>
+            </c:strRef>
+          </c:cat>
+          <c:val>
+            <c:numRef>
+              <c:f>Sheet1!$E$2:$E$8</c:f>
+              <c:numCache>
+                <c:formatCode>General</c:formatCode>
+                <c:ptCount val="7"/>
+                <c:pt idx="0">
+                  <c:v>2</c:v>
+                </c:pt>
+                <c:pt idx="3">
+                  <c:v>1</c:v>
+                </c:pt>
+                <c:pt idx="5">
+                  <c:v>5</c:v>
+                </c:pt>
+                <c:pt idx="6">
+                  <c:v>1</c:v>
+                </c:pt>
+              </c:numCache>
+            </c:numRef>
+          </c:val>
+        </c:ser>
+        <c:ser>
+          <c:idx val="4"/>
+          <c:order val="4"/>
+          <c:tx>
+            <c:strRef>
+              <c:f>Sheet1!$F$1</c:f>
+              <c:strCache>
+                <c:ptCount val="1"/>
+                <c:pt idx="0">
+                  <c:v>To confirm</c:v>
+                </c:pt>
+              </c:strCache>
+            </c:strRef>
+          </c:tx>
+          <c:spPr>
+            <a:solidFill>
+              <a:srgbClr val="7A7075"/>
+            </a:solidFill>
+            <a:ln>
+              <a:noFill/>
+            </a:ln>
+          </c:spPr>
+          <c:cat>
+            <c:strRef>
+              <c:f>Sheet1!$A$2:$A$8</c:f>
+              <c:strCache>
+                <c:ptCount val="7"/>
+                <c:pt idx="0">
+                  <c:v>Eastern NC</c:v>
+                </c:pt>
+                <c:pt idx="1">
+                  <c:v>Western NC</c:v>
+                </c:pt>
+                <c:pt idx="2">
+                  <c:v>SC</c:v>
+                </c:pt>
+                <c:pt idx="3">
+                  <c:v>TN</c:v>
+                </c:pt>
+                <c:pt idx="4">
+                  <c:v>VA</c:v>
+                </c:pt>
+                <c:pt idx="5">
+                  <c:v>Iowa</c:v>
+                </c:pt>
+                <c:pt idx="6">
+                  <c:v>Nebraska</c:v>
+                </c:pt>
+              </c:strCache>
+            </c:strRef>
+          </c:cat>
+          <c:val>
+            <c:numRef>
+              <c:f>Sheet1!$F$2:$F$8</c:f>
+              <c:numCache>
+                <c:formatCode>General</c:formatCode>
+                <c:ptCount val="7"/>
+                <c:pt idx="0">
+                  <c:v>5</c:v>
                 </c:pt>
                 <c:pt idx="1">
                   <c:v>8</c:v>
@@ -5716,7 +6239,7 @@
           <a:noFill/>
         </p:spPr>
         <p:txBody>
-          <a:bodyPr wrap="square" lIns="0" rIns="0" tIns="0" bIns="0" anchor="t">
+          <a:bodyPr wrap="square" lIns="0" rIns="0" tIns="0" bIns="0">
             <a:spAutoFit/>
           </a:bodyPr>
           <a:lstStyle/>
@@ -5751,7 +6274,7 @@
           <a:noFill/>
         </p:spPr>
         <p:txBody>
-          <a:bodyPr wrap="square" lIns="0" rIns="0" tIns="0" bIns="0" anchor="t">
+          <a:bodyPr wrap="square" lIns="0" rIns="0" tIns="0" bIns="0">
             <a:spAutoFit/>
           </a:bodyPr>
           <a:lstStyle/>
@@ -5782,7 +6305,7 @@
           </a:xfrm>
           <a:prstGeom prst="roundRect">
             <a:avLst>
-              <a:gd name="adj" fmla="val 6000"/>
+              <a:gd name="adj" fmla="val 25000"/>
             </a:avLst>
           </a:prstGeom>
           <a:solidFill>
@@ -5830,7 +6353,7 @@
           <a:noFill/>
         </p:spPr>
         <p:txBody>
-          <a:bodyPr wrap="square" lIns="0" rIns="0" tIns="0" bIns="0" anchor="t">
+          <a:bodyPr wrap="square" lIns="0" rIns="0" tIns="0" bIns="0">
             <a:spAutoFit/>
           </a:bodyPr>
           <a:lstStyle/>
@@ -5865,7 +6388,7 @@
           <a:noFill/>
         </p:spPr>
         <p:txBody>
-          <a:bodyPr wrap="square" lIns="0" rIns="0" tIns="0" bIns="0" anchor="t">
+          <a:bodyPr wrap="square" lIns="0" rIns="0" tIns="0" bIns="0">
             <a:spAutoFit/>
           </a:bodyPr>
           <a:lstStyle/>
@@ -5878,7 +6401,7 @@
                 </a:solidFill>
                 <a:latin typeface="Calibri"/>
               </a:rPr>
-              <a:t>54 plants across our target areas, sized by weekly hog volume.</a:t>
+              <a:t>53 named plants in our target areas — of ~138 identified in total. Sized by weekly hog volume.</a:t>
             </a:r>
           </a:p>
         </p:txBody>
@@ -5897,7 +6420,7 @@
         </p:xfrm>
         <a:graphic>
           <a:graphicData uri="http://schemas.openxmlformats.org/drawingml/2006/chart">
-            <c:chart xmlns:c="http://schemas.openxmlformats.org/drawingml/2006/chart" r:id="rId5"/>
+            <c:chart xmlns:c="http://schemas.openxmlformats.org/drawingml/2006/chart" r:id="rId6"/>
           </a:graphicData>
         </a:graphic>
       </p:graphicFrame>
@@ -5918,7 +6441,7 @@
           <a:noFill/>
         </p:spPr>
         <p:txBody>
-          <a:bodyPr wrap="square" lIns="0" rIns="0" tIns="0" bIns="0" anchor="t">
+          <a:bodyPr wrap="square" lIns="0" rIns="0" tIns="0" bIns="0">
             <a:spAutoFit/>
           </a:bodyPr>
           <a:lstStyle/>
@@ -5997,7 +6520,7 @@
             </a:avLst>
           </a:prstGeom>
           <a:solidFill>
-            <a:srgbClr val="7A7075"/>
+            <a:srgbClr val="6D2E46"/>
           </a:solidFill>
           <a:ln>
             <a:noFill/>
@@ -6021,9 +6544,7 @@
         <p:txBody>
           <a:bodyPr rtlCol="0" anchor="ctr"/>
           <a:lstStyle/>
-          <a:p>
-            <a:pPr algn="ctr"/>
-          </a:p>
+          <a:p/>
         </p:txBody>
       </p:sp>
       <p:sp>
@@ -6043,7 +6564,7 @@
           <a:noFill/>
         </p:spPr>
         <p:txBody>
-          <a:bodyPr wrap="square" lIns="0" rIns="0" tIns="0" bIns="0" anchor="t">
+          <a:bodyPr wrap="square" lIns="0" rIns="0" tIns="0" bIns="0">
             <a:spAutoFit/>
           </a:bodyPr>
           <a:lstStyle/>
@@ -6056,7 +6577,7 @@
                 </a:solidFill>
                 <a:latin typeface="Calibri"/>
               </a:rPr>
-              <a:t>TO CONFIRM</a:t>
+              <a:t>MEDIUM</a:t>
             </a:r>
           </a:p>
         </p:txBody>
@@ -6078,7 +6599,7 @@
           <a:noFill/>
         </p:spPr>
         <p:txBody>
-          <a:bodyPr wrap="square" lIns="0" rIns="0" tIns="0" bIns="0" anchor="t">
+          <a:bodyPr wrap="square" lIns="0" rIns="0" tIns="0" bIns="0">
             <a:spAutoFit/>
           </a:bodyPr>
           <a:lstStyle/>
@@ -6113,7 +6634,7 @@
           <a:noFill/>
         </p:spPr>
         <p:txBody>
-          <a:bodyPr wrap="square" lIns="0" rIns="0" tIns="0" bIns="0" anchor="t">
+          <a:bodyPr wrap="square" lIns="0" rIns="0" tIns="0" bIns="0">
             <a:spAutoFit/>
           </a:bodyPr>
           <a:lstStyle/>
@@ -6148,7 +6669,7 @@
           <a:noFill/>
         </p:spPr>
         <p:txBody>
-          <a:bodyPr wrap="square" lIns="0" rIns="0" tIns="0" bIns="0" anchor="t">
+          <a:bodyPr wrap="square" lIns="0" rIns="0" tIns="0" bIns="0">
             <a:spAutoFit/>
           </a:bodyPr>
           <a:lstStyle/>
@@ -6161,7 +6682,7 @@
                 </a:solidFill>
                 <a:latin typeface="Calibri"/>
               </a:rPr>
-              <a:t>likely Small — high-touch, one animal at a time</a:t>
+              <a:t>~500 / wk  ·  federal TA  ·  high-touch handling</a:t>
             </a:r>
           </a:p>
         </p:txBody>
@@ -6251,9 +6772,7 @@
         <p:txBody>
           <a:bodyPr rtlCol="0" anchor="ctr"/>
           <a:lstStyle/>
-          <a:p>
-            <a:pPr algn="ctr"/>
-          </a:p>
+          <a:p/>
         </p:txBody>
       </p:sp>
       <p:sp>
@@ -6273,7 +6792,7 @@
           <a:noFill/>
         </p:spPr>
         <p:txBody>
-          <a:bodyPr wrap="square" lIns="0" rIns="0" tIns="0" bIns="0" anchor="t">
+          <a:bodyPr wrap="square" lIns="0" rIns="0" tIns="0" bIns="0">
             <a:spAutoFit/>
           </a:bodyPr>
           <a:lstStyle/>
@@ -6308,7 +6827,7 @@
           <a:noFill/>
         </p:spPr>
         <p:txBody>
-          <a:bodyPr wrap="square" lIns="0" rIns="0" tIns="0" bIns="0" anchor="t">
+          <a:bodyPr wrap="square" lIns="0" rIns="0" tIns="0" bIns="0">
             <a:spAutoFit/>
           </a:bodyPr>
           <a:lstStyle/>
@@ -6343,7 +6862,7 @@
           <a:noFill/>
         </p:spPr>
         <p:txBody>
-          <a:bodyPr wrap="square" lIns="0" rIns="0" tIns="0" bIns="0" anchor="t">
+          <a:bodyPr wrap="square" lIns="0" rIns="0" tIns="0" bIns="0">
             <a:spAutoFit/>
           </a:bodyPr>
           <a:lstStyle/>
@@ -6378,7 +6897,7 @@
           <a:noFill/>
         </p:spPr>
         <p:txBody>
-          <a:bodyPr wrap="square" lIns="0" rIns="0" tIns="0" bIns="0" anchor="t">
+          <a:bodyPr wrap="square" lIns="0" rIns="0" tIns="0" bIns="0">
             <a:spAutoFit/>
           </a:bodyPr>
           <a:lstStyle/>
@@ -6481,9 +7000,7 @@
         <p:txBody>
           <a:bodyPr rtlCol="0" anchor="ctr"/>
           <a:lstStyle/>
-          <a:p>
-            <a:pPr algn="ctr"/>
-          </a:p>
+          <a:p/>
         </p:txBody>
       </p:sp>
       <p:sp>
@@ -6503,7 +7020,7 @@
           <a:noFill/>
         </p:spPr>
         <p:txBody>
-          <a:bodyPr wrap="square" lIns="0" rIns="0" tIns="0" bIns="0" anchor="t">
+          <a:bodyPr wrap="square" lIns="0" rIns="0" tIns="0" bIns="0">
             <a:spAutoFit/>
           </a:bodyPr>
           <a:lstStyle/>
@@ -6538,7 +7055,7 @@
           <a:noFill/>
         </p:spPr>
         <p:txBody>
-          <a:bodyPr wrap="square" lIns="0" rIns="0" tIns="0" bIns="0" anchor="t">
+          <a:bodyPr wrap="square" lIns="0" rIns="0" tIns="0" bIns="0">
             <a:spAutoFit/>
           </a:bodyPr>
           <a:lstStyle/>
@@ -6551,7 +7068,7 @@
                 </a:solidFill>
                 <a:latin typeface="Cambria"/>
               </a:rPr>
-              <a:t>Martin's Pork Products</a:t>
+              <a:t>Parks Family Meats</a:t>
             </a:r>
           </a:p>
         </p:txBody>
@@ -6573,7 +7090,7 @@
           <a:noFill/>
         </p:spPr>
         <p:txBody>
-          <a:bodyPr wrap="square" lIns="0" rIns="0" tIns="0" bIns="0" anchor="t">
+          <a:bodyPr wrap="square" lIns="0" rIns="0" tIns="0" bIns="0">
             <a:spAutoFit/>
           </a:bodyPr>
           <a:lstStyle/>
@@ -6586,7 +7103,7 @@
                 </a:solidFill>
                 <a:latin typeface="Calibri"/>
               </a:rPr>
-              <a:t>TA-6720 · Falcon</a:t>
+              <a:t>TA-18296A · Warsaw</a:t>
             </a:r>
           </a:p>
         </p:txBody>
@@ -6608,7 +7125,7 @@
           <a:noFill/>
         </p:spPr>
         <p:txBody>
-          <a:bodyPr wrap="square" lIns="0" rIns="0" tIns="0" bIns="0" anchor="t">
+          <a:bodyPr wrap="square" lIns="0" rIns="0" tIns="0" bIns="0">
             <a:spAutoFit/>
           </a:bodyPr>
           <a:lstStyle/>
@@ -6621,7 +7138,7 @@
                 </a:solidFill>
                 <a:latin typeface="Calibri"/>
               </a:rPr>
-              <a:t>200–1,500 / wk  ·  federal TA → export-eligible</a:t>
+              <a:t>400–1,000 / wk  ·  but ROASTER pigs, 10–150 lb</a:t>
             </a:r>
           </a:p>
         </p:txBody>
@@ -6711,9 +7228,7 @@
         <p:txBody>
           <a:bodyPr rtlCol="0" anchor="ctr"/>
           <a:lstStyle/>
-          <a:p>
-            <a:pPr algn="ctr"/>
-          </a:p>
+          <a:p/>
         </p:txBody>
       </p:sp>
       <p:sp>
@@ -6733,7 +7248,7 @@
           <a:noFill/>
         </p:spPr>
         <p:txBody>
-          <a:bodyPr wrap="square" lIns="0" rIns="0" tIns="0" bIns="0" anchor="t">
+          <a:bodyPr wrap="square" lIns="0" rIns="0" tIns="0" bIns="0">
             <a:spAutoFit/>
           </a:bodyPr>
           <a:lstStyle/>
@@ -6768,7 +7283,7 @@
           <a:noFill/>
         </p:spPr>
         <p:txBody>
-          <a:bodyPr wrap="square" lIns="0" rIns="0" tIns="0" bIns="0" anchor="t">
+          <a:bodyPr wrap="square" lIns="0" rIns="0" tIns="0" bIns="0">
             <a:spAutoFit/>
           </a:bodyPr>
           <a:lstStyle/>
@@ -6781,7 +7296,7 @@
                 </a:solidFill>
                 <a:latin typeface="Cambria"/>
               </a:rPr>
-              <a:t>Parks Family Meats</a:t>
+              <a:t>Martin's Pork Products</a:t>
             </a:r>
           </a:p>
         </p:txBody>
@@ -6803,7 +7318,7 @@
           <a:noFill/>
         </p:spPr>
         <p:txBody>
-          <a:bodyPr wrap="square" lIns="0" rIns="0" tIns="0" bIns="0" anchor="t">
+          <a:bodyPr wrap="square" lIns="0" rIns="0" tIns="0" bIns="0">
             <a:spAutoFit/>
           </a:bodyPr>
           <a:lstStyle/>
@@ -6816,7 +7331,7 @@
                 </a:solidFill>
                 <a:latin typeface="Calibri"/>
               </a:rPr>
-              <a:t>TA-18296A · Warsaw</a:t>
+              <a:t>TA-6720 · Falcon</a:t>
             </a:r>
           </a:p>
         </p:txBody>
@@ -6838,7 +7353,7 @@
           <a:noFill/>
         </p:spPr>
         <p:txBody>
-          <a:bodyPr wrap="square" lIns="0" rIns="0" tIns="0" bIns="0" anchor="t">
+          <a:bodyPr wrap="square" lIns="0" rIns="0" tIns="0" bIns="0">
             <a:spAutoFit/>
           </a:bodyPr>
           <a:lstStyle/>
@@ -6851,7 +7366,7 @@
                 </a:solidFill>
                 <a:latin typeface="Calibri"/>
               </a:rPr>
-              <a:t>~1,750–2,000 / wk  ·  but ROASTER pigs, 10–150 lb</a:t>
+              <a:t>1,500–2,500 / wk  ·  federal TA → export-eligible</a:t>
             </a:r>
           </a:p>
         </p:txBody>
@@ -6873,7 +7388,7 @@
           <a:noFill/>
         </p:spPr>
         <p:txBody>
-          <a:bodyPr wrap="square" lIns="0" rIns="0" tIns="0" bIns="0" anchor="t">
+          <a:bodyPr wrap="square" lIns="0" rIns="0" tIns="0" bIns="0">
             <a:spAutoFit/>
           </a:bodyPr>
           <a:lstStyle/>
@@ -6886,7 +7401,7 @@
                 </a:solidFill>
                 <a:latin typeface="Calibri"/>
               </a:rPr>
-              <a:t>Three of our four Eastern NC candidates sit in MEDIUM — and 10 of Eastern NC’s 14 plants are federally inspected, the only export-eligible base.</a:t>
+              <a:t>All four Eastern NC candidates sit in MEDIUM — so the choice between them is not volume, it is the constraint on each.</a:t>
             </a:r>
           </a:p>
         </p:txBody>
@@ -6908,7 +7423,7 @@
           <a:noFill/>
         </p:spPr>
         <p:txBody>
-          <a:bodyPr wrap="square" lIns="0" rIns="0" tIns="0" bIns="0" anchor="t">
+          <a:bodyPr wrap="square" lIns="0" rIns="0" tIns="0" bIns="0">
             <a:spAutoFit/>
           </a:bodyPr>
           <a:lstStyle/>
@@ -6921,7 +7436,7 @@
                 </a:solidFill>
                 <a:latin typeface="Calibri"/>
               </a:rPr>
-              <a:t>Distinct named plants only; roll-ups excluded. 20 further plants sit elsewhere in the Midwest / nationally. Pennsylvania out of scope.</a:t>
+              <a:t>Chart counts named plants in these seven areas. 21 further named plants sit elsewhere in the Midwest / nationally, and ~64 more are grouped inside multi-plant roll-ups. Pennsylvania out of scope.</a:t>
             </a:r>
           </a:p>
         </p:txBody>

--- a/Tissue Supplier Research/Supplier_Strategy_Meeting.pptx
+++ b/Tissue Supplier Research/Supplier_Strategy_Meeting.pptx
@@ -125,41 +125,13 @@
   <c:roundedCorners val="1"/>
   <c:style val="2"/>
   <c:chart>
-    <c:title>
-      <c:tx>
-        <c:rich>
-          <a:bodyPr/>
-          <a:lstStyle/>
-          <a:p>
-            <a:pPr algn="l">
-              <a:defRPr sz="1400" b="0" i="0" u="none" strike="noStrike">
-                <a:solidFill>
-                  <a:srgbClr val="6D2E46"/>
-                </a:solidFill>
-                <a:latin typeface="Cambria"/>
-              </a:defRPr>
-            </a:pPr>
-            <a:r>
-              <a:rPr lang="en-US" sz="1400" b="0" i="0" u="none" strike="noStrike">
-                <a:solidFill>
-                  <a:srgbClr val="6D2E46"/>
-                </a:solidFill>
-                <a:latin typeface="Cambria"/>
-              </a:rPr>
-              <a:t>By certification</a:t>
-            </a:r>
-          </a:p>
-        </c:rich>
-      </c:tx>
-      <c:overlay val="0"/>
-    </c:title>
-    <c:autoTitleDeleted val="0"/>
+    <c:autoTitleDeleted val="1"/>
     <c:plotArea>
       <c:layout/>
       <c:barChart>
         <c:barDir val="col"/>
         <c:grouping val="stacked"/>
-        <c:varyColors val="0"/>
+        <c:varyColors val="1"/>
         <c:ser>
           <c:idx val="0"/>
           <c:order val="0"/>
@@ -169,20 +141,21 @@
               <c:strCache>
                 <c:ptCount val="1"/>
                 <c:pt idx="0">
-                  <c:v>Federal / Talmadge-Aiken</c:v>
+                  <c:v>Small  0–300</c:v>
                 </c:pt>
               </c:strCache>
             </c:strRef>
           </c:tx>
           <c:spPr>
             <a:solidFill>
-              <a:srgbClr val="6D2E46"/>
+              <a:srgbClr val="9C6B76"/>
             </a:solidFill>
-            <a:effectLst/>
+            <a:ln>
+              <a:noFill/>
+            </a:ln>
           </c:spPr>
-          <c:invertIfNegative val="0"/>
+          <c:invertIfNegative val="1"/>
           <c:dLbls>
-            <c:numFmt formatCode="#,##0" sourceLinked="0"/>
             <c:spPr>
               <a:noFill/>
               <a:ln>
@@ -195,726 +168,9 @@
               <a:lstStyle/>
               <a:p>
                 <a:pPr>
-                  <a:defRPr sz="900" b="0" i="0" u="none" strike="noStrike">
+                  <a:defRPr sz="1200" b="1">
                     <a:solidFill>
                       <a:srgbClr val="FFFFFF"/>
-                    </a:solidFill>
-                    <a:latin typeface="Calibri"/>
-                  </a:defRPr>
-                </a:pPr>
-                <a:endParaRPr lang="en-US"/>
-              </a:p>
-            </c:txPr>
-            <c:dLblPos val="ctr"/>
-            <c:showLegendKey val="0"/>
-            <c:showVal val="1"/>
-            <c:showCatName val="0"/>
-            <c:showSerName val="0"/>
-            <c:showPercent val="0"/>
-            <c:showBubbleSize val="0"/>
-            <c:showLeaderLines val="0"/>
-            <c:extLst>
-              <c:ext xmlns:c15="http://schemas.microsoft.com/office/drawing/2012/chart" uri="{CE6537A1-D6FC-4f65-9D91-7224C49458BB}">
-                <c15:showLeaderLines val="0"/>
-              </c:ext>
-            </c:extLst>
-          </c:dLbls>
-          <c:cat>
-            <c:strRef>
-              <c:f>Sheet1!$A$2:$A$8</c:f>
-              <c:strCache>
-                <c:ptCount val="7"/>
-                <c:pt idx="0">
-                  <c:v>Eastern NC</c:v>
-                </c:pt>
-                <c:pt idx="1">
-                  <c:v>Western NC</c:v>
-                </c:pt>
-                <c:pt idx="2">
-                  <c:v>SC</c:v>
-                </c:pt>
-                <c:pt idx="3">
-                  <c:v>TN</c:v>
-                </c:pt>
-                <c:pt idx="4">
-                  <c:v>VA</c:v>
-                </c:pt>
-                <c:pt idx="5">
-                  <c:v>Iowa</c:v>
-                </c:pt>
-                <c:pt idx="6">
-                  <c:v>Nebraska</c:v>
-                </c:pt>
-              </c:strCache>
-            </c:strRef>
-          </c:cat>
-          <c:val>
-            <c:numRef>
-              <c:f>Sheet1!$B$2:$B$8</c:f>
-              <c:numCache>
-                <c:formatCode>General</c:formatCode>
-                <c:ptCount val="7"/>
-                <c:pt idx="0">
-                  <c:v>10</c:v>
-                </c:pt>
-                <c:pt idx="1">
-                  <c:v>5</c:v>
-                </c:pt>
-                <c:pt idx="2">
-                  <c:v>4</c:v>
-                </c:pt>
-                <c:pt idx="3">
-                  <c:v>7</c:v>
-                </c:pt>
-                <c:pt idx="4">
-                  <c:v>4</c:v>
-                </c:pt>
-                <c:pt idx="5">
-                  <c:v>8</c:v>
-                </c:pt>
-                <c:pt idx="6">
-                  <c:v>1</c:v>
-                </c:pt>
-              </c:numCache>
-            </c:numRef>
-          </c:val>
-          <c:extLst>
-            <c:ext xmlns:c16="http://schemas.microsoft.com/office/drawing/2014/chart" uri="{C3380CC4-5D6E-409C-BE32-E72D297353CC}">
-              <c16:uniqueId val="{00000000-8A7C-40CB-8A81-746579DC55F5}"/>
-            </c:ext>
-          </c:extLst>
-        </c:ser>
-        <c:ser>
-          <c:idx val="1"/>
-          <c:order val="1"/>
-          <c:tx>
-            <c:strRef>
-              <c:f>Sheet1!$C$1</c:f>
-              <c:strCache>
-                <c:ptCount val="1"/>
-                <c:pt idx="0">
-                  <c:v>State-inspected only</c:v>
-                </c:pt>
-              </c:strCache>
-            </c:strRef>
-          </c:tx>
-          <c:spPr>
-            <a:solidFill>
-              <a:srgbClr val="A26769"/>
-            </a:solidFill>
-            <a:effectLst/>
-          </c:spPr>
-          <c:invertIfNegative val="0"/>
-          <c:dLbls>
-            <c:numFmt formatCode="#,##0" sourceLinked="0"/>
-            <c:spPr>
-              <a:noFill/>
-              <a:ln>
-                <a:noFill/>
-              </a:ln>
-              <a:effectLst/>
-            </c:spPr>
-            <c:txPr>
-              <a:bodyPr/>
-              <a:lstStyle/>
-              <a:p>
-                <a:pPr>
-                  <a:defRPr sz="900" b="0" i="0" u="none" strike="noStrike">
-                    <a:solidFill>
-                      <a:srgbClr val="FFFFFF"/>
-                    </a:solidFill>
-                    <a:latin typeface="Calibri"/>
-                  </a:defRPr>
-                </a:pPr>
-                <a:endParaRPr lang="en-US"/>
-              </a:p>
-            </c:txPr>
-            <c:dLblPos val="ctr"/>
-            <c:showLegendKey val="0"/>
-            <c:showVal val="1"/>
-            <c:showCatName val="0"/>
-            <c:showSerName val="0"/>
-            <c:showPercent val="0"/>
-            <c:showBubbleSize val="0"/>
-            <c:showLeaderLines val="0"/>
-            <c:extLst>
-              <c:ext xmlns:c15="http://schemas.microsoft.com/office/drawing/2012/chart" uri="{CE6537A1-D6FC-4f65-9D91-7224C49458BB}">
-                <c15:showLeaderLines val="0"/>
-              </c:ext>
-            </c:extLst>
-          </c:dLbls>
-          <c:cat>
-            <c:strRef>
-              <c:f>Sheet1!$A$2:$A$8</c:f>
-              <c:strCache>
-                <c:ptCount val="7"/>
-                <c:pt idx="0">
-                  <c:v>Eastern NC</c:v>
-                </c:pt>
-                <c:pt idx="1">
-                  <c:v>Western NC</c:v>
-                </c:pt>
-                <c:pt idx="2">
-                  <c:v>SC</c:v>
-                </c:pt>
-                <c:pt idx="3">
-                  <c:v>TN</c:v>
-                </c:pt>
-                <c:pt idx="4">
-                  <c:v>VA</c:v>
-                </c:pt>
-                <c:pt idx="5">
-                  <c:v>Iowa</c:v>
-                </c:pt>
-                <c:pt idx="6">
-                  <c:v>Nebraska</c:v>
-                </c:pt>
-              </c:strCache>
-            </c:strRef>
-          </c:cat>
-          <c:val>
-            <c:numRef>
-              <c:f>Sheet1!$C$2:$C$8</c:f>
-              <c:numCache>
-                <c:formatCode>General</c:formatCode>
-                <c:ptCount val="7"/>
-                <c:pt idx="0">
-                  <c:v>1</c:v>
-                </c:pt>
-                <c:pt idx="1">
-                  <c:v>4</c:v>
-                </c:pt>
-                <c:pt idx="2">
-                  <c:v>0</c:v>
-                </c:pt>
-                <c:pt idx="3">
-                  <c:v>0</c:v>
-                </c:pt>
-                <c:pt idx="4">
-                  <c:v>0</c:v>
-                </c:pt>
-                <c:pt idx="5">
-                  <c:v>0</c:v>
-                </c:pt>
-                <c:pt idx="6">
-                  <c:v>0</c:v>
-                </c:pt>
-              </c:numCache>
-            </c:numRef>
-          </c:val>
-          <c:extLst>
-            <c:ext xmlns:c16="http://schemas.microsoft.com/office/drawing/2014/chart" uri="{C3380CC4-5D6E-409C-BE32-E72D297353CC}">
-              <c16:uniqueId val="{00000001-8A7C-40CB-8A81-746579DC55F5}"/>
-            </c:ext>
-          </c:extLst>
-        </c:ser>
-        <c:ser>
-          <c:idx val="2"/>
-          <c:order val="2"/>
-          <c:tx>
-            <c:strRef>
-              <c:f>Sheet1!$D$1</c:f>
-              <c:strCache>
-                <c:ptCount val="1"/>
-                <c:pt idx="0">
-                  <c:v>Custom-exempt</c:v>
-                </c:pt>
-              </c:strCache>
-            </c:strRef>
-          </c:tx>
-          <c:spPr>
-            <a:solidFill>
-              <a:srgbClr val="C89B7B"/>
-            </a:solidFill>
-            <a:effectLst/>
-          </c:spPr>
-          <c:invertIfNegative val="0"/>
-          <c:dLbls>
-            <c:numFmt formatCode="#,##0" sourceLinked="0"/>
-            <c:spPr>
-              <a:noFill/>
-              <a:ln>
-                <a:noFill/>
-              </a:ln>
-              <a:effectLst/>
-            </c:spPr>
-            <c:txPr>
-              <a:bodyPr/>
-              <a:lstStyle/>
-              <a:p>
-                <a:pPr>
-                  <a:defRPr sz="900" b="0" i="0" u="none" strike="noStrike">
-                    <a:solidFill>
-                      <a:srgbClr val="FFFFFF"/>
-                    </a:solidFill>
-                    <a:latin typeface="Calibri"/>
-                  </a:defRPr>
-                </a:pPr>
-                <a:endParaRPr lang="en-US"/>
-              </a:p>
-            </c:txPr>
-            <c:dLblPos val="ctr"/>
-            <c:showLegendKey val="0"/>
-            <c:showVal val="1"/>
-            <c:showCatName val="0"/>
-            <c:showSerName val="0"/>
-            <c:showPercent val="0"/>
-            <c:showBubbleSize val="0"/>
-            <c:showLeaderLines val="0"/>
-            <c:extLst>
-              <c:ext xmlns:c15="http://schemas.microsoft.com/office/drawing/2012/chart" uri="{CE6537A1-D6FC-4f65-9D91-7224C49458BB}">
-                <c15:showLeaderLines val="0"/>
-              </c:ext>
-            </c:extLst>
-          </c:dLbls>
-          <c:cat>
-            <c:strRef>
-              <c:f>Sheet1!$A$2:$A$8</c:f>
-              <c:strCache>
-                <c:ptCount val="7"/>
-                <c:pt idx="0">
-                  <c:v>Eastern NC</c:v>
-                </c:pt>
-                <c:pt idx="1">
-                  <c:v>Western NC</c:v>
-                </c:pt>
-                <c:pt idx="2">
-                  <c:v>SC</c:v>
-                </c:pt>
-                <c:pt idx="3">
-                  <c:v>TN</c:v>
-                </c:pt>
-                <c:pt idx="4">
-                  <c:v>VA</c:v>
-                </c:pt>
-                <c:pt idx="5">
-                  <c:v>Iowa</c:v>
-                </c:pt>
-                <c:pt idx="6">
-                  <c:v>Nebraska</c:v>
-                </c:pt>
-              </c:strCache>
-            </c:strRef>
-          </c:cat>
-          <c:val>
-            <c:numRef>
-              <c:f>Sheet1!$D$2:$D$8</c:f>
-              <c:numCache>
-                <c:formatCode>General</c:formatCode>
-                <c:ptCount val="7"/>
-                <c:pt idx="0">
-                  <c:v>1</c:v>
-                </c:pt>
-                <c:pt idx="1">
-                  <c:v>1</c:v>
-                </c:pt>
-                <c:pt idx="2">
-                  <c:v>0</c:v>
-                </c:pt>
-                <c:pt idx="3">
-                  <c:v>0</c:v>
-                </c:pt>
-                <c:pt idx="4">
-                  <c:v>0</c:v>
-                </c:pt>
-                <c:pt idx="5">
-                  <c:v>0</c:v>
-                </c:pt>
-                <c:pt idx="6">
-                  <c:v>0</c:v>
-                </c:pt>
-              </c:numCache>
-            </c:numRef>
-          </c:val>
-          <c:extLst>
-            <c:ext xmlns:c16="http://schemas.microsoft.com/office/drawing/2014/chart" uri="{C3380CC4-5D6E-409C-BE32-E72D297353CC}">
-              <c16:uniqueId val="{00000002-8A7C-40CB-8A81-746579DC55F5}"/>
-            </c:ext>
-          </c:extLst>
-        </c:ser>
-        <c:ser>
-          <c:idx val="3"/>
-          <c:order val="3"/>
-          <c:tx>
-            <c:strRef>
-              <c:f>Sheet1!$E$1</c:f>
-              <c:strCache>
-                <c:ptCount val="1"/>
-                <c:pt idx="0">
-                  <c:v>Unconfirmed</c:v>
-                </c:pt>
-              </c:strCache>
-            </c:strRef>
-          </c:tx>
-          <c:spPr>
-            <a:solidFill>
-              <a:srgbClr val="D5CACD"/>
-            </a:solidFill>
-            <a:effectLst/>
-          </c:spPr>
-          <c:invertIfNegative val="0"/>
-          <c:dLbls>
-            <c:dLbl>
-              <c:idx val="5"/>
-              <c:layout>
-                <c:manualLayout>
-                  <c:x val="-8.6314131579796564E-17"/>
-                  <c:y val="-3.3602150537634476E-2"/>
-                </c:manualLayout>
-              </c:layout>
-              <c:dLblPos val="ctr"/>
-              <c:showLegendKey val="0"/>
-              <c:showVal val="1"/>
-              <c:showCatName val="0"/>
-              <c:showSerName val="0"/>
-              <c:showPercent val="0"/>
-              <c:showBubbleSize val="0"/>
-              <c:extLst>
-                <c:ext xmlns:c15="http://schemas.microsoft.com/office/drawing/2012/chart" uri="{CE6537A1-D6FC-4f65-9D91-7224C49458BB}"/>
-                <c:ext xmlns:c16="http://schemas.microsoft.com/office/drawing/2014/chart" uri="{C3380CC4-5D6E-409C-BE32-E72D297353CC}">
-                  <c16:uniqueId val="{00000004-8A7C-40CB-8A81-746579DC55F5}"/>
-                </c:ext>
-              </c:extLst>
-            </c:dLbl>
-            <c:numFmt formatCode="#,##0" sourceLinked="0"/>
-            <c:spPr>
-              <a:noFill/>
-              <a:ln>
-                <a:noFill/>
-              </a:ln>
-              <a:effectLst/>
-            </c:spPr>
-            <c:txPr>
-              <a:bodyPr/>
-              <a:lstStyle/>
-              <a:p>
-                <a:pPr>
-                  <a:defRPr sz="900" b="0" i="0" u="none" strike="noStrike">
-                    <a:solidFill>
-                      <a:srgbClr val="FFFFFF"/>
-                    </a:solidFill>
-                    <a:latin typeface="Calibri"/>
-                  </a:defRPr>
-                </a:pPr>
-                <a:endParaRPr lang="en-US"/>
-              </a:p>
-            </c:txPr>
-            <c:dLblPos val="ctr"/>
-            <c:showLegendKey val="0"/>
-            <c:showVal val="1"/>
-            <c:showCatName val="0"/>
-            <c:showSerName val="0"/>
-            <c:showPercent val="0"/>
-            <c:showBubbleSize val="0"/>
-            <c:showLeaderLines val="0"/>
-            <c:extLst>
-              <c:ext xmlns:c15="http://schemas.microsoft.com/office/drawing/2012/chart" uri="{CE6537A1-D6FC-4f65-9D91-7224C49458BB}">
-                <c15:showLeaderLines val="0"/>
-              </c:ext>
-            </c:extLst>
-          </c:dLbls>
-          <c:cat>
-            <c:strRef>
-              <c:f>Sheet1!$A$2:$A$8</c:f>
-              <c:strCache>
-                <c:ptCount val="7"/>
-                <c:pt idx="0">
-                  <c:v>Eastern NC</c:v>
-                </c:pt>
-                <c:pt idx="1">
-                  <c:v>Western NC</c:v>
-                </c:pt>
-                <c:pt idx="2">
-                  <c:v>SC</c:v>
-                </c:pt>
-                <c:pt idx="3">
-                  <c:v>TN</c:v>
-                </c:pt>
-                <c:pt idx="4">
-                  <c:v>VA</c:v>
-                </c:pt>
-                <c:pt idx="5">
-                  <c:v>Iowa</c:v>
-                </c:pt>
-                <c:pt idx="6">
-                  <c:v>Nebraska</c:v>
-                </c:pt>
-              </c:strCache>
-            </c:strRef>
-          </c:cat>
-          <c:val>
-            <c:numRef>
-              <c:f>Sheet1!$E$2:$E$8</c:f>
-              <c:numCache>
-                <c:formatCode>General</c:formatCode>
-                <c:ptCount val="7"/>
-                <c:pt idx="0">
-                  <c:v>2</c:v>
-                </c:pt>
-                <c:pt idx="1">
-                  <c:v>4</c:v>
-                </c:pt>
-                <c:pt idx="2">
-                  <c:v>1</c:v>
-                </c:pt>
-                <c:pt idx="3">
-                  <c:v>0</c:v>
-                </c:pt>
-                <c:pt idx="4">
-                  <c:v>1</c:v>
-                </c:pt>
-                <c:pt idx="5">
-                  <c:v>0</c:v>
-                </c:pt>
-                <c:pt idx="6">
-                  <c:v>0</c:v>
-                </c:pt>
-              </c:numCache>
-            </c:numRef>
-          </c:val>
-          <c:extLst>
-            <c:ext xmlns:c16="http://schemas.microsoft.com/office/drawing/2014/chart" uri="{C3380CC4-5D6E-409C-BE32-E72D297353CC}">
-              <c16:uniqueId val="{00000003-8A7C-40CB-8A81-746579DC55F5}"/>
-            </c:ext>
-          </c:extLst>
-        </c:ser>
-        <c:dLbls>
-          <c:dLblPos val="ctr"/>
-          <c:showLegendKey val="0"/>
-          <c:showVal val="1"/>
-          <c:showCatName val="0"/>
-          <c:showSerName val="0"/>
-          <c:showPercent val="0"/>
-          <c:showBubbleSize val="0"/>
-        </c:dLbls>
-        <c:gapWidth val="50"/>
-        <c:overlap val="100"/>
-        <c:axId val="2094734554"/>
-        <c:axId val="2094734552"/>
-      </c:barChart>
-      <c:catAx>
-        <c:axId val="2094734554"/>
-        <c:scaling>
-          <c:orientation val="minMax"/>
-        </c:scaling>
-        <c:delete val="0"/>
-        <c:axPos val="b"/>
-        <c:numFmt formatCode="General" sourceLinked="1"/>
-        <c:majorTickMark val="out"/>
-        <c:minorTickMark val="none"/>
-        <c:tickLblPos val="low"/>
-        <c:spPr>
-          <a:ln w="12700" cap="flat">
-            <a:solidFill>
-              <a:srgbClr val="888888"/>
-            </a:solidFill>
-            <a:prstDash val="solid"/>
-            <a:round/>
-          </a:ln>
-        </c:spPr>
-        <c:txPr>
-          <a:bodyPr/>
-          <a:lstStyle/>
-          <a:p>
-            <a:pPr>
-              <a:defRPr sz="1000" b="0" i="0" u="none" strike="noStrike">
-                <a:solidFill>
-                  <a:srgbClr val="2B2B2B"/>
-                </a:solidFill>
-                <a:latin typeface="Calibri"/>
-              </a:defRPr>
-            </a:pPr>
-            <a:endParaRPr lang="en-US"/>
-          </a:p>
-        </c:txPr>
-        <c:crossAx val="2094734552"/>
-        <c:crosses val="autoZero"/>
-        <c:auto val="1"/>
-        <c:lblAlgn val="ctr"/>
-        <c:lblOffset val="100"/>
-        <c:noMultiLvlLbl val="1"/>
-      </c:catAx>
-      <c:valAx>
-        <c:axId val="2094734552"/>
-        <c:scaling>
-          <c:orientation val="minMax"/>
-          <c:max val="16"/>
-        </c:scaling>
-        <c:delete val="0"/>
-        <c:axPos val="l"/>
-        <c:majorGridlines>
-          <c:spPr>
-            <a:ln w="12700" cap="flat">
-              <a:solidFill>
-                <a:srgbClr val="EDE4E6"/>
-              </a:solidFill>
-              <a:prstDash val="solid"/>
-              <a:round/>
-            </a:ln>
-          </c:spPr>
-        </c:majorGridlines>
-        <c:numFmt formatCode="General" sourceLinked="0"/>
-        <c:majorTickMark val="out"/>
-        <c:minorTickMark val="none"/>
-        <c:tickLblPos val="nextTo"/>
-        <c:spPr>
-          <a:ln w="12700" cap="flat">
-            <a:solidFill>
-              <a:srgbClr val="888888"/>
-            </a:solidFill>
-            <a:prstDash val="solid"/>
-            <a:round/>
-          </a:ln>
-        </c:spPr>
-        <c:txPr>
-          <a:bodyPr/>
-          <a:lstStyle/>
-          <a:p>
-            <a:pPr>
-              <a:defRPr sz="900" b="0" i="0" u="none" strike="noStrike">
-                <a:solidFill>
-                  <a:srgbClr val="6E6E6E"/>
-                </a:solidFill>
-                <a:latin typeface="Arial"/>
-              </a:defRPr>
-            </a:pPr>
-            <a:endParaRPr lang="en-US"/>
-          </a:p>
-        </c:txPr>
-        <c:crossAx val="2094734554"/>
-        <c:crosses val="autoZero"/>
-        <c:crossBetween val="between"/>
-        <c:majorUnit val="4"/>
-      </c:valAx>
-      <c:spPr>
-        <a:solidFill>
-          <a:srgbClr val="FFFFFF"/>
-        </a:solidFill>
-        <a:ln w="12700" cap="flat">
-          <a:solidFill>
-            <a:srgbClr val="FFFFFF"/>
-          </a:solidFill>
-        </a:ln>
-        <a:effectLst/>
-      </c:spPr>
-    </c:plotArea>
-    <c:legend>
-      <c:legendPos val="b"/>
-      <c:overlay val="0"/>
-      <c:txPr>
-        <a:bodyPr/>
-        <a:lstStyle/>
-        <a:p>
-          <a:pPr>
-            <a:defRPr sz="900">
-              <a:solidFill>
-                <a:srgbClr val="2B2B2B"/>
-              </a:solidFill>
-              <a:latin typeface="Calibri"/>
-              <a:cs typeface="Calibri"/>
-            </a:defRPr>
-          </a:pPr>
-          <a:endParaRPr lang="en-US"/>
-        </a:p>
-      </c:txPr>
-    </c:legend>
-    <c:plotVisOnly val="1"/>
-    <c:dispBlanksAs val="span"/>
-    <c:showDLblsOverMax val="1"/>
-  </c:chart>
-  <c:spPr>
-    <a:noFill/>
-    <a:ln>
-      <a:noFill/>
-    </a:ln>
-    <a:effectLst/>
-  </c:spPr>
-  <c:externalData r:id="rId1">
-    <c:autoUpdate val="0"/>
-  </c:externalData>
-</c:chartSpace>
-</file>
-
-<file path=ppt/charts/chart2.xml><?xml version="1.0" encoding="utf-8"?>
-<c:chartSpace xmlns:c="http://schemas.openxmlformats.org/drawingml/2006/chart" xmlns:a="http://schemas.openxmlformats.org/drawingml/2006/main" xmlns:r="http://schemas.openxmlformats.org/officeDocument/2006/relationships" xmlns:c16r2="http://schemas.microsoft.com/office/drawing/2015/06/chart">
-  <c:date1904 val="0"/>
-  <c:lang val="en-US"/>
-  <c:roundedCorners val="1"/>
-  <c:style val="2"/>
-  <c:chart>
-    <c:title>
-      <c:tx>
-        <c:rich>
-          <a:bodyPr/>
-          <a:lstStyle/>
-          <a:p>
-            <a:pPr algn="l">
-              <a:defRPr sz="1400" b="0" i="0" u="none" strike="noStrike">
-                <a:solidFill>
-                  <a:srgbClr val="6D2E46"/>
-                </a:solidFill>
-                <a:latin typeface="Cambria"/>
-              </a:defRPr>
-            </a:pPr>
-            <a:r>
-              <a:rPr lang="en-US" sz="1400" b="0" i="0" u="none" strike="noStrike">
-                <a:solidFill>
-                  <a:srgbClr val="6D2E46"/>
-                </a:solidFill>
-                <a:latin typeface="Cambria"/>
-              </a:rPr>
-              <a:t>By size tier (hogs / week)</a:t>
-            </a:r>
-          </a:p>
-        </c:rich>
-      </c:tx>
-      <c:overlay val="0"/>
-    </c:title>
-    <c:autoTitleDeleted val="0"/>
-    <c:plotArea>
-      <c:layout/>
-      <c:barChart>
-        <c:barDir val="col"/>
-        <c:grouping val="stacked"/>
-        <c:varyColors val="0"/>
-        <c:ser>
-          <c:idx val="0"/>
-          <c:order val="0"/>
-          <c:tx>
-            <c:strRef>
-              <c:f>Sheet1!$B$1</c:f>
-              <c:strCache>
-                <c:ptCount val="1"/>
-                <c:pt idx="0">
-                  <c:v>Small (0–300)</c:v>
-                </c:pt>
-              </c:strCache>
-            </c:strRef>
-          </c:tx>
-          <c:spPr>
-            <a:solidFill>
-              <a:srgbClr val="D9BFC6"/>
-            </a:solidFill>
-            <a:effectLst/>
-          </c:spPr>
-          <c:invertIfNegative val="0"/>
-          <c:dLbls>
-            <c:numFmt formatCode="#,##0" sourceLinked="0"/>
-            <c:spPr>
-              <a:noFill/>
-              <a:ln>
-                <a:noFill/>
-              </a:ln>
-              <a:effectLst/>
-            </c:spPr>
-            <c:txPr>
-              <a:bodyPr/>
-              <a:lstStyle/>
-              <a:p>
-                <a:pPr>
-                  <a:defRPr sz="900" b="0" i="0" u="none" strike="noStrike">
-                    <a:solidFill>
-                      <a:srgbClr val="3A3A3A"/>
                     </a:solidFill>
                     <a:latin typeface="Calibri"/>
                   </a:defRPr>
@@ -989,15 +245,24 @@
                 <c:pt idx="5">
                   <c:v>1</c:v>
                 </c:pt>
-                <c:pt idx="6">
-                  <c:v>0</c:v>
-                </c:pt>
               </c:numCache>
             </c:numRef>
           </c:val>
           <c:extLst>
+            <c:ext xmlns:c14="http://schemas.microsoft.com/office/drawing/2007/8/2/chart" uri="{6F2FDCE9-48DA-4B69-8628-5D25D57E5C99}">
+              <c14:invertSolidFillFmt>
+                <c14:spPr xmlns:c14="http://schemas.microsoft.com/office/drawing/2007/8/2/chart">
+                  <a:solidFill>
+                    <a:srgbClr val="FFFFFF"/>
+                  </a:solidFill>
+                  <a:ln>
+                    <a:noFill/>
+                  </a:ln>
+                </c14:spPr>
+              </c14:invertSolidFillFmt>
+            </c:ext>
             <c:ext xmlns:c16="http://schemas.microsoft.com/office/drawing/2014/chart" uri="{C3380CC4-5D6E-409C-BE32-E72D297353CC}">
-              <c16:uniqueId val="{00000000-F8EC-45DF-BC0B-332ECDADB56E}"/>
+              <c16:uniqueId val="{00000000-8F9F-421E-BA4D-E8ECD5E145D0}"/>
             </c:ext>
           </c:extLst>
         </c:ser>
@@ -1010,20 +275,21 @@
               <c:strCache>
                 <c:ptCount val="1"/>
                 <c:pt idx="0">
-                  <c:v>Medium (350–2.5k)</c:v>
+                  <c:v>Medium  350–2,500</c:v>
                 </c:pt>
               </c:strCache>
             </c:strRef>
           </c:tx>
           <c:spPr>
             <a:solidFill>
-              <a:srgbClr val="A26769"/>
+              <a:srgbClr val="6D2E46"/>
             </a:solidFill>
-            <a:effectLst/>
+            <a:ln>
+              <a:noFill/>
+            </a:ln>
           </c:spPr>
-          <c:invertIfNegative val="0"/>
+          <c:invertIfNegative val="1"/>
           <c:dLbls>
-            <c:numFmt formatCode="#,##0" sourceLinked="0"/>
             <c:spPr>
               <a:noFill/>
               <a:ln>
@@ -1036,9 +302,9 @@
               <a:lstStyle/>
               <a:p>
                 <a:pPr>
-                  <a:defRPr sz="900" b="0" i="0" u="none" strike="noStrike">
+                  <a:defRPr sz="1200" b="1">
                     <a:solidFill>
-                      <a:srgbClr val="3A3A3A"/>
+                      <a:srgbClr val="FFFFFF"/>
                     </a:solidFill>
                     <a:latin typeface="Calibri"/>
                   </a:defRPr>
@@ -1096,13 +362,7 @@
                 <c:formatCode>General</c:formatCode>
                 <c:ptCount val="7"/>
                 <c:pt idx="0">
-                  <c:v>3</c:v>
-                </c:pt>
-                <c:pt idx="1">
-                  <c:v>0</c:v>
-                </c:pt>
-                <c:pt idx="2">
-                  <c:v>0</c:v>
+                  <c:v>4</c:v>
                 </c:pt>
                 <c:pt idx="3">
                   <c:v>1</c:v>
@@ -1110,18 +370,24 @@
                 <c:pt idx="4">
                   <c:v>1</c:v>
                 </c:pt>
-                <c:pt idx="5">
-                  <c:v>0</c:v>
-                </c:pt>
-                <c:pt idx="6">
-                  <c:v>0</c:v>
-                </c:pt>
               </c:numCache>
             </c:numRef>
           </c:val>
           <c:extLst>
+            <c:ext xmlns:c14="http://schemas.microsoft.com/office/drawing/2007/8/2/chart" uri="{6F2FDCE9-48DA-4B69-8628-5D25D57E5C99}">
+              <c14:invertSolidFillFmt>
+                <c14:spPr xmlns:c14="http://schemas.microsoft.com/office/drawing/2007/8/2/chart">
+                  <a:solidFill>
+                    <a:srgbClr val="FFFFFF"/>
+                  </a:solidFill>
+                  <a:ln>
+                    <a:noFill/>
+                  </a:ln>
+                </c14:spPr>
+              </c14:invertSolidFillFmt>
+            </c:ext>
             <c:ext xmlns:c16="http://schemas.microsoft.com/office/drawing/2014/chart" uri="{C3380CC4-5D6E-409C-BE32-E72D297353CC}">
-              <c16:uniqueId val="{00000001-F8EC-45DF-BC0B-332ECDADB56E}"/>
+              <c16:uniqueId val="{00000001-8F9F-421E-BA4D-E8ECD5E145D0}"/>
             </c:ext>
           </c:extLst>
         </c:ser>
@@ -1134,20 +400,21 @@
               <c:strCache>
                 <c:ptCount val="1"/>
                 <c:pt idx="0">
-                  <c:v>Med-High (2.5–5k)</c:v>
+                  <c:v>Med-High  2,500–5,000</c:v>
                 </c:pt>
               </c:strCache>
             </c:strRef>
           </c:tx>
           <c:spPr>
             <a:solidFill>
-              <a:srgbClr val="E0A458"/>
+              <a:srgbClr val="A9601F"/>
             </a:solidFill>
-            <a:effectLst/>
+            <a:ln>
+              <a:noFill/>
+            </a:ln>
           </c:spPr>
-          <c:invertIfNegative val="0"/>
+          <c:invertIfNegative val="1"/>
           <c:dLbls>
-            <c:numFmt formatCode="#,##0" sourceLinked="0"/>
             <c:spPr>
               <a:noFill/>
               <a:ln>
@@ -1160,9 +427,9 @@
               <a:lstStyle/>
               <a:p>
                 <a:pPr>
-                  <a:defRPr sz="900" b="0" i="0" u="none" strike="noStrike">
+                  <a:defRPr sz="1200" b="1">
                     <a:solidFill>
-                      <a:srgbClr val="3A3A3A"/>
+                      <a:srgbClr val="FFFFFF"/>
                     </a:solidFill>
                     <a:latin typeface="Calibri"/>
                   </a:defRPr>
@@ -1222,30 +489,27 @@
                 <c:pt idx="0">
                   <c:v>1</c:v>
                 </c:pt>
-                <c:pt idx="1">
-                  <c:v>0</c:v>
-                </c:pt>
-                <c:pt idx="2">
-                  <c:v>0</c:v>
-                </c:pt>
                 <c:pt idx="3">
                   <c:v>2</c:v>
-                </c:pt>
-                <c:pt idx="4">
-                  <c:v>0</c:v>
-                </c:pt>
-                <c:pt idx="5">
-                  <c:v>0</c:v>
-                </c:pt>
-                <c:pt idx="6">
-                  <c:v>0</c:v>
                 </c:pt>
               </c:numCache>
             </c:numRef>
           </c:val>
           <c:extLst>
+            <c:ext xmlns:c14="http://schemas.microsoft.com/office/drawing/2007/8/2/chart" uri="{6F2FDCE9-48DA-4B69-8628-5D25D57E5C99}">
+              <c14:invertSolidFillFmt>
+                <c14:spPr xmlns:c14="http://schemas.microsoft.com/office/drawing/2007/8/2/chart">
+                  <a:solidFill>
+                    <a:srgbClr val="FFFFFF"/>
+                  </a:solidFill>
+                  <a:ln>
+                    <a:noFill/>
+                  </a:ln>
+                </c14:spPr>
+              </c14:invertSolidFillFmt>
+            </c:ext>
             <c:ext xmlns:c16="http://schemas.microsoft.com/office/drawing/2014/chart" uri="{C3380CC4-5D6E-409C-BE32-E72D297353CC}">
-              <c16:uniqueId val="{00000002-F8EC-45DF-BC0B-332ECDADB56E}"/>
+              <c16:uniqueId val="{00000002-8F9F-421E-BA4D-E8ECD5E145D0}"/>
             </c:ext>
           </c:extLst>
         </c:ser>
@@ -1258,20 +522,21 @@
               <c:strCache>
                 <c:ptCount val="1"/>
                 <c:pt idx="0">
-                  <c:v>High (5k+)</c:v>
+                  <c:v>High  5,000+</c:v>
                 </c:pt>
               </c:strCache>
             </c:strRef>
           </c:tx>
           <c:spPr>
             <a:solidFill>
-              <a:srgbClr val="6D2E46"/>
+              <a:srgbClr val="3D1A29"/>
             </a:solidFill>
-            <a:effectLst/>
+            <a:ln>
+              <a:noFill/>
+            </a:ln>
           </c:spPr>
-          <c:invertIfNegative val="0"/>
+          <c:invertIfNegative val="1"/>
           <c:dLbls>
-            <c:numFmt formatCode="#,##0" sourceLinked="0"/>
             <c:spPr>
               <a:noFill/>
               <a:ln>
@@ -1284,9 +549,9 @@
               <a:lstStyle/>
               <a:p>
                 <a:pPr>
-                  <a:defRPr sz="900" b="0" i="0" u="none" strike="noStrike">
+                  <a:defRPr sz="1200" b="1">
                     <a:solidFill>
-                      <a:srgbClr val="3A3A3A"/>
+                      <a:srgbClr val="FFFFFF"/>
                     </a:solidFill>
                     <a:latin typeface="Calibri"/>
                   </a:defRPr>
@@ -1346,20 +611,11 @@
                 <c:pt idx="0">
                   <c:v>2</c:v>
                 </c:pt>
-                <c:pt idx="1">
-                  <c:v>0</c:v>
-                </c:pt>
-                <c:pt idx="2">
-                  <c:v>0</c:v>
-                </c:pt>
                 <c:pt idx="3">
                   <c:v>1</c:v>
                 </c:pt>
-                <c:pt idx="4">
-                  <c:v>0</c:v>
-                </c:pt>
                 <c:pt idx="5">
-                  <c:v>6</c:v>
+                  <c:v>5</c:v>
                 </c:pt>
                 <c:pt idx="6">
                   <c:v>1</c:v>
@@ -1368,8 +624,20 @@
             </c:numRef>
           </c:val>
           <c:extLst>
+            <c:ext xmlns:c14="http://schemas.microsoft.com/office/drawing/2007/8/2/chart" uri="{6F2FDCE9-48DA-4B69-8628-5D25D57E5C99}">
+              <c14:invertSolidFillFmt>
+                <c14:spPr xmlns:c14="http://schemas.microsoft.com/office/drawing/2007/8/2/chart">
+                  <a:solidFill>
+                    <a:srgbClr val="FFFFFF"/>
+                  </a:solidFill>
+                  <a:ln>
+                    <a:noFill/>
+                  </a:ln>
+                </c14:spPr>
+              </c14:invertSolidFillFmt>
+            </c:ext>
             <c:ext xmlns:c16="http://schemas.microsoft.com/office/drawing/2014/chart" uri="{C3380CC4-5D6E-409C-BE32-E72D297353CC}">
-              <c16:uniqueId val="{00000003-F8EC-45DF-BC0B-332ECDADB56E}"/>
+              <c16:uniqueId val="{00000003-8F9F-421E-BA4D-E8ECD5E145D0}"/>
             </c:ext>
           </c:extLst>
         </c:ser>
@@ -1389,13 +657,14 @@
           </c:tx>
           <c:spPr>
             <a:solidFill>
-              <a:srgbClr val="D5CACD"/>
+              <a:srgbClr val="7A7075"/>
             </a:solidFill>
-            <a:effectLst/>
+            <a:ln>
+              <a:noFill/>
+            </a:ln>
           </c:spPr>
-          <c:invertIfNegative val="0"/>
+          <c:invertIfNegative val="1"/>
           <c:dLbls>
-            <c:numFmt formatCode="#,##0" sourceLinked="0"/>
             <c:spPr>
               <a:noFill/>
               <a:ln>
@@ -1408,9 +677,9 @@
               <a:lstStyle/>
               <a:p>
                 <a:pPr>
-                  <a:defRPr sz="900" b="0" i="0" u="none" strike="noStrike">
+                  <a:defRPr sz="1200" b="1">
                     <a:solidFill>
-                      <a:srgbClr val="3A3A3A"/>
+                      <a:srgbClr val="FFFFFF"/>
                     </a:solidFill>
                     <a:latin typeface="Calibri"/>
                   </a:defRPr>
@@ -1468,1071 +737,6 @@
                 <c:formatCode>General</c:formatCode>
                 <c:ptCount val="7"/>
                 <c:pt idx="0">
-                  <c:v>6</c:v>
-                </c:pt>
-                <c:pt idx="1">
-                  <c:v>8</c:v>
-                </c:pt>
-                <c:pt idx="2">
-                  <c:v>3</c:v>
-                </c:pt>
-                <c:pt idx="3">
-                  <c:v>2</c:v>
-                </c:pt>
-                <c:pt idx="4">
-                  <c:v>2</c:v>
-                </c:pt>
-                <c:pt idx="5">
-                  <c:v>1</c:v>
-                </c:pt>
-                <c:pt idx="6">
-                  <c:v>0</c:v>
-                </c:pt>
-              </c:numCache>
-            </c:numRef>
-          </c:val>
-          <c:extLst>
-            <c:ext xmlns:c16="http://schemas.microsoft.com/office/drawing/2014/chart" uri="{C3380CC4-5D6E-409C-BE32-E72D297353CC}">
-              <c16:uniqueId val="{00000004-F8EC-45DF-BC0B-332ECDADB56E}"/>
-            </c:ext>
-          </c:extLst>
-        </c:ser>
-        <c:dLbls>
-          <c:dLblPos val="ctr"/>
-          <c:showLegendKey val="0"/>
-          <c:showVal val="1"/>
-          <c:showCatName val="0"/>
-          <c:showSerName val="0"/>
-          <c:showPercent val="0"/>
-          <c:showBubbleSize val="0"/>
-        </c:dLbls>
-        <c:gapWidth val="50"/>
-        <c:overlap val="100"/>
-        <c:axId val="2094734554"/>
-        <c:axId val="2094734552"/>
-      </c:barChart>
-      <c:catAx>
-        <c:axId val="2094734554"/>
-        <c:scaling>
-          <c:orientation val="minMax"/>
-        </c:scaling>
-        <c:delete val="0"/>
-        <c:axPos val="b"/>
-        <c:numFmt formatCode="General" sourceLinked="1"/>
-        <c:majorTickMark val="out"/>
-        <c:minorTickMark val="none"/>
-        <c:tickLblPos val="low"/>
-        <c:spPr>
-          <a:ln w="12700" cap="flat">
-            <a:solidFill>
-              <a:srgbClr val="888888"/>
-            </a:solidFill>
-            <a:prstDash val="solid"/>
-            <a:round/>
-          </a:ln>
-        </c:spPr>
-        <c:txPr>
-          <a:bodyPr/>
-          <a:lstStyle/>
-          <a:p>
-            <a:pPr>
-              <a:defRPr sz="1000" b="0" i="0" u="none" strike="noStrike">
-                <a:solidFill>
-                  <a:srgbClr val="2B2B2B"/>
-                </a:solidFill>
-                <a:latin typeface="Calibri"/>
-              </a:defRPr>
-            </a:pPr>
-            <a:endParaRPr lang="en-US"/>
-          </a:p>
-        </c:txPr>
-        <c:crossAx val="2094734552"/>
-        <c:crosses val="autoZero"/>
-        <c:auto val="1"/>
-        <c:lblAlgn val="ctr"/>
-        <c:lblOffset val="100"/>
-        <c:noMultiLvlLbl val="1"/>
-      </c:catAx>
-      <c:valAx>
-        <c:axId val="2094734552"/>
-        <c:scaling>
-          <c:orientation val="minMax"/>
-          <c:max val="16"/>
-        </c:scaling>
-        <c:delete val="0"/>
-        <c:axPos val="l"/>
-        <c:majorGridlines>
-          <c:spPr>
-            <a:ln w="12700" cap="flat">
-              <a:solidFill>
-                <a:srgbClr val="EDE4E6"/>
-              </a:solidFill>
-              <a:prstDash val="solid"/>
-              <a:round/>
-            </a:ln>
-          </c:spPr>
-        </c:majorGridlines>
-        <c:numFmt formatCode="General" sourceLinked="0"/>
-        <c:majorTickMark val="out"/>
-        <c:minorTickMark val="none"/>
-        <c:tickLblPos val="nextTo"/>
-        <c:spPr>
-          <a:ln w="12700" cap="flat">
-            <a:solidFill>
-              <a:srgbClr val="888888"/>
-            </a:solidFill>
-            <a:prstDash val="solid"/>
-            <a:round/>
-          </a:ln>
-        </c:spPr>
-        <c:txPr>
-          <a:bodyPr/>
-          <a:lstStyle/>
-          <a:p>
-            <a:pPr>
-              <a:defRPr sz="900" b="0" i="0" u="none" strike="noStrike">
-                <a:solidFill>
-                  <a:srgbClr val="6E6E6E"/>
-                </a:solidFill>
-                <a:latin typeface="Arial"/>
-              </a:defRPr>
-            </a:pPr>
-            <a:endParaRPr lang="en-US"/>
-          </a:p>
-        </c:txPr>
-        <c:crossAx val="2094734554"/>
-        <c:crosses val="autoZero"/>
-        <c:crossBetween val="between"/>
-        <c:majorUnit val="4"/>
-      </c:valAx>
-      <c:spPr>
-        <a:solidFill>
-          <a:srgbClr val="FFFFFF"/>
-        </a:solidFill>
-        <a:ln w="12700" cap="flat">
-          <a:solidFill>
-            <a:srgbClr val="FFFFFF"/>
-          </a:solidFill>
-        </a:ln>
-        <a:effectLst/>
-      </c:spPr>
-    </c:plotArea>
-    <c:legend>
-      <c:legendPos val="b"/>
-      <c:overlay val="0"/>
-      <c:txPr>
-        <a:bodyPr/>
-        <a:lstStyle/>
-        <a:p>
-          <a:pPr>
-            <a:defRPr sz="900">
-              <a:solidFill>
-                <a:srgbClr val="2B2B2B"/>
-              </a:solidFill>
-              <a:latin typeface="Calibri"/>
-              <a:cs typeface="Calibri"/>
-            </a:defRPr>
-          </a:pPr>
-          <a:endParaRPr lang="en-US"/>
-        </a:p>
-      </c:txPr>
-    </c:legend>
-    <c:plotVisOnly val="1"/>
-    <c:dispBlanksAs val="span"/>
-    <c:showDLblsOverMax val="1"/>
-  </c:chart>
-  <c:spPr>
-    <a:noFill/>
-    <a:ln>
-      <a:noFill/>
-    </a:ln>
-    <a:effectLst/>
-  </c:spPr>
-  <c:externalData r:id="rId1">
-    <c:autoUpdate val="0"/>
-  </c:externalData>
-</c:chartSpace>
-</file>
-
-<file path=ppt/charts/chart3.xml><?xml version="1.0" encoding="utf-8"?>
-<c:chartSpace xmlns:c="http://schemas.openxmlformats.org/drawingml/2006/chart" xmlns:a="http://schemas.openxmlformats.org/drawingml/2006/main" xmlns:r="http://schemas.openxmlformats.org/officeDocument/2006/relationships">
-  <c:date1904 val="0"/>
-  <c:chart>
-    <c:autoTitleDeleted val="1"/>
-    <c:plotArea>
-      <c:barChart>
-        <c:barDir val="col"/>
-        <c:grouping val="stacked"/>
-        <c:ser>
-          <c:idx val="0"/>
-          <c:order val="0"/>
-          <c:tx>
-            <c:strRef>
-              <c:f>Sheet1!$B$1</c:f>
-              <c:strCache>
-                <c:ptCount val="1"/>
-                <c:pt idx="0">
-                  <c:v>Small  0–300</c:v>
-                </c:pt>
-              </c:strCache>
-            </c:strRef>
-          </c:tx>
-          <c:spPr>
-            <a:solidFill>
-              <a:srgbClr val="9C6B76"/>
-            </a:solidFill>
-            <a:ln>
-              <a:noFill/>
-            </a:ln>
-          </c:spPr>
-          <c:cat>
-            <c:strRef>
-              <c:f>Sheet1!$A$2:$A$8</c:f>
-              <c:strCache>
-                <c:ptCount val="7"/>
-                <c:pt idx="0">
-                  <c:v>Eastern NC</c:v>
-                </c:pt>
-                <c:pt idx="1">
-                  <c:v>Western NC</c:v>
-                </c:pt>
-                <c:pt idx="2">
-                  <c:v>SC</c:v>
-                </c:pt>
-                <c:pt idx="3">
-                  <c:v>TN</c:v>
-                </c:pt>
-                <c:pt idx="4">
-                  <c:v>VA</c:v>
-                </c:pt>
-                <c:pt idx="5">
-                  <c:v>Iowa</c:v>
-                </c:pt>
-                <c:pt idx="6">
-                  <c:v>Nebraska</c:v>
-                </c:pt>
-              </c:strCache>
-            </c:strRef>
-          </c:cat>
-          <c:val>
-            <c:numRef>
-              <c:f>Sheet1!$B$2:$B$8</c:f>
-              <c:numCache>
-                <c:formatCode>General</c:formatCode>
-                <c:ptCount val="7"/>
-                <c:pt idx="0">
-                  <c:v>2</c:v>
-                </c:pt>
-                <c:pt idx="1">
-                  <c:v>6</c:v>
-                </c:pt>
-                <c:pt idx="2">
-                  <c:v>2</c:v>
-                </c:pt>
-                <c:pt idx="3">
-                  <c:v>1</c:v>
-                </c:pt>
-                <c:pt idx="4">
-                  <c:v>2</c:v>
-                </c:pt>
-                <c:pt idx="5">
-                  <c:v>1</c:v>
-                </c:pt>
-              </c:numCache>
-            </c:numRef>
-          </c:val>
-        </c:ser>
-        <c:ser>
-          <c:idx val="1"/>
-          <c:order val="1"/>
-          <c:tx>
-            <c:strRef>
-              <c:f>Sheet1!$C$1</c:f>
-              <c:strCache>
-                <c:ptCount val="1"/>
-                <c:pt idx="0">
-                  <c:v>Medium  350–2,500</c:v>
-                </c:pt>
-              </c:strCache>
-            </c:strRef>
-          </c:tx>
-          <c:spPr>
-            <a:solidFill>
-              <a:srgbClr val="6D2E46"/>
-            </a:solidFill>
-            <a:ln>
-              <a:noFill/>
-            </a:ln>
-          </c:spPr>
-          <c:cat>
-            <c:strRef>
-              <c:f>Sheet1!$A$2:$A$8</c:f>
-              <c:strCache>
-                <c:ptCount val="7"/>
-                <c:pt idx="0">
-                  <c:v>Eastern NC</c:v>
-                </c:pt>
-                <c:pt idx="1">
-                  <c:v>Western NC</c:v>
-                </c:pt>
-                <c:pt idx="2">
-                  <c:v>SC</c:v>
-                </c:pt>
-                <c:pt idx="3">
-                  <c:v>TN</c:v>
-                </c:pt>
-                <c:pt idx="4">
-                  <c:v>VA</c:v>
-                </c:pt>
-                <c:pt idx="5">
-                  <c:v>Iowa</c:v>
-                </c:pt>
-                <c:pt idx="6">
-                  <c:v>Nebraska</c:v>
-                </c:pt>
-              </c:strCache>
-            </c:strRef>
-          </c:cat>
-          <c:val>
-            <c:numRef>
-              <c:f>Sheet1!$C$2:$C$8</c:f>
-              <c:numCache>
-                <c:formatCode>General</c:formatCode>
-                <c:ptCount val="7"/>
-                <c:pt idx="0">
-                  <c:v>3</c:v>
-                </c:pt>
-                <c:pt idx="3">
-                  <c:v>1</c:v>
-                </c:pt>
-                <c:pt idx="4">
-                  <c:v>1</c:v>
-                </c:pt>
-              </c:numCache>
-            </c:numRef>
-          </c:val>
-        </c:ser>
-        <c:ser>
-          <c:idx val="2"/>
-          <c:order val="2"/>
-          <c:tx>
-            <c:strRef>
-              <c:f>Sheet1!$D$1</c:f>
-              <c:strCache>
-                <c:ptCount val="1"/>
-                <c:pt idx="0">
-                  <c:v>Med-High  2,500–5,000</c:v>
-                </c:pt>
-              </c:strCache>
-            </c:strRef>
-          </c:tx>
-          <c:spPr>
-            <a:solidFill>
-              <a:srgbClr val="A9601F"/>
-            </a:solidFill>
-            <a:ln>
-              <a:noFill/>
-            </a:ln>
-          </c:spPr>
-          <c:cat>
-            <c:strRef>
-              <c:f>Sheet1!$A$2:$A$8</c:f>
-              <c:strCache>
-                <c:ptCount val="7"/>
-                <c:pt idx="0">
-                  <c:v>Eastern NC</c:v>
-                </c:pt>
-                <c:pt idx="1">
-                  <c:v>Western NC</c:v>
-                </c:pt>
-                <c:pt idx="2">
-                  <c:v>SC</c:v>
-                </c:pt>
-                <c:pt idx="3">
-                  <c:v>TN</c:v>
-                </c:pt>
-                <c:pt idx="4">
-                  <c:v>VA</c:v>
-                </c:pt>
-                <c:pt idx="5">
-                  <c:v>Iowa</c:v>
-                </c:pt>
-                <c:pt idx="6">
-                  <c:v>Nebraska</c:v>
-                </c:pt>
-              </c:strCache>
-            </c:strRef>
-          </c:cat>
-          <c:val>
-            <c:numRef>
-              <c:f>Sheet1!$D$2:$D$8</c:f>
-              <c:numCache>
-                <c:formatCode>General</c:formatCode>
-                <c:ptCount val="7"/>
-                <c:pt idx="0">
-                  <c:v>1</c:v>
-                </c:pt>
-                <c:pt idx="3">
-                  <c:v>2</c:v>
-                </c:pt>
-              </c:numCache>
-            </c:numRef>
-          </c:val>
-        </c:ser>
-        <c:ser>
-          <c:idx val="3"/>
-          <c:order val="3"/>
-          <c:tx>
-            <c:strRef>
-              <c:f>Sheet1!$E$1</c:f>
-              <c:strCache>
-                <c:ptCount val="1"/>
-                <c:pt idx="0">
-                  <c:v>High  5,000+</c:v>
-                </c:pt>
-              </c:strCache>
-            </c:strRef>
-          </c:tx>
-          <c:spPr>
-            <a:solidFill>
-              <a:srgbClr val="3D1A29"/>
-            </a:solidFill>
-            <a:ln>
-              <a:noFill/>
-            </a:ln>
-          </c:spPr>
-          <c:cat>
-            <c:strRef>
-              <c:f>Sheet1!$A$2:$A$8</c:f>
-              <c:strCache>
-                <c:ptCount val="7"/>
-                <c:pt idx="0">
-                  <c:v>Eastern NC</c:v>
-                </c:pt>
-                <c:pt idx="1">
-                  <c:v>Western NC</c:v>
-                </c:pt>
-                <c:pt idx="2">
-                  <c:v>SC</c:v>
-                </c:pt>
-                <c:pt idx="3">
-                  <c:v>TN</c:v>
-                </c:pt>
-                <c:pt idx="4">
-                  <c:v>VA</c:v>
-                </c:pt>
-                <c:pt idx="5">
-                  <c:v>Iowa</c:v>
-                </c:pt>
-                <c:pt idx="6">
-                  <c:v>Nebraska</c:v>
-                </c:pt>
-              </c:strCache>
-            </c:strRef>
-          </c:cat>
-          <c:val>
-            <c:numRef>
-              <c:f>Sheet1!$E$2:$E$8</c:f>
-              <c:numCache>
-                <c:formatCode>General</c:formatCode>
-                <c:ptCount val="7"/>
-                <c:pt idx="0">
-                  <c:v>2</c:v>
-                </c:pt>
-                <c:pt idx="3">
-                  <c:v>1</c:v>
-                </c:pt>
-                <c:pt idx="5">
-                  <c:v>6</c:v>
-                </c:pt>
-                <c:pt idx="6">
-                  <c:v>1</c:v>
-                </c:pt>
-              </c:numCache>
-            </c:numRef>
-          </c:val>
-        </c:ser>
-        <c:ser>
-          <c:idx val="4"/>
-          <c:order val="4"/>
-          <c:tx>
-            <c:strRef>
-              <c:f>Sheet1!$F$1</c:f>
-              <c:strCache>
-                <c:ptCount val="1"/>
-                <c:pt idx="0">
-                  <c:v>To confirm</c:v>
-                </c:pt>
-              </c:strCache>
-            </c:strRef>
-          </c:tx>
-          <c:spPr>
-            <a:solidFill>
-              <a:srgbClr val="7A7075"/>
-            </a:solidFill>
-            <a:ln>
-              <a:noFill/>
-            </a:ln>
-          </c:spPr>
-          <c:cat>
-            <c:strRef>
-              <c:f>Sheet1!$A$2:$A$8</c:f>
-              <c:strCache>
-                <c:ptCount val="7"/>
-                <c:pt idx="0">
-                  <c:v>Eastern NC</c:v>
-                </c:pt>
-                <c:pt idx="1">
-                  <c:v>Western NC</c:v>
-                </c:pt>
-                <c:pt idx="2">
-                  <c:v>SC</c:v>
-                </c:pt>
-                <c:pt idx="3">
-                  <c:v>TN</c:v>
-                </c:pt>
-                <c:pt idx="4">
-                  <c:v>VA</c:v>
-                </c:pt>
-                <c:pt idx="5">
-                  <c:v>Iowa</c:v>
-                </c:pt>
-                <c:pt idx="6">
-                  <c:v>Nebraska</c:v>
-                </c:pt>
-              </c:strCache>
-            </c:strRef>
-          </c:cat>
-          <c:val>
-            <c:numRef>
-              <c:f>Sheet1!$F$2:$F$8</c:f>
-              <c:numCache>
-                <c:formatCode>General</c:formatCode>
-                <c:ptCount val="7"/>
-                <c:pt idx="0">
-                  <c:v>6</c:v>
-                </c:pt>
-                <c:pt idx="1">
-                  <c:v>8</c:v>
-                </c:pt>
-                <c:pt idx="2">
-                  <c:v>3</c:v>
-                </c:pt>
-                <c:pt idx="3">
-                  <c:v>2</c:v>
-                </c:pt>
-                <c:pt idx="4">
-                  <c:v>2</c:v>
-                </c:pt>
-                <c:pt idx="5">
-                  <c:v>1</c:v>
-                </c:pt>
-              </c:numCache>
-            </c:numRef>
-          </c:val>
-        </c:ser>
-        <c:dLbls>
-          <c:txPr>
-            <a:bodyPr/>
-            <a:lstStyle/>
-            <a:p>
-              <a:pPr>
-                <a:defRPr sz="1200" b="1">
-                  <a:solidFill>
-                    <a:srgbClr val="FFFFFF"/>
-                  </a:solidFill>
-                  <a:latin typeface="Calibri"/>
-                </a:defRPr>
-              </a:pPr>
-            </a:p>
-          </c:txPr>
-          <c:dLblPos val="ctr"/>
-          <c:showLegendKey val="0"/>
-          <c:showVal val="1"/>
-          <c:showCatName val="0"/>
-          <c:showSerName val="0"/>
-          <c:showPercent val="0"/>
-          <c:showBubbleSize val="0"/>
-          <c:showLeaderLines val="1"/>
-        </c:dLbls>
-        <c:gapWidth val="55"/>
-        <c:overlap val="100"/>
-        <c:axId val="-2068027336"/>
-        <c:axId val="-2113994440"/>
-      </c:barChart>
-      <c:catAx>
-        <c:axId val="-2068027336"/>
-        <c:scaling>
-          <c:orientation val="minMax"/>
-        </c:scaling>
-        <c:delete val="0"/>
-        <c:axPos val="b"/>
-        <c:majorTickMark val="out"/>
-        <c:minorTickMark val="none"/>
-        <c:tickLblPos val="nextTo"/>
-        <c:spPr>
-          <a:ln>
-            <a:solidFill>
-              <a:srgbClr val="D8CCD0"/>
-            </a:solidFill>
-          </a:ln>
-        </c:spPr>
-        <c:txPr>
-          <a:bodyPr/>
-          <a:lstStyle/>
-          <a:p>
-            <a:pPr>
-              <a:defRPr sz="1200" b="1">
-                <a:solidFill>
-                  <a:srgbClr val="2B2B2B"/>
-                </a:solidFill>
-                <a:latin typeface="Calibri"/>
-              </a:defRPr>
-            </a:pPr>
-          </a:p>
-        </c:txPr>
-        <c:crossAx val="-2113994440"/>
-        <c:crosses val="autoZero"/>
-        <c:auto val="1"/>
-        <c:lblAlgn val="ctr"/>
-        <c:lblOffset val="100"/>
-        <c:noMultiLvlLbl val="0"/>
-      </c:catAx>
-      <c:valAx>
-        <c:axId val="-2113994440"/>
-        <c:scaling>
-          <c:max val="16.0"/>
-        </c:scaling>
-        <c:delete val="0"/>
-        <c:axPos val="l"/>
-        <c:majorGridlines>
-          <c:spPr>
-            <a:ln>
-              <a:solidFill>
-                <a:srgbClr val="EDE4E6"/>
-              </a:solidFill>
-            </a:ln>
-          </c:spPr>
-        </c:majorGridlines>
-        <c:majorTickMark val="out"/>
-        <c:minorTickMark val="none"/>
-        <c:tickLblPos val="nextTo"/>
-        <c:spPr>
-          <a:ln>
-            <a:noFill/>
-          </a:ln>
-        </c:spPr>
-        <c:txPr>
-          <a:bodyPr/>
-          <a:lstStyle/>
-          <a:p>
-            <a:pPr>
-              <a:defRPr sz="1000">
-                <a:solidFill>
-                  <a:srgbClr val="6E6E6E"/>
-                </a:solidFill>
-                <a:latin typeface="Calibri"/>
-              </a:defRPr>
-            </a:pPr>
-          </a:p>
-        </c:txPr>
-        <c:crossAx val="-2068027336"/>
-        <c:crosses val="autoZero"/>
-        <c:majorUnit val="4.0"/>
-      </c:valAx>
-    </c:plotArea>
-    <c:legend>
-      <c:legendPos val="b"/>
-      <c:overlay val="0"/>
-      <c:txPr>
-        <a:bodyPr/>
-        <a:lstStyle/>
-        <a:p>
-          <a:pPr>
-            <a:defRPr sz="1100">
-              <a:solidFill>
-                <a:srgbClr val="2B2B2B"/>
-              </a:solidFill>
-              <a:latin typeface="Calibri"/>
-            </a:defRPr>
-          </a:pPr>
-        </a:p>
-      </c:txPr>
-    </c:legend>
-    <c:dispBlanksAs val="gap"/>
-  </c:chart>
-  <c:txPr>
-    <a:bodyPr/>
-    <a:lstStyle/>
-    <a:p>
-      <a:pPr>
-        <a:defRPr sz="1800"/>
-      </a:pPr>
-      <a:endParaRPr lang="en-US"/>
-    </a:p>
-  </c:txPr>
-  <c:externalData r:id="rId1">
-    <c:autoUpdate val="0"/>
-  </c:externalData>
-</c:chartSpace>
-</file>
-
-<file path=ppt/charts/chart4.xml><?xml version="1.0" encoding="utf-8"?>
-<c:chartSpace xmlns:c="http://schemas.openxmlformats.org/drawingml/2006/chart" xmlns:a="http://schemas.openxmlformats.org/drawingml/2006/main" xmlns:r="http://schemas.openxmlformats.org/officeDocument/2006/relationships">
-  <c:date1904 val="0"/>
-  <c:chart>
-    <c:autoTitleDeleted val="1"/>
-    <c:plotArea>
-      <c:barChart>
-        <c:barDir val="col"/>
-        <c:grouping val="stacked"/>
-        <c:ser>
-          <c:idx val="0"/>
-          <c:order val="0"/>
-          <c:tx>
-            <c:strRef>
-              <c:f>Sheet1!$B$1</c:f>
-              <c:strCache>
-                <c:ptCount val="1"/>
-                <c:pt idx="0">
-                  <c:v>Small  0–300</c:v>
-                </c:pt>
-              </c:strCache>
-            </c:strRef>
-          </c:tx>
-          <c:spPr>
-            <a:solidFill>
-              <a:srgbClr val="9C6B76"/>
-            </a:solidFill>
-            <a:ln>
-              <a:noFill/>
-            </a:ln>
-          </c:spPr>
-          <c:cat>
-            <c:strRef>
-              <c:f>Sheet1!$A$2:$A$8</c:f>
-              <c:strCache>
-                <c:ptCount val="7"/>
-                <c:pt idx="0">
-                  <c:v>Eastern NC</c:v>
-                </c:pt>
-                <c:pt idx="1">
-                  <c:v>Western NC</c:v>
-                </c:pt>
-                <c:pt idx="2">
-                  <c:v>SC</c:v>
-                </c:pt>
-                <c:pt idx="3">
-                  <c:v>TN</c:v>
-                </c:pt>
-                <c:pt idx="4">
-                  <c:v>VA</c:v>
-                </c:pt>
-                <c:pt idx="5">
-                  <c:v>Iowa</c:v>
-                </c:pt>
-                <c:pt idx="6">
-                  <c:v>Nebraska</c:v>
-                </c:pt>
-              </c:strCache>
-            </c:strRef>
-          </c:cat>
-          <c:val>
-            <c:numRef>
-              <c:f>Sheet1!$B$2:$B$8</c:f>
-              <c:numCache>
-                <c:formatCode>General</c:formatCode>
-                <c:ptCount val="7"/>
-                <c:pt idx="0">
-                  <c:v>2</c:v>
-                </c:pt>
-                <c:pt idx="1">
-                  <c:v>6</c:v>
-                </c:pt>
-                <c:pt idx="2">
-                  <c:v>2</c:v>
-                </c:pt>
-                <c:pt idx="3">
-                  <c:v>1</c:v>
-                </c:pt>
-                <c:pt idx="4">
-                  <c:v>2</c:v>
-                </c:pt>
-                <c:pt idx="5">
-                  <c:v>1</c:v>
-                </c:pt>
-              </c:numCache>
-            </c:numRef>
-          </c:val>
-        </c:ser>
-        <c:ser>
-          <c:idx val="1"/>
-          <c:order val="1"/>
-          <c:tx>
-            <c:strRef>
-              <c:f>Sheet1!$C$1</c:f>
-              <c:strCache>
-                <c:ptCount val="1"/>
-                <c:pt idx="0">
-                  <c:v>Medium  350–2,500</c:v>
-                </c:pt>
-              </c:strCache>
-            </c:strRef>
-          </c:tx>
-          <c:spPr>
-            <a:solidFill>
-              <a:srgbClr val="6D2E46"/>
-            </a:solidFill>
-            <a:ln>
-              <a:noFill/>
-            </a:ln>
-          </c:spPr>
-          <c:cat>
-            <c:strRef>
-              <c:f>Sheet1!$A$2:$A$8</c:f>
-              <c:strCache>
-                <c:ptCount val="7"/>
-                <c:pt idx="0">
-                  <c:v>Eastern NC</c:v>
-                </c:pt>
-                <c:pt idx="1">
-                  <c:v>Western NC</c:v>
-                </c:pt>
-                <c:pt idx="2">
-                  <c:v>SC</c:v>
-                </c:pt>
-                <c:pt idx="3">
-                  <c:v>TN</c:v>
-                </c:pt>
-                <c:pt idx="4">
-                  <c:v>VA</c:v>
-                </c:pt>
-                <c:pt idx="5">
-                  <c:v>Iowa</c:v>
-                </c:pt>
-                <c:pt idx="6">
-                  <c:v>Nebraska</c:v>
-                </c:pt>
-              </c:strCache>
-            </c:strRef>
-          </c:cat>
-          <c:val>
-            <c:numRef>
-              <c:f>Sheet1!$C$2:$C$8</c:f>
-              <c:numCache>
-                <c:formatCode>General</c:formatCode>
-                <c:ptCount val="7"/>
-                <c:pt idx="0">
-                  <c:v>4</c:v>
-                </c:pt>
-                <c:pt idx="3">
-                  <c:v>1</c:v>
-                </c:pt>
-                <c:pt idx="4">
-                  <c:v>1</c:v>
-                </c:pt>
-              </c:numCache>
-            </c:numRef>
-          </c:val>
-        </c:ser>
-        <c:ser>
-          <c:idx val="2"/>
-          <c:order val="2"/>
-          <c:tx>
-            <c:strRef>
-              <c:f>Sheet1!$D$1</c:f>
-              <c:strCache>
-                <c:ptCount val="1"/>
-                <c:pt idx="0">
-                  <c:v>Med-High  2,500–5,000</c:v>
-                </c:pt>
-              </c:strCache>
-            </c:strRef>
-          </c:tx>
-          <c:spPr>
-            <a:solidFill>
-              <a:srgbClr val="A9601F"/>
-            </a:solidFill>
-            <a:ln>
-              <a:noFill/>
-            </a:ln>
-          </c:spPr>
-          <c:cat>
-            <c:strRef>
-              <c:f>Sheet1!$A$2:$A$8</c:f>
-              <c:strCache>
-                <c:ptCount val="7"/>
-                <c:pt idx="0">
-                  <c:v>Eastern NC</c:v>
-                </c:pt>
-                <c:pt idx="1">
-                  <c:v>Western NC</c:v>
-                </c:pt>
-                <c:pt idx="2">
-                  <c:v>SC</c:v>
-                </c:pt>
-                <c:pt idx="3">
-                  <c:v>TN</c:v>
-                </c:pt>
-                <c:pt idx="4">
-                  <c:v>VA</c:v>
-                </c:pt>
-                <c:pt idx="5">
-                  <c:v>Iowa</c:v>
-                </c:pt>
-                <c:pt idx="6">
-                  <c:v>Nebraska</c:v>
-                </c:pt>
-              </c:strCache>
-            </c:strRef>
-          </c:cat>
-          <c:val>
-            <c:numRef>
-              <c:f>Sheet1!$D$2:$D$8</c:f>
-              <c:numCache>
-                <c:formatCode>General</c:formatCode>
-                <c:ptCount val="7"/>
-                <c:pt idx="0">
-                  <c:v>1</c:v>
-                </c:pt>
-                <c:pt idx="3">
-                  <c:v>2</c:v>
-                </c:pt>
-              </c:numCache>
-            </c:numRef>
-          </c:val>
-        </c:ser>
-        <c:ser>
-          <c:idx val="3"/>
-          <c:order val="3"/>
-          <c:tx>
-            <c:strRef>
-              <c:f>Sheet1!$E$1</c:f>
-              <c:strCache>
-                <c:ptCount val="1"/>
-                <c:pt idx="0">
-                  <c:v>High  5,000+</c:v>
-                </c:pt>
-              </c:strCache>
-            </c:strRef>
-          </c:tx>
-          <c:spPr>
-            <a:solidFill>
-              <a:srgbClr val="3D1A29"/>
-            </a:solidFill>
-            <a:ln>
-              <a:noFill/>
-            </a:ln>
-          </c:spPr>
-          <c:cat>
-            <c:strRef>
-              <c:f>Sheet1!$A$2:$A$8</c:f>
-              <c:strCache>
-                <c:ptCount val="7"/>
-                <c:pt idx="0">
-                  <c:v>Eastern NC</c:v>
-                </c:pt>
-                <c:pt idx="1">
-                  <c:v>Western NC</c:v>
-                </c:pt>
-                <c:pt idx="2">
-                  <c:v>SC</c:v>
-                </c:pt>
-                <c:pt idx="3">
-                  <c:v>TN</c:v>
-                </c:pt>
-                <c:pt idx="4">
-                  <c:v>VA</c:v>
-                </c:pt>
-                <c:pt idx="5">
-                  <c:v>Iowa</c:v>
-                </c:pt>
-                <c:pt idx="6">
-                  <c:v>Nebraska</c:v>
-                </c:pt>
-              </c:strCache>
-            </c:strRef>
-          </c:cat>
-          <c:val>
-            <c:numRef>
-              <c:f>Sheet1!$E$2:$E$8</c:f>
-              <c:numCache>
-                <c:formatCode>General</c:formatCode>
-                <c:ptCount val="7"/>
-                <c:pt idx="0">
-                  <c:v>2</c:v>
-                </c:pt>
-                <c:pt idx="3">
-                  <c:v>1</c:v>
-                </c:pt>
-                <c:pt idx="5">
-                  <c:v>5</c:v>
-                </c:pt>
-                <c:pt idx="6">
-                  <c:v>1</c:v>
-                </c:pt>
-              </c:numCache>
-            </c:numRef>
-          </c:val>
-        </c:ser>
-        <c:ser>
-          <c:idx val="4"/>
-          <c:order val="4"/>
-          <c:tx>
-            <c:strRef>
-              <c:f>Sheet1!$F$1</c:f>
-              <c:strCache>
-                <c:ptCount val="1"/>
-                <c:pt idx="0">
-                  <c:v>To confirm</c:v>
-                </c:pt>
-              </c:strCache>
-            </c:strRef>
-          </c:tx>
-          <c:spPr>
-            <a:solidFill>
-              <a:srgbClr val="7A7075"/>
-            </a:solidFill>
-            <a:ln>
-              <a:noFill/>
-            </a:ln>
-          </c:spPr>
-          <c:cat>
-            <c:strRef>
-              <c:f>Sheet1!$A$2:$A$8</c:f>
-              <c:strCache>
-                <c:ptCount val="7"/>
-                <c:pt idx="0">
-                  <c:v>Eastern NC</c:v>
-                </c:pt>
-                <c:pt idx="1">
-                  <c:v>Western NC</c:v>
-                </c:pt>
-                <c:pt idx="2">
-                  <c:v>SC</c:v>
-                </c:pt>
-                <c:pt idx="3">
-                  <c:v>TN</c:v>
-                </c:pt>
-                <c:pt idx="4">
-                  <c:v>VA</c:v>
-                </c:pt>
-                <c:pt idx="5">
-                  <c:v>Iowa</c:v>
-                </c:pt>
-                <c:pt idx="6">
-                  <c:v>Nebraska</c:v>
-                </c:pt>
-              </c:strCache>
-            </c:strRef>
-          </c:cat>
-          <c:val>
-            <c:numRef>
-              <c:f>Sheet1!$F$2:$F$8</c:f>
-              <c:numCache>
-                <c:formatCode>General</c:formatCode>
-                <c:ptCount val="7"/>
-                <c:pt idx="0">
                   <c:v>5</c:v>
                 </c:pt>
                 <c:pt idx="1">
@@ -2553,22 +757,25 @@
               </c:numCache>
             </c:numRef>
           </c:val>
-        </c:ser>
-        <c:dLbls>
-          <c:txPr>
-            <a:bodyPr/>
-            <a:lstStyle/>
-            <a:p>
-              <a:pPr>
-                <a:defRPr sz="1200" b="1">
+          <c:extLst>
+            <c:ext xmlns:c14="http://schemas.microsoft.com/office/drawing/2007/8/2/chart" uri="{6F2FDCE9-48DA-4B69-8628-5D25D57E5C99}">
+              <c14:invertSolidFillFmt>
+                <c14:spPr xmlns:c14="http://schemas.microsoft.com/office/drawing/2007/8/2/chart">
                   <a:solidFill>
                     <a:srgbClr val="FFFFFF"/>
                   </a:solidFill>
-                  <a:latin typeface="Calibri"/>
-                </a:defRPr>
-              </a:pPr>
-            </a:p>
-          </c:txPr>
+                  <a:ln>
+                    <a:noFill/>
+                  </a:ln>
+                </c14:spPr>
+              </c14:invertSolidFillFmt>
+            </c:ext>
+            <c:ext xmlns:c16="http://schemas.microsoft.com/office/drawing/2014/chart" uri="{C3380CC4-5D6E-409C-BE32-E72D297353CC}">
+              <c16:uniqueId val="{00000004-8F9F-421E-BA4D-E8ECD5E145D0}"/>
+            </c:ext>
+          </c:extLst>
+        </c:ser>
+        <c:dLbls>
           <c:dLblPos val="ctr"/>
           <c:showLegendKey val="0"/>
           <c:showVal val="1"/>
@@ -2576,7 +783,6 @@
           <c:showSerName val="0"/>
           <c:showPercent val="0"/>
           <c:showBubbleSize val="0"/>
-          <c:showLeaderLines val="1"/>
         </c:dLbls>
         <c:gapWidth val="55"/>
         <c:overlap val="100"/>
@@ -2590,6 +796,7 @@
         </c:scaling>
         <c:delete val="0"/>
         <c:axPos val="b"/>
+        <c:numFmt formatCode="General" sourceLinked="0"/>
         <c:majorTickMark val="out"/>
         <c:minorTickMark val="none"/>
         <c:tickLblPos val="nextTo"/>
@@ -2612,6 +819,7 @@
                 <a:latin typeface="Calibri"/>
               </a:defRPr>
             </a:pPr>
+            <a:endParaRPr lang="en-US"/>
           </a:p>
         </c:txPr>
         <c:crossAx val="-2113994440"/>
@@ -2624,7 +832,8 @@
       <c:valAx>
         <c:axId val="-2113994440"/>
         <c:scaling>
-          <c:max val="16.0"/>
+          <c:orientation val="minMax"/>
+          <c:max val="16"/>
         </c:scaling>
         <c:delete val="0"/>
         <c:axPos val="l"/>
@@ -2637,6 +846,7 @@
             </a:ln>
           </c:spPr>
         </c:majorGridlines>
+        <c:numFmt formatCode="General" sourceLinked="1"/>
         <c:majorTickMark val="out"/>
         <c:minorTickMark val="none"/>
         <c:tickLblPos val="nextTo"/>
@@ -2657,11 +867,13 @@
                 <a:latin typeface="Calibri"/>
               </a:defRPr>
             </a:pPr>
+            <a:endParaRPr lang="en-US"/>
           </a:p>
         </c:txPr>
         <c:crossAx val="-2068027336"/>
         <c:crosses val="autoZero"/>
-        <c:majorUnit val="4.0"/>
+        <c:crossBetween val="between"/>
+        <c:majorUnit val="4"/>
       </c:valAx>
     </c:plotArea>
     <c:legend>
@@ -2679,10 +891,13 @@
               <a:latin typeface="Calibri"/>
             </a:defRPr>
           </a:pPr>
+          <a:endParaRPr lang="en-US"/>
         </a:p>
       </c:txPr>
     </c:legend>
+    <c:plotVisOnly val="1"/>
     <c:dispBlanksAs val="gap"/>
+    <c:showDLblsOverMax val="1"/>
   </c:chart>
   <c:txPr>
     <a:bodyPr/>
@@ -4429,7 +2644,7 @@
                 <a:ea typeface="Calibri" pitchFamily="34" charset="-122"/>
                 <a:cs typeface="Calibri" pitchFamily="34" charset="-120"/>
               </a:rPr>
-              <a:t>Size tier · certifications · welfare culture ·</a:t>
+              <a:t>1) Size tier · certifications · welfare culture ·</a:t>
             </a:r>
             <a:endParaRPr lang="en-US" sz="1300" dirty="0"/>
           </a:p>
@@ -4449,7 +2664,7 @@
                 <a:ea typeface="Calibri" pitchFamily="34" charset="-122"/>
                 <a:cs typeface="Calibri" pitchFamily="34" charset="-120"/>
               </a:rPr>
-              <a:t>Model A or Model B · which regions ·</a:t>
+              <a:t>2) Model A or Model B · which regions ·</a:t>
             </a:r>
             <a:endParaRPr lang="en-US" sz="1300" dirty="0"/>
           </a:p>
@@ -4469,7 +2684,7 @@
                 <a:ea typeface="Calibri" pitchFamily="34" charset="-122"/>
                 <a:cs typeface="Calibri" pitchFamily="34" charset="-120"/>
               </a:rPr>
-              <a:t>and organ-direct suppliers (Smithfield BioScience,</a:t>
+              <a:t>and 3) organ-direct suppliers (Smithfield BioScience,</a:t>
             </a:r>
             <a:endParaRPr lang="en-US" sz="1300" dirty="0"/>
           </a:p>
@@ -4865,79 +3080,6 @@
       </p:sp>
       <p:sp>
         <p:nvSpPr>
-          <p:cNvPr id="4" name="Shape 2"/>
-          <p:cNvSpPr/>
-          <p:nvPr/>
-        </p:nvSpPr>
-        <p:spPr>
-          <a:xfrm>
-            <a:off x="10607040" y="457200"/>
-            <a:ext cx="1005840" cy="402336"/>
-          </a:xfrm>
-          <a:prstGeom prst="roundRect">
-            <a:avLst>
-              <a:gd name="adj" fmla="val 45455"/>
-            </a:avLst>
-          </a:prstGeom>
-          <a:solidFill>
-            <a:srgbClr val="ECE2D0"/>
-          </a:solidFill>
-          <a:ln w="12700">
-            <a:solidFill>
-              <a:srgbClr val="ECE2D0"/>
-            </a:solidFill>
-            <a:prstDash val="solid"/>
-          </a:ln>
-        </p:spPr>
-        <p:txBody>
-          <a:bodyPr/>
-          <a:lstStyle/>
-          <a:p>
-            <a:endParaRPr lang="en-US"/>
-          </a:p>
-        </p:txBody>
-      </p:sp>
-      <p:sp>
-        <p:nvSpPr>
-          <p:cNvPr id="5" name="Text 3"/>
-          <p:cNvSpPr/>
-          <p:nvPr/>
-        </p:nvSpPr>
-        <p:spPr>
-          <a:xfrm>
-            <a:off x="10607040" y="457200"/>
-            <a:ext cx="1005840" cy="402336"/>
-          </a:xfrm>
-          <a:prstGeom prst="rect">
-            <a:avLst/>
-          </a:prstGeom>
-          <a:noFill/>
-          <a:ln/>
-        </p:spPr>
-        <p:txBody>
-          <a:bodyPr wrap="square" lIns="0" tIns="0" rIns="0" bIns="0" rtlCol="0" anchor="ctr"/>
-          <a:lstStyle/>
-          <a:p>
-            <a:pPr marL="0" indent="0" algn="ctr">
-              <a:buNone/>
-            </a:pPr>
-            <a:r>
-              <a:rPr lang="en-US" sz="1200" b="1" dirty="0">
-                <a:solidFill>
-                  <a:srgbClr val="6D2E46"/>
-                </a:solidFill>
-                <a:latin typeface="Calibri" pitchFamily="34" charset="0"/>
-                <a:ea typeface="Calibri" pitchFamily="34" charset="-122"/>
-                <a:cs typeface="Calibri" pitchFamily="34" charset="-120"/>
-              </a:rPr>
-              <a:t>25 min</a:t>
-            </a:r>
-            <a:endParaRPr lang="en-US" sz="1200" dirty="0"/>
-          </a:p>
-        </p:txBody>
-      </p:sp>
-      <p:sp>
-        <p:nvSpPr>
           <p:cNvPr id="6" name="Text 4"/>
           <p:cNvSpPr/>
           <p:nvPr/>
@@ -5816,7 +3958,7 @@
                 <a:ea typeface="Cambria" pitchFamily="34" charset="-122"/>
                 <a:cs typeface="Cambria" pitchFamily="34" charset="-120"/>
               </a:rPr>
-              <a:t>USDA inspected</a:t>
+              <a:t>USDA or FSIS inspected</a:t>
             </a:r>
             <a:endParaRPr lang="en-US" sz="1500" dirty="0"/>
           </a:p>
@@ -5959,17 +4101,21 @@
               <a:buNone/>
             </a:pPr>
             <a:r>
-              <a:rPr lang="en-US" sz="1200" dirty="0">
-                <a:solidFill>
-                  <a:srgbClr val="6E6E6E"/>
-                </a:solidFill>
-                <a:latin typeface="Calibri" pitchFamily="34" charset="0"/>
-                <a:ea typeface="Calibri" pitchFamily="34" charset="-122"/>
-                <a:cs typeface="Calibri" pitchFamily="34" charset="-120"/>
-              </a:rPr>
-              <a:t>Yes — for exports only</a:t>
-            </a:r>
-            <a:endParaRPr lang="en-US" sz="1200" dirty="0"/>
+              <a:rPr lang="en-US" sz="1200" b="1" dirty="0">
+                <a:solidFill>
+                  <a:srgbClr val="FF0000"/>
+                </a:solidFill>
+                <a:latin typeface="Calibri" pitchFamily="34" charset="0"/>
+                <a:ea typeface="Calibri" pitchFamily="34" charset="-122"/>
+                <a:cs typeface="Calibri" pitchFamily="34" charset="-120"/>
+              </a:rPr>
+              <a:t>It doesn’t need to be aphis certified</a:t>
+            </a:r>
+            <a:endParaRPr lang="en-US" sz="1200" b="1" dirty="0">
+              <a:solidFill>
+                <a:srgbClr val="FF0000"/>
+              </a:solidFill>
+            </a:endParaRPr>
           </a:p>
         </p:txBody>
       </p:sp>
@@ -6079,7 +4225,7 @@
                 <a:ea typeface="Calibri" pitchFamily="34" charset="-122"/>
                 <a:cs typeface="Calibri" pitchFamily="34" charset="-120"/>
               </a:rPr>
-              <a:t>No animal-cruelty flags</a:t>
+              <a:t>No flagging, bring to discussion</a:t>
             </a:r>
             <a:endParaRPr lang="en-US" sz="1200" dirty="0"/>
           </a:p>
@@ -6152,7 +4298,7 @@
                 <a:ea typeface="Calibri" pitchFamily="34" charset="-122"/>
                 <a:cs typeface="Calibri" pitchFamily="34" charset="-120"/>
               </a:rPr>
-              <a:t>Nahunta is domestic-only. Anything EU-bound must come from a federally-inspected (USDA / Talmadge-Aiken) plant — two supply chains, planned separately.</a:t>
+              <a:t>Comment: Nahunta products can be international – Correction. </a:t>
             </a:r>
             <a:endParaRPr lang="en-US" sz="1300" dirty="0"/>
           </a:p>
@@ -6239,7 +4385,7 @@
           <a:noFill/>
         </p:spPr>
         <p:txBody>
-          <a:bodyPr wrap="square" lIns="0" rIns="0" tIns="0" bIns="0">
+          <a:bodyPr wrap="square" lIns="0" tIns="0" rIns="0" bIns="0">
             <a:spAutoFit/>
           </a:bodyPr>
           <a:lstStyle/>
@@ -6274,7 +4420,7 @@
           <a:noFill/>
         </p:spPr>
         <p:txBody>
-          <a:bodyPr wrap="square" lIns="0" rIns="0" tIns="0" bIns="0">
+          <a:bodyPr wrap="square" lIns="0" tIns="0" rIns="0" bIns="0">
             <a:spAutoFit/>
           </a:bodyPr>
           <a:lstStyle/>
@@ -6294,22 +4440,110 @@
       </p:sp>
       <p:sp>
         <p:nvSpPr>
-          <p:cNvPr id="4" name="Rounded Rectangle 3"/>
-          <p:cNvSpPr/>
-          <p:nvPr/>
-        </p:nvSpPr>
-        <p:spPr>
-          <a:xfrm>
-            <a:off x="10607040" y="457200"/>
-            <a:ext cx="1005840" cy="402336"/>
+          <p:cNvPr id="6" name="TextBox 5"/>
+          <p:cNvSpPr txBox="1"/>
+          <p:nvPr/>
+        </p:nvSpPr>
+        <p:spPr>
+          <a:xfrm>
+            <a:off x="548640" y="1371600"/>
+            <a:ext cx="11064240" cy="274320"/>
+          </a:xfrm>
+          <a:prstGeom prst="rect">
+            <a:avLst/>
+          </a:prstGeom>
+          <a:noFill/>
+        </p:spPr>
+        <p:txBody>
+          <a:bodyPr wrap="square" lIns="0" tIns="0" rIns="0" bIns="0">
+            <a:spAutoFit/>
+          </a:bodyPr>
+          <a:lstStyle/>
+          <a:p>
+            <a:pPr algn="l"/>
+            <a:r>
+              <a:rPr sz="1400" b="0" i="0">
+                <a:solidFill>
+                  <a:srgbClr val="2B2B2B"/>
+                </a:solidFill>
+                <a:latin typeface="Calibri"/>
+              </a:rPr>
+              <a:t>53 named plants in our target areas — of ~138 identified in total. Sized by weekly hog volume.</a:t>
+            </a:r>
+          </a:p>
+        </p:txBody>
+      </p:sp>
+      <p:graphicFrame>
+        <p:nvGraphicFramePr>
+          <p:cNvPr id="7" name="Chart 6"/>
+          <p:cNvGraphicFramePr>
+            <a:graphicFrameLocks noGrp="1"/>
+          </p:cNvGraphicFramePr>
+          <p:nvPr/>
+        </p:nvGraphicFramePr>
+        <p:xfrm>
+          <a:off x="548640" y="1737360"/>
+          <a:ext cx="11064240" cy="2697480"/>
+        </p:xfrm>
+        <a:graphic>
+          <a:graphicData uri="http://schemas.openxmlformats.org/drawingml/2006/chart">
+            <c:chart xmlns:c="http://schemas.openxmlformats.org/drawingml/2006/chart" xmlns:r="http://schemas.openxmlformats.org/officeDocument/2006/relationships" r:id="rId3"/>
+          </a:graphicData>
+        </a:graphic>
+      </p:graphicFrame>
+      <p:sp>
+        <p:nvSpPr>
+          <p:cNvPr id="8" name="TextBox 7"/>
+          <p:cNvSpPr txBox="1"/>
+          <p:nvPr/>
+        </p:nvSpPr>
+        <p:spPr>
+          <a:xfrm>
+            <a:off x="548640" y="4590288"/>
+            <a:ext cx="8229600" cy="256032"/>
+          </a:xfrm>
+          <a:prstGeom prst="rect">
+            <a:avLst/>
+          </a:prstGeom>
+          <a:noFill/>
+        </p:spPr>
+        <p:txBody>
+          <a:bodyPr wrap="square" lIns="0" tIns="0" rIns="0" bIns="0">
+            <a:spAutoFit/>
+          </a:bodyPr>
+          <a:lstStyle/>
+          <a:p>
+            <a:pPr algn="l"/>
+            <a:r>
+              <a:rPr sz="1200" b="1" i="0">
+                <a:solidFill>
+                  <a:srgbClr val="A26769"/>
+                </a:solidFill>
+                <a:latin typeface="Calibri"/>
+              </a:rPr>
+              <a:t>EASTERN NC — WHERE OUR NAMED PLANTS SIT, BY SIZE</a:t>
+            </a:r>
+          </a:p>
+        </p:txBody>
+      </p:sp>
+      <p:sp>
+        <p:nvSpPr>
+          <p:cNvPr id="9" name="Rounded Rectangle 8"/>
+          <p:cNvSpPr/>
+          <p:nvPr/>
+        </p:nvSpPr>
+        <p:spPr>
+          <a:xfrm>
+            <a:off x="548640" y="4901184"/>
+            <a:ext cx="2633472" cy="1170432"/>
           </a:xfrm>
           <a:prstGeom prst="roundRect">
             <a:avLst>
-              <a:gd name="adj" fmla="val 25000"/>
+              <a:gd name="adj" fmla="val 6000"/>
             </a:avLst>
           </a:prstGeom>
           <a:solidFill>
-            <a:srgbClr val="ECE2D0"/>
+            <a:srgbClr val="F7F0F1"/>
           </a:solidFill>
           <a:ln>
             <a:noFill/>
@@ -6333,150 +4567,29 @@
         <p:txBody>
           <a:bodyPr rtlCol="0" anchor="ctr"/>
           <a:lstStyle/>
-          <a:p/>
-        </p:txBody>
-      </p:sp>
-      <p:sp>
-        <p:nvSpPr>
-          <p:cNvPr id="5" name="TextBox 4"/>
-          <p:cNvSpPr txBox="1"/>
-          <p:nvPr/>
-        </p:nvSpPr>
-        <p:spPr>
-          <a:xfrm>
-            <a:off x="10607040" y="530352"/>
-            <a:ext cx="1005840" cy="274320"/>
-          </a:xfrm>
-          <a:prstGeom prst="rect">
-            <a:avLst/>
-          </a:prstGeom>
-          <a:noFill/>
-        </p:spPr>
-        <p:txBody>
-          <a:bodyPr wrap="square" lIns="0" rIns="0" tIns="0" bIns="0">
-            <a:spAutoFit/>
-          </a:bodyPr>
-          <a:lstStyle/>
-          <a:p>
-            <a:pPr algn="ctr"/>
-            <a:r>
-              <a:rPr sz="1200" b="1" i="0">
-                <a:solidFill>
-                  <a:srgbClr val="6D2E46"/>
-                </a:solidFill>
-                <a:latin typeface="Calibri"/>
-              </a:rPr>
-              <a:t>10 min</a:t>
-            </a:r>
-          </a:p>
-        </p:txBody>
-      </p:sp>
-      <p:sp>
-        <p:nvSpPr>
-          <p:cNvPr id="6" name="TextBox 5"/>
-          <p:cNvSpPr txBox="1"/>
-          <p:nvPr/>
-        </p:nvSpPr>
-        <p:spPr>
-          <a:xfrm>
-            <a:off x="548640" y="1371600"/>
-            <a:ext cx="11064240" cy="274320"/>
-          </a:xfrm>
-          <a:prstGeom prst="rect">
-            <a:avLst/>
-          </a:prstGeom>
-          <a:noFill/>
-        </p:spPr>
-        <p:txBody>
-          <a:bodyPr wrap="square" lIns="0" rIns="0" tIns="0" bIns="0">
-            <a:spAutoFit/>
-          </a:bodyPr>
-          <a:lstStyle/>
-          <a:p>
-            <a:pPr algn="l"/>
-            <a:r>
-              <a:rPr sz="1400" b="0" i="0">
-                <a:solidFill>
-                  <a:srgbClr val="2B2B2B"/>
-                </a:solidFill>
-                <a:latin typeface="Calibri"/>
-              </a:rPr>
-              <a:t>53 named plants in our target areas — of ~138 identified in total. Sized by weekly hog volume.</a:t>
-            </a:r>
-          </a:p>
-        </p:txBody>
-      </p:sp>
-      <p:graphicFrame>
-        <p:nvGraphicFramePr>
-          <p:cNvPr id="7" name="Chart 6"/>
-          <p:cNvGraphicFramePr>
-            <a:graphicFrameLocks noGrp="1"/>
-          </p:cNvGraphicFramePr>
-          <p:nvPr/>
-        </p:nvGraphicFramePr>
-        <p:xfrm>
-          <a:off x="548640" y="1737360"/>
-          <a:ext cx="11064240" cy="2697480"/>
-        </p:xfrm>
-        <a:graphic>
-          <a:graphicData uri="http://schemas.openxmlformats.org/drawingml/2006/chart">
-            <c:chart xmlns:c="http://schemas.openxmlformats.org/drawingml/2006/chart" r:id="rId6"/>
-          </a:graphicData>
-        </a:graphic>
-      </p:graphicFrame>
-      <p:sp>
-        <p:nvSpPr>
-          <p:cNvPr id="8" name="TextBox 7"/>
-          <p:cNvSpPr txBox="1"/>
-          <p:nvPr/>
-        </p:nvSpPr>
-        <p:spPr>
-          <a:xfrm>
-            <a:off x="548640" y="4590288"/>
-            <a:ext cx="8229600" cy="256032"/>
-          </a:xfrm>
-          <a:prstGeom prst="rect">
-            <a:avLst/>
-          </a:prstGeom>
-          <a:noFill/>
-        </p:spPr>
-        <p:txBody>
-          <a:bodyPr wrap="square" lIns="0" rIns="0" tIns="0" bIns="0">
-            <a:spAutoFit/>
-          </a:bodyPr>
-          <a:lstStyle/>
-          <a:p>
-            <a:pPr algn="l"/>
-            <a:r>
-              <a:rPr sz="1200" b="1" i="0">
-                <a:solidFill>
-                  <a:srgbClr val="A26769"/>
-                </a:solidFill>
-                <a:latin typeface="Calibri"/>
-              </a:rPr>
-              <a:t>EASTERN NC — WHERE OUR NAMED PLANTS SIT, BY SIZE</a:t>
-            </a:r>
-          </a:p>
-        </p:txBody>
-      </p:sp>
-      <p:sp>
-        <p:nvSpPr>
-          <p:cNvPr id="9" name="Rounded Rectangle 8"/>
-          <p:cNvSpPr/>
-          <p:nvPr/>
-        </p:nvSpPr>
-        <p:spPr>
-          <a:xfrm>
-            <a:off x="548640" y="4901184"/>
-            <a:ext cx="2633472" cy="1170432"/>
+          <a:p>
+            <a:endParaRPr/>
+          </a:p>
+        </p:txBody>
+      </p:sp>
+      <p:sp>
+        <p:nvSpPr>
+          <p:cNvPr id="10" name="Rounded Rectangle 9"/>
+          <p:cNvSpPr/>
+          <p:nvPr/>
+        </p:nvSpPr>
+        <p:spPr>
+          <a:xfrm>
+            <a:off x="694944" y="5010912"/>
+            <a:ext cx="932688" cy="219456"/>
           </a:xfrm>
           <a:prstGeom prst="roundRect">
             <a:avLst>
-              <a:gd name="adj" fmla="val 6000"/>
+              <a:gd name="adj" fmla="val 35000"/>
             </a:avLst>
           </a:prstGeom>
           <a:solidFill>
-            <a:srgbClr val="F7F0F1"/>
+            <a:srgbClr val="6D2E46"/>
           </a:solidFill>
           <a:ln>
             <a:noFill/>
@@ -6500,27 +4613,169 @@
         <p:txBody>
           <a:bodyPr rtlCol="0" anchor="ctr"/>
           <a:lstStyle/>
-          <a:p/>
-        </p:txBody>
-      </p:sp>
-      <p:sp>
-        <p:nvSpPr>
-          <p:cNvPr id="10" name="Rounded Rectangle 9"/>
-          <p:cNvSpPr/>
-          <p:nvPr/>
-        </p:nvSpPr>
-        <p:spPr>
-          <a:xfrm>
-            <a:off x="694944" y="5010912"/>
-            <a:ext cx="932688" cy="219456"/>
+          <a:p>
+            <a:endParaRPr/>
+          </a:p>
+        </p:txBody>
+      </p:sp>
+      <p:sp>
+        <p:nvSpPr>
+          <p:cNvPr id="11" name="TextBox 10"/>
+          <p:cNvSpPr txBox="1"/>
+          <p:nvPr/>
+        </p:nvSpPr>
+        <p:spPr>
+          <a:xfrm>
+            <a:off x="694944" y="5038344"/>
+            <a:ext cx="932688" cy="182880"/>
+          </a:xfrm>
+          <a:prstGeom prst="rect">
+            <a:avLst/>
+          </a:prstGeom>
+          <a:noFill/>
+        </p:spPr>
+        <p:txBody>
+          <a:bodyPr wrap="square" lIns="0" tIns="0" rIns="0" bIns="0">
+            <a:spAutoFit/>
+          </a:bodyPr>
+          <a:lstStyle/>
+          <a:p>
+            <a:pPr algn="ctr"/>
+            <a:r>
+              <a:rPr sz="850" b="1" i="0">
+                <a:solidFill>
+                  <a:srgbClr val="FFFFFF"/>
+                </a:solidFill>
+                <a:latin typeface="Calibri"/>
+              </a:rPr>
+              <a:t>MEDIUM</a:t>
+            </a:r>
+          </a:p>
+        </p:txBody>
+      </p:sp>
+      <p:sp>
+        <p:nvSpPr>
+          <p:cNvPr id="12" name="TextBox 11"/>
+          <p:cNvSpPr txBox="1"/>
+          <p:nvPr/>
+        </p:nvSpPr>
+        <p:spPr>
+          <a:xfrm>
+            <a:off x="694944" y="5285232"/>
+            <a:ext cx="2377440" cy="237744"/>
+          </a:xfrm>
+          <a:prstGeom prst="rect">
+            <a:avLst/>
+          </a:prstGeom>
+          <a:noFill/>
+        </p:spPr>
+        <p:txBody>
+          <a:bodyPr wrap="square" lIns="0" tIns="0" rIns="0" bIns="0">
+            <a:spAutoFit/>
+          </a:bodyPr>
+          <a:lstStyle/>
+          <a:p>
+            <a:pPr algn="l"/>
+            <a:r>
+              <a:rPr sz="1300" b="1" i="0">
+                <a:solidFill>
+                  <a:srgbClr val="6D2E46"/>
+                </a:solidFill>
+                <a:latin typeface="Cambria"/>
+              </a:rPr>
+              <a:t>Custom Quality Packers</a:t>
+            </a:r>
+          </a:p>
+        </p:txBody>
+      </p:sp>
+      <p:sp>
+        <p:nvSpPr>
+          <p:cNvPr id="13" name="TextBox 12"/>
+          <p:cNvSpPr txBox="1"/>
+          <p:nvPr/>
+        </p:nvSpPr>
+        <p:spPr>
+          <a:xfrm>
+            <a:off x="694944" y="5513832"/>
+            <a:ext cx="2377440" cy="182880"/>
+          </a:xfrm>
+          <a:prstGeom prst="rect">
+            <a:avLst/>
+          </a:prstGeom>
+          <a:noFill/>
+        </p:spPr>
+        <p:txBody>
+          <a:bodyPr wrap="square" lIns="0" tIns="0" rIns="0" bIns="0">
+            <a:spAutoFit/>
+          </a:bodyPr>
+          <a:lstStyle/>
+          <a:p>
+            <a:pPr algn="l"/>
+            <a:r>
+              <a:rPr sz="950" b="0" i="1">
+                <a:solidFill>
+                  <a:srgbClr val="A26769"/>
+                </a:solidFill>
+                <a:latin typeface="Calibri"/>
+              </a:rPr>
+              <a:t>TA-20129 · Sims</a:t>
+            </a:r>
+          </a:p>
+        </p:txBody>
+      </p:sp>
+      <p:sp>
+        <p:nvSpPr>
+          <p:cNvPr id="14" name="TextBox 13"/>
+          <p:cNvSpPr txBox="1"/>
+          <p:nvPr/>
+        </p:nvSpPr>
+        <p:spPr>
+          <a:xfrm>
+            <a:off x="694944" y="5705856"/>
+            <a:ext cx="2395728" cy="310896"/>
+          </a:xfrm>
+          <a:prstGeom prst="rect">
+            <a:avLst/>
+          </a:prstGeom>
+          <a:noFill/>
+        </p:spPr>
+        <p:txBody>
+          <a:bodyPr wrap="square" lIns="0" tIns="0" rIns="0" bIns="0">
+            <a:spAutoFit/>
+          </a:bodyPr>
+          <a:lstStyle/>
+          <a:p>
+            <a:pPr algn="l"/>
+            <a:r>
+              <a:rPr sz="950" b="0" i="0">
+                <a:solidFill>
+                  <a:srgbClr val="2B2B2B"/>
+                </a:solidFill>
+                <a:latin typeface="Calibri"/>
+              </a:rPr>
+              <a:t>~500 / wk  ·  federal TA  ·  high-touch handling</a:t>
+            </a:r>
+          </a:p>
+        </p:txBody>
+      </p:sp>
+      <p:sp>
+        <p:nvSpPr>
+          <p:cNvPr id="15" name="Rounded Rectangle 14"/>
+          <p:cNvSpPr/>
+          <p:nvPr/>
+        </p:nvSpPr>
+        <p:spPr>
+          <a:xfrm>
+            <a:off x="3383280" y="4901184"/>
+            <a:ext cx="2633472" cy="1170432"/>
           </a:xfrm>
           <a:prstGeom prst="roundRect">
             <a:avLst>
-              <a:gd name="adj" fmla="val 35000"/>
+              <a:gd name="adj" fmla="val 6000"/>
             </a:avLst>
           </a:prstGeom>
           <a:solidFill>
-            <a:srgbClr val="6D2E46"/>
+            <a:srgbClr val="F7F0F1"/>
           </a:solidFill>
           <a:ln>
             <a:noFill/>
@@ -6544,167 +4799,29 @@
         <p:txBody>
           <a:bodyPr rtlCol="0" anchor="ctr"/>
           <a:lstStyle/>
-          <a:p/>
-        </p:txBody>
-      </p:sp>
-      <p:sp>
-        <p:nvSpPr>
-          <p:cNvPr id="11" name="TextBox 10"/>
-          <p:cNvSpPr txBox="1"/>
-          <p:nvPr/>
-        </p:nvSpPr>
-        <p:spPr>
-          <a:xfrm>
-            <a:off x="694944" y="5038344"/>
-            <a:ext cx="932688" cy="182880"/>
-          </a:xfrm>
-          <a:prstGeom prst="rect">
-            <a:avLst/>
-          </a:prstGeom>
-          <a:noFill/>
-        </p:spPr>
-        <p:txBody>
-          <a:bodyPr wrap="square" lIns="0" rIns="0" tIns="0" bIns="0">
-            <a:spAutoFit/>
-          </a:bodyPr>
-          <a:lstStyle/>
-          <a:p>
-            <a:pPr algn="ctr"/>
-            <a:r>
-              <a:rPr sz="850" b="1" i="0">
-                <a:solidFill>
-                  <a:srgbClr val="FFFFFF"/>
-                </a:solidFill>
-                <a:latin typeface="Calibri"/>
-              </a:rPr>
-              <a:t>MEDIUM</a:t>
-            </a:r>
-          </a:p>
-        </p:txBody>
-      </p:sp>
-      <p:sp>
-        <p:nvSpPr>
-          <p:cNvPr id="12" name="TextBox 11"/>
-          <p:cNvSpPr txBox="1"/>
-          <p:nvPr/>
-        </p:nvSpPr>
-        <p:spPr>
-          <a:xfrm>
-            <a:off x="694944" y="5285232"/>
-            <a:ext cx="2377440" cy="237744"/>
-          </a:xfrm>
-          <a:prstGeom prst="rect">
-            <a:avLst/>
-          </a:prstGeom>
-          <a:noFill/>
-        </p:spPr>
-        <p:txBody>
-          <a:bodyPr wrap="square" lIns="0" rIns="0" tIns="0" bIns="0">
-            <a:spAutoFit/>
-          </a:bodyPr>
-          <a:lstStyle/>
-          <a:p>
-            <a:pPr algn="l"/>
-            <a:r>
-              <a:rPr sz="1300" b="1" i="0">
-                <a:solidFill>
-                  <a:srgbClr val="6D2E46"/>
-                </a:solidFill>
-                <a:latin typeface="Cambria"/>
-              </a:rPr>
-              <a:t>Custom Quality Packers</a:t>
-            </a:r>
-          </a:p>
-        </p:txBody>
-      </p:sp>
-      <p:sp>
-        <p:nvSpPr>
-          <p:cNvPr id="13" name="TextBox 12"/>
-          <p:cNvSpPr txBox="1"/>
-          <p:nvPr/>
-        </p:nvSpPr>
-        <p:spPr>
-          <a:xfrm>
-            <a:off x="694944" y="5513832"/>
-            <a:ext cx="2377440" cy="182880"/>
-          </a:xfrm>
-          <a:prstGeom prst="rect">
-            <a:avLst/>
-          </a:prstGeom>
-          <a:noFill/>
-        </p:spPr>
-        <p:txBody>
-          <a:bodyPr wrap="square" lIns="0" rIns="0" tIns="0" bIns="0">
-            <a:spAutoFit/>
-          </a:bodyPr>
-          <a:lstStyle/>
-          <a:p>
-            <a:pPr algn="l"/>
-            <a:r>
-              <a:rPr sz="950" b="0" i="1">
-                <a:solidFill>
-                  <a:srgbClr val="A26769"/>
-                </a:solidFill>
-                <a:latin typeface="Calibri"/>
-              </a:rPr>
-              <a:t>TA-20129 · Sims</a:t>
-            </a:r>
-          </a:p>
-        </p:txBody>
-      </p:sp>
-      <p:sp>
-        <p:nvSpPr>
-          <p:cNvPr id="14" name="TextBox 13"/>
-          <p:cNvSpPr txBox="1"/>
-          <p:nvPr/>
-        </p:nvSpPr>
-        <p:spPr>
-          <a:xfrm>
-            <a:off x="694944" y="5705856"/>
-            <a:ext cx="2395728" cy="310896"/>
-          </a:xfrm>
-          <a:prstGeom prst="rect">
-            <a:avLst/>
-          </a:prstGeom>
-          <a:noFill/>
-        </p:spPr>
-        <p:txBody>
-          <a:bodyPr wrap="square" lIns="0" rIns="0" tIns="0" bIns="0">
-            <a:spAutoFit/>
-          </a:bodyPr>
-          <a:lstStyle/>
-          <a:p>
-            <a:pPr algn="l"/>
-            <a:r>
-              <a:rPr sz="950" b="0" i="0">
-                <a:solidFill>
-                  <a:srgbClr val="2B2B2B"/>
-                </a:solidFill>
-                <a:latin typeface="Calibri"/>
-              </a:rPr>
-              <a:t>~500 / wk  ·  federal TA  ·  high-touch handling</a:t>
-            </a:r>
-          </a:p>
-        </p:txBody>
-      </p:sp>
-      <p:sp>
-        <p:nvSpPr>
-          <p:cNvPr id="15" name="Rounded Rectangle 14"/>
-          <p:cNvSpPr/>
-          <p:nvPr/>
-        </p:nvSpPr>
-        <p:spPr>
-          <a:xfrm>
-            <a:off x="3383280" y="4901184"/>
-            <a:ext cx="2633472" cy="1170432"/>
+          <a:p>
+            <a:endParaRPr/>
+          </a:p>
+        </p:txBody>
+      </p:sp>
+      <p:sp>
+        <p:nvSpPr>
+          <p:cNvPr id="16" name="Rounded Rectangle 15"/>
+          <p:cNvSpPr/>
+          <p:nvPr/>
+        </p:nvSpPr>
+        <p:spPr>
+          <a:xfrm>
+            <a:off x="3529584" y="5010912"/>
+            <a:ext cx="932688" cy="219456"/>
           </a:xfrm>
           <a:prstGeom prst="roundRect">
             <a:avLst>
-              <a:gd name="adj" fmla="val 6000"/>
+              <a:gd name="adj" fmla="val 35000"/>
             </a:avLst>
           </a:prstGeom>
           <a:solidFill>
-            <a:srgbClr val="F7F0F1"/>
+            <a:srgbClr val="6D2E46"/>
           </a:solidFill>
           <a:ln>
             <a:noFill/>
@@ -6728,27 +4845,187 @@
         <p:txBody>
           <a:bodyPr rtlCol="0" anchor="ctr"/>
           <a:lstStyle/>
-          <a:p/>
-        </p:txBody>
-      </p:sp>
-      <p:sp>
-        <p:nvSpPr>
-          <p:cNvPr id="16" name="Rounded Rectangle 15"/>
-          <p:cNvSpPr/>
-          <p:nvPr/>
-        </p:nvSpPr>
-        <p:spPr>
-          <a:xfrm>
-            <a:off x="3529584" y="5010912"/>
-            <a:ext cx="932688" cy="219456"/>
+          <a:p>
+            <a:endParaRPr/>
+          </a:p>
+        </p:txBody>
+      </p:sp>
+      <p:sp>
+        <p:nvSpPr>
+          <p:cNvPr id="17" name="TextBox 16"/>
+          <p:cNvSpPr txBox="1"/>
+          <p:nvPr/>
+        </p:nvSpPr>
+        <p:spPr>
+          <a:xfrm>
+            <a:off x="3529584" y="5038344"/>
+            <a:ext cx="932688" cy="182880"/>
+          </a:xfrm>
+          <a:prstGeom prst="rect">
+            <a:avLst/>
+          </a:prstGeom>
+          <a:noFill/>
+        </p:spPr>
+        <p:txBody>
+          <a:bodyPr wrap="square" lIns="0" tIns="0" rIns="0" bIns="0">
+            <a:spAutoFit/>
+          </a:bodyPr>
+          <a:lstStyle/>
+          <a:p>
+            <a:pPr algn="ctr"/>
+            <a:r>
+              <a:rPr sz="850" b="1" i="0">
+                <a:solidFill>
+                  <a:srgbClr val="FFFFFF"/>
+                </a:solidFill>
+                <a:latin typeface="Calibri"/>
+              </a:rPr>
+              <a:t>MEDIUM</a:t>
+            </a:r>
+          </a:p>
+        </p:txBody>
+      </p:sp>
+      <p:sp>
+        <p:nvSpPr>
+          <p:cNvPr id="18" name="TextBox 17"/>
+          <p:cNvSpPr txBox="1"/>
+          <p:nvPr/>
+        </p:nvSpPr>
+        <p:spPr>
+          <a:xfrm>
+            <a:off x="3529584" y="5285232"/>
+            <a:ext cx="2377440" cy="237744"/>
+          </a:xfrm>
+          <a:prstGeom prst="rect">
+            <a:avLst/>
+          </a:prstGeom>
+          <a:noFill/>
+        </p:spPr>
+        <p:txBody>
+          <a:bodyPr wrap="square" lIns="0" tIns="0" rIns="0" bIns="0">
+            <a:spAutoFit/>
+          </a:bodyPr>
+          <a:lstStyle/>
+          <a:p>
+            <a:pPr algn="l"/>
+            <a:r>
+              <a:rPr sz="1300" b="1" i="0">
+                <a:solidFill>
+                  <a:srgbClr val="6D2E46"/>
+                </a:solidFill>
+                <a:latin typeface="Cambria"/>
+              </a:rPr>
+              <a:t>Nahunta</a:t>
+            </a:r>
+          </a:p>
+        </p:txBody>
+      </p:sp>
+      <p:sp>
+        <p:nvSpPr>
+          <p:cNvPr id="19" name="TextBox 18"/>
+          <p:cNvSpPr txBox="1"/>
+          <p:nvPr/>
+        </p:nvSpPr>
+        <p:spPr>
+          <a:xfrm>
+            <a:off x="3529584" y="5513832"/>
+            <a:ext cx="2377440" cy="182880"/>
+          </a:xfrm>
+          <a:prstGeom prst="rect">
+            <a:avLst/>
+          </a:prstGeom>
+          <a:noFill/>
+        </p:spPr>
+        <p:txBody>
+          <a:bodyPr wrap="square" lIns="0" tIns="0" rIns="0" bIns="0">
+            <a:spAutoFit/>
+          </a:bodyPr>
+          <a:lstStyle/>
+          <a:p>
+            <a:pPr algn="l"/>
+            <a:r>
+              <a:rPr sz="950" b="0" i="1">
+                <a:solidFill>
+                  <a:srgbClr val="A26769"/>
+                </a:solidFill>
+                <a:latin typeface="Calibri"/>
+              </a:rPr>
+              <a:t>P-80A · Pikeville</a:t>
+            </a:r>
+          </a:p>
+        </p:txBody>
+      </p:sp>
+      <p:sp>
+        <p:nvSpPr>
+          <p:cNvPr id="20" name="TextBox 19"/>
+          <p:cNvSpPr txBox="1"/>
+          <p:nvPr/>
+        </p:nvSpPr>
+        <p:spPr>
+          <a:xfrm>
+            <a:off x="3529584" y="5705856"/>
+            <a:ext cx="2395728" cy="146194"/>
+          </a:xfrm>
+          <a:prstGeom prst="rect">
+            <a:avLst/>
+          </a:prstGeom>
+          <a:noFill/>
+        </p:spPr>
+        <p:txBody>
+          <a:bodyPr wrap="square" lIns="0" tIns="0" rIns="0" bIns="0">
+            <a:spAutoFit/>
+          </a:bodyPr>
+          <a:lstStyle/>
+          <a:p>
+            <a:pPr algn="l"/>
+            <a:r>
+              <a:rPr sz="950" b="0" i="0" dirty="0">
+                <a:solidFill>
+                  <a:srgbClr val="2B2B2B"/>
+                </a:solidFill>
+                <a:latin typeface="Calibri"/>
+              </a:rPr>
+              <a:t>~500 / </a:t>
+            </a:r>
+            <a:r>
+              <a:rPr sz="950" b="0" i="0" dirty="0" err="1">
+                <a:solidFill>
+                  <a:srgbClr val="2B2B2B"/>
+                </a:solidFill>
+                <a:latin typeface="Calibri"/>
+              </a:rPr>
+              <a:t>wk</a:t>
+            </a:r>
+            <a:r>
+              <a:rPr sz="950" b="0" i="0" dirty="0">
+                <a:solidFill>
+                  <a:srgbClr val="2B2B2B"/>
+                </a:solidFill>
+                <a:latin typeface="Calibri"/>
+              </a:rPr>
+              <a:t>  ·</a:t>
+            </a:r>
+          </a:p>
+        </p:txBody>
+      </p:sp>
+      <p:sp>
+        <p:nvSpPr>
+          <p:cNvPr id="21" name="Rounded Rectangle 20"/>
+          <p:cNvSpPr/>
+          <p:nvPr/>
+        </p:nvSpPr>
+        <p:spPr>
+          <a:xfrm>
+            <a:off x="6217920" y="4901184"/>
+            <a:ext cx="2633472" cy="1170432"/>
           </a:xfrm>
           <a:prstGeom prst="roundRect">
             <a:avLst>
-              <a:gd name="adj" fmla="val 35000"/>
+              <a:gd name="adj" fmla="val 6000"/>
             </a:avLst>
           </a:prstGeom>
           <a:solidFill>
-            <a:srgbClr val="6D2E46"/>
+            <a:srgbClr val="F7F0F1"/>
           </a:solidFill>
           <a:ln>
             <a:noFill/>
@@ -6772,167 +5049,29 @@
         <p:txBody>
           <a:bodyPr rtlCol="0" anchor="ctr"/>
           <a:lstStyle/>
-          <a:p/>
-        </p:txBody>
-      </p:sp>
-      <p:sp>
-        <p:nvSpPr>
-          <p:cNvPr id="17" name="TextBox 16"/>
-          <p:cNvSpPr txBox="1"/>
-          <p:nvPr/>
-        </p:nvSpPr>
-        <p:spPr>
-          <a:xfrm>
-            <a:off x="3529584" y="5038344"/>
-            <a:ext cx="932688" cy="182880"/>
-          </a:xfrm>
-          <a:prstGeom prst="rect">
-            <a:avLst/>
-          </a:prstGeom>
-          <a:noFill/>
-        </p:spPr>
-        <p:txBody>
-          <a:bodyPr wrap="square" lIns="0" rIns="0" tIns="0" bIns="0">
-            <a:spAutoFit/>
-          </a:bodyPr>
-          <a:lstStyle/>
-          <a:p>
-            <a:pPr algn="ctr"/>
-            <a:r>
-              <a:rPr sz="850" b="1" i="0">
-                <a:solidFill>
-                  <a:srgbClr val="FFFFFF"/>
-                </a:solidFill>
-                <a:latin typeface="Calibri"/>
-              </a:rPr>
-              <a:t>MEDIUM</a:t>
-            </a:r>
-          </a:p>
-        </p:txBody>
-      </p:sp>
-      <p:sp>
-        <p:nvSpPr>
-          <p:cNvPr id="18" name="TextBox 17"/>
-          <p:cNvSpPr txBox="1"/>
-          <p:nvPr/>
-        </p:nvSpPr>
-        <p:spPr>
-          <a:xfrm>
-            <a:off x="3529584" y="5285232"/>
-            <a:ext cx="2377440" cy="237744"/>
-          </a:xfrm>
-          <a:prstGeom prst="rect">
-            <a:avLst/>
-          </a:prstGeom>
-          <a:noFill/>
-        </p:spPr>
-        <p:txBody>
-          <a:bodyPr wrap="square" lIns="0" rIns="0" tIns="0" bIns="0">
-            <a:spAutoFit/>
-          </a:bodyPr>
-          <a:lstStyle/>
-          <a:p>
-            <a:pPr algn="l"/>
-            <a:r>
-              <a:rPr sz="1300" b="1" i="0">
-                <a:solidFill>
-                  <a:srgbClr val="6D2E46"/>
-                </a:solidFill>
-                <a:latin typeface="Cambria"/>
-              </a:rPr>
-              <a:t>Nahunta</a:t>
-            </a:r>
-          </a:p>
-        </p:txBody>
-      </p:sp>
-      <p:sp>
-        <p:nvSpPr>
-          <p:cNvPr id="19" name="TextBox 18"/>
-          <p:cNvSpPr txBox="1"/>
-          <p:nvPr/>
-        </p:nvSpPr>
-        <p:spPr>
-          <a:xfrm>
-            <a:off x="3529584" y="5513832"/>
-            <a:ext cx="2377440" cy="182880"/>
-          </a:xfrm>
-          <a:prstGeom prst="rect">
-            <a:avLst/>
-          </a:prstGeom>
-          <a:noFill/>
-        </p:spPr>
-        <p:txBody>
-          <a:bodyPr wrap="square" lIns="0" rIns="0" tIns="0" bIns="0">
-            <a:spAutoFit/>
-          </a:bodyPr>
-          <a:lstStyle/>
-          <a:p>
-            <a:pPr algn="l"/>
-            <a:r>
-              <a:rPr sz="950" b="0" i="1">
-                <a:solidFill>
-                  <a:srgbClr val="A26769"/>
-                </a:solidFill>
-                <a:latin typeface="Calibri"/>
-              </a:rPr>
-              <a:t>P-80A · Pikeville</a:t>
-            </a:r>
-          </a:p>
-        </p:txBody>
-      </p:sp>
-      <p:sp>
-        <p:nvSpPr>
-          <p:cNvPr id="20" name="TextBox 19"/>
-          <p:cNvSpPr txBox="1"/>
-          <p:nvPr/>
-        </p:nvSpPr>
-        <p:spPr>
-          <a:xfrm>
-            <a:off x="3529584" y="5705856"/>
-            <a:ext cx="2395728" cy="310896"/>
-          </a:xfrm>
-          <a:prstGeom prst="rect">
-            <a:avLst/>
-          </a:prstGeom>
-          <a:noFill/>
-        </p:spPr>
-        <p:txBody>
-          <a:bodyPr wrap="square" lIns="0" rIns="0" tIns="0" bIns="0">
-            <a:spAutoFit/>
-          </a:bodyPr>
-          <a:lstStyle/>
-          <a:p>
-            <a:pPr algn="l"/>
-            <a:r>
-              <a:rPr sz="950" b="0" i="0">
-                <a:solidFill>
-                  <a:srgbClr val="2B2B2B"/>
-                </a:solidFill>
-                <a:latin typeface="Calibri"/>
-              </a:rPr>
-              <a:t>~500 / wk  ·  state-inspected → domestic only</a:t>
-            </a:r>
-          </a:p>
-        </p:txBody>
-      </p:sp>
-      <p:sp>
-        <p:nvSpPr>
-          <p:cNvPr id="21" name="Rounded Rectangle 20"/>
-          <p:cNvSpPr/>
-          <p:nvPr/>
-        </p:nvSpPr>
-        <p:spPr>
-          <a:xfrm>
-            <a:off x="6217920" y="4901184"/>
-            <a:ext cx="2633472" cy="1170432"/>
+          <a:p>
+            <a:endParaRPr/>
+          </a:p>
+        </p:txBody>
+      </p:sp>
+      <p:sp>
+        <p:nvSpPr>
+          <p:cNvPr id="22" name="Rounded Rectangle 21"/>
+          <p:cNvSpPr/>
+          <p:nvPr/>
+        </p:nvSpPr>
+        <p:spPr>
+          <a:xfrm>
+            <a:off x="6364224" y="5010912"/>
+            <a:ext cx="932688" cy="219456"/>
           </a:xfrm>
           <a:prstGeom prst="roundRect">
             <a:avLst>
-              <a:gd name="adj" fmla="val 6000"/>
+              <a:gd name="adj" fmla="val 35000"/>
             </a:avLst>
           </a:prstGeom>
           <a:solidFill>
-            <a:srgbClr val="F7F0F1"/>
+            <a:srgbClr val="6D2E46"/>
           </a:solidFill>
           <a:ln>
             <a:noFill/>
@@ -6956,27 +5095,169 @@
         <p:txBody>
           <a:bodyPr rtlCol="0" anchor="ctr"/>
           <a:lstStyle/>
-          <a:p/>
-        </p:txBody>
-      </p:sp>
-      <p:sp>
-        <p:nvSpPr>
-          <p:cNvPr id="22" name="Rounded Rectangle 21"/>
-          <p:cNvSpPr/>
-          <p:nvPr/>
-        </p:nvSpPr>
-        <p:spPr>
-          <a:xfrm>
-            <a:off x="6364224" y="5010912"/>
-            <a:ext cx="932688" cy="219456"/>
+          <a:p>
+            <a:endParaRPr/>
+          </a:p>
+        </p:txBody>
+      </p:sp>
+      <p:sp>
+        <p:nvSpPr>
+          <p:cNvPr id="23" name="TextBox 22"/>
+          <p:cNvSpPr txBox="1"/>
+          <p:nvPr/>
+        </p:nvSpPr>
+        <p:spPr>
+          <a:xfrm>
+            <a:off x="6364224" y="5038344"/>
+            <a:ext cx="932688" cy="182880"/>
+          </a:xfrm>
+          <a:prstGeom prst="rect">
+            <a:avLst/>
+          </a:prstGeom>
+          <a:noFill/>
+        </p:spPr>
+        <p:txBody>
+          <a:bodyPr wrap="square" lIns="0" tIns="0" rIns="0" bIns="0">
+            <a:spAutoFit/>
+          </a:bodyPr>
+          <a:lstStyle/>
+          <a:p>
+            <a:pPr algn="ctr"/>
+            <a:r>
+              <a:rPr sz="850" b="1" i="0">
+                <a:solidFill>
+                  <a:srgbClr val="FFFFFF"/>
+                </a:solidFill>
+                <a:latin typeface="Calibri"/>
+              </a:rPr>
+              <a:t>MEDIUM</a:t>
+            </a:r>
+          </a:p>
+        </p:txBody>
+      </p:sp>
+      <p:sp>
+        <p:nvSpPr>
+          <p:cNvPr id="24" name="TextBox 23"/>
+          <p:cNvSpPr txBox="1"/>
+          <p:nvPr/>
+        </p:nvSpPr>
+        <p:spPr>
+          <a:xfrm>
+            <a:off x="6364224" y="5285232"/>
+            <a:ext cx="2377440" cy="237744"/>
+          </a:xfrm>
+          <a:prstGeom prst="rect">
+            <a:avLst/>
+          </a:prstGeom>
+          <a:noFill/>
+        </p:spPr>
+        <p:txBody>
+          <a:bodyPr wrap="square" lIns="0" tIns="0" rIns="0" bIns="0">
+            <a:spAutoFit/>
+          </a:bodyPr>
+          <a:lstStyle/>
+          <a:p>
+            <a:pPr algn="l"/>
+            <a:r>
+              <a:rPr sz="1300" b="1" i="0">
+                <a:solidFill>
+                  <a:srgbClr val="6D2E46"/>
+                </a:solidFill>
+                <a:latin typeface="Cambria"/>
+              </a:rPr>
+              <a:t>Parks Family Meats</a:t>
+            </a:r>
+          </a:p>
+        </p:txBody>
+      </p:sp>
+      <p:sp>
+        <p:nvSpPr>
+          <p:cNvPr id="25" name="TextBox 24"/>
+          <p:cNvSpPr txBox="1"/>
+          <p:nvPr/>
+        </p:nvSpPr>
+        <p:spPr>
+          <a:xfrm>
+            <a:off x="6364224" y="5513832"/>
+            <a:ext cx="2377440" cy="182880"/>
+          </a:xfrm>
+          <a:prstGeom prst="rect">
+            <a:avLst/>
+          </a:prstGeom>
+          <a:noFill/>
+        </p:spPr>
+        <p:txBody>
+          <a:bodyPr wrap="square" lIns="0" tIns="0" rIns="0" bIns="0">
+            <a:spAutoFit/>
+          </a:bodyPr>
+          <a:lstStyle/>
+          <a:p>
+            <a:pPr algn="l"/>
+            <a:r>
+              <a:rPr sz="950" b="0" i="1">
+                <a:solidFill>
+                  <a:srgbClr val="A26769"/>
+                </a:solidFill>
+                <a:latin typeface="Calibri"/>
+              </a:rPr>
+              <a:t>TA-18296A · Warsaw</a:t>
+            </a:r>
+          </a:p>
+        </p:txBody>
+      </p:sp>
+      <p:sp>
+        <p:nvSpPr>
+          <p:cNvPr id="26" name="TextBox 25"/>
+          <p:cNvSpPr txBox="1"/>
+          <p:nvPr/>
+        </p:nvSpPr>
+        <p:spPr>
+          <a:xfrm>
+            <a:off x="6364224" y="5705856"/>
+            <a:ext cx="2395728" cy="310896"/>
+          </a:xfrm>
+          <a:prstGeom prst="rect">
+            <a:avLst/>
+          </a:prstGeom>
+          <a:noFill/>
+        </p:spPr>
+        <p:txBody>
+          <a:bodyPr wrap="square" lIns="0" tIns="0" rIns="0" bIns="0">
+            <a:spAutoFit/>
+          </a:bodyPr>
+          <a:lstStyle/>
+          <a:p>
+            <a:pPr algn="l"/>
+            <a:r>
+              <a:rPr sz="950" b="0" i="0">
+                <a:solidFill>
+                  <a:srgbClr val="2B2B2B"/>
+                </a:solidFill>
+                <a:latin typeface="Calibri"/>
+              </a:rPr>
+              <a:t>400–1,000 / wk  ·  but ROASTER pigs, 10–150 lb</a:t>
+            </a:r>
+          </a:p>
+        </p:txBody>
+      </p:sp>
+      <p:sp>
+        <p:nvSpPr>
+          <p:cNvPr id="27" name="Rounded Rectangle 26"/>
+          <p:cNvSpPr/>
+          <p:nvPr/>
+        </p:nvSpPr>
+        <p:spPr>
+          <a:xfrm>
+            <a:off x="9052560" y="4901184"/>
+            <a:ext cx="2633472" cy="1170432"/>
           </a:xfrm>
           <a:prstGeom prst="roundRect">
             <a:avLst>
-              <a:gd name="adj" fmla="val 35000"/>
+              <a:gd name="adj" fmla="val 6000"/>
             </a:avLst>
           </a:prstGeom>
           <a:solidFill>
-            <a:srgbClr val="6D2E46"/>
+            <a:srgbClr val="F7F0F1"/>
           </a:solidFill>
           <a:ln>
             <a:noFill/>
@@ -7000,167 +5281,29 @@
         <p:txBody>
           <a:bodyPr rtlCol="0" anchor="ctr"/>
           <a:lstStyle/>
-          <a:p/>
-        </p:txBody>
-      </p:sp>
-      <p:sp>
-        <p:nvSpPr>
-          <p:cNvPr id="23" name="TextBox 22"/>
-          <p:cNvSpPr txBox="1"/>
-          <p:nvPr/>
-        </p:nvSpPr>
-        <p:spPr>
-          <a:xfrm>
-            <a:off x="6364224" y="5038344"/>
-            <a:ext cx="932688" cy="182880"/>
-          </a:xfrm>
-          <a:prstGeom prst="rect">
-            <a:avLst/>
-          </a:prstGeom>
-          <a:noFill/>
-        </p:spPr>
-        <p:txBody>
-          <a:bodyPr wrap="square" lIns="0" rIns="0" tIns="0" bIns="0">
-            <a:spAutoFit/>
-          </a:bodyPr>
-          <a:lstStyle/>
-          <a:p>
-            <a:pPr algn="ctr"/>
-            <a:r>
-              <a:rPr sz="850" b="1" i="0">
-                <a:solidFill>
-                  <a:srgbClr val="FFFFFF"/>
-                </a:solidFill>
-                <a:latin typeface="Calibri"/>
-              </a:rPr>
-              <a:t>MEDIUM</a:t>
-            </a:r>
-          </a:p>
-        </p:txBody>
-      </p:sp>
-      <p:sp>
-        <p:nvSpPr>
-          <p:cNvPr id="24" name="TextBox 23"/>
-          <p:cNvSpPr txBox="1"/>
-          <p:nvPr/>
-        </p:nvSpPr>
-        <p:spPr>
-          <a:xfrm>
-            <a:off x="6364224" y="5285232"/>
-            <a:ext cx="2377440" cy="237744"/>
-          </a:xfrm>
-          <a:prstGeom prst="rect">
-            <a:avLst/>
-          </a:prstGeom>
-          <a:noFill/>
-        </p:spPr>
-        <p:txBody>
-          <a:bodyPr wrap="square" lIns="0" rIns="0" tIns="0" bIns="0">
-            <a:spAutoFit/>
-          </a:bodyPr>
-          <a:lstStyle/>
-          <a:p>
-            <a:pPr algn="l"/>
-            <a:r>
-              <a:rPr sz="1300" b="1" i="0">
-                <a:solidFill>
-                  <a:srgbClr val="6D2E46"/>
-                </a:solidFill>
-                <a:latin typeface="Cambria"/>
-              </a:rPr>
-              <a:t>Parks Family Meats</a:t>
-            </a:r>
-          </a:p>
-        </p:txBody>
-      </p:sp>
-      <p:sp>
-        <p:nvSpPr>
-          <p:cNvPr id="25" name="TextBox 24"/>
-          <p:cNvSpPr txBox="1"/>
-          <p:nvPr/>
-        </p:nvSpPr>
-        <p:spPr>
-          <a:xfrm>
-            <a:off x="6364224" y="5513832"/>
-            <a:ext cx="2377440" cy="182880"/>
-          </a:xfrm>
-          <a:prstGeom prst="rect">
-            <a:avLst/>
-          </a:prstGeom>
-          <a:noFill/>
-        </p:spPr>
-        <p:txBody>
-          <a:bodyPr wrap="square" lIns="0" rIns="0" tIns="0" bIns="0">
-            <a:spAutoFit/>
-          </a:bodyPr>
-          <a:lstStyle/>
-          <a:p>
-            <a:pPr algn="l"/>
-            <a:r>
-              <a:rPr sz="950" b="0" i="1">
-                <a:solidFill>
-                  <a:srgbClr val="A26769"/>
-                </a:solidFill>
-                <a:latin typeface="Calibri"/>
-              </a:rPr>
-              <a:t>TA-18296A · Warsaw</a:t>
-            </a:r>
-          </a:p>
-        </p:txBody>
-      </p:sp>
-      <p:sp>
-        <p:nvSpPr>
-          <p:cNvPr id="26" name="TextBox 25"/>
-          <p:cNvSpPr txBox="1"/>
-          <p:nvPr/>
-        </p:nvSpPr>
-        <p:spPr>
-          <a:xfrm>
-            <a:off x="6364224" y="5705856"/>
-            <a:ext cx="2395728" cy="310896"/>
-          </a:xfrm>
-          <a:prstGeom prst="rect">
-            <a:avLst/>
-          </a:prstGeom>
-          <a:noFill/>
-        </p:spPr>
-        <p:txBody>
-          <a:bodyPr wrap="square" lIns="0" rIns="0" tIns="0" bIns="0">
-            <a:spAutoFit/>
-          </a:bodyPr>
-          <a:lstStyle/>
-          <a:p>
-            <a:pPr algn="l"/>
-            <a:r>
-              <a:rPr sz="950" b="0" i="0">
-                <a:solidFill>
-                  <a:srgbClr val="2B2B2B"/>
-                </a:solidFill>
-                <a:latin typeface="Calibri"/>
-              </a:rPr>
-              <a:t>400–1,000 / wk  ·  but ROASTER pigs, 10–150 lb</a:t>
-            </a:r>
-          </a:p>
-        </p:txBody>
-      </p:sp>
-      <p:sp>
-        <p:nvSpPr>
-          <p:cNvPr id="27" name="Rounded Rectangle 26"/>
-          <p:cNvSpPr/>
-          <p:nvPr/>
-        </p:nvSpPr>
-        <p:spPr>
-          <a:xfrm>
-            <a:off x="9052560" y="4901184"/>
-            <a:ext cx="2633472" cy="1170432"/>
+          <a:p>
+            <a:endParaRPr/>
+          </a:p>
+        </p:txBody>
+      </p:sp>
+      <p:sp>
+        <p:nvSpPr>
+          <p:cNvPr id="28" name="Rounded Rectangle 27"/>
+          <p:cNvSpPr/>
+          <p:nvPr/>
+        </p:nvSpPr>
+        <p:spPr>
+          <a:xfrm>
+            <a:off x="9198864" y="5010912"/>
+            <a:ext cx="932688" cy="219456"/>
           </a:xfrm>
           <a:prstGeom prst="roundRect">
             <a:avLst>
-              <a:gd name="adj" fmla="val 6000"/>
+              <a:gd name="adj" fmla="val 35000"/>
             </a:avLst>
           </a:prstGeom>
           <a:solidFill>
-            <a:srgbClr val="F7F0F1"/>
+            <a:srgbClr val="6D2E46"/>
           </a:solidFill>
           <a:ln>
             <a:noFill/>
@@ -7184,51 +5327,9 @@
         <p:txBody>
           <a:bodyPr rtlCol="0" anchor="ctr"/>
           <a:lstStyle/>
-          <a:p/>
-        </p:txBody>
-      </p:sp>
-      <p:sp>
-        <p:nvSpPr>
-          <p:cNvPr id="28" name="Rounded Rectangle 27"/>
-          <p:cNvSpPr/>
-          <p:nvPr/>
-        </p:nvSpPr>
-        <p:spPr>
-          <a:xfrm>
-            <a:off x="9198864" y="5010912"/>
-            <a:ext cx="932688" cy="219456"/>
-          </a:xfrm>
-          <a:prstGeom prst="roundRect">
-            <a:avLst>
-              <a:gd name="adj" fmla="val 35000"/>
-            </a:avLst>
-          </a:prstGeom>
-          <a:solidFill>
-            <a:srgbClr val="6D2E46"/>
-          </a:solidFill>
-          <a:ln>
-            <a:noFill/>
-          </a:ln>
-          <a:effectLst/>
-        </p:spPr>
-        <p:style>
-          <a:lnRef idx="1">
-            <a:schemeClr val="accent1"/>
-          </a:lnRef>
-          <a:fillRef idx="3">
-            <a:schemeClr val="accent1"/>
-          </a:fillRef>
-          <a:effectRef idx="2">
-            <a:schemeClr val="accent1"/>
-          </a:effectRef>
-          <a:fontRef idx="minor">
-            <a:schemeClr val="lt1"/>
-          </a:fontRef>
-        </p:style>
-        <p:txBody>
-          <a:bodyPr rtlCol="0" anchor="ctr"/>
-          <a:lstStyle/>
-          <a:p/>
+          <a:p>
+            <a:endParaRPr/>
+          </a:p>
         </p:txBody>
       </p:sp>
       <p:sp>
@@ -7248,7 +5349,7 @@
           <a:noFill/>
         </p:spPr>
         <p:txBody>
-          <a:bodyPr wrap="square" lIns="0" rIns="0" tIns="0" bIns="0">
+          <a:bodyPr wrap="square" lIns="0" tIns="0" rIns="0" bIns="0">
             <a:spAutoFit/>
           </a:bodyPr>
           <a:lstStyle/>
@@ -7283,7 +5384,7 @@
           <a:noFill/>
         </p:spPr>
         <p:txBody>
-          <a:bodyPr wrap="square" lIns="0" rIns="0" tIns="0" bIns="0">
+          <a:bodyPr wrap="square" lIns="0" tIns="0" rIns="0" bIns="0">
             <a:spAutoFit/>
           </a:bodyPr>
           <a:lstStyle/>
@@ -7318,7 +5419,7 @@
           <a:noFill/>
         </p:spPr>
         <p:txBody>
-          <a:bodyPr wrap="square" lIns="0" rIns="0" tIns="0" bIns="0">
+          <a:bodyPr wrap="square" lIns="0" tIns="0" rIns="0" bIns="0">
             <a:spAutoFit/>
           </a:bodyPr>
           <a:lstStyle/>
@@ -7353,7 +5454,7 @@
           <a:noFill/>
         </p:spPr>
         <p:txBody>
-          <a:bodyPr wrap="square" lIns="0" rIns="0" tIns="0" bIns="0">
+          <a:bodyPr wrap="square" lIns="0" tIns="0" rIns="0" bIns="0">
             <a:spAutoFit/>
           </a:bodyPr>
           <a:lstStyle/>
@@ -7380,22 +5481,22 @@
         <p:spPr>
           <a:xfrm>
             <a:off x="548640" y="6199632"/>
-            <a:ext cx="11064240" cy="274320"/>
-          </a:xfrm>
-          <a:prstGeom prst="rect">
-            <a:avLst/>
-          </a:prstGeom>
-          <a:noFill/>
-        </p:spPr>
-        <p:txBody>
-          <a:bodyPr wrap="square" lIns="0" rIns="0" tIns="0" bIns="0">
+            <a:ext cx="11064240" cy="192360"/>
+          </a:xfrm>
+          <a:prstGeom prst="rect">
+            <a:avLst/>
+          </a:prstGeom>
+          <a:noFill/>
+        </p:spPr>
+        <p:txBody>
+          <a:bodyPr wrap="square" lIns="0" tIns="0" rIns="0" bIns="0">
             <a:spAutoFit/>
           </a:bodyPr>
           <a:lstStyle/>
           <a:p>
             <a:pPr algn="l"/>
             <a:r>
-              <a:rPr sz="1250" b="1" i="0">
+              <a:rPr sz="1250" b="1" i="0" dirty="0">
                 <a:solidFill>
                   <a:srgbClr val="6D2E46"/>
                 </a:solidFill>
@@ -7403,6 +5504,21 @@
               </a:rPr>
               <a:t>All four Eastern NC candidates sit in MEDIUM — so the choice between them is not volume, it is the constraint on each.</a:t>
             </a:r>
+            <a:r>
+              <a:rPr lang="en-US" sz="1250" b="1" i="0" dirty="0">
+                <a:solidFill>
+                  <a:srgbClr val="6D2E46"/>
+                </a:solidFill>
+                <a:latin typeface="Calibri"/>
+              </a:rPr>
+              <a:t> Geographical weight</a:t>
+            </a:r>
+            <a:endParaRPr sz="1250" b="1" i="0" dirty="0">
+              <a:solidFill>
+                <a:srgbClr val="6D2E46"/>
+              </a:solidFill>
+              <a:latin typeface="Calibri"/>
+            </a:endParaRPr>
           </a:p>
         </p:txBody>
       </p:sp>
@@ -7423,7 +5539,7 @@
           <a:noFill/>
         </p:spPr>
         <p:txBody>
-          <a:bodyPr wrap="square" lIns="0" rIns="0" tIns="0" bIns="0">
+          <a:bodyPr wrap="square" lIns="0" tIns="0" rIns="0" bIns="0">
             <a:spAutoFit/>
           </a:bodyPr>
           <a:lstStyle/>
@@ -7546,19 +5662,51 @@
       </p:sp>
       <p:sp>
         <p:nvSpPr>
-          <p:cNvPr id="4" name="Shape 2"/>
-          <p:cNvSpPr/>
-          <p:nvPr/>
-        </p:nvSpPr>
-        <p:spPr>
-          <a:xfrm>
-            <a:off x="10607040" y="457200"/>
-            <a:ext cx="1005840" cy="402336"/>
+          <p:cNvPr id="6" name="Shape 4"/>
+          <p:cNvSpPr/>
+          <p:nvPr/>
+        </p:nvSpPr>
+        <p:spPr>
+          <a:xfrm>
+            <a:off x="548640" y="1572768"/>
+            <a:ext cx="5349240" cy="3200400"/>
           </a:xfrm>
           <a:prstGeom prst="roundRect">
             <a:avLst>
-              <a:gd name="adj" fmla="val 45455"/>
+              <a:gd name="adj" fmla="val 2286"/>
             </a:avLst>
+          </a:prstGeom>
+          <a:solidFill>
+            <a:srgbClr val="6D2E46"/>
+          </a:solidFill>
+          <a:ln w="12700">
+            <a:solidFill>
+              <a:srgbClr val="6D2E46"/>
+            </a:solidFill>
+            <a:prstDash val="solid"/>
+          </a:ln>
+        </p:spPr>
+        <p:txBody>
+          <a:bodyPr/>
+          <a:lstStyle/>
+          <a:p>
+            <a:endParaRPr lang="en-US"/>
+          </a:p>
+        </p:txBody>
+      </p:sp>
+      <p:sp>
+        <p:nvSpPr>
+          <p:cNvPr id="7" name="Shape 5"/>
+          <p:cNvSpPr/>
+          <p:nvPr/>
+        </p:nvSpPr>
+        <p:spPr>
+          <a:xfrm>
+            <a:off x="914400" y="1865376"/>
+            <a:ext cx="512064" cy="512064"/>
+          </a:xfrm>
+          <a:prstGeom prst="ellipse">
+            <a:avLst/>
           </a:prstGeom>
           <a:solidFill>
             <a:srgbClr val="ECE2D0"/>
@@ -7580,14 +5728,14 @@
       </p:sp>
       <p:sp>
         <p:nvSpPr>
-          <p:cNvPr id="5" name="Text 3"/>
-          <p:cNvSpPr/>
-          <p:nvPr/>
-        </p:nvSpPr>
-        <p:spPr>
-          <a:xfrm>
-            <a:off x="10607040" y="457200"/>
-            <a:ext cx="1005840" cy="402336"/>
+          <p:cNvPr id="8" name="Text 6"/>
+          <p:cNvSpPr/>
+          <p:nvPr/>
+        </p:nvSpPr>
+        <p:spPr>
+          <a:xfrm>
+            <a:off x="914400" y="1865376"/>
+            <a:ext cx="512064" cy="512064"/>
           </a:xfrm>
           <a:prstGeom prst="rect">
             <a:avLst/>
@@ -7603,35 +5751,290 @@
               <a:buNone/>
             </a:pPr>
             <a:r>
-              <a:rPr lang="en-US" sz="1200" b="1" dirty="0">
+              <a:rPr lang="en-US" sz="2000" b="1" dirty="0">
                 <a:solidFill>
                   <a:srgbClr val="6D2E46"/>
                 </a:solidFill>
-                <a:latin typeface="Calibri" pitchFamily="34" charset="0"/>
-                <a:ea typeface="Calibri" pitchFamily="34" charset="-122"/>
-                <a:cs typeface="Calibri" pitchFamily="34" charset="-120"/>
-              </a:rPr>
-              <a:t>15 min</a:t>
-            </a:r>
-            <a:endParaRPr lang="en-US" sz="1200" dirty="0"/>
-          </a:p>
-        </p:txBody>
-      </p:sp>
-      <p:sp>
-        <p:nvSpPr>
-          <p:cNvPr id="6" name="Shape 4"/>
-          <p:cNvSpPr/>
-          <p:nvPr/>
-        </p:nvSpPr>
-        <p:spPr>
-          <a:xfrm>
-            <a:off x="548640" y="1572768"/>
+                <a:latin typeface="Cambria" pitchFamily="34" charset="0"/>
+                <a:ea typeface="Cambria" pitchFamily="34" charset="-122"/>
+                <a:cs typeface="Cambria" pitchFamily="34" charset="-120"/>
+              </a:rPr>
+              <a:t>A</a:t>
+            </a:r>
+            <a:endParaRPr lang="en-US" sz="2000" dirty="0"/>
+          </a:p>
+        </p:txBody>
+      </p:sp>
+      <p:sp>
+        <p:nvSpPr>
+          <p:cNvPr id="9" name="Text 7"/>
+          <p:cNvSpPr/>
+          <p:nvPr/>
+        </p:nvSpPr>
+        <p:spPr>
+          <a:xfrm>
+            <a:off x="1572768" y="1847088"/>
+            <a:ext cx="3931920" cy="237744"/>
+          </a:xfrm>
+          <a:prstGeom prst="rect">
+            <a:avLst/>
+          </a:prstGeom>
+          <a:noFill/>
+          <a:ln/>
+        </p:spPr>
+        <p:txBody>
+          <a:bodyPr wrap="square" lIns="0" tIns="0" rIns="0" bIns="0" rtlCol="0" anchor="ctr"/>
+          <a:lstStyle/>
+          <a:p>
+            <a:pPr marL="0" indent="0">
+              <a:buNone/>
+            </a:pPr>
+            <a:r>
+              <a:rPr lang="en-US" sz="1100" b="1" kern="0" spc="150" dirty="0">
+                <a:solidFill>
+                  <a:srgbClr val="A26769"/>
+                </a:solidFill>
+                <a:latin typeface="Calibri" pitchFamily="34" charset="0"/>
+                <a:ea typeface="Calibri" pitchFamily="34" charset="-122"/>
+                <a:cs typeface="Calibri" pitchFamily="34" charset="-120"/>
+              </a:rPr>
+              <a:t>MODEL A</a:t>
+            </a:r>
+            <a:endParaRPr lang="en-US" sz="1100" dirty="0"/>
+          </a:p>
+        </p:txBody>
+      </p:sp>
+      <p:sp>
+        <p:nvSpPr>
+          <p:cNvPr id="10" name="Text 8"/>
+          <p:cNvSpPr/>
+          <p:nvPr/>
+        </p:nvSpPr>
+        <p:spPr>
+          <a:xfrm>
+            <a:off x="1572768" y="2066544"/>
+            <a:ext cx="3931920" cy="329184"/>
+          </a:xfrm>
+          <a:prstGeom prst="rect">
+            <a:avLst/>
+          </a:prstGeom>
+          <a:noFill/>
+          <a:ln/>
+        </p:spPr>
+        <p:txBody>
+          <a:bodyPr wrap="square" lIns="0" tIns="0" rIns="0" bIns="0" rtlCol="0" anchor="ctr"/>
+          <a:lstStyle/>
+          <a:p>
+            <a:pPr marL="0" indent="0">
+              <a:buNone/>
+            </a:pPr>
+            <a:r>
+              <a:rPr lang="en-US" sz="2000" b="1" dirty="0">
+                <a:solidFill>
+                  <a:srgbClr val="FFFFFF"/>
+                </a:solidFill>
+                <a:latin typeface="Cambria" pitchFamily="34" charset="0"/>
+                <a:ea typeface="Cambria" pitchFamily="34" charset="-122"/>
+                <a:cs typeface="Cambria" pitchFamily="34" charset="-120"/>
+              </a:rPr>
+              <a:t>We harvest</a:t>
+            </a:r>
+            <a:endParaRPr lang="en-US" sz="2000" dirty="0"/>
+          </a:p>
+        </p:txBody>
+      </p:sp>
+      <p:sp>
+        <p:nvSpPr>
+          <p:cNvPr id="11" name="Text 9"/>
+          <p:cNvSpPr/>
+          <p:nvPr/>
+        </p:nvSpPr>
+        <p:spPr>
+          <a:xfrm>
+            <a:off x="914400" y="2523744"/>
+            <a:ext cx="4663440" cy="274320"/>
+          </a:xfrm>
+          <a:prstGeom prst="rect">
+            <a:avLst/>
+          </a:prstGeom>
+          <a:noFill/>
+          <a:ln/>
+        </p:spPr>
+        <p:txBody>
+          <a:bodyPr wrap="square" lIns="0" tIns="0" rIns="0" bIns="0" rtlCol="0" anchor="ctr"/>
+          <a:lstStyle/>
+          <a:p>
+            <a:pPr marL="0" indent="0">
+              <a:buNone/>
+            </a:pPr>
+            <a:r>
+              <a:rPr lang="en-US" sz="1300" i="1" dirty="0">
+                <a:solidFill>
+                  <a:srgbClr val="ECE2D0"/>
+                </a:solidFill>
+                <a:latin typeface="Calibri" pitchFamily="34" charset="0"/>
+                <a:ea typeface="Calibri" pitchFamily="34" charset="-122"/>
+                <a:cs typeface="Calibri" pitchFamily="34" charset="-120"/>
+              </a:rPr>
+              <a:t>Our technicians on their floor.</a:t>
+            </a:r>
+            <a:endParaRPr lang="en-US" sz="1300" dirty="0"/>
+          </a:p>
+        </p:txBody>
+      </p:sp>
+      <p:sp>
+        <p:nvSpPr>
+          <p:cNvPr id="12" name="Text 10"/>
+          <p:cNvSpPr/>
+          <p:nvPr/>
+        </p:nvSpPr>
+        <p:spPr>
+          <a:xfrm>
+            <a:off x="914400" y="2889504"/>
+            <a:ext cx="4663440" cy="1691640"/>
+          </a:xfrm>
+          <a:prstGeom prst="rect">
+            <a:avLst/>
+          </a:prstGeom>
+          <a:noFill/>
+          <a:ln/>
+        </p:spPr>
+        <p:txBody>
+          <a:bodyPr wrap="square" lIns="0" tIns="0" rIns="0" bIns="0" rtlCol="0" anchor="ctr"/>
+          <a:lstStyle/>
+          <a:p>
+            <a:pPr marL="342900" indent="-342900">
+              <a:spcAft>
+                <a:spcPts val="700"/>
+              </a:spcAft>
+              <a:buSzPct val="100000"/>
+              <a:buChar char="•"/>
+            </a:pPr>
+            <a:r>
+              <a:rPr lang="en-US" sz="1300" dirty="0">
+                <a:solidFill>
+                  <a:srgbClr val="ECE2D0"/>
+                </a:solidFill>
+                <a:latin typeface="Calibri" pitchFamily="34" charset="0"/>
+                <a:ea typeface="Calibri" pitchFamily="34" charset="-122"/>
+                <a:cs typeface="Calibri" pitchFamily="34" charset="-120"/>
+              </a:rPr>
+              <a:t>Rent space, or pay by piece?</a:t>
+            </a:r>
+            <a:endParaRPr lang="en-US" sz="1300" dirty="0"/>
+          </a:p>
+          <a:p>
+            <a:pPr marL="342900" indent="-342900">
+              <a:spcAft>
+                <a:spcPts val="700"/>
+              </a:spcAft>
+              <a:buSzPct val="100000"/>
+              <a:buChar char="•"/>
+            </a:pPr>
+            <a:r>
+              <a:rPr lang="en-US" sz="1300" dirty="0">
+                <a:solidFill>
+                  <a:srgbClr val="ECE2D0"/>
+                </a:solidFill>
+                <a:latin typeface="Calibri" pitchFamily="34" charset="0"/>
+                <a:ea typeface="Calibri" pitchFamily="34" charset="-122"/>
+                <a:cs typeface="Calibri" pitchFamily="34" charset="-120"/>
+              </a:rPr>
+              <a:t>Best freshness — we control the clock</a:t>
+            </a:r>
+            <a:endParaRPr lang="en-US" sz="1300" dirty="0"/>
+          </a:p>
+          <a:p>
+            <a:pPr marL="342900" indent="-342900">
+              <a:spcAft>
+                <a:spcPts val="700"/>
+              </a:spcAft>
+              <a:buSzPct val="100000"/>
+              <a:buChar char="•"/>
+            </a:pPr>
+            <a:r>
+              <a:rPr lang="en-US" sz="1300" dirty="0">
+                <a:solidFill>
+                  <a:srgbClr val="ECE2D0"/>
+                </a:solidFill>
+                <a:latin typeface="Calibri" pitchFamily="34" charset="0"/>
+                <a:ea typeface="Calibri" pitchFamily="34" charset="-122"/>
+                <a:cs typeface="Calibri" pitchFamily="34" charset="-120"/>
+              </a:rPr>
+              <a:t>Needs floor access + cooler space</a:t>
+            </a:r>
+            <a:endParaRPr lang="en-US" sz="1300" dirty="0"/>
+          </a:p>
+          <a:p>
+            <a:pPr marL="342900" indent="-342900">
+              <a:spcAft>
+                <a:spcPts val="700"/>
+              </a:spcAft>
+              <a:buSzPct val="100000"/>
+              <a:buChar char="•"/>
+            </a:pPr>
+            <a:r>
+              <a:rPr lang="en-US" sz="1300" dirty="0">
+                <a:solidFill>
+                  <a:srgbClr val="ECE2D0"/>
+                </a:solidFill>
+                <a:latin typeface="Calibri" pitchFamily="34" charset="0"/>
+                <a:ea typeface="Calibri" pitchFamily="34" charset="-122"/>
+                <a:cs typeface="Calibri" pitchFamily="34" charset="-120"/>
+              </a:rPr>
+              <a:t>Our people, our protocol, our quality call</a:t>
+            </a:r>
+            <a:endParaRPr lang="en-US" sz="1300" dirty="0"/>
+          </a:p>
+        </p:txBody>
+      </p:sp>
+      <p:sp>
+        <p:nvSpPr>
+          <p:cNvPr id="13" name="Shape 11"/>
+          <p:cNvSpPr/>
+          <p:nvPr/>
+        </p:nvSpPr>
+        <p:spPr>
+          <a:xfrm>
+            <a:off x="6263640" y="1572768"/>
             <a:ext cx="5349240" cy="3200400"/>
           </a:xfrm>
           <a:prstGeom prst="roundRect">
             <a:avLst>
               <a:gd name="adj" fmla="val 2286"/>
             </a:avLst>
+          </a:prstGeom>
+          <a:solidFill>
+            <a:srgbClr val="F7F0F1"/>
+          </a:solidFill>
+          <a:ln w="12700">
+            <a:solidFill>
+              <a:srgbClr val="F7F0F1"/>
+            </a:solidFill>
+            <a:prstDash val="solid"/>
+          </a:ln>
+        </p:spPr>
+        <p:txBody>
+          <a:bodyPr/>
+          <a:lstStyle/>
+          <a:p>
+            <a:endParaRPr lang="en-US"/>
+          </a:p>
+        </p:txBody>
+      </p:sp>
+      <p:sp>
+        <p:nvSpPr>
+          <p:cNvPr id="14" name="Shape 12"/>
+          <p:cNvSpPr/>
+          <p:nvPr/>
+        </p:nvSpPr>
+        <p:spPr>
+          <a:xfrm>
+            <a:off x="6629400" y="1865376"/>
+            <a:ext cx="512064" cy="512064"/>
+          </a:xfrm>
+          <a:prstGeom prst="ellipse">
+            <a:avLst/>
           </a:prstGeom>
           <a:solidFill>
             <a:srgbClr val="6D2E46"/>
@@ -7653,47 +6056,15 @@
       </p:sp>
       <p:sp>
         <p:nvSpPr>
-          <p:cNvPr id="7" name="Shape 5"/>
-          <p:cNvSpPr/>
-          <p:nvPr/>
-        </p:nvSpPr>
-        <p:spPr>
-          <a:xfrm>
-            <a:off x="914400" y="1865376"/>
+          <p:cNvPr id="15" name="Text 13"/>
+          <p:cNvSpPr/>
+          <p:nvPr/>
+        </p:nvSpPr>
+        <p:spPr>
+          <a:xfrm>
+            <a:off x="6629400" y="1865376"/>
             <a:ext cx="512064" cy="512064"/>
           </a:xfrm>
-          <a:prstGeom prst="ellipse">
-            <a:avLst/>
-          </a:prstGeom>
-          <a:solidFill>
-            <a:srgbClr val="ECE2D0"/>
-          </a:solidFill>
-          <a:ln w="12700">
-            <a:solidFill>
-              <a:srgbClr val="ECE2D0"/>
-            </a:solidFill>
-            <a:prstDash val="solid"/>
-          </a:ln>
-        </p:spPr>
-        <p:txBody>
-          <a:bodyPr/>
-          <a:lstStyle/>
-          <a:p>
-            <a:endParaRPr lang="en-US"/>
-          </a:p>
-        </p:txBody>
-      </p:sp>
-      <p:sp>
-        <p:nvSpPr>
-          <p:cNvPr id="8" name="Text 6"/>
-          <p:cNvSpPr/>
-          <p:nvPr/>
-        </p:nvSpPr>
-        <p:spPr>
-          <a:xfrm>
-            <a:off x="914400" y="1865376"/>
-            <a:ext cx="512064" cy="512064"/>
-          </a:xfrm>
           <a:prstGeom prst="rect">
             <a:avLst/>
           </a:prstGeom>
@@ -7710,13 +6081,13 @@
             <a:r>
               <a:rPr lang="en-US" sz="2000" b="1" dirty="0">
                 <a:solidFill>
-                  <a:srgbClr val="6D2E46"/>
+                  <a:srgbClr val="FFFFFF"/>
                 </a:solidFill>
                 <a:latin typeface="Cambria" pitchFamily="34" charset="0"/>
                 <a:ea typeface="Cambria" pitchFamily="34" charset="-122"/>
                 <a:cs typeface="Cambria" pitchFamily="34" charset="-120"/>
               </a:rPr>
-              <a:t>A</a:t>
+              <a:t>B</a:t>
             </a:r>
             <a:endParaRPr lang="en-US" sz="2000" dirty="0"/>
           </a:p>
@@ -7724,13 +6095,13 @@
       </p:sp>
       <p:sp>
         <p:nvSpPr>
-          <p:cNvPr id="9" name="Text 7"/>
-          <p:cNvSpPr/>
-          <p:nvPr/>
-        </p:nvSpPr>
-        <p:spPr>
-          <a:xfrm>
-            <a:off x="1572768" y="1847088"/>
+          <p:cNvPr id="16" name="Text 14"/>
+          <p:cNvSpPr/>
+          <p:nvPr/>
+        </p:nvSpPr>
+        <p:spPr>
+          <a:xfrm>
+            <a:off x="7287768" y="1847088"/>
             <a:ext cx="3931920" cy="237744"/>
           </a:xfrm>
           <a:prstGeom prst="rect">
@@ -7755,7 +6126,7 @@
                 <a:ea typeface="Calibri" pitchFamily="34" charset="-122"/>
                 <a:cs typeface="Calibri" pitchFamily="34" charset="-120"/>
               </a:rPr>
-              <a:t>MODEL A</a:t>
+              <a:t>MODEL B</a:t>
             </a:r>
             <a:endParaRPr lang="en-US" sz="1100" dirty="0"/>
           </a:p>
@@ -7763,13 +6134,13 @@
       </p:sp>
       <p:sp>
         <p:nvSpPr>
-          <p:cNvPr id="10" name="Text 8"/>
-          <p:cNvSpPr/>
-          <p:nvPr/>
-        </p:nvSpPr>
-        <p:spPr>
-          <a:xfrm>
-            <a:off x="1572768" y="2066544"/>
+          <p:cNvPr id="17" name="Text 15"/>
+          <p:cNvSpPr/>
+          <p:nvPr/>
+        </p:nvSpPr>
+        <p:spPr>
+          <a:xfrm>
+            <a:off x="7287768" y="2066544"/>
             <a:ext cx="3931920" cy="329184"/>
           </a:xfrm>
           <a:prstGeom prst="rect">
@@ -7788,13 +6159,13 @@
             <a:r>
               <a:rPr lang="en-US" sz="2000" b="1" dirty="0">
                 <a:solidFill>
-                  <a:srgbClr val="FFFFFF"/>
+                  <a:srgbClr val="6D2E46"/>
                 </a:solidFill>
                 <a:latin typeface="Cambria" pitchFamily="34" charset="0"/>
                 <a:ea typeface="Cambria" pitchFamily="34" charset="-122"/>
                 <a:cs typeface="Cambria" pitchFamily="34" charset="-120"/>
               </a:rPr>
-              <a:t>We harvest</a:t>
+              <a:t>They harvest</a:t>
             </a:r>
             <a:endParaRPr lang="en-US" sz="2000" dirty="0"/>
           </a:p>
@@ -7802,13 +6173,13 @@
       </p:sp>
       <p:sp>
         <p:nvSpPr>
-          <p:cNvPr id="11" name="Text 9"/>
-          <p:cNvSpPr/>
-          <p:nvPr/>
-        </p:nvSpPr>
-        <p:spPr>
-          <a:xfrm>
-            <a:off x="914400" y="2523744"/>
+          <p:cNvPr id="18" name="Text 16"/>
+          <p:cNvSpPr/>
+          <p:nvPr/>
+        </p:nvSpPr>
+        <p:spPr>
+          <a:xfrm>
+            <a:off x="6629400" y="2523744"/>
             <a:ext cx="4663440" cy="274320"/>
           </a:xfrm>
           <a:prstGeom prst="rect">
@@ -7827,13 +6198,13 @@
             <a:r>
               <a:rPr lang="en-US" sz="1300" i="1" dirty="0">
                 <a:solidFill>
-                  <a:srgbClr val="ECE2D0"/>
-                </a:solidFill>
-                <a:latin typeface="Calibri" pitchFamily="34" charset="0"/>
-                <a:ea typeface="Calibri" pitchFamily="34" charset="-122"/>
-                <a:cs typeface="Calibri" pitchFamily="34" charset="-120"/>
-              </a:rPr>
-              <a:t>Our technicians on their floor.</a:t>
+                  <a:srgbClr val="6E6E6E"/>
+                </a:solidFill>
+                <a:latin typeface="Calibri" pitchFamily="34" charset="0"/>
+                <a:ea typeface="Calibri" pitchFamily="34" charset="-122"/>
+                <a:cs typeface="Calibri" pitchFamily="34" charset="-120"/>
+              </a:rPr>
+              <a:t>Their crew, to our written spec.</a:t>
             </a:r>
             <a:endParaRPr lang="en-US" sz="1300" dirty="0"/>
           </a:p>
@@ -7841,13 +6212,13 @@
       </p:sp>
       <p:sp>
         <p:nvSpPr>
-          <p:cNvPr id="12" name="Text 10"/>
-          <p:cNvSpPr/>
-          <p:nvPr/>
-        </p:nvSpPr>
-        <p:spPr>
-          <a:xfrm>
-            <a:off x="914400" y="2889504"/>
+          <p:cNvPr id="19" name="Text 17"/>
+          <p:cNvSpPr/>
+          <p:nvPr/>
+        </p:nvSpPr>
+        <p:spPr>
+          <a:xfrm>
+            <a:off x="6629400" y="2889504"/>
             <a:ext cx="4663440" cy="1691640"/>
           </a:xfrm>
           <a:prstGeom prst="rect">
@@ -7870,13 +6241,13 @@
             <a:r>
               <a:rPr lang="en-US" sz="1300" dirty="0">
                 <a:solidFill>
-                  <a:srgbClr val="ECE2D0"/>
-                </a:solidFill>
-                <a:latin typeface="Calibri" pitchFamily="34" charset="0"/>
-                <a:ea typeface="Calibri" pitchFamily="34" charset="-122"/>
-                <a:cs typeface="Calibri" pitchFamily="34" charset="-120"/>
-              </a:rPr>
-              <a:t>Rent space, or pay by piece?</a:t>
+                  <a:srgbClr val="2B2B2B"/>
+                </a:solidFill>
+                <a:latin typeface="Calibri" pitchFamily="34" charset="0"/>
+                <a:ea typeface="Calibri" pitchFamily="34" charset="-122"/>
+                <a:cs typeface="Calibri" pitchFamily="34" charset="-120"/>
+              </a:rPr>
+              <a:t>We send inspectors and trainers</a:t>
             </a:r>
             <a:endParaRPr lang="en-US" sz="1300" dirty="0"/>
           </a:p>
@@ -7891,13 +6262,13 @@
             <a:r>
               <a:rPr lang="en-US" sz="1300" dirty="0">
                 <a:solidFill>
-                  <a:srgbClr val="ECE2D0"/>
-                </a:solidFill>
-                <a:latin typeface="Calibri" pitchFamily="34" charset="0"/>
-                <a:ea typeface="Calibri" pitchFamily="34" charset="-122"/>
-                <a:cs typeface="Calibri" pitchFamily="34" charset="-120"/>
-              </a:rPr>
-              <a:t>Best freshness — we control the clock</a:t>
+                  <a:srgbClr val="2B2B2B"/>
+                </a:solidFill>
+                <a:latin typeface="Calibri" pitchFamily="34" charset="0"/>
+                <a:ea typeface="Calibri" pitchFamily="34" charset="-122"/>
+                <a:cs typeface="Calibri" pitchFamily="34" charset="-120"/>
+              </a:rPr>
+              <a:t>Scales without moving our people</a:t>
             </a:r>
             <a:endParaRPr lang="en-US" sz="1300" dirty="0"/>
           </a:p>
@@ -7912,13 +6283,13 @@
             <a:r>
               <a:rPr lang="en-US" sz="1300" dirty="0">
                 <a:solidFill>
-                  <a:srgbClr val="ECE2D0"/>
-                </a:solidFill>
-                <a:latin typeface="Calibri" pitchFamily="34" charset="0"/>
-                <a:ea typeface="Calibri" pitchFamily="34" charset="-122"/>
-                <a:cs typeface="Calibri" pitchFamily="34" charset="-120"/>
-              </a:rPr>
-              <a:t>Needs floor access + cooler space</a:t>
+                  <a:srgbClr val="2B2B2B"/>
+                </a:solidFill>
+                <a:latin typeface="Calibri" pitchFamily="34" charset="0"/>
+                <a:ea typeface="Calibri" pitchFamily="34" charset="-122"/>
+                <a:cs typeface="Calibri" pitchFamily="34" charset="-120"/>
+              </a:rPr>
+              <a:t>Depends on their culture and QA</a:t>
             </a:r>
             <a:endParaRPr lang="en-US" sz="1300" dirty="0"/>
           </a:p>
@@ -7933,13 +6304,13 @@
             <a:r>
               <a:rPr lang="en-US" sz="1300" dirty="0">
                 <a:solidFill>
-                  <a:srgbClr val="ECE2D0"/>
-                </a:solidFill>
-                <a:latin typeface="Calibri" pitchFamily="34" charset="0"/>
-                <a:ea typeface="Calibri" pitchFamily="34" charset="-122"/>
-                <a:cs typeface="Calibri" pitchFamily="34" charset="-120"/>
-              </a:rPr>
-              <a:t>Our people, our protocol, our quality call</a:t>
+                  <a:srgbClr val="2B2B2B"/>
+                </a:solidFill>
+                <a:latin typeface="Calibri" pitchFamily="34" charset="0"/>
+                <a:ea typeface="Calibri" pitchFamily="34" charset="-122"/>
+                <a:cs typeface="Calibri" pitchFamily="34" charset="-120"/>
+              </a:rPr>
+              <a:t>Leverage on quality is indirect</a:t>
             </a:r>
             <a:endParaRPr lang="en-US" sz="1300" dirty="0"/>
           </a:p>
@@ -7947,341 +6318,13 @@
       </p:sp>
       <p:sp>
         <p:nvSpPr>
-          <p:cNvPr id="13" name="Shape 11"/>
-          <p:cNvSpPr/>
-          <p:nvPr/>
-        </p:nvSpPr>
-        <p:spPr>
-          <a:xfrm>
-            <a:off x="6263640" y="1572768"/>
-            <a:ext cx="5349240" cy="3200400"/>
-          </a:xfrm>
-          <a:prstGeom prst="roundRect">
-            <a:avLst>
-              <a:gd name="adj" fmla="val 2286"/>
-            </a:avLst>
-          </a:prstGeom>
-          <a:solidFill>
-            <a:srgbClr val="F7F0F1"/>
-          </a:solidFill>
-          <a:ln w="12700">
-            <a:solidFill>
-              <a:srgbClr val="F7F0F1"/>
-            </a:solidFill>
-            <a:prstDash val="solid"/>
-          </a:ln>
-        </p:spPr>
-        <p:txBody>
-          <a:bodyPr/>
-          <a:lstStyle/>
-          <a:p>
-            <a:endParaRPr lang="en-US"/>
-          </a:p>
-        </p:txBody>
-      </p:sp>
-      <p:sp>
-        <p:nvSpPr>
-          <p:cNvPr id="14" name="Shape 12"/>
-          <p:cNvSpPr/>
-          <p:nvPr/>
-        </p:nvSpPr>
-        <p:spPr>
-          <a:xfrm>
-            <a:off x="6629400" y="1865376"/>
-            <a:ext cx="512064" cy="512064"/>
-          </a:xfrm>
-          <a:prstGeom prst="ellipse">
-            <a:avLst/>
-          </a:prstGeom>
-          <a:solidFill>
-            <a:srgbClr val="6D2E46"/>
-          </a:solidFill>
-          <a:ln w="12700">
-            <a:solidFill>
-              <a:srgbClr val="6D2E46"/>
-            </a:solidFill>
-            <a:prstDash val="solid"/>
-          </a:ln>
-        </p:spPr>
-        <p:txBody>
-          <a:bodyPr/>
-          <a:lstStyle/>
-          <a:p>
-            <a:endParaRPr lang="en-US"/>
-          </a:p>
-        </p:txBody>
-      </p:sp>
-      <p:sp>
-        <p:nvSpPr>
-          <p:cNvPr id="15" name="Text 13"/>
-          <p:cNvSpPr/>
-          <p:nvPr/>
-        </p:nvSpPr>
-        <p:spPr>
-          <a:xfrm>
-            <a:off x="6629400" y="1865376"/>
-            <a:ext cx="512064" cy="512064"/>
-          </a:xfrm>
-          <a:prstGeom prst="rect">
-            <a:avLst/>
-          </a:prstGeom>
-          <a:noFill/>
-          <a:ln/>
-        </p:spPr>
-        <p:txBody>
-          <a:bodyPr wrap="square" lIns="0" tIns="0" rIns="0" bIns="0" rtlCol="0" anchor="ctr"/>
-          <a:lstStyle/>
-          <a:p>
-            <a:pPr marL="0" indent="0" algn="ctr">
-              <a:buNone/>
-            </a:pPr>
-            <a:r>
-              <a:rPr lang="en-US" sz="2000" b="1" dirty="0">
-                <a:solidFill>
-                  <a:srgbClr val="FFFFFF"/>
-                </a:solidFill>
-                <a:latin typeface="Cambria" pitchFamily="34" charset="0"/>
-                <a:ea typeface="Cambria" pitchFamily="34" charset="-122"/>
-                <a:cs typeface="Cambria" pitchFamily="34" charset="-120"/>
-              </a:rPr>
-              <a:t>B</a:t>
-            </a:r>
-            <a:endParaRPr lang="en-US" sz="2000" dirty="0"/>
-          </a:p>
-        </p:txBody>
-      </p:sp>
-      <p:sp>
-        <p:nvSpPr>
-          <p:cNvPr id="16" name="Text 14"/>
-          <p:cNvSpPr/>
-          <p:nvPr/>
-        </p:nvSpPr>
-        <p:spPr>
-          <a:xfrm>
-            <a:off x="7287768" y="1847088"/>
-            <a:ext cx="3931920" cy="237744"/>
-          </a:xfrm>
-          <a:prstGeom prst="rect">
-            <a:avLst/>
-          </a:prstGeom>
-          <a:noFill/>
-          <a:ln/>
-        </p:spPr>
-        <p:txBody>
-          <a:bodyPr wrap="square" lIns="0" tIns="0" rIns="0" bIns="0" rtlCol="0" anchor="ctr"/>
-          <a:lstStyle/>
-          <a:p>
-            <a:pPr marL="0" indent="0">
-              <a:buNone/>
-            </a:pPr>
-            <a:r>
-              <a:rPr lang="en-US" sz="1100" b="1" kern="0" spc="150" dirty="0">
-                <a:solidFill>
-                  <a:srgbClr val="A26769"/>
-                </a:solidFill>
-                <a:latin typeface="Calibri" pitchFamily="34" charset="0"/>
-                <a:ea typeface="Calibri" pitchFamily="34" charset="-122"/>
-                <a:cs typeface="Calibri" pitchFamily="34" charset="-120"/>
-              </a:rPr>
-              <a:t>MODEL B</a:t>
-            </a:r>
-            <a:endParaRPr lang="en-US" sz="1100" dirty="0"/>
-          </a:p>
-        </p:txBody>
-      </p:sp>
-      <p:sp>
-        <p:nvSpPr>
-          <p:cNvPr id="17" name="Text 15"/>
-          <p:cNvSpPr/>
-          <p:nvPr/>
-        </p:nvSpPr>
-        <p:spPr>
-          <a:xfrm>
-            <a:off x="7287768" y="2066544"/>
-            <a:ext cx="3931920" cy="329184"/>
-          </a:xfrm>
-          <a:prstGeom prst="rect">
-            <a:avLst/>
-          </a:prstGeom>
-          <a:noFill/>
-          <a:ln/>
-        </p:spPr>
-        <p:txBody>
-          <a:bodyPr wrap="square" lIns="0" tIns="0" rIns="0" bIns="0" rtlCol="0" anchor="ctr"/>
-          <a:lstStyle/>
-          <a:p>
-            <a:pPr marL="0" indent="0">
-              <a:buNone/>
-            </a:pPr>
-            <a:r>
-              <a:rPr lang="en-US" sz="2000" b="1" dirty="0">
-                <a:solidFill>
-                  <a:srgbClr val="6D2E46"/>
-                </a:solidFill>
-                <a:latin typeface="Cambria" pitchFamily="34" charset="0"/>
-                <a:ea typeface="Cambria" pitchFamily="34" charset="-122"/>
-                <a:cs typeface="Cambria" pitchFamily="34" charset="-120"/>
-              </a:rPr>
-              <a:t>They harvest</a:t>
-            </a:r>
-            <a:endParaRPr lang="en-US" sz="2000" dirty="0"/>
-          </a:p>
-        </p:txBody>
-      </p:sp>
-      <p:sp>
-        <p:nvSpPr>
-          <p:cNvPr id="18" name="Text 16"/>
-          <p:cNvSpPr/>
-          <p:nvPr/>
-        </p:nvSpPr>
-        <p:spPr>
-          <a:xfrm>
-            <a:off x="6629400" y="2523744"/>
-            <a:ext cx="4663440" cy="274320"/>
-          </a:xfrm>
-          <a:prstGeom prst="rect">
-            <a:avLst/>
-          </a:prstGeom>
-          <a:noFill/>
-          <a:ln/>
-        </p:spPr>
-        <p:txBody>
-          <a:bodyPr wrap="square" lIns="0" tIns="0" rIns="0" bIns="0" rtlCol="0" anchor="ctr"/>
-          <a:lstStyle/>
-          <a:p>
-            <a:pPr marL="0" indent="0">
-              <a:buNone/>
-            </a:pPr>
-            <a:r>
-              <a:rPr lang="en-US" sz="1300" i="1" dirty="0">
-                <a:solidFill>
-                  <a:srgbClr val="6E6E6E"/>
-                </a:solidFill>
-                <a:latin typeface="Calibri" pitchFamily="34" charset="0"/>
-                <a:ea typeface="Calibri" pitchFamily="34" charset="-122"/>
-                <a:cs typeface="Calibri" pitchFamily="34" charset="-120"/>
-              </a:rPr>
-              <a:t>Their crew, to our written spec.</a:t>
-            </a:r>
-            <a:endParaRPr lang="en-US" sz="1300" dirty="0"/>
-          </a:p>
-        </p:txBody>
-      </p:sp>
-      <p:sp>
-        <p:nvSpPr>
-          <p:cNvPr id="19" name="Text 17"/>
-          <p:cNvSpPr/>
-          <p:nvPr/>
-        </p:nvSpPr>
-        <p:spPr>
-          <a:xfrm>
-            <a:off x="6629400" y="2889504"/>
-            <a:ext cx="4663440" cy="1691640"/>
-          </a:xfrm>
-          <a:prstGeom prst="rect">
-            <a:avLst/>
-          </a:prstGeom>
-          <a:noFill/>
-          <a:ln/>
-        </p:spPr>
-        <p:txBody>
-          <a:bodyPr wrap="square" lIns="0" tIns="0" rIns="0" bIns="0" rtlCol="0" anchor="ctr"/>
-          <a:lstStyle/>
-          <a:p>
-            <a:pPr marL="342900" indent="-342900">
-              <a:spcAft>
-                <a:spcPts val="700"/>
-              </a:spcAft>
-              <a:buSzPct val="100000"/>
-              <a:buChar char="•"/>
-            </a:pPr>
-            <a:r>
-              <a:rPr lang="en-US" sz="1300" dirty="0">
-                <a:solidFill>
-                  <a:srgbClr val="2B2B2B"/>
-                </a:solidFill>
-                <a:latin typeface="Calibri" pitchFamily="34" charset="0"/>
-                <a:ea typeface="Calibri" pitchFamily="34" charset="-122"/>
-                <a:cs typeface="Calibri" pitchFamily="34" charset="-120"/>
-              </a:rPr>
-              <a:t>We send inspectors and trainers</a:t>
-            </a:r>
-            <a:endParaRPr lang="en-US" sz="1300" dirty="0"/>
-          </a:p>
-          <a:p>
-            <a:pPr marL="342900" indent="-342900">
-              <a:spcAft>
-                <a:spcPts val="700"/>
-              </a:spcAft>
-              <a:buSzPct val="100000"/>
-              <a:buChar char="•"/>
-            </a:pPr>
-            <a:r>
-              <a:rPr lang="en-US" sz="1300" dirty="0">
-                <a:solidFill>
-                  <a:srgbClr val="2B2B2B"/>
-                </a:solidFill>
-                <a:latin typeface="Calibri" pitchFamily="34" charset="0"/>
-                <a:ea typeface="Calibri" pitchFamily="34" charset="-122"/>
-                <a:cs typeface="Calibri" pitchFamily="34" charset="-120"/>
-              </a:rPr>
-              <a:t>Scales without moving our people</a:t>
-            </a:r>
-            <a:endParaRPr lang="en-US" sz="1300" dirty="0"/>
-          </a:p>
-          <a:p>
-            <a:pPr marL="342900" indent="-342900">
-              <a:spcAft>
-                <a:spcPts val="700"/>
-              </a:spcAft>
-              <a:buSzPct val="100000"/>
-              <a:buChar char="•"/>
-            </a:pPr>
-            <a:r>
-              <a:rPr lang="en-US" sz="1300" dirty="0">
-                <a:solidFill>
-                  <a:srgbClr val="2B2B2B"/>
-                </a:solidFill>
-                <a:latin typeface="Calibri" pitchFamily="34" charset="0"/>
-                <a:ea typeface="Calibri" pitchFamily="34" charset="-122"/>
-                <a:cs typeface="Calibri" pitchFamily="34" charset="-120"/>
-              </a:rPr>
-              <a:t>Depends on their culture and QA</a:t>
-            </a:r>
-            <a:endParaRPr lang="en-US" sz="1300" dirty="0"/>
-          </a:p>
-          <a:p>
-            <a:pPr marL="342900" indent="-342900">
-              <a:spcAft>
-                <a:spcPts val="700"/>
-              </a:spcAft>
-              <a:buSzPct val="100000"/>
-              <a:buChar char="•"/>
-            </a:pPr>
-            <a:r>
-              <a:rPr lang="en-US" sz="1300" dirty="0">
-                <a:solidFill>
-                  <a:srgbClr val="2B2B2B"/>
-                </a:solidFill>
-                <a:latin typeface="Calibri" pitchFamily="34" charset="0"/>
-                <a:ea typeface="Calibri" pitchFamily="34" charset="-122"/>
-                <a:cs typeface="Calibri" pitchFamily="34" charset="-120"/>
-              </a:rPr>
-              <a:t>Leverage on quality is indirect</a:t>
-            </a:r>
-            <a:endParaRPr lang="en-US" sz="1300" dirty="0"/>
-          </a:p>
-        </p:txBody>
-      </p:sp>
-      <p:sp>
-        <p:nvSpPr>
           <p:cNvPr id="20" name="Shape 18"/>
           <p:cNvSpPr/>
           <p:nvPr/>
         </p:nvSpPr>
         <p:spPr>
           <a:xfrm>
-            <a:off x="548640" y="4956048"/>
+            <a:off x="555567" y="4956048"/>
             <a:ext cx="11064240" cy="932688"/>
           </a:xfrm>
           <a:prstGeom prst="roundRect">
@@ -8340,8 +6383,13 @@
                 <a:ea typeface="Calibri" pitchFamily="34" charset="-122"/>
                 <a:cs typeface="Calibri" pitchFamily="34" charset="-120"/>
               </a:rPr>
-              <a:t>Discussion Notes:</a:t>
-            </a:r>
+              <a:t>Discussion Notes: This has always been dependent on the supplier. Before: Location and volume were the two first requirement gates</a:t>
+            </a:r>
+          </a:p>
+          <a:p>
+            <a:pPr marL="0" indent="0">
+              <a:buNone/>
+            </a:pPr>
             <a:endParaRPr lang="en-US" sz="1200" dirty="0"/>
           </a:p>
         </p:txBody>
@@ -8521,9 +6569,24 @@
                 <a:ea typeface="Calibri" pitchFamily="34" charset="-122"/>
                 <a:cs typeface="Calibri" pitchFamily="34" charset="-120"/>
               </a:rPr>
-              <a:t>Plants and suppliers that ALREADY harvest organs to a customer's written spec. With these, Model B is not a build — it exists.</a:t>
-            </a:r>
-            <a:endParaRPr lang="en-US" sz="1400" dirty="0"/>
+              <a:t>Plants and suppliers that ALREADY harvest organs to a customer's written spec. With these, Model B is not a build — it exists. </a:t>
+            </a:r>
+            <a:r>
+              <a:rPr lang="en-US" sz="1400" dirty="0">
+                <a:solidFill>
+                  <a:srgbClr val="FF0000"/>
+                </a:solidFill>
+                <a:latin typeface="Calibri" pitchFamily="34" charset="0"/>
+                <a:ea typeface="Calibri" pitchFamily="34" charset="-122"/>
+                <a:cs typeface="Calibri" pitchFamily="34" charset="-120"/>
+              </a:rPr>
+              <a:t>ALL OF THESE SHOULD BE APHIS Certified</a:t>
+            </a:r>
+            <a:endParaRPr lang="en-US" sz="1400" dirty="0">
+              <a:solidFill>
+                <a:srgbClr val="FF0000"/>
+              </a:solidFill>
+            </a:endParaRPr>
           </a:p>
         </p:txBody>
       </p:sp>
@@ -9946,79 +8009,6 @@
       </p:sp>
       <p:sp>
         <p:nvSpPr>
-          <p:cNvPr id="4" name="Shape 2"/>
-          <p:cNvSpPr/>
-          <p:nvPr/>
-        </p:nvSpPr>
-        <p:spPr>
-          <a:xfrm>
-            <a:off x="10607040" y="457200"/>
-            <a:ext cx="1005840" cy="402336"/>
-          </a:xfrm>
-          <a:prstGeom prst="roundRect">
-            <a:avLst>
-              <a:gd name="adj" fmla="val 45455"/>
-            </a:avLst>
-          </a:prstGeom>
-          <a:solidFill>
-            <a:srgbClr val="ECE2D0"/>
-          </a:solidFill>
-          <a:ln w="12700">
-            <a:solidFill>
-              <a:srgbClr val="ECE2D0"/>
-            </a:solidFill>
-            <a:prstDash val="solid"/>
-          </a:ln>
-        </p:spPr>
-        <p:txBody>
-          <a:bodyPr/>
-          <a:lstStyle/>
-          <a:p>
-            <a:endParaRPr lang="en-US"/>
-          </a:p>
-        </p:txBody>
-      </p:sp>
-      <p:sp>
-        <p:nvSpPr>
-          <p:cNvPr id="5" name="Text 3"/>
-          <p:cNvSpPr/>
-          <p:nvPr/>
-        </p:nvSpPr>
-        <p:spPr>
-          <a:xfrm>
-            <a:off x="10607040" y="457200"/>
-            <a:ext cx="1005840" cy="402336"/>
-          </a:xfrm>
-          <a:prstGeom prst="rect">
-            <a:avLst/>
-          </a:prstGeom>
-          <a:noFill/>
-          <a:ln/>
-        </p:spPr>
-        <p:txBody>
-          <a:bodyPr wrap="square" lIns="0" tIns="0" rIns="0" bIns="0" rtlCol="0" anchor="ctr"/>
-          <a:lstStyle/>
-          <a:p>
-            <a:pPr marL="0" indent="0" algn="ctr">
-              <a:buNone/>
-            </a:pPr>
-            <a:r>
-              <a:rPr lang="en-US" sz="1200" b="1" dirty="0">
-                <a:solidFill>
-                  <a:srgbClr val="6D2E46"/>
-                </a:solidFill>
-                <a:latin typeface="Calibri" pitchFamily="34" charset="0"/>
-                <a:ea typeface="Calibri" pitchFamily="34" charset="-122"/>
-                <a:cs typeface="Calibri" pitchFamily="34" charset="-120"/>
-              </a:rPr>
-              <a:t>5 min</a:t>
-            </a:r>
-            <a:endParaRPr lang="en-US" sz="1200" dirty="0"/>
-          </a:p>
-        </p:txBody>
-      </p:sp>
-      <p:sp>
-        <p:nvSpPr>
           <p:cNvPr id="6" name="Text 4"/>
           <p:cNvSpPr/>
           <p:nvPr/>
@@ -10050,7 +8040,29 @@
                 <a:ea typeface="Calibri" pitchFamily="34" charset="-122"/>
                 <a:cs typeface="Calibri" pitchFamily="34" charset="-120"/>
               </a:rPr>
-              <a:t>A mock process to react to — does this shape look right?</a:t>
+              <a:t>A </a:t>
+            </a:r>
+            <a:r>
+              <a:rPr lang="en-US" sz="1500" dirty="0">
+                <a:solidFill>
+                  <a:srgbClr val="FF0000"/>
+                </a:solidFill>
+                <a:latin typeface="Calibri" pitchFamily="34" charset="0"/>
+                <a:ea typeface="Calibri" pitchFamily="34" charset="-122"/>
+                <a:cs typeface="Calibri" pitchFamily="34" charset="-120"/>
+              </a:rPr>
+              <a:t>mock</a:t>
+            </a:r>
+            <a:r>
+              <a:rPr lang="en-US" sz="1500" dirty="0">
+                <a:solidFill>
+                  <a:srgbClr val="2B2B2B"/>
+                </a:solidFill>
+                <a:latin typeface="Calibri" pitchFamily="34" charset="0"/>
+                <a:ea typeface="Calibri" pitchFamily="34" charset="-122"/>
+                <a:cs typeface="Calibri" pitchFamily="34" charset="-120"/>
+              </a:rPr>
+              <a:t> process to react to — does this shape look right?</a:t>
             </a:r>
             <a:endParaRPr lang="en-US" sz="1500" dirty="0"/>
           </a:p>
@@ -11426,7 +9438,7 @@
         <p:spPr>
           <a:xfrm>
             <a:off x="548640" y="4443984"/>
-            <a:ext cx="11064240" cy="1170432"/>
+            <a:ext cx="11064240" cy="1316736"/>
           </a:xfrm>
           <a:prstGeom prst="roundRect">
             <a:avLst>
@@ -11459,8 +9471,8 @@
         </p:nvSpPr>
         <p:spPr>
           <a:xfrm>
-            <a:off x="822960" y="4572000"/>
-            <a:ext cx="4572000" cy="274320"/>
+            <a:off x="795528" y="4754880"/>
+            <a:ext cx="9484822" cy="621792"/>
           </a:xfrm>
           <a:prstGeom prst="rect">
             <a:avLst/>
@@ -11484,8 +9496,130 @@
                 <a:ea typeface="Calibri" pitchFamily="34" charset="-122"/>
                 <a:cs typeface="Calibri" pitchFamily="34" charset="-120"/>
               </a:rPr>
-              <a:t>Discussion Notes:</a:t>
-            </a:r>
+              <a:t>Discussion Notes: Need – </a:t>
+            </a:r>
+            <a:r>
+              <a:rPr lang="en-US" sz="1200" b="1" dirty="0" err="1">
+                <a:solidFill>
+                  <a:srgbClr val="8C2F39"/>
+                </a:solidFill>
+                <a:latin typeface="Calibri" pitchFamily="34" charset="0"/>
+                <a:ea typeface="Calibri" pitchFamily="34" charset="-122"/>
+                <a:cs typeface="Calibri" pitchFamily="34" charset="-120"/>
+              </a:rPr>
+              <a:t>Pelvics</a:t>
+            </a:r>
+            <a:endParaRPr lang="en-US" sz="1200" b="1" dirty="0">
+              <a:solidFill>
+                <a:srgbClr val="8C2F39"/>
+              </a:solidFill>
+              <a:latin typeface="Calibri" pitchFamily="34" charset="0"/>
+              <a:ea typeface="Calibri" pitchFamily="34" charset="-122"/>
+              <a:cs typeface="Calibri" pitchFamily="34" charset="-120"/>
+            </a:endParaRPr>
+          </a:p>
+          <a:p>
+            <a:pPr marL="0" indent="0">
+              <a:buNone/>
+            </a:pPr>
+            <a:r>
+              <a:rPr lang="en-US" sz="1200" b="1" dirty="0">
+                <a:solidFill>
+                  <a:srgbClr val="8C2F39"/>
+                </a:solidFill>
+                <a:latin typeface="Calibri" pitchFamily="34" charset="0"/>
+                <a:ea typeface="Calibri" pitchFamily="34" charset="-122"/>
+                <a:cs typeface="Calibri" pitchFamily="34" charset="-120"/>
+              </a:rPr>
+              <a:t>It won’t be effective to send them information. Establish willingness, going in person. Team: SE, </a:t>
+            </a:r>
+            <a:r>
+              <a:rPr lang="en-US" sz="1200" b="1" dirty="0" err="1">
+                <a:solidFill>
+                  <a:srgbClr val="8C2F39"/>
+                </a:solidFill>
+                <a:latin typeface="Calibri" pitchFamily="34" charset="0"/>
+                <a:ea typeface="Calibri" pitchFamily="34" charset="-122"/>
+                <a:cs typeface="Calibri" pitchFamily="34" charset="-120"/>
+              </a:rPr>
+              <a:t>MCc</a:t>
+            </a:r>
+            <a:r>
+              <a:rPr lang="en-US" sz="1200" b="1" dirty="0">
+                <a:solidFill>
+                  <a:srgbClr val="8C2F39"/>
+                </a:solidFill>
+                <a:latin typeface="Calibri" pitchFamily="34" charset="0"/>
+                <a:ea typeface="Calibri" pitchFamily="34" charset="-122"/>
+                <a:cs typeface="Calibri" pitchFamily="34" charset="-120"/>
+              </a:rPr>
+              <a:t>, Ops manager : </a:t>
+            </a:r>
+            <a:r>
+              <a:rPr lang="en-US" sz="1200" b="1" dirty="0" err="1">
+                <a:solidFill>
+                  <a:srgbClr val="8C2F39"/>
+                </a:solidFill>
+                <a:latin typeface="Calibri" pitchFamily="34" charset="0"/>
+                <a:ea typeface="Calibri" pitchFamily="34" charset="-122"/>
+                <a:cs typeface="Calibri" pitchFamily="34" charset="-120"/>
+              </a:rPr>
+              <a:t>Kindheart</a:t>
+            </a:r>
+            <a:r>
+              <a:rPr lang="en-US" sz="1200" b="1" dirty="0">
+                <a:solidFill>
+                  <a:srgbClr val="8C2F39"/>
+                </a:solidFill>
+                <a:latin typeface="Calibri" pitchFamily="34" charset="0"/>
+                <a:ea typeface="Calibri" pitchFamily="34" charset="-122"/>
+                <a:cs typeface="Calibri" pitchFamily="34" charset="-120"/>
+              </a:rPr>
+              <a:t> story.</a:t>
+            </a:r>
+          </a:p>
+          <a:p>
+            <a:pPr marL="0" indent="0">
+              <a:buNone/>
+            </a:pPr>
+            <a:r>
+              <a:rPr lang="en-US" sz="1200" b="1" dirty="0">
+                <a:solidFill>
+                  <a:srgbClr val="8C2F39"/>
+                </a:solidFill>
+                <a:latin typeface="Calibri" pitchFamily="34" charset="0"/>
+                <a:ea typeface="Calibri" pitchFamily="34" charset="-122"/>
+                <a:cs typeface="Calibri" pitchFamily="34" charset="-120"/>
+              </a:rPr>
+              <a:t>After screening and passing criteria gate (phone call: how many pigs a week, would you be able to harvest or have us harvest organs?): In person visit -&gt; Intuitive Story -&gt; after phone call enquiries, more thorough conversation about feasibility of operations, walk areas to determine: their labor capacity to harvest organs, space for us to bring labor to harvest organs, what equipment is needed to adapt operation? , NDA, Onboarding : put together contract (they meet requirements that we need to fulfill), setting up in </a:t>
+            </a:r>
+            <a:r>
+              <a:rPr lang="en-US" sz="1200" b="1" dirty="0" err="1">
+                <a:solidFill>
+                  <a:srgbClr val="8C2F39"/>
+                </a:solidFill>
+                <a:latin typeface="Calibri" pitchFamily="34" charset="0"/>
+                <a:ea typeface="Calibri" pitchFamily="34" charset="-122"/>
+                <a:cs typeface="Calibri" pitchFamily="34" charset="-120"/>
+              </a:rPr>
+              <a:t>coupa</a:t>
+            </a:r>
+            <a:r>
+              <a:rPr lang="en-US" sz="1200" b="1" dirty="0">
+                <a:solidFill>
+                  <a:srgbClr val="8C2F39"/>
+                </a:solidFill>
+                <a:latin typeface="Calibri" pitchFamily="34" charset="0"/>
+                <a:ea typeface="Calibri" pitchFamily="34" charset="-122"/>
+                <a:cs typeface="Calibri" pitchFamily="34" charset="-120"/>
+              </a:rPr>
+              <a:t>, Traceability: Ante mortem inspections – some records. Pen carts being signed in, Veterinary inspection, USDA stamps, SIS number on stamps. Canadian Pigs – Parking lot – Contracting.</a:t>
+            </a:r>
+          </a:p>
+          <a:p>
+            <a:pPr marL="0" indent="0">
+              <a:buNone/>
+            </a:pPr>
             <a:endParaRPr lang="en-US" sz="1200" dirty="0"/>
           </a:p>
         </p:txBody>
@@ -11498,7 +9632,7 @@
         </p:nvSpPr>
         <p:spPr>
           <a:xfrm>
-            <a:off x="548640" y="5760720"/>
+            <a:off x="548640" y="5956346"/>
             <a:ext cx="11064240" cy="310896"/>
           </a:xfrm>
           <a:prstGeom prst="rect">

--- a/Tissue Supplier Research/Supplier_Strategy_Meeting.pptx
+++ b/Tissue Supplier Research/Supplier_Strategy_Meeting.pptx
@@ -228,22 +228,25 @@
                 <c:formatCode>General</c:formatCode>
                 <c:ptCount val="7"/>
                 <c:pt idx="0">
-                  <c:v>2</c:v>
+                  <c:v>5</c:v>
                 </c:pt>
                 <c:pt idx="1">
-                  <c:v>6</c:v>
+                  <c:v>10</c:v>
                 </c:pt>
                 <c:pt idx="2">
-                  <c:v>2</c:v>
+                  <c:v>3</c:v>
                 </c:pt>
                 <c:pt idx="3">
-                  <c:v>1</c:v>
+                  <c:v>2</c:v>
                 </c:pt>
                 <c:pt idx="4">
                   <c:v>2</c:v>
                 </c:pt>
                 <c:pt idx="5">
                   <c:v>1</c:v>
+                </c:pt>
+                <c:pt idx="6">
+                  <c:v>0</c:v>
                 </c:pt>
               </c:numCache>
             </c:numRef>
@@ -364,11 +367,23 @@
                 <c:pt idx="0">
                   <c:v>4</c:v>
                 </c:pt>
+                <c:pt idx="1">
+                  <c:v>0</c:v>
+                </c:pt>
+                <c:pt idx="2">
+                  <c:v>0</c:v>
+                </c:pt>
                 <c:pt idx="3">
-                  <c:v>1</c:v>
+                  <c:v>2</c:v>
                 </c:pt>
                 <c:pt idx="4">
                   <c:v>1</c:v>
+                </c:pt>
+                <c:pt idx="5">
+                  <c:v>1</c:v>
+                </c:pt>
+                <c:pt idx="6">
+                  <c:v>0</c:v>
                 </c:pt>
               </c:numCache>
             </c:numRef>
@@ -489,8 +504,23 @@
                 <c:pt idx="0">
                   <c:v>1</c:v>
                 </c:pt>
+                <c:pt idx="1">
+                  <c:v>0</c:v>
+                </c:pt>
+                <c:pt idx="2">
+                  <c:v>0</c:v>
+                </c:pt>
                 <c:pt idx="3">
                   <c:v>2</c:v>
+                </c:pt>
+                <c:pt idx="4">
+                  <c:v>0</c:v>
+                </c:pt>
+                <c:pt idx="5">
+                  <c:v>0</c:v>
+                </c:pt>
+                <c:pt idx="6">
+                  <c:v>0</c:v>
                 </c:pt>
               </c:numCache>
             </c:numRef>
@@ -611,8 +641,17 @@
                 <c:pt idx="0">
                   <c:v>2</c:v>
                 </c:pt>
+                <c:pt idx="1">
+                  <c:v>0</c:v>
+                </c:pt>
+                <c:pt idx="2">
+                  <c:v>0</c:v>
+                </c:pt>
                 <c:pt idx="3">
                   <c:v>1</c:v>
+                </c:pt>
+                <c:pt idx="4">
+                  <c:v>0</c:v>
                 </c:pt>
                 <c:pt idx="5">
                   <c:v>5</c:v>
@@ -737,22 +776,25 @@
                 <c:formatCode>General</c:formatCode>
                 <c:ptCount val="7"/>
                 <c:pt idx="0">
-                  <c:v>5</c:v>
+                  <c:v>2</c:v>
                 </c:pt>
                 <c:pt idx="1">
-                  <c:v>8</c:v>
+                  <c:v>2</c:v>
                 </c:pt>
                 <c:pt idx="2">
-                  <c:v>3</c:v>
+                  <c:v>1</c:v>
                 </c:pt>
                 <c:pt idx="3">
-                  <c:v>2</c:v>
+                  <c:v>0</c:v>
                 </c:pt>
                 <c:pt idx="4">
                   <c:v>2</c:v>
                 </c:pt>
                 <c:pt idx="5">
-                  <c:v>1</c:v>
+                  <c:v>0</c:v>
+                </c:pt>
+                <c:pt idx="6">
+                  <c:v>0</c:v>
                 </c:pt>
               </c:numCache>
             </c:numRef>
@@ -4468,7 +4510,7 @@
                 </a:solidFill>
                 <a:latin typeface="Calibri"/>
               </a:rPr>
-              <a:t>53 named plants in our target areas — of ~138 identified in total. Sized by weekly hog volume.</a:t>
+              <a:t>50 live candidates in our target areas — of 93 named plants. Sized by weekly hog volume.</a:t>
             </a:r>
           </a:p>
         </p:txBody>
@@ -4718,7 +4760,7 @@
                 </a:solidFill>
                 <a:latin typeface="Calibri"/>
               </a:rPr>
-              <a:t>TA-20129 · Sims</a:t>
+              <a:t>M20129 · Sims</a:t>
             </a:r>
           </a:p>
         </p:txBody>
@@ -4753,7 +4795,7 @@
                 </a:solidFill>
                 <a:latin typeface="Calibri"/>
               </a:rPr>
-              <a:t>~500 / wk  ·  federal TA  ·  high-touch handling</a:t>
+              <a:t>~500 / wk  ·  federal  ·  high-touch handling</a:t>
             </a:r>
           </a:p>
         </p:txBody>
@@ -5200,7 +5242,7 @@
                 </a:solidFill>
                 <a:latin typeface="Calibri"/>
               </a:rPr>
-              <a:t>TA-18296A · Warsaw</a:t>
+              <a:t>M18296A (T-A) · Warsaw</a:t>
             </a:r>
           </a:p>
         </p:txBody>
@@ -5235,7 +5277,7 @@
                 </a:solidFill>
                 <a:latin typeface="Calibri"/>
               </a:rPr>
-              <a:t>400–1,000 / wk  ·  but ROASTER pigs, 10–150 lb</a:t>
+              <a:t>400–1,000 / wk  ·  market hogs AND roasters  ·  slaughter-only floor</a:t>
             </a:r>
           </a:p>
         </p:txBody>
@@ -5552,7 +5594,7 @@
                 </a:solidFill>
                 <a:latin typeface="Calibri"/>
               </a:rPr>
-              <a:t>Chart counts named plants in these seven areas. 21 further named plants sit elsewhere in the Midwest / nationally, and ~64 more are grouped inside multi-plant roll-ups. Pennsylvania out of scope.</a:t>
+              <a:t>Counts LIVE candidates in these seven areas after the USDA primary-data pass: duplicates merged, species/inspection exclusions removed. 22 named plants elsewhere, 13 excluded, ~64 in roll-ups.</a:t>
             </a:r>
           </a:p>
         </p:txBody>
@@ -7055,7 +7097,7 @@
                 <a:ea typeface="Calibri" pitchFamily="34" charset="-122"/>
                 <a:cs typeface="Calibri" pitchFamily="34" charset="-120"/>
               </a:rPr>
-              <a:t>ISO 13485 + 22442-2, USDA Class B/R.</a:t>
+              <a:t>ISO 13485 + 22442-2. AWA licence ≠ APHIS export.</a:t>
             </a:r>
             <a:endParaRPr lang="en-US" sz="1050" dirty="0"/>
           </a:p>
@@ -7281,7 +7323,7 @@
                 <a:ea typeface="Calibri" pitchFamily="34" charset="-122"/>
                 <a:cs typeface="Calibri" pitchFamily="34" charset="-120"/>
               </a:rPr>
-              <a:t>22442-2, USDA Class A, ante/post-mortem</a:t>
+              <a:t>22442-2, ante/post-mortem inspection,</a:t>
             </a:r>
             <a:endParaRPr lang="en-US" sz="1050" dirty="0"/>
           </a:p>
@@ -7301,7 +7343,7 @@
                 <a:ea typeface="Calibri" pitchFamily="34" charset="-122"/>
                 <a:cs typeface="Calibri" pitchFamily="34" charset="-120"/>
               </a:rPr>
-              <a:t>inspection, animal-level traceability.</a:t>
+              <a:t>animal-level traceability. (Class A claim withdrawn.)</a:t>
             </a:r>
             <a:endParaRPr lang="en-US" sz="1050" dirty="0"/>
           </a:p>

--- a/Tissue Supplier Research/Supplier_Strategy_Meeting.pptx
+++ b/Tissue Supplier Research/Supplier_Strategy_Meeting.pptx
@@ -15,6 +15,7 @@
     <p:sldId id="260" r:id="rId6"/>
     <p:sldId id="261" r:id="rId7"/>
     <p:sldId id="262" r:id="rId8"/>
+    <p:sldId id="263" r:id="rId14"/>
   </p:sldIdLst>
   <p:sldSz cx="12192000" cy="6858000"/>
   <p:notesSz cx="6858000" cy="12192000"/>
@@ -1691,6 +1692,87 @@
 </p:notes>
 </file>
 
+<file path=ppt/notesSlides/notesSlide8.xml><?xml version="1.0" encoding="utf-8"?>
+<p:notes xmlns:a="http://schemas.openxmlformats.org/drawingml/2006/main" xmlns:p="http://schemas.openxmlformats.org/presentationml/2006/main" xmlns:r="http://schemas.openxmlformats.org/officeDocument/2006/relationships">
+  <p:cSld>
+    <p:spTree>
+      <p:nvGrpSpPr>
+        <p:cNvPr id="1" name=""/>
+        <p:cNvGrpSpPr/>
+        <p:nvPr/>
+      </p:nvGrpSpPr>
+      <p:grpSpPr>
+        <a:xfrm>
+          <a:off x="0" y="0"/>
+          <a:ext cx="0" cy="0"/>
+          <a:chOff x="0" y="0"/>
+          <a:chExt cx="0" cy="0"/>
+        </a:xfrm>
+      </p:grpSpPr>
+      <p:sp>
+        <p:nvSpPr>
+          <p:cNvPr id="2" name="Slide Image Placeholder 1"/>
+          <p:cNvSpPr>
+            <a:spLocks noGrp="1" noRot="1" noChangeAspect="1"/>
+          </p:cNvSpPr>
+          <p:nvPr>
+            <p:ph type="sldImg"/>
+          </p:nvPr>
+        </p:nvSpPr>
+        <p:spPr/>
+      </p:sp>
+      <p:sp>
+        <p:nvSpPr>
+          <p:cNvPr id="3" name="Notes Placeholder 2"/>
+          <p:cNvSpPr>
+            <a:spLocks noGrp="1"/>
+          </p:cNvSpPr>
+          <p:nvPr>
+            <p:ph type="body" idx="1"/>
+          </p:nvPr>
+        </p:nvSpPr>
+        <p:spPr/>
+        <p:txBody>
+          <a:bodyPr/>
+          <a:lstStyle/>
+          <a:p>
+            <a:r>
+              <a:t>Closing recap. Everything on this slide came out of the meeting itself — the requirement corrections on slide 2, the per-supplier operating-model point on slide 4, the APHIS point on slide 4b, and the process notes on slide 5. Two things to land before people leave: pelvics is the first need, and nobody gets an information packet — the phone gate is a qualifying call, then we go in person.</a:t>
+            </a:r>
+          </a:p>
+        </p:txBody>
+      </p:sp>
+      <p:sp>
+        <p:nvSpPr>
+          <p:cNvPr id="4" name="Slide Number Placeholder 3"/>
+          <p:cNvSpPr>
+            <a:spLocks noGrp="1"/>
+          </p:cNvSpPr>
+          <p:nvPr>
+            <p:ph type="sldNum" sz="quarter" idx="10"/>
+          </p:nvPr>
+        </p:nvSpPr>
+        <p:spPr/>
+        <p:txBody>
+          <a:bodyPr/>
+          <a:lstStyle/>
+          <a:p>
+            <a:fld id="{F7021451-1387-4CA6-816F-3879F97B5CBC}" type="slidenum">
+              <a:rPr lang="en-US"/>
+              <a:t>7</a:t>
+            </a:fld>
+            <a:endParaRPr lang="en-US"/>
+          </a:p>
+        </p:txBody>
+      </p:sp>
+    </p:spTree>
+  </p:cSld>
+  <p:clrMapOvr>
+    <a:masterClrMapping/>
+  </p:clrMapOvr>
+</p:notes>
+</file>
+
 <file path=ppt/slideLayouts/slideLayout1.xml><?xml version="1.0" encoding="utf-8"?>
 <p:sldLayout xmlns:a="http://schemas.openxmlformats.org/drawingml/2006/main" xmlns:r="http://schemas.openxmlformats.org/officeDocument/2006/relationships" xmlns:p="http://schemas.openxmlformats.org/presentationml/2006/main" preserve="1">
   <p:cSld name="DEFAULT">
@@ -6401,7 +6483,7 @@
         <p:spPr>
           <a:xfrm>
             <a:off x="822960" y="5084064"/>
-            <a:ext cx="4572000" cy="274320"/>
+            <a:ext cx="10543032" cy="365760"/>
           </a:xfrm>
           <a:prstGeom prst="rect">
             <a:avLst/>
@@ -6611,7 +6693,7 @@
                 <a:ea typeface="Calibri" pitchFamily="34" charset="-122"/>
                 <a:cs typeface="Calibri" pitchFamily="34" charset="-120"/>
               </a:rPr>
-              <a:t>Plants and suppliers that ALREADY harvest organs to a customer's written spec. With these, Model B is not a build — it exists. </a:t>
+              <a:t>Suppliers that ALREADY harvest organs to a written spec — Model B exists here. </a:t>
             </a:r>
             <a:r>
               <a:rPr lang="en-US" sz="1400" dirty="0">
@@ -9480,7 +9562,7 @@
         <p:spPr>
           <a:xfrm>
             <a:off x="548640" y="4443984"/>
-            <a:ext cx="11064240" cy="1316736"/>
+            <a:ext cx="11064240" cy="1517904"/>
           </a:xfrm>
           <a:prstGeom prst="roundRect">
             <a:avLst>
@@ -9513,8 +9595,8 @@
         </p:nvSpPr>
         <p:spPr>
           <a:xfrm>
-            <a:off x="795528" y="4754880"/>
-            <a:ext cx="9484822" cy="621792"/>
+            <a:off x="795528" y="4617720"/>
+            <a:ext cx="10597896" cy="1289304"/>
           </a:xfrm>
           <a:prstGeom prst="rect">
             <a:avLst/>
@@ -9530,7 +9612,7 @@
               <a:buNone/>
             </a:pPr>
             <a:r>
-              <a:rPr lang="en-US" sz="1200" b="1" dirty="0">
+              <a:rPr lang="en-US" sz="1050" b="1" dirty="0">
                 <a:solidFill>
                   <a:srgbClr val="8C2F39"/>
                 </a:solidFill>
@@ -9541,7 +9623,7 @@
               <a:t>Discussion Notes: Need – </a:t>
             </a:r>
             <a:r>
-              <a:rPr lang="en-US" sz="1200" b="1" dirty="0" err="1">
+              <a:rPr lang="en-US" sz="1050" b="1" dirty="0" err="1">
                 <a:solidFill>
                   <a:srgbClr val="8C2F39"/>
                 </a:solidFill>
@@ -9565,7 +9647,7 @@
               <a:buNone/>
             </a:pPr>
             <a:r>
-              <a:rPr lang="en-US" sz="1200" b="1" dirty="0">
+              <a:rPr lang="en-US" sz="1050" b="1" dirty="0">
                 <a:solidFill>
                   <a:srgbClr val="8C2F39"/>
                 </a:solidFill>
@@ -9576,7 +9658,7 @@
               <a:t>It won’t be effective to send them information. Establish willingness, going in person. Team: SE, </a:t>
             </a:r>
             <a:r>
-              <a:rPr lang="en-US" sz="1200" b="1" dirty="0" err="1">
+              <a:rPr lang="en-US" sz="1050" b="1" dirty="0" err="1">
                 <a:solidFill>
                   <a:srgbClr val="8C2F39"/>
                 </a:solidFill>
@@ -9587,7 +9669,7 @@
               <a:t>MCc</a:t>
             </a:r>
             <a:r>
-              <a:rPr lang="en-US" sz="1200" b="1" dirty="0">
+              <a:rPr lang="en-US" sz="1050" b="1" dirty="0">
                 <a:solidFill>
                   <a:srgbClr val="8C2F39"/>
                 </a:solidFill>
@@ -9598,7 +9680,7 @@
               <a:t>, Ops manager : </a:t>
             </a:r>
             <a:r>
-              <a:rPr lang="en-US" sz="1200" b="1" dirty="0" err="1">
+              <a:rPr lang="en-US" sz="1050" b="1" dirty="0" err="1">
                 <a:solidFill>
                   <a:srgbClr val="8C2F39"/>
                 </a:solidFill>
@@ -9609,7 +9691,7 @@
               <a:t>Kindheart</a:t>
             </a:r>
             <a:r>
-              <a:rPr lang="en-US" sz="1200" b="1" dirty="0">
+              <a:rPr lang="en-US" sz="1050" b="1" dirty="0">
                 <a:solidFill>
                   <a:srgbClr val="8C2F39"/>
                 </a:solidFill>
@@ -9625,7 +9707,7 @@
               <a:buNone/>
             </a:pPr>
             <a:r>
-              <a:rPr lang="en-US" sz="1200" b="1" dirty="0">
+              <a:rPr lang="en-US" sz="1050" b="1" dirty="0">
                 <a:solidFill>
                   <a:srgbClr val="8C2F39"/>
                 </a:solidFill>
@@ -9636,7 +9718,7 @@
               <a:t>After screening and passing criteria gate (phone call: how many pigs a week, would you be able to harvest or have us harvest organs?): In person visit -&gt; Intuitive Story -&gt; after phone call enquiries, more thorough conversation about feasibility of operations, walk areas to determine: their labor capacity to harvest organs, space for us to bring labor to harvest organs, what equipment is needed to adapt operation? , NDA, Onboarding : put together contract (they meet requirements that we need to fulfill), setting up in </a:t>
             </a:r>
             <a:r>
-              <a:rPr lang="en-US" sz="1200" b="1" dirty="0" err="1">
+              <a:rPr lang="en-US" sz="1050" b="1" dirty="0" err="1">
                 <a:solidFill>
                   <a:srgbClr val="8C2F39"/>
                 </a:solidFill>
@@ -9647,7 +9729,7 @@
               <a:t>coupa</a:t>
             </a:r>
             <a:r>
-              <a:rPr lang="en-US" sz="1200" b="1" dirty="0">
+              <a:rPr lang="en-US" sz="1050" b="1" dirty="0">
                 <a:solidFill>
                   <a:srgbClr val="8C2F39"/>
                 </a:solidFill>
@@ -9674,7 +9756,7 @@
         </p:nvSpPr>
         <p:spPr>
           <a:xfrm>
-            <a:off x="548640" y="5956346"/>
+            <a:off x="548640" y="6144768"/>
             <a:ext cx="11064240" cy="310896"/>
           </a:xfrm>
           <a:prstGeom prst="rect">
@@ -9702,6 +9784,1479 @@
               <a:t>Parking lot:  revisit the supplier questionnaire.</a:t>
             </a:r>
             <a:endParaRPr lang="en-US" sz="1350" dirty="0"/>
+          </a:p>
+        </p:txBody>
+      </p:sp>
+    </p:spTree>
+  </p:cSld>
+  <p:clrMapOvr>
+    <a:masterClrMapping/>
+  </p:clrMapOvr>
+</p:sld>
+</file>
+
+<file path=ppt/slides/slide8.xml><?xml version="1.0" encoding="utf-8"?>
+<p:sld xmlns:a="http://schemas.openxmlformats.org/drawingml/2006/main" xmlns:p="http://schemas.openxmlformats.org/presentationml/2006/main" xmlns:r="http://schemas.openxmlformats.org/officeDocument/2006/relationships">
+  <p:cSld>
+    <p:bg>
+      <p:bgPr>
+        <a:solidFill>
+          <a:srgbClr val="6D2E46"/>
+        </a:solidFill>
+        <a:effectLst/>
+      </p:bgPr>
+    </p:bg>
+    <p:spTree>
+      <p:nvGrpSpPr>
+        <p:cNvPr id="1" name=""/>
+        <p:cNvGrpSpPr/>
+        <p:nvPr/>
+      </p:nvGrpSpPr>
+      <p:grpSpPr/>
+      <p:sp>
+        <p:nvSpPr>
+          <p:cNvPr id="2" name="Oval 1"/>
+          <p:cNvSpPr/>
+          <p:nvPr/>
+        </p:nvSpPr>
+        <p:spPr>
+          <a:xfrm>
+            <a:off x="10927080" y="-1965960"/>
+            <a:ext cx="4206240" cy="4206240"/>
+          </a:xfrm>
+          <a:prstGeom prst="ellipse">
+            <a:avLst/>
+          </a:prstGeom>
+          <a:solidFill>
+            <a:srgbClr val="7E3B53"/>
+          </a:solidFill>
+          <a:ln>
+            <a:noFill/>
+          </a:ln>
+          <a:effectLst/>
+        </p:spPr>
+        <p:style>
+          <a:lnRef idx="1">
+            <a:schemeClr val="accent1"/>
+          </a:lnRef>
+          <a:fillRef idx="3">
+            <a:schemeClr val="accent1"/>
+          </a:fillRef>
+          <a:effectRef idx="2">
+            <a:schemeClr val="accent1"/>
+          </a:effectRef>
+          <a:fontRef idx="minor">
+            <a:schemeClr val="lt1"/>
+          </a:fontRef>
+        </p:style>
+        <p:txBody>
+          <a:bodyPr rtlCol="0" anchor="ctr" lIns="0" rIns="0" tIns="0" bIns="0" wrap="none"/>
+          <a:lstStyle/>
+          <a:p>
+            <a:pPr algn="ctr"/>
+          </a:p>
+        </p:txBody>
+      </p:sp>
+      <p:sp>
+        <p:nvSpPr>
+          <p:cNvPr id="3" name="Oval 2"/>
+          <p:cNvSpPr/>
+          <p:nvPr/>
+        </p:nvSpPr>
+        <p:spPr>
+          <a:xfrm>
+            <a:off x="11475720" y="5074920"/>
+            <a:ext cx="2743200" cy="2743200"/>
+          </a:xfrm>
+          <a:prstGeom prst="ellipse">
+            <a:avLst/>
+          </a:prstGeom>
+          <a:solidFill>
+            <a:srgbClr val="5C2439"/>
+          </a:solidFill>
+          <a:ln>
+            <a:noFill/>
+          </a:ln>
+          <a:effectLst/>
+        </p:spPr>
+        <p:style>
+          <a:lnRef idx="1">
+            <a:schemeClr val="accent1"/>
+          </a:lnRef>
+          <a:fillRef idx="3">
+            <a:schemeClr val="accent1"/>
+          </a:fillRef>
+          <a:effectRef idx="2">
+            <a:schemeClr val="accent1"/>
+          </a:effectRef>
+          <a:fontRef idx="minor">
+            <a:schemeClr val="lt1"/>
+          </a:fontRef>
+        </p:style>
+        <p:txBody>
+          <a:bodyPr rtlCol="0" anchor="ctr" lIns="0" rIns="0" tIns="0" bIns="0" wrap="none"/>
+          <a:lstStyle/>
+          <a:p>
+            <a:pPr algn="ctr"/>
+          </a:p>
+        </p:txBody>
+      </p:sp>
+      <p:sp>
+        <p:nvSpPr>
+          <p:cNvPr id="4" name="TextBox 3"/>
+          <p:cNvSpPr txBox="1"/>
+          <p:nvPr/>
+        </p:nvSpPr>
+        <p:spPr>
+          <a:xfrm>
+            <a:off x="548640" y="384048"/>
+            <a:ext cx="8229600" cy="274320"/>
+          </a:xfrm>
+          <a:prstGeom prst="rect">
+            <a:avLst/>
+          </a:prstGeom>
+          <a:noFill/>
+        </p:spPr>
+        <p:txBody>
+          <a:bodyPr wrap="square" lIns="0" rIns="0" tIns="0" bIns="0" anchor="t">
+            <a:spAutoFit/>
+          </a:bodyPr>
+          <a:lstStyle/>
+          <a:p>
+            <a:pPr algn="l"/>
+            <a:r>
+              <a:rPr sz="1200" b="1">
+                <a:solidFill>
+                  <a:srgbClr val="A26769"/>
+                </a:solidFill>
+                <a:latin typeface="Calibri"/>
+              </a:rPr>
+              <a:t>6 · SUMMARY</a:t>
+            </a:r>
+          </a:p>
+        </p:txBody>
+      </p:sp>
+      <p:sp>
+        <p:nvSpPr>
+          <p:cNvPr id="5" name="TextBox 4"/>
+          <p:cNvSpPr txBox="1"/>
+          <p:nvPr/>
+        </p:nvSpPr>
+        <p:spPr>
+          <a:xfrm>
+            <a:off x="548640" y="676656"/>
+            <a:ext cx="9144000" cy="658368"/>
+          </a:xfrm>
+          <a:prstGeom prst="rect">
+            <a:avLst/>
+          </a:prstGeom>
+          <a:noFill/>
+        </p:spPr>
+        <p:txBody>
+          <a:bodyPr wrap="square" lIns="0" rIns="0" tIns="0" bIns="0" anchor="t">
+            <a:spAutoFit/>
+          </a:bodyPr>
+          <a:lstStyle/>
+          <a:p>
+            <a:pPr algn="l"/>
+            <a:r>
+              <a:rPr sz="3400" b="1">
+                <a:solidFill>
+                  <a:srgbClr val="FFFFFF"/>
+                </a:solidFill>
+                <a:latin typeface="Cambria"/>
+              </a:rPr>
+              <a:t>Where we landed</a:t>
+            </a:r>
+          </a:p>
+        </p:txBody>
+      </p:sp>
+      <p:sp>
+        <p:nvSpPr>
+          <p:cNvPr id="6" name="TextBox 5"/>
+          <p:cNvSpPr txBox="1"/>
+          <p:nvPr/>
+        </p:nvSpPr>
+        <p:spPr>
+          <a:xfrm>
+            <a:off x="548640" y="1371600"/>
+            <a:ext cx="10424160" cy="310896"/>
+          </a:xfrm>
+          <a:prstGeom prst="rect">
+            <a:avLst/>
+          </a:prstGeom>
+          <a:noFill/>
+        </p:spPr>
+        <p:txBody>
+          <a:bodyPr wrap="square" lIns="0" rIns="0" tIns="0" bIns="0" anchor="t">
+            <a:spAutoFit/>
+          </a:bodyPr>
+          <a:lstStyle/>
+          <a:p>
+            <a:pPr algn="l"/>
+            <a:r>
+              <a:rPr sz="1500" b="0">
+                <a:solidFill>
+                  <a:srgbClr val="ECE2D0"/>
+                </a:solidFill>
+                <a:latin typeface="Calibri"/>
+              </a:rPr>
+              <a:t>The decisions taken in this meeting, and the approach we agreed for reaching suppliers.</a:t>
+            </a:r>
+          </a:p>
+        </p:txBody>
+      </p:sp>
+      <p:sp>
+        <p:nvSpPr>
+          <p:cNvPr id="7" name="TextBox 6"/>
+          <p:cNvSpPr txBox="1"/>
+          <p:nvPr/>
+        </p:nvSpPr>
+        <p:spPr>
+          <a:xfrm>
+            <a:off x="548640" y="1828800"/>
+            <a:ext cx="5349240" cy="237744"/>
+          </a:xfrm>
+          <a:prstGeom prst="rect">
+            <a:avLst/>
+          </a:prstGeom>
+          <a:noFill/>
+        </p:spPr>
+        <p:txBody>
+          <a:bodyPr wrap="square" lIns="0" rIns="0" tIns="0" bIns="0" anchor="t">
+            <a:spAutoFit/>
+          </a:bodyPr>
+          <a:lstStyle/>
+          <a:p>
+            <a:pPr algn="l"/>
+            <a:r>
+              <a:rPr sz="1200" b="1">
+                <a:solidFill>
+                  <a:srgbClr val="A26769"/>
+                </a:solidFill>
+                <a:latin typeface="Calibri"/>
+              </a:rPr>
+              <a:t>WHAT WE AGREED</a:t>
+            </a:r>
+          </a:p>
+        </p:txBody>
+      </p:sp>
+      <p:sp>
+        <p:nvSpPr>
+          <p:cNvPr id="8" name="Oval 7"/>
+          <p:cNvSpPr/>
+          <p:nvPr/>
+        </p:nvSpPr>
+        <p:spPr>
+          <a:xfrm>
+            <a:off x="548640" y="2217420"/>
+            <a:ext cx="146304" cy="146304"/>
+          </a:xfrm>
+          <a:prstGeom prst="ellipse">
+            <a:avLst/>
+          </a:prstGeom>
+          <a:solidFill>
+            <a:srgbClr val="E8C47E"/>
+          </a:solidFill>
+          <a:ln>
+            <a:noFill/>
+          </a:ln>
+          <a:effectLst/>
+        </p:spPr>
+        <p:style>
+          <a:lnRef idx="1">
+            <a:schemeClr val="accent1"/>
+          </a:lnRef>
+          <a:fillRef idx="3">
+            <a:schemeClr val="accent1"/>
+          </a:fillRef>
+          <a:effectRef idx="2">
+            <a:schemeClr val="accent1"/>
+          </a:effectRef>
+          <a:fontRef idx="minor">
+            <a:schemeClr val="lt1"/>
+          </a:fontRef>
+        </p:style>
+        <p:txBody>
+          <a:bodyPr rtlCol="0" anchor="ctr" lIns="0" rIns="0" tIns="0" bIns="0" wrap="none"/>
+          <a:lstStyle/>
+          <a:p>
+            <a:pPr algn="ctr"/>
+          </a:p>
+        </p:txBody>
+      </p:sp>
+      <p:sp>
+        <p:nvSpPr>
+          <p:cNvPr id="9" name="TextBox 8"/>
+          <p:cNvSpPr txBox="1"/>
+          <p:nvPr/>
+        </p:nvSpPr>
+        <p:spPr>
+          <a:xfrm>
+            <a:off x="822959" y="2176272"/>
+            <a:ext cx="5074920" cy="237744"/>
+          </a:xfrm>
+          <a:prstGeom prst="rect">
+            <a:avLst/>
+          </a:prstGeom>
+          <a:noFill/>
+        </p:spPr>
+        <p:txBody>
+          <a:bodyPr wrap="square" lIns="0" rIns="0" tIns="0" bIns="0" anchor="t">
+            <a:spAutoFit/>
+          </a:bodyPr>
+          <a:lstStyle/>
+          <a:p>
+            <a:pPr algn="l"/>
+            <a:r>
+              <a:rPr sz="1400" b="1">
+                <a:solidFill>
+                  <a:srgbClr val="FFFFFF"/>
+                </a:solidFill>
+                <a:latin typeface="Cambria"/>
+              </a:rPr>
+              <a:t>Requirements</a:t>
+            </a:r>
+          </a:p>
+        </p:txBody>
+      </p:sp>
+      <p:sp>
+        <p:nvSpPr>
+          <p:cNvPr id="10" name="TextBox 9"/>
+          <p:cNvSpPr txBox="1"/>
+          <p:nvPr/>
+        </p:nvSpPr>
+        <p:spPr>
+          <a:xfrm>
+            <a:off x="822959" y="2432304"/>
+            <a:ext cx="5074920" cy="603504"/>
+          </a:xfrm>
+          <a:prstGeom prst="rect">
+            <a:avLst/>
+          </a:prstGeom>
+          <a:noFill/>
+        </p:spPr>
+        <p:txBody>
+          <a:bodyPr wrap="square" lIns="0" rIns="0" tIns="0" bIns="0" anchor="t">
+            <a:spAutoFit/>
+          </a:bodyPr>
+          <a:lstStyle/>
+          <a:p>
+            <a:pPr algn="l">
+              <a:lnSpc>
+                <a:spcPct val="114000"/>
+              </a:lnSpc>
+            </a:pPr>
+            <a:r>
+              <a:rPr sz="1150" b="0">
+                <a:solidFill>
+                  <a:srgbClr val="ECE2D0"/>
+                </a:solidFill>
+                <a:latin typeface="Calibri"/>
+              </a:rPr>
+              <a:t>USDA / FSIS inspection is the hard gate. APHIS is NOT required of a plant we harvest at — only of a direct tissue supplier. A welfare flag does not auto-exclude a plant; it comes to the group.</a:t>
+            </a:r>
+          </a:p>
+        </p:txBody>
+      </p:sp>
+      <p:sp>
+        <p:nvSpPr>
+          <p:cNvPr id="11" name="Oval 10"/>
+          <p:cNvSpPr/>
+          <p:nvPr/>
+        </p:nvSpPr>
+        <p:spPr>
+          <a:xfrm>
+            <a:off x="548640" y="3095244"/>
+            <a:ext cx="146304" cy="146304"/>
+          </a:xfrm>
+          <a:prstGeom prst="ellipse">
+            <a:avLst/>
+          </a:prstGeom>
+          <a:solidFill>
+            <a:srgbClr val="E8C47E"/>
+          </a:solidFill>
+          <a:ln>
+            <a:noFill/>
+          </a:ln>
+          <a:effectLst/>
+        </p:spPr>
+        <p:style>
+          <a:lnRef idx="1">
+            <a:schemeClr val="accent1"/>
+          </a:lnRef>
+          <a:fillRef idx="3">
+            <a:schemeClr val="accent1"/>
+          </a:fillRef>
+          <a:effectRef idx="2">
+            <a:schemeClr val="accent1"/>
+          </a:effectRef>
+          <a:fontRef idx="minor">
+            <a:schemeClr val="lt1"/>
+          </a:fontRef>
+        </p:style>
+        <p:txBody>
+          <a:bodyPr rtlCol="0" anchor="ctr" lIns="0" rIns="0" tIns="0" bIns="0" wrap="none"/>
+          <a:lstStyle/>
+          <a:p>
+            <a:pPr algn="ctr"/>
+          </a:p>
+        </p:txBody>
+      </p:sp>
+      <p:sp>
+        <p:nvSpPr>
+          <p:cNvPr id="12" name="TextBox 11"/>
+          <p:cNvSpPr txBox="1"/>
+          <p:nvPr/>
+        </p:nvSpPr>
+        <p:spPr>
+          <a:xfrm>
+            <a:off x="822959" y="3054096"/>
+            <a:ext cx="5074920" cy="237744"/>
+          </a:xfrm>
+          <a:prstGeom prst="rect">
+            <a:avLst/>
+          </a:prstGeom>
+          <a:noFill/>
+        </p:spPr>
+        <p:txBody>
+          <a:bodyPr wrap="square" lIns="0" rIns="0" tIns="0" bIns="0" anchor="t">
+            <a:spAutoFit/>
+          </a:bodyPr>
+          <a:lstStyle/>
+          <a:p>
+            <a:pPr algn="l"/>
+            <a:r>
+              <a:rPr sz="1400" b="1">
+                <a:solidFill>
+                  <a:srgbClr val="FFFFFF"/>
+                </a:solidFill>
+                <a:latin typeface="Cambria"/>
+              </a:rPr>
+              <a:t>Nahunta — correction accepted</a:t>
+            </a:r>
+          </a:p>
+        </p:txBody>
+      </p:sp>
+      <p:sp>
+        <p:nvSpPr>
+          <p:cNvPr id="13" name="TextBox 12"/>
+          <p:cNvSpPr txBox="1"/>
+          <p:nvPr/>
+        </p:nvSpPr>
+        <p:spPr>
+          <a:xfrm>
+            <a:off x="822959" y="3310128"/>
+            <a:ext cx="5074920" cy="603504"/>
+          </a:xfrm>
+          <a:prstGeom prst="rect">
+            <a:avLst/>
+          </a:prstGeom>
+          <a:noFill/>
+        </p:spPr>
+        <p:txBody>
+          <a:bodyPr wrap="square" lIns="0" rIns="0" tIns="0" bIns="0" anchor="t">
+            <a:spAutoFit/>
+          </a:bodyPr>
+          <a:lstStyle/>
+          <a:p>
+            <a:pPr algn="l">
+              <a:lnSpc>
+                <a:spcPct val="114000"/>
+              </a:lnSpc>
+            </a:pPr>
+            <a:r>
+              <a:rPr sz="1150" b="0">
+                <a:solidFill>
+                  <a:srgbClr val="ECE2D0"/>
+                </a:solidFill>
+                <a:latin typeface="Calibri"/>
+              </a:rPr>
+              <a:t>Nahunta product CAN go international. APHIS treats NC state inspection as equivalent, and the model is assembled at ATM.</a:t>
+            </a:r>
+          </a:p>
+        </p:txBody>
+      </p:sp>
+      <p:sp>
+        <p:nvSpPr>
+          <p:cNvPr id="14" name="Oval 13"/>
+          <p:cNvSpPr/>
+          <p:nvPr/>
+        </p:nvSpPr>
+        <p:spPr>
+          <a:xfrm>
+            <a:off x="548640" y="3973068"/>
+            <a:ext cx="146304" cy="146304"/>
+          </a:xfrm>
+          <a:prstGeom prst="ellipse">
+            <a:avLst/>
+          </a:prstGeom>
+          <a:solidFill>
+            <a:srgbClr val="E8C47E"/>
+          </a:solidFill>
+          <a:ln>
+            <a:noFill/>
+          </a:ln>
+          <a:effectLst/>
+        </p:spPr>
+        <p:style>
+          <a:lnRef idx="1">
+            <a:schemeClr val="accent1"/>
+          </a:lnRef>
+          <a:fillRef idx="3">
+            <a:schemeClr val="accent1"/>
+          </a:fillRef>
+          <a:effectRef idx="2">
+            <a:schemeClr val="accent1"/>
+          </a:effectRef>
+          <a:fontRef idx="minor">
+            <a:schemeClr val="lt1"/>
+          </a:fontRef>
+        </p:style>
+        <p:txBody>
+          <a:bodyPr rtlCol="0" anchor="ctr" lIns="0" rIns="0" tIns="0" bIns="0" wrap="none"/>
+          <a:lstStyle/>
+          <a:p>
+            <a:pPr algn="ctr"/>
+          </a:p>
+        </p:txBody>
+      </p:sp>
+      <p:sp>
+        <p:nvSpPr>
+          <p:cNvPr id="15" name="TextBox 14"/>
+          <p:cNvSpPr txBox="1"/>
+          <p:nvPr/>
+        </p:nvSpPr>
+        <p:spPr>
+          <a:xfrm>
+            <a:off x="822959" y="3931920"/>
+            <a:ext cx="5074920" cy="237744"/>
+          </a:xfrm>
+          <a:prstGeom prst="rect">
+            <a:avLst/>
+          </a:prstGeom>
+          <a:noFill/>
+        </p:spPr>
+        <p:txBody>
+          <a:bodyPr wrap="square" lIns="0" rIns="0" tIns="0" bIns="0" anchor="t">
+            <a:spAutoFit/>
+          </a:bodyPr>
+          <a:lstStyle/>
+          <a:p>
+            <a:pPr algn="l"/>
+            <a:r>
+              <a:rPr sz="1400" b="1">
+                <a:solidFill>
+                  <a:srgbClr val="FFFFFF"/>
+                </a:solidFill>
+                <a:latin typeface="Cambria"/>
+              </a:rPr>
+              <a:t>Operating model</a:t>
+            </a:r>
+          </a:p>
+        </p:txBody>
+      </p:sp>
+      <p:sp>
+        <p:nvSpPr>
+          <p:cNvPr id="16" name="TextBox 15"/>
+          <p:cNvSpPr txBox="1"/>
+          <p:nvPr/>
+        </p:nvSpPr>
+        <p:spPr>
+          <a:xfrm>
+            <a:off x="822959" y="4187952"/>
+            <a:ext cx="5074920" cy="603504"/>
+          </a:xfrm>
+          <a:prstGeom prst="rect">
+            <a:avLst/>
+          </a:prstGeom>
+          <a:noFill/>
+        </p:spPr>
+        <p:txBody>
+          <a:bodyPr wrap="square" lIns="0" rIns="0" tIns="0" bIns="0" anchor="t">
+            <a:spAutoFit/>
+          </a:bodyPr>
+          <a:lstStyle/>
+          <a:p>
+            <a:pPr algn="l">
+              <a:lnSpc>
+                <a:spcPct val="114000"/>
+              </a:lnSpc>
+            </a:pPr>
+            <a:r>
+              <a:rPr sz="1150" b="0">
+                <a:solidFill>
+                  <a:srgbClr val="ECE2D0"/>
+                </a:solidFill>
+                <a:latin typeface="Calibri"/>
+              </a:rPr>
+              <a:t>A or B is decided PER SUPPLIER, not once for all — it has always depended on the plant. Location and volume stay the first two gates.</a:t>
+            </a:r>
+          </a:p>
+        </p:txBody>
+      </p:sp>
+      <p:sp>
+        <p:nvSpPr>
+          <p:cNvPr id="17" name="Oval 16"/>
+          <p:cNvSpPr/>
+          <p:nvPr/>
+        </p:nvSpPr>
+        <p:spPr>
+          <a:xfrm>
+            <a:off x="548640" y="4850892"/>
+            <a:ext cx="146304" cy="146304"/>
+          </a:xfrm>
+          <a:prstGeom prst="ellipse">
+            <a:avLst/>
+          </a:prstGeom>
+          <a:solidFill>
+            <a:srgbClr val="E8C47E"/>
+          </a:solidFill>
+          <a:ln>
+            <a:noFill/>
+          </a:ln>
+          <a:effectLst/>
+        </p:spPr>
+        <p:style>
+          <a:lnRef idx="1">
+            <a:schemeClr val="accent1"/>
+          </a:lnRef>
+          <a:fillRef idx="3">
+            <a:schemeClr val="accent1"/>
+          </a:fillRef>
+          <a:effectRef idx="2">
+            <a:schemeClr val="accent1"/>
+          </a:effectRef>
+          <a:fontRef idx="minor">
+            <a:schemeClr val="lt1"/>
+          </a:fontRef>
+        </p:style>
+        <p:txBody>
+          <a:bodyPr rtlCol="0" anchor="ctr" lIns="0" rIns="0" tIns="0" bIns="0" wrap="none"/>
+          <a:lstStyle/>
+          <a:p>
+            <a:pPr algn="ctr"/>
+          </a:p>
+        </p:txBody>
+      </p:sp>
+      <p:sp>
+        <p:nvSpPr>
+          <p:cNvPr id="18" name="TextBox 17"/>
+          <p:cNvSpPr txBox="1"/>
+          <p:nvPr/>
+        </p:nvSpPr>
+        <p:spPr>
+          <a:xfrm>
+            <a:off x="822959" y="4809744"/>
+            <a:ext cx="5074920" cy="237744"/>
+          </a:xfrm>
+          <a:prstGeom prst="rect">
+            <a:avLst/>
+          </a:prstGeom>
+          <a:noFill/>
+        </p:spPr>
+        <p:txBody>
+          <a:bodyPr wrap="square" lIns="0" rIns="0" tIns="0" bIns="0" anchor="t">
+            <a:spAutoFit/>
+          </a:bodyPr>
+          <a:lstStyle/>
+          <a:p>
+            <a:pPr algn="l"/>
+            <a:r>
+              <a:rPr sz="1400" b="1">
+                <a:solidFill>
+                  <a:srgbClr val="FFFFFF"/>
+                </a:solidFill>
+                <a:latin typeface="Cambria"/>
+              </a:rPr>
+              <a:t>What we need first</a:t>
+            </a:r>
+          </a:p>
+        </p:txBody>
+      </p:sp>
+      <p:sp>
+        <p:nvSpPr>
+          <p:cNvPr id="19" name="TextBox 18"/>
+          <p:cNvSpPr txBox="1"/>
+          <p:nvPr/>
+        </p:nvSpPr>
+        <p:spPr>
+          <a:xfrm>
+            <a:off x="822959" y="5047488"/>
+            <a:ext cx="5074920" cy="402336"/>
+          </a:xfrm>
+          <a:prstGeom prst="rect">
+            <a:avLst/>
+          </a:prstGeom>
+          <a:noFill/>
+        </p:spPr>
+        <p:txBody>
+          <a:bodyPr wrap="square" lIns="0" rIns="0" tIns="0" bIns="0" anchor="t">
+            <a:spAutoFit/>
+          </a:bodyPr>
+          <a:lstStyle/>
+          <a:p>
+            <a:pPr algn="l"/>
+            <a:r>
+              <a:rPr sz="2600" b="1">
+                <a:solidFill>
+                  <a:srgbClr val="E8C47E"/>
+                </a:solidFill>
+                <a:latin typeface="Cambria"/>
+              </a:rPr>
+              <a:t>PELVICS</a:t>
+            </a:r>
+          </a:p>
+        </p:txBody>
+      </p:sp>
+      <p:sp>
+        <p:nvSpPr>
+          <p:cNvPr id="20" name="TextBox 19"/>
+          <p:cNvSpPr txBox="1"/>
+          <p:nvPr/>
+        </p:nvSpPr>
+        <p:spPr>
+          <a:xfrm>
+            <a:off x="6492240" y="1828800"/>
+            <a:ext cx="5148072" cy="237744"/>
+          </a:xfrm>
+          <a:prstGeom prst="rect">
+            <a:avLst/>
+          </a:prstGeom>
+          <a:noFill/>
+        </p:spPr>
+        <p:txBody>
+          <a:bodyPr wrap="square" lIns="0" rIns="0" tIns="0" bIns="0" anchor="t">
+            <a:spAutoFit/>
+          </a:bodyPr>
+          <a:lstStyle/>
+          <a:p>
+            <a:pPr algn="l"/>
+            <a:r>
+              <a:rPr sz="1200" b="1">
+                <a:solidFill>
+                  <a:srgbClr val="A26769"/>
+                </a:solidFill>
+                <a:latin typeface="Calibri"/>
+              </a:rPr>
+              <a:t>HOW WE APPROACH THEM</a:t>
+            </a:r>
+          </a:p>
+        </p:txBody>
+      </p:sp>
+      <p:sp>
+        <p:nvSpPr>
+          <p:cNvPr id="21" name="Oval 20"/>
+          <p:cNvSpPr/>
+          <p:nvPr/>
+        </p:nvSpPr>
+        <p:spPr>
+          <a:xfrm>
+            <a:off x="6492240" y="2185415"/>
+            <a:ext cx="274320" cy="274320"/>
+          </a:xfrm>
+          <a:prstGeom prst="ellipse">
+            <a:avLst/>
+          </a:prstGeom>
+          <a:solidFill>
+            <a:srgbClr val="A26769"/>
+          </a:solidFill>
+          <a:ln>
+            <a:noFill/>
+          </a:ln>
+          <a:effectLst/>
+        </p:spPr>
+        <p:style>
+          <a:lnRef idx="1">
+            <a:schemeClr val="accent1"/>
+          </a:lnRef>
+          <a:fillRef idx="3">
+            <a:schemeClr val="accent1"/>
+          </a:fillRef>
+          <a:effectRef idx="2">
+            <a:schemeClr val="accent1"/>
+          </a:effectRef>
+          <a:fontRef idx="minor">
+            <a:schemeClr val="lt1"/>
+          </a:fontRef>
+        </p:style>
+        <p:txBody>
+          <a:bodyPr rtlCol="0" anchor="ctr" lIns="0" rIns="0" tIns="0" bIns="0" wrap="none"/>
+          <a:lstStyle/>
+          <a:p>
+            <a:pPr algn="ctr"/>
+            <a:r>
+              <a:rPr sz="1250" b="1">
+                <a:solidFill>
+                  <a:srgbClr val="FFFFFF"/>
+                </a:solidFill>
+                <a:latin typeface="Calibri"/>
+              </a:rPr>
+              <a:t>1</a:t>
+            </a:r>
+          </a:p>
+        </p:txBody>
+      </p:sp>
+      <p:sp>
+        <p:nvSpPr>
+          <p:cNvPr id="22" name="TextBox 21"/>
+          <p:cNvSpPr txBox="1"/>
+          <p:nvPr/>
+        </p:nvSpPr>
+        <p:spPr>
+          <a:xfrm>
+            <a:off x="6894576" y="2203703"/>
+            <a:ext cx="4745736" cy="237744"/>
+          </a:xfrm>
+          <a:prstGeom prst="rect">
+            <a:avLst/>
+          </a:prstGeom>
+          <a:noFill/>
+        </p:spPr>
+        <p:txBody>
+          <a:bodyPr wrap="square" lIns="0" rIns="0" tIns="0" bIns="0" anchor="t">
+            <a:spAutoFit/>
+          </a:bodyPr>
+          <a:lstStyle/>
+          <a:p>
+            <a:pPr algn="l"/>
+            <a:r>
+              <a:rPr sz="1300" b="1">
+                <a:solidFill>
+                  <a:srgbClr val="FFFFFF"/>
+                </a:solidFill>
+                <a:latin typeface="Cambria"/>
+              </a:rPr>
+              <a:t>PHONE GATE</a:t>
+            </a:r>
+          </a:p>
+        </p:txBody>
+      </p:sp>
+      <p:sp>
+        <p:nvSpPr>
+          <p:cNvPr id="23" name="TextBox 22"/>
+          <p:cNvSpPr txBox="1"/>
+          <p:nvPr/>
+        </p:nvSpPr>
+        <p:spPr>
+          <a:xfrm>
+            <a:off x="6894576" y="2459736"/>
+            <a:ext cx="4745736" cy="457200"/>
+          </a:xfrm>
+          <a:prstGeom prst="rect">
+            <a:avLst/>
+          </a:prstGeom>
+          <a:noFill/>
+        </p:spPr>
+        <p:txBody>
+          <a:bodyPr wrap="square" lIns="0" rIns="0" tIns="0" bIns="0" anchor="t">
+            <a:spAutoFit/>
+          </a:bodyPr>
+          <a:lstStyle/>
+          <a:p>
+            <a:pPr algn="l">
+              <a:lnSpc>
+                <a:spcPct val="112000"/>
+              </a:lnSpc>
+            </a:pPr>
+            <a:r>
+              <a:rPr sz="1100" b="0">
+                <a:solidFill>
+                  <a:srgbClr val="ECE2D0"/>
+                </a:solidFill>
+                <a:latin typeface="Calibri"/>
+              </a:rPr>
+              <a:t>How many pigs a week? Would you harvest the organs, or let us harvest them?</a:t>
+            </a:r>
+          </a:p>
+        </p:txBody>
+      </p:sp>
+      <p:sp>
+        <p:nvSpPr>
+          <p:cNvPr id="24" name="Oval 23"/>
+          <p:cNvSpPr/>
+          <p:nvPr/>
+        </p:nvSpPr>
+        <p:spPr>
+          <a:xfrm>
+            <a:off x="6492240" y="2880359"/>
+            <a:ext cx="274320" cy="274320"/>
+          </a:xfrm>
+          <a:prstGeom prst="ellipse">
+            <a:avLst/>
+          </a:prstGeom>
+          <a:solidFill>
+            <a:srgbClr val="A26769"/>
+          </a:solidFill>
+          <a:ln>
+            <a:noFill/>
+          </a:ln>
+          <a:effectLst/>
+        </p:spPr>
+        <p:style>
+          <a:lnRef idx="1">
+            <a:schemeClr val="accent1"/>
+          </a:lnRef>
+          <a:fillRef idx="3">
+            <a:schemeClr val="accent1"/>
+          </a:fillRef>
+          <a:effectRef idx="2">
+            <a:schemeClr val="accent1"/>
+          </a:effectRef>
+          <a:fontRef idx="minor">
+            <a:schemeClr val="lt1"/>
+          </a:fontRef>
+        </p:style>
+        <p:txBody>
+          <a:bodyPr rtlCol="0" anchor="ctr" lIns="0" rIns="0" tIns="0" bIns="0" wrap="none"/>
+          <a:lstStyle/>
+          <a:p>
+            <a:pPr algn="ctr"/>
+            <a:r>
+              <a:rPr sz="1250" b="1">
+                <a:solidFill>
+                  <a:srgbClr val="FFFFFF"/>
+                </a:solidFill>
+                <a:latin typeface="Calibri"/>
+              </a:rPr>
+              <a:t>2</a:t>
+            </a:r>
+          </a:p>
+        </p:txBody>
+      </p:sp>
+      <p:sp>
+        <p:nvSpPr>
+          <p:cNvPr id="25" name="TextBox 24"/>
+          <p:cNvSpPr txBox="1"/>
+          <p:nvPr/>
+        </p:nvSpPr>
+        <p:spPr>
+          <a:xfrm>
+            <a:off x="6894576" y="2898647"/>
+            <a:ext cx="4745736" cy="237744"/>
+          </a:xfrm>
+          <a:prstGeom prst="rect">
+            <a:avLst/>
+          </a:prstGeom>
+          <a:noFill/>
+        </p:spPr>
+        <p:txBody>
+          <a:bodyPr wrap="square" lIns="0" rIns="0" tIns="0" bIns="0" anchor="t">
+            <a:spAutoFit/>
+          </a:bodyPr>
+          <a:lstStyle/>
+          <a:p>
+            <a:pPr algn="l"/>
+            <a:r>
+              <a:rPr sz="1300" b="1">
+                <a:solidFill>
+                  <a:srgbClr val="FFFFFF"/>
+                </a:solidFill>
+                <a:latin typeface="Cambria"/>
+              </a:rPr>
+              <a:t>GO IN PERSON</a:t>
+            </a:r>
+          </a:p>
+        </p:txBody>
+      </p:sp>
+      <p:sp>
+        <p:nvSpPr>
+          <p:cNvPr id="26" name="TextBox 25"/>
+          <p:cNvSpPr txBox="1"/>
+          <p:nvPr/>
+        </p:nvSpPr>
+        <p:spPr>
+          <a:xfrm>
+            <a:off x="6894576" y="3154679"/>
+            <a:ext cx="4745736" cy="457200"/>
+          </a:xfrm>
+          <a:prstGeom prst="rect">
+            <a:avLst/>
+          </a:prstGeom>
+          <a:noFill/>
+        </p:spPr>
+        <p:txBody>
+          <a:bodyPr wrap="square" lIns="0" rIns="0" tIns="0" bIns="0" anchor="t">
+            <a:spAutoFit/>
+          </a:bodyPr>
+          <a:lstStyle/>
+          <a:p>
+            <a:pPr algn="l">
+              <a:lnSpc>
+                <a:spcPct val="112000"/>
+              </a:lnSpc>
+            </a:pPr>
+            <a:r>
+              <a:rPr sz="1100" b="0">
+                <a:solidFill>
+                  <a:srgbClr val="ECE2D0"/>
+                </a:solidFill>
+                <a:latin typeface="Calibri"/>
+              </a:rPr>
+              <a:t>Sending information will not work — establish willingness face to face. Team: SE, MCc, Ops manager. Open with the KindHeart / Intuitive story.</a:t>
+            </a:r>
+          </a:p>
+        </p:txBody>
+      </p:sp>
+      <p:sp>
+        <p:nvSpPr>
+          <p:cNvPr id="27" name="Oval 26"/>
+          <p:cNvSpPr/>
+          <p:nvPr/>
+        </p:nvSpPr>
+        <p:spPr>
+          <a:xfrm>
+            <a:off x="6492240" y="3575303"/>
+            <a:ext cx="274320" cy="274320"/>
+          </a:xfrm>
+          <a:prstGeom prst="ellipse">
+            <a:avLst/>
+          </a:prstGeom>
+          <a:solidFill>
+            <a:srgbClr val="A26769"/>
+          </a:solidFill>
+          <a:ln>
+            <a:noFill/>
+          </a:ln>
+          <a:effectLst/>
+        </p:spPr>
+        <p:style>
+          <a:lnRef idx="1">
+            <a:schemeClr val="accent1"/>
+          </a:lnRef>
+          <a:fillRef idx="3">
+            <a:schemeClr val="accent1"/>
+          </a:fillRef>
+          <a:effectRef idx="2">
+            <a:schemeClr val="accent1"/>
+          </a:effectRef>
+          <a:fontRef idx="minor">
+            <a:schemeClr val="lt1"/>
+          </a:fontRef>
+        </p:style>
+        <p:txBody>
+          <a:bodyPr rtlCol="0" anchor="ctr" lIns="0" rIns="0" tIns="0" bIns="0" wrap="none"/>
+          <a:lstStyle/>
+          <a:p>
+            <a:pPr algn="ctr"/>
+            <a:r>
+              <a:rPr sz="1250" b="1">
+                <a:solidFill>
+                  <a:srgbClr val="FFFFFF"/>
+                </a:solidFill>
+                <a:latin typeface="Calibri"/>
+              </a:rPr>
+              <a:t>3</a:t>
+            </a:r>
+          </a:p>
+        </p:txBody>
+      </p:sp>
+      <p:sp>
+        <p:nvSpPr>
+          <p:cNvPr id="28" name="TextBox 27"/>
+          <p:cNvSpPr txBox="1"/>
+          <p:nvPr/>
+        </p:nvSpPr>
+        <p:spPr>
+          <a:xfrm>
+            <a:off x="6894576" y="3593591"/>
+            <a:ext cx="4745736" cy="237744"/>
+          </a:xfrm>
+          <a:prstGeom prst="rect">
+            <a:avLst/>
+          </a:prstGeom>
+          <a:noFill/>
+        </p:spPr>
+        <p:txBody>
+          <a:bodyPr wrap="square" lIns="0" rIns="0" tIns="0" bIns="0" anchor="t">
+            <a:spAutoFit/>
+          </a:bodyPr>
+          <a:lstStyle/>
+          <a:p>
+            <a:pPr algn="l"/>
+            <a:r>
+              <a:rPr sz="1300" b="1">
+                <a:solidFill>
+                  <a:srgbClr val="FFFFFF"/>
+                </a:solidFill>
+                <a:latin typeface="Cambria"/>
+              </a:rPr>
+              <a:t>WALK THE FLOOR</a:t>
+            </a:r>
+          </a:p>
+        </p:txBody>
+      </p:sp>
+      <p:sp>
+        <p:nvSpPr>
+          <p:cNvPr id="29" name="TextBox 28"/>
+          <p:cNvSpPr txBox="1"/>
+          <p:nvPr/>
+        </p:nvSpPr>
+        <p:spPr>
+          <a:xfrm>
+            <a:off x="6894576" y="3849623"/>
+            <a:ext cx="4745736" cy="457200"/>
+          </a:xfrm>
+          <a:prstGeom prst="rect">
+            <a:avLst/>
+          </a:prstGeom>
+          <a:noFill/>
+        </p:spPr>
+        <p:txBody>
+          <a:bodyPr wrap="square" lIns="0" rIns="0" tIns="0" bIns="0" anchor="t">
+            <a:spAutoFit/>
+          </a:bodyPr>
+          <a:lstStyle/>
+          <a:p>
+            <a:pPr algn="l">
+              <a:lnSpc>
+                <a:spcPct val="112000"/>
+              </a:lnSpc>
+            </a:pPr>
+            <a:r>
+              <a:rPr sz="1100" b="0">
+                <a:solidFill>
+                  <a:srgbClr val="ECE2D0"/>
+                </a:solidFill>
+                <a:latin typeface="Calibri"/>
+              </a:rPr>
+              <a:t>Their labour capacity to harvest · space to bring our own crew in · what equipment has to be adapted.</a:t>
+            </a:r>
+          </a:p>
+        </p:txBody>
+      </p:sp>
+      <p:sp>
+        <p:nvSpPr>
+          <p:cNvPr id="30" name="Oval 29"/>
+          <p:cNvSpPr/>
+          <p:nvPr/>
+        </p:nvSpPr>
+        <p:spPr>
+          <a:xfrm>
+            <a:off x="6492240" y="4270247"/>
+            <a:ext cx="274320" cy="274320"/>
+          </a:xfrm>
+          <a:prstGeom prst="ellipse">
+            <a:avLst/>
+          </a:prstGeom>
+          <a:solidFill>
+            <a:srgbClr val="A26769"/>
+          </a:solidFill>
+          <a:ln>
+            <a:noFill/>
+          </a:ln>
+          <a:effectLst/>
+        </p:spPr>
+        <p:style>
+          <a:lnRef idx="1">
+            <a:schemeClr val="accent1"/>
+          </a:lnRef>
+          <a:fillRef idx="3">
+            <a:schemeClr val="accent1"/>
+          </a:fillRef>
+          <a:effectRef idx="2">
+            <a:schemeClr val="accent1"/>
+          </a:effectRef>
+          <a:fontRef idx="minor">
+            <a:schemeClr val="lt1"/>
+          </a:fontRef>
+        </p:style>
+        <p:txBody>
+          <a:bodyPr rtlCol="0" anchor="ctr" lIns="0" rIns="0" tIns="0" bIns="0" wrap="none"/>
+          <a:lstStyle/>
+          <a:p>
+            <a:pPr algn="ctr"/>
+            <a:r>
+              <a:rPr sz="1250" b="1">
+                <a:solidFill>
+                  <a:srgbClr val="FFFFFF"/>
+                </a:solidFill>
+                <a:latin typeface="Calibri"/>
+              </a:rPr>
+              <a:t>4</a:t>
+            </a:r>
+          </a:p>
+        </p:txBody>
+      </p:sp>
+      <p:sp>
+        <p:nvSpPr>
+          <p:cNvPr id="31" name="TextBox 30"/>
+          <p:cNvSpPr txBox="1"/>
+          <p:nvPr/>
+        </p:nvSpPr>
+        <p:spPr>
+          <a:xfrm>
+            <a:off x="6894576" y="4288536"/>
+            <a:ext cx="4745736" cy="237744"/>
+          </a:xfrm>
+          <a:prstGeom prst="rect">
+            <a:avLst/>
+          </a:prstGeom>
+          <a:noFill/>
+        </p:spPr>
+        <p:txBody>
+          <a:bodyPr wrap="square" lIns="0" rIns="0" tIns="0" bIns="0" anchor="t">
+            <a:spAutoFit/>
+          </a:bodyPr>
+          <a:lstStyle/>
+          <a:p>
+            <a:pPr algn="l"/>
+            <a:r>
+              <a:rPr sz="1300" b="1">
+                <a:solidFill>
+                  <a:srgbClr val="FFFFFF"/>
+                </a:solidFill>
+                <a:latin typeface="Cambria"/>
+              </a:rPr>
+              <a:t>NDA, THEN CONTRACT</a:t>
+            </a:r>
+          </a:p>
+        </p:txBody>
+      </p:sp>
+      <p:sp>
+        <p:nvSpPr>
+          <p:cNvPr id="32" name="TextBox 31"/>
+          <p:cNvSpPr txBox="1"/>
+          <p:nvPr/>
+        </p:nvSpPr>
+        <p:spPr>
+          <a:xfrm>
+            <a:off x="6894576" y="4544567"/>
+            <a:ext cx="4745736" cy="457200"/>
+          </a:xfrm>
+          <a:prstGeom prst="rect">
+            <a:avLst/>
+          </a:prstGeom>
+          <a:noFill/>
+        </p:spPr>
+        <p:txBody>
+          <a:bodyPr wrap="square" lIns="0" rIns="0" tIns="0" bIns="0" anchor="t">
+            <a:spAutoFit/>
+          </a:bodyPr>
+          <a:lstStyle/>
+          <a:p>
+            <a:pPr algn="l">
+              <a:lnSpc>
+                <a:spcPct val="112000"/>
+              </a:lnSpc>
+            </a:pPr>
+            <a:r>
+              <a:rPr sz="1100" b="0">
+                <a:solidFill>
+                  <a:srgbClr val="ECE2D0"/>
+                </a:solidFill>
+                <a:latin typeface="Calibri"/>
+              </a:rPr>
+              <a:t>Contract written against the requirements WE have to fulfil. Set the supplier up in Coupa.</a:t>
+            </a:r>
+          </a:p>
+        </p:txBody>
+      </p:sp>
+      <p:sp>
+        <p:nvSpPr>
+          <p:cNvPr id="33" name="Oval 32"/>
+          <p:cNvSpPr/>
+          <p:nvPr/>
+        </p:nvSpPr>
+        <p:spPr>
+          <a:xfrm>
+            <a:off x="6492240" y="4965191"/>
+            <a:ext cx="274320" cy="274320"/>
+          </a:xfrm>
+          <a:prstGeom prst="ellipse">
+            <a:avLst/>
+          </a:prstGeom>
+          <a:solidFill>
+            <a:srgbClr val="A26769"/>
+          </a:solidFill>
+          <a:ln>
+            <a:noFill/>
+          </a:ln>
+          <a:effectLst/>
+        </p:spPr>
+        <p:style>
+          <a:lnRef idx="1">
+            <a:schemeClr val="accent1"/>
+          </a:lnRef>
+          <a:fillRef idx="3">
+            <a:schemeClr val="accent1"/>
+          </a:fillRef>
+          <a:effectRef idx="2">
+            <a:schemeClr val="accent1"/>
+          </a:effectRef>
+          <a:fontRef idx="minor">
+            <a:schemeClr val="lt1"/>
+          </a:fontRef>
+        </p:style>
+        <p:txBody>
+          <a:bodyPr rtlCol="0" anchor="ctr" lIns="0" rIns="0" tIns="0" bIns="0" wrap="none"/>
+          <a:lstStyle/>
+          <a:p>
+            <a:pPr algn="ctr"/>
+            <a:r>
+              <a:rPr sz="1250" b="1">
+                <a:solidFill>
+                  <a:srgbClr val="FFFFFF"/>
+                </a:solidFill>
+                <a:latin typeface="Calibri"/>
+              </a:rPr>
+              <a:t>5</a:t>
+            </a:r>
+          </a:p>
+        </p:txBody>
+      </p:sp>
+      <p:sp>
+        <p:nvSpPr>
+          <p:cNvPr id="34" name="TextBox 33"/>
+          <p:cNvSpPr txBox="1"/>
+          <p:nvPr/>
+        </p:nvSpPr>
+        <p:spPr>
+          <a:xfrm>
+            <a:off x="6894576" y="4983479"/>
+            <a:ext cx="4745736" cy="237744"/>
+          </a:xfrm>
+          <a:prstGeom prst="rect">
+            <a:avLst/>
+          </a:prstGeom>
+          <a:noFill/>
+        </p:spPr>
+        <p:txBody>
+          <a:bodyPr wrap="square" lIns="0" rIns="0" tIns="0" bIns="0" anchor="t">
+            <a:spAutoFit/>
+          </a:bodyPr>
+          <a:lstStyle/>
+          <a:p>
+            <a:pPr algn="l"/>
+            <a:r>
+              <a:rPr sz="1300" b="1">
+                <a:solidFill>
+                  <a:srgbClr val="FFFFFF"/>
+                </a:solidFill>
+                <a:latin typeface="Cambria"/>
+              </a:rPr>
+              <a:t>TRACEABILITY EVIDENCE</a:t>
+            </a:r>
+          </a:p>
+        </p:txBody>
+      </p:sp>
+      <p:sp>
+        <p:nvSpPr>
+          <p:cNvPr id="35" name="TextBox 34"/>
+          <p:cNvSpPr txBox="1"/>
+          <p:nvPr/>
+        </p:nvSpPr>
+        <p:spPr>
+          <a:xfrm>
+            <a:off x="6894576" y="5239511"/>
+            <a:ext cx="4745736" cy="457200"/>
+          </a:xfrm>
+          <a:prstGeom prst="rect">
+            <a:avLst/>
+          </a:prstGeom>
+          <a:noFill/>
+        </p:spPr>
+        <p:txBody>
+          <a:bodyPr wrap="square" lIns="0" rIns="0" tIns="0" bIns="0" anchor="t">
+            <a:spAutoFit/>
+          </a:bodyPr>
+          <a:lstStyle/>
+          <a:p>
+            <a:pPr algn="l">
+              <a:lnSpc>
+                <a:spcPct val="112000"/>
+              </a:lnSpc>
+            </a:pPr>
+            <a:r>
+              <a:rPr sz="1100" b="0">
+                <a:solidFill>
+                  <a:srgbClr val="ECE2D0"/>
+                </a:solidFill>
+                <a:latin typeface="Calibri"/>
+              </a:rPr>
+              <a:t>Ante-mortem inspection records · pen carts signed in · veterinary inspection · USDA stamps and the SIS number on them.</a:t>
+            </a:r>
+          </a:p>
+        </p:txBody>
+      </p:sp>
+      <p:sp>
+        <p:nvSpPr>
+          <p:cNvPr id="36" name="Rounded Rectangle 35"/>
+          <p:cNvSpPr/>
+          <p:nvPr/>
+        </p:nvSpPr>
+        <p:spPr>
+          <a:xfrm>
+            <a:off x="548640" y="5989320"/>
+            <a:ext cx="11091672" cy="438912"/>
+          </a:xfrm>
+          <a:prstGeom prst="roundRect">
+            <a:avLst>
+              <a:gd name="adj" fmla="val 6000"/>
+            </a:avLst>
+          </a:prstGeom>
+          <a:solidFill>
+            <a:srgbClr val="5C2439"/>
+          </a:solidFill>
+          <a:ln>
+            <a:noFill/>
+          </a:ln>
+          <a:effectLst/>
+        </p:spPr>
+        <p:style>
+          <a:lnRef idx="1">
+            <a:schemeClr val="accent1"/>
+          </a:lnRef>
+          <a:fillRef idx="3">
+            <a:schemeClr val="accent1"/>
+          </a:fillRef>
+          <a:effectRef idx="2">
+            <a:schemeClr val="accent1"/>
+          </a:effectRef>
+          <a:fontRef idx="minor">
+            <a:schemeClr val="lt1"/>
+          </a:fontRef>
+        </p:style>
+        <p:txBody>
+          <a:bodyPr rtlCol="0" anchor="ctr"/>
+          <a:lstStyle/>
+          <a:p>
+            <a:pPr algn="ctr"/>
+          </a:p>
+        </p:txBody>
+      </p:sp>
+      <p:sp>
+        <p:nvSpPr>
+          <p:cNvPr id="37" name="TextBox 36"/>
+          <p:cNvSpPr txBox="1"/>
+          <p:nvPr/>
+        </p:nvSpPr>
+        <p:spPr>
+          <a:xfrm>
+            <a:off x="822960" y="6108192"/>
+            <a:ext cx="10543032" cy="237744"/>
+          </a:xfrm>
+          <a:prstGeom prst="rect">
+            <a:avLst/>
+          </a:prstGeom>
+          <a:noFill/>
+        </p:spPr>
+        <p:txBody>
+          <a:bodyPr wrap="square" lIns="0" rIns="0" tIns="0" bIns="0" anchor="t">
+            <a:spAutoFit/>
+          </a:bodyPr>
+          <a:lstStyle/>
+          <a:p>
+            <a:pPr algn="l"/>
+            <a:r>
+              <a:rPr sz="1250" b="1">
+                <a:solidFill>
+                  <a:srgbClr val="D4A5A5"/>
+                </a:solidFill>
+                <a:latin typeface="Calibri"/>
+              </a:rPr>
+              <a:t>Parking lot:   Canadian pigs   ·   contracting   ·   the supplier questionnaire</a:t>
+            </a:r>
           </a:p>
         </p:txBody>
       </p:sp>
